--- a/docs/pptx/carbo/jx-carbo-linsubhr-ratio-hosp10.pptx
+++ b/docs/pptx/carbo/jx-carbo-linsubhr-ratio-hosp10.pptx
@@ -2271,7 +2271,7 @@
           </p:nvSpPr>
           <p:spPr>
             <a:xfrm>
-              <a:off x="817517" y="5114368"/>
+              <a:off x="817517" y="5142518"/>
               <a:ext cx="7799693" cy="0"/>
             </a:xfrm>
             <a:custGeom>
@@ -2314,7 +2314,7 @@
           </p:nvSpPr>
           <p:spPr>
             <a:xfrm>
-              <a:off x="817517" y="4244691"/>
+              <a:off x="817517" y="4313054"/>
               <a:ext cx="7799693" cy="0"/>
             </a:xfrm>
             <a:custGeom>
@@ -2357,7 +2357,7 @@
           </p:nvSpPr>
           <p:spPr>
             <a:xfrm>
-              <a:off x="817517" y="3375014"/>
+              <a:off x="817517" y="3483591"/>
               <a:ext cx="7799693" cy="0"/>
             </a:xfrm>
             <a:custGeom>
@@ -2400,7 +2400,7 @@
           </p:nvSpPr>
           <p:spPr>
             <a:xfrm>
-              <a:off x="817517" y="2505337"/>
+              <a:off x="817517" y="2654127"/>
               <a:ext cx="7799693" cy="0"/>
             </a:xfrm>
             <a:custGeom>
@@ -2443,15 +2443,15 @@
           </p:nvSpPr>
           <p:spPr>
             <a:xfrm>
-              <a:off x="1615213" y="1896563"/>
-              <a:ext cx="0" cy="3826579"/>
+              <a:off x="1615213" y="2073503"/>
+              <a:ext cx="0" cy="3649639"/>
             </a:xfrm>
             <a:custGeom>
               <a:avLst/>
               <a:pathLst>
-                <a:path w="0" h="3826579">
+                <a:path w="0" h="3649639">
                   <a:moveTo>
-                    <a:pt x="0" y="3826579"/>
+                    <a:pt x="0" y="3649639"/>
                   </a:moveTo>
                   <a:lnTo>
                     <a:pt x="0" y="0"/>
@@ -2486,15 +2486,15 @@
           </p:nvSpPr>
           <p:spPr>
             <a:xfrm>
-              <a:off x="3387871" y="1896563"/>
-              <a:ext cx="0" cy="3826579"/>
+              <a:off x="3387871" y="2073503"/>
+              <a:ext cx="0" cy="3649639"/>
             </a:xfrm>
             <a:custGeom>
               <a:avLst/>
               <a:pathLst>
-                <a:path w="0" h="3826579">
+                <a:path w="0" h="3649639">
                   <a:moveTo>
-                    <a:pt x="0" y="3826579"/>
+                    <a:pt x="0" y="3649639"/>
                   </a:moveTo>
                   <a:lnTo>
                     <a:pt x="0" y="0"/>
@@ -2529,15 +2529,15 @@
           </p:nvSpPr>
           <p:spPr>
             <a:xfrm>
-              <a:off x="5160528" y="1896563"/>
-              <a:ext cx="0" cy="3826579"/>
+              <a:off x="5160528" y="2073503"/>
+              <a:ext cx="0" cy="3649639"/>
             </a:xfrm>
             <a:custGeom>
               <a:avLst/>
               <a:pathLst>
-                <a:path w="0" h="3826579">
+                <a:path w="0" h="3649639">
                   <a:moveTo>
-                    <a:pt x="0" y="3826579"/>
+                    <a:pt x="0" y="3649639"/>
                   </a:moveTo>
                   <a:lnTo>
                     <a:pt x="0" y="0"/>
@@ -2572,15 +2572,15 @@
           </p:nvSpPr>
           <p:spPr>
             <a:xfrm>
-              <a:off x="6933186" y="1896563"/>
-              <a:ext cx="0" cy="3826579"/>
+              <a:off x="6933186" y="2073503"/>
+              <a:ext cx="0" cy="3649639"/>
             </a:xfrm>
             <a:custGeom>
               <a:avLst/>
               <a:pathLst>
-                <a:path w="0" h="3826579">
+                <a:path w="0" h="3649639">
                   <a:moveTo>
-                    <a:pt x="0" y="3826579"/>
+                    <a:pt x="0" y="3649639"/>
                   </a:moveTo>
                   <a:lnTo>
                     <a:pt x="0" y="0"/>
@@ -2615,7 +2615,7 @@
           </p:nvSpPr>
           <p:spPr>
             <a:xfrm>
-              <a:off x="817517" y="5549207"/>
+              <a:off x="817517" y="5557249"/>
               <a:ext cx="7799693" cy="0"/>
             </a:xfrm>
             <a:custGeom>
@@ -2658,7 +2658,7 @@
           </p:nvSpPr>
           <p:spPr>
             <a:xfrm>
-              <a:off x="817517" y="4679530"/>
+              <a:off x="817517" y="4727786"/>
               <a:ext cx="7799693" cy="0"/>
             </a:xfrm>
             <a:custGeom>
@@ -2701,7 +2701,7 @@
           </p:nvSpPr>
           <p:spPr>
             <a:xfrm>
-              <a:off x="817517" y="3809853"/>
+              <a:off x="817517" y="3898322"/>
               <a:ext cx="7799693" cy="0"/>
             </a:xfrm>
             <a:custGeom>
@@ -2744,7 +2744,7 @@
           </p:nvSpPr>
           <p:spPr>
             <a:xfrm>
-              <a:off x="817517" y="2940175"/>
+              <a:off x="817517" y="3068859"/>
               <a:ext cx="7799693" cy="0"/>
             </a:xfrm>
             <a:custGeom>
@@ -2787,7 +2787,7 @@
           </p:nvSpPr>
           <p:spPr>
             <a:xfrm>
-              <a:off x="817517" y="2070498"/>
+              <a:off x="817517" y="2239395"/>
               <a:ext cx="7799693" cy="0"/>
             </a:xfrm>
             <a:custGeom>
@@ -2830,15 +2830,15 @@
           </p:nvSpPr>
           <p:spPr>
             <a:xfrm>
-              <a:off x="2501542" y="1896563"/>
-              <a:ext cx="0" cy="3826579"/>
+              <a:off x="2501542" y="2073503"/>
+              <a:ext cx="0" cy="3649639"/>
             </a:xfrm>
             <a:custGeom>
               <a:avLst/>
               <a:pathLst>
-                <a:path w="0" h="3826579">
+                <a:path w="0" h="3649639">
                   <a:moveTo>
-                    <a:pt x="0" y="3826579"/>
+                    <a:pt x="0" y="3649639"/>
                   </a:moveTo>
                   <a:lnTo>
                     <a:pt x="0" y="0"/>
@@ -2873,15 +2873,15 @@
           </p:nvSpPr>
           <p:spPr>
             <a:xfrm>
-              <a:off x="4274200" y="1896563"/>
-              <a:ext cx="0" cy="3826579"/>
+              <a:off x="4274200" y="2073503"/>
+              <a:ext cx="0" cy="3649639"/>
             </a:xfrm>
             <a:custGeom>
               <a:avLst/>
               <a:pathLst>
-                <a:path w="0" h="3826579">
+                <a:path w="0" h="3649639">
                   <a:moveTo>
-                    <a:pt x="0" y="3826579"/>
+                    <a:pt x="0" y="3649639"/>
                   </a:moveTo>
                   <a:lnTo>
                     <a:pt x="0" y="0"/>
@@ -2916,15 +2916,15 @@
           </p:nvSpPr>
           <p:spPr>
             <a:xfrm>
-              <a:off x="6046857" y="1896563"/>
-              <a:ext cx="0" cy="3826579"/>
+              <a:off x="6046857" y="2073503"/>
+              <a:ext cx="0" cy="3649639"/>
             </a:xfrm>
             <a:custGeom>
               <a:avLst/>
               <a:pathLst>
-                <a:path w="0" h="3826579">
+                <a:path w="0" h="3649639">
                   <a:moveTo>
-                    <a:pt x="0" y="3826579"/>
+                    <a:pt x="0" y="3649639"/>
                   </a:moveTo>
                   <a:lnTo>
                     <a:pt x="0" y="0"/>
@@ -2959,15 +2959,15 @@
           </p:nvSpPr>
           <p:spPr>
             <a:xfrm>
-              <a:off x="7819515" y="1896563"/>
-              <a:ext cx="0" cy="3826579"/>
+              <a:off x="7819515" y="2073503"/>
+              <a:ext cx="0" cy="3649639"/>
             </a:xfrm>
             <a:custGeom>
               <a:avLst/>
               <a:pathLst>
-                <a:path w="0" h="3826579">
+                <a:path w="0" h="3649639">
                   <a:moveTo>
-                    <a:pt x="0" y="3826579"/>
+                    <a:pt x="0" y="3649639"/>
                   </a:moveTo>
                   <a:lnTo>
                     <a:pt x="0" y="0"/>
@@ -3002,600 +3002,600 @@
           </p:nvSpPr>
           <p:spPr>
             <a:xfrm>
-              <a:off x="817517" y="3494674"/>
-              <a:ext cx="7403783" cy="1655980"/>
+              <a:off x="817517" y="3597718"/>
+              <a:ext cx="7403783" cy="1579408"/>
             </a:xfrm>
             <a:custGeom>
               <a:avLst/>
               <a:pathLst>
-                <a:path w="7403783" h="1655980">
+                <a:path w="7403783" h="1579408">
                   <a:moveTo>
-                    <a:pt x="0" y="363326"/>
+                    <a:pt x="0" y="346525"/>
                   </a:moveTo>
                   <a:lnTo>
-                    <a:pt x="47058" y="378835"/>
-                  </a:lnTo>
-                  <a:lnTo>
-                    <a:pt x="123691" y="403717"/>
-                  </a:lnTo>
-                  <a:lnTo>
-                    <a:pt x="200323" y="428229"/>
-                  </a:lnTo>
-                  <a:lnTo>
-                    <a:pt x="276956" y="452377"/>
-                  </a:lnTo>
-                  <a:lnTo>
-                    <a:pt x="353588" y="476167"/>
-                  </a:lnTo>
-                  <a:lnTo>
-                    <a:pt x="430221" y="499603"/>
-                  </a:lnTo>
-                  <a:lnTo>
-                    <a:pt x="506853" y="522691"/>
-                  </a:lnTo>
-                  <a:lnTo>
-                    <a:pt x="583486" y="545437"/>
-                  </a:lnTo>
-                  <a:lnTo>
-                    <a:pt x="660118" y="567845"/>
-                  </a:lnTo>
-                  <a:lnTo>
-                    <a:pt x="736751" y="589920"/>
-                  </a:lnTo>
-                  <a:lnTo>
-                    <a:pt x="813384" y="611667"/>
-                  </a:lnTo>
-                  <a:lnTo>
-                    <a:pt x="890016" y="633092"/>
-                  </a:lnTo>
-                  <a:lnTo>
-                    <a:pt x="966649" y="654198"/>
-                  </a:lnTo>
-                  <a:lnTo>
-                    <a:pt x="1043281" y="674991"/>
-                  </a:lnTo>
-                  <a:lnTo>
-                    <a:pt x="1119914" y="695475"/>
-                  </a:lnTo>
-                  <a:lnTo>
-                    <a:pt x="1196546" y="715655"/>
-                  </a:lnTo>
-                  <a:lnTo>
-                    <a:pt x="1273179" y="735535"/>
-                  </a:lnTo>
-                  <a:lnTo>
-                    <a:pt x="1349811" y="755120"/>
-                  </a:lnTo>
-                  <a:lnTo>
-                    <a:pt x="1426444" y="774415"/>
-                  </a:lnTo>
-                  <a:lnTo>
-                    <a:pt x="1503076" y="793423"/>
-                  </a:lnTo>
-                  <a:lnTo>
-                    <a:pt x="1579709" y="812148"/>
-                  </a:lnTo>
-                  <a:lnTo>
-                    <a:pt x="1656342" y="830596"/>
-                  </a:lnTo>
-                  <a:lnTo>
-                    <a:pt x="1732974" y="848769"/>
-                  </a:lnTo>
-                  <a:lnTo>
-                    <a:pt x="1809607" y="866673"/>
-                  </a:lnTo>
-                  <a:lnTo>
-                    <a:pt x="1886239" y="884311"/>
-                  </a:lnTo>
-                  <a:lnTo>
-                    <a:pt x="1962872" y="901687"/>
-                  </a:lnTo>
-                  <a:lnTo>
-                    <a:pt x="2039504" y="918805"/>
-                  </a:lnTo>
-                  <a:lnTo>
-                    <a:pt x="2116137" y="935669"/>
-                  </a:lnTo>
-                  <a:lnTo>
-                    <a:pt x="2192769" y="952282"/>
-                  </a:lnTo>
-                  <a:lnTo>
-                    <a:pt x="2269402" y="968649"/>
-                  </a:lnTo>
-                  <a:lnTo>
-                    <a:pt x="2346034" y="984773"/>
-                  </a:lnTo>
-                  <a:lnTo>
-                    <a:pt x="2422667" y="1000657"/>
-                  </a:lnTo>
-                  <a:lnTo>
-                    <a:pt x="2499300" y="1016306"/>
-                  </a:lnTo>
-                  <a:lnTo>
-                    <a:pt x="2575932" y="1031722"/>
-                  </a:lnTo>
-                  <a:lnTo>
-                    <a:pt x="2652565" y="1046909"/>
-                  </a:lnTo>
-                  <a:lnTo>
-                    <a:pt x="2729197" y="1061871"/>
-                  </a:lnTo>
-                  <a:lnTo>
-                    <a:pt x="2805830" y="1076610"/>
-                  </a:lnTo>
-                  <a:lnTo>
-                    <a:pt x="2882462" y="1091131"/>
-                  </a:lnTo>
-                  <a:lnTo>
-                    <a:pt x="2959095" y="1105436"/>
-                  </a:lnTo>
-                  <a:lnTo>
-                    <a:pt x="3035727" y="1119529"/>
-                  </a:lnTo>
-                  <a:lnTo>
-                    <a:pt x="3112360" y="1133412"/>
-                  </a:lnTo>
-                  <a:lnTo>
-                    <a:pt x="3188993" y="1147089"/>
-                  </a:lnTo>
-                  <a:lnTo>
-                    <a:pt x="3265625" y="1160564"/>
-                  </a:lnTo>
-                  <a:lnTo>
-                    <a:pt x="3342258" y="1173838"/>
-                  </a:lnTo>
-                  <a:lnTo>
-                    <a:pt x="3418890" y="1182580"/>
-                  </a:lnTo>
-                  <a:lnTo>
-                    <a:pt x="3495523" y="1168089"/>
-                  </a:lnTo>
-                  <a:lnTo>
-                    <a:pt x="3572155" y="1153358"/>
-                  </a:lnTo>
-                  <a:lnTo>
-                    <a:pt x="3648788" y="1138381"/>
-                  </a:lnTo>
-                  <a:lnTo>
-                    <a:pt x="3725420" y="1123156"/>
-                  </a:lnTo>
-                  <a:lnTo>
-                    <a:pt x="3802053" y="1107678"/>
-                  </a:lnTo>
-                  <a:lnTo>
-                    <a:pt x="3878685" y="1091942"/>
-                  </a:lnTo>
-                  <a:lnTo>
-                    <a:pt x="3955318" y="1075946"/>
-                  </a:lnTo>
-                  <a:lnTo>
-                    <a:pt x="4031951" y="1059683"/>
-                  </a:lnTo>
-                  <a:lnTo>
-                    <a:pt x="4108583" y="1043150"/>
-                  </a:lnTo>
-                  <a:lnTo>
-                    <a:pt x="4185216" y="1026342"/>
-                  </a:lnTo>
-                  <a:lnTo>
-                    <a:pt x="4261848" y="1009255"/>
-                  </a:lnTo>
-                  <a:lnTo>
-                    <a:pt x="4338481" y="991883"/>
-                  </a:lnTo>
-                  <a:lnTo>
-                    <a:pt x="4415113" y="974224"/>
-                  </a:lnTo>
-                  <a:lnTo>
-                    <a:pt x="4491746" y="956270"/>
-                  </a:lnTo>
-                  <a:lnTo>
-                    <a:pt x="4568378" y="938019"/>
-                  </a:lnTo>
-                  <a:lnTo>
-                    <a:pt x="4645011" y="919464"/>
-                  </a:lnTo>
-                  <a:lnTo>
-                    <a:pt x="4721644" y="900600"/>
-                  </a:lnTo>
-                  <a:lnTo>
-                    <a:pt x="4798276" y="881424"/>
-                  </a:lnTo>
-                  <a:lnTo>
-                    <a:pt x="4874909" y="861928"/>
-                  </a:lnTo>
-                  <a:lnTo>
-                    <a:pt x="4951541" y="842109"/>
-                  </a:lnTo>
-                  <a:lnTo>
-                    <a:pt x="5028174" y="821960"/>
-                  </a:lnTo>
-                  <a:lnTo>
-                    <a:pt x="5104806" y="801476"/>
-                  </a:lnTo>
-                  <a:lnTo>
-                    <a:pt x="5181439" y="780652"/>
-                  </a:lnTo>
-                  <a:lnTo>
-                    <a:pt x="5258071" y="759482"/>
-                  </a:lnTo>
-                  <a:lnTo>
-                    <a:pt x="5334704" y="737960"/>
-                  </a:lnTo>
-                  <a:lnTo>
-                    <a:pt x="5411336" y="716080"/>
-                  </a:lnTo>
-                  <a:lnTo>
-                    <a:pt x="5487969" y="693837"/>
-                  </a:lnTo>
-                  <a:lnTo>
-                    <a:pt x="5564602" y="671224"/>
-                  </a:lnTo>
-                  <a:lnTo>
-                    <a:pt x="5641234" y="648235"/>
-                  </a:lnTo>
-                  <a:lnTo>
-                    <a:pt x="5717867" y="624864"/>
-                  </a:lnTo>
-                  <a:lnTo>
-                    <a:pt x="5794499" y="601105"/>
-                  </a:lnTo>
-                  <a:lnTo>
-                    <a:pt x="5871132" y="576951"/>
-                  </a:lnTo>
-                  <a:lnTo>
-                    <a:pt x="5947764" y="552395"/>
-                  </a:lnTo>
-                  <a:lnTo>
-                    <a:pt x="6024397" y="527432"/>
-                  </a:lnTo>
-                  <a:lnTo>
-                    <a:pt x="6101029" y="502054"/>
-                  </a:lnTo>
-                  <a:lnTo>
-                    <a:pt x="6177662" y="476253"/>
-                  </a:lnTo>
-                  <a:lnTo>
-                    <a:pt x="6254294" y="450025"/>
-                  </a:lnTo>
-                  <a:lnTo>
-                    <a:pt x="6330927" y="423360"/>
-                  </a:lnTo>
-                  <a:lnTo>
-                    <a:pt x="6407560" y="396252"/>
-                  </a:lnTo>
-                  <a:lnTo>
-                    <a:pt x="6484192" y="368693"/>
-                  </a:lnTo>
-                  <a:lnTo>
-                    <a:pt x="6560825" y="340677"/>
-                  </a:lnTo>
-                  <a:lnTo>
-                    <a:pt x="6637457" y="312195"/>
-                  </a:lnTo>
-                  <a:lnTo>
-                    <a:pt x="6714090" y="283240"/>
-                  </a:lnTo>
-                  <a:lnTo>
-                    <a:pt x="6790722" y="253803"/>
-                  </a:lnTo>
-                  <a:lnTo>
-                    <a:pt x="6867355" y="223877"/>
-                  </a:lnTo>
-                  <a:lnTo>
-                    <a:pt x="6943987" y="193454"/>
-                  </a:lnTo>
-                  <a:lnTo>
-                    <a:pt x="7020620" y="162526"/>
-                  </a:lnTo>
-                  <a:lnTo>
-                    <a:pt x="7097253" y="131083"/>
-                  </a:lnTo>
-                  <a:lnTo>
-                    <a:pt x="7173885" y="99118"/>
-                  </a:lnTo>
-                  <a:lnTo>
-                    <a:pt x="7250518" y="66621"/>
-                  </a:lnTo>
-                  <a:lnTo>
-                    <a:pt x="7327150" y="33585"/>
+                    <a:pt x="47058" y="361318"/>
+                  </a:lnTo>
+                  <a:lnTo>
+                    <a:pt x="123691" y="385049"/>
+                  </a:lnTo>
+                  <a:lnTo>
+                    <a:pt x="200323" y="408428"/>
+                  </a:lnTo>
+                  <a:lnTo>
+                    <a:pt x="276956" y="431459"/>
+                  </a:lnTo>
+                  <a:lnTo>
+                    <a:pt x="353588" y="454149"/>
+                  </a:lnTo>
+                  <a:lnTo>
+                    <a:pt x="430221" y="476502"/>
+                  </a:lnTo>
+                  <a:lnTo>
+                    <a:pt x="506853" y="498522"/>
+                  </a:lnTo>
+                  <a:lnTo>
+                    <a:pt x="583486" y="520216"/>
+                  </a:lnTo>
+                  <a:lnTo>
+                    <a:pt x="660118" y="541588"/>
+                  </a:lnTo>
+                  <a:lnTo>
+                    <a:pt x="736751" y="562642"/>
+                  </a:lnTo>
+                  <a:lnTo>
+                    <a:pt x="813384" y="583384"/>
+                  </a:lnTo>
+                  <a:lnTo>
+                    <a:pt x="890016" y="603818"/>
+                  </a:lnTo>
+                  <a:lnTo>
+                    <a:pt x="966649" y="623948"/>
+                  </a:lnTo>
+                  <a:lnTo>
+                    <a:pt x="1043281" y="643779"/>
+                  </a:lnTo>
+                  <a:lnTo>
+                    <a:pt x="1119914" y="663316"/>
+                  </a:lnTo>
+                  <a:lnTo>
+                    <a:pt x="1196546" y="682563"/>
+                  </a:lnTo>
+                  <a:lnTo>
+                    <a:pt x="1273179" y="701524"/>
+                  </a:lnTo>
+                  <a:lnTo>
+                    <a:pt x="1349811" y="720204"/>
+                  </a:lnTo>
+                  <a:lnTo>
+                    <a:pt x="1426444" y="738606"/>
+                  </a:lnTo>
+                  <a:lnTo>
+                    <a:pt x="1503076" y="756735"/>
+                  </a:lnTo>
+                  <a:lnTo>
+                    <a:pt x="1579709" y="774595"/>
+                  </a:lnTo>
+                  <a:lnTo>
+                    <a:pt x="1656342" y="792189"/>
+                  </a:lnTo>
+                  <a:lnTo>
+                    <a:pt x="1732974" y="809523"/>
+                  </a:lnTo>
+                  <a:lnTo>
+                    <a:pt x="1809607" y="826598"/>
+                  </a:lnTo>
+                  <a:lnTo>
+                    <a:pt x="1886239" y="843421"/>
+                  </a:lnTo>
+                  <a:lnTo>
+                    <a:pt x="1962872" y="859993"/>
+                  </a:lnTo>
+                  <a:lnTo>
+                    <a:pt x="2039504" y="876320"/>
+                  </a:lnTo>
+                  <a:lnTo>
+                    <a:pt x="2116137" y="892404"/>
+                  </a:lnTo>
+                  <a:lnTo>
+                    <a:pt x="2192769" y="908249"/>
+                  </a:lnTo>
+                  <a:lnTo>
+                    <a:pt x="2269402" y="923859"/>
+                  </a:lnTo>
+                  <a:lnTo>
+                    <a:pt x="2346034" y="939237"/>
+                  </a:lnTo>
+                  <a:lnTo>
+                    <a:pt x="2422667" y="954387"/>
+                  </a:lnTo>
+                  <a:lnTo>
+                    <a:pt x="2499300" y="969312"/>
+                  </a:lnTo>
+                  <a:lnTo>
+                    <a:pt x="2575932" y="984015"/>
+                  </a:lnTo>
+                  <a:lnTo>
+                    <a:pt x="2652565" y="998500"/>
+                  </a:lnTo>
+                  <a:lnTo>
+                    <a:pt x="2729197" y="1012770"/>
+                  </a:lnTo>
+                  <a:lnTo>
+                    <a:pt x="2805830" y="1026828"/>
+                  </a:lnTo>
+                  <a:lnTo>
+                    <a:pt x="2882462" y="1040677"/>
+                  </a:lnTo>
+                  <a:lnTo>
+                    <a:pt x="2959095" y="1054321"/>
+                  </a:lnTo>
+                  <a:lnTo>
+                    <a:pt x="3035727" y="1067762"/>
+                  </a:lnTo>
+                  <a:lnTo>
+                    <a:pt x="3112360" y="1081004"/>
+                  </a:lnTo>
+                  <a:lnTo>
+                    <a:pt x="3188993" y="1094048"/>
+                  </a:lnTo>
+                  <a:lnTo>
+                    <a:pt x="3265625" y="1106900"/>
+                  </a:lnTo>
+                  <a:lnTo>
+                    <a:pt x="3342258" y="1119560"/>
+                  </a:lnTo>
+                  <a:lnTo>
+                    <a:pt x="3418890" y="1127898"/>
+                  </a:lnTo>
+                  <a:lnTo>
+                    <a:pt x="3495523" y="1114077"/>
+                  </a:lnTo>
+                  <a:lnTo>
+                    <a:pt x="3572155" y="1100027"/>
+                  </a:lnTo>
+                  <a:lnTo>
+                    <a:pt x="3648788" y="1085743"/>
+                  </a:lnTo>
+                  <a:lnTo>
+                    <a:pt x="3725420" y="1071222"/>
+                  </a:lnTo>
+                  <a:lnTo>
+                    <a:pt x="3802053" y="1056459"/>
+                  </a:lnTo>
+                  <a:lnTo>
+                    <a:pt x="3878685" y="1041451"/>
+                  </a:lnTo>
+                  <a:lnTo>
+                    <a:pt x="3955318" y="1026194"/>
+                  </a:lnTo>
+                  <a:lnTo>
+                    <a:pt x="4031951" y="1010683"/>
+                  </a:lnTo>
+                  <a:lnTo>
+                    <a:pt x="4108583" y="994915"/>
+                  </a:lnTo>
+                  <a:lnTo>
+                    <a:pt x="4185216" y="978884"/>
+                  </a:lnTo>
+                  <a:lnTo>
+                    <a:pt x="4261848" y="962587"/>
+                  </a:lnTo>
+                  <a:lnTo>
+                    <a:pt x="4338481" y="946019"/>
+                  </a:lnTo>
+                  <a:lnTo>
+                    <a:pt x="4415113" y="929176"/>
+                  </a:lnTo>
+                  <a:lnTo>
+                    <a:pt x="4491746" y="912053"/>
+                  </a:lnTo>
+                  <a:lnTo>
+                    <a:pt x="4568378" y="894645"/>
+                  </a:lnTo>
+                  <a:lnTo>
+                    <a:pt x="4645011" y="876948"/>
+                  </a:lnTo>
+                  <a:lnTo>
+                    <a:pt x="4721644" y="858957"/>
+                  </a:lnTo>
+                  <a:lnTo>
+                    <a:pt x="4798276" y="840667"/>
+                  </a:lnTo>
+                  <a:lnTo>
+                    <a:pt x="4874909" y="822073"/>
+                  </a:lnTo>
+                  <a:lnTo>
+                    <a:pt x="4951541" y="803170"/>
+                  </a:lnTo>
+                  <a:lnTo>
+                    <a:pt x="5028174" y="783953"/>
+                  </a:lnTo>
+                  <a:lnTo>
+                    <a:pt x="5104806" y="764416"/>
+                  </a:lnTo>
+                  <a:lnTo>
+                    <a:pt x="5181439" y="744555"/>
+                  </a:lnTo>
+                  <a:lnTo>
+                    <a:pt x="5258071" y="724363"/>
+                  </a:lnTo>
+                  <a:lnTo>
+                    <a:pt x="5334704" y="703837"/>
+                  </a:lnTo>
+                  <a:lnTo>
+                    <a:pt x="5411336" y="682969"/>
+                  </a:lnTo>
+                  <a:lnTo>
+                    <a:pt x="5487969" y="661754"/>
+                  </a:lnTo>
+                  <a:lnTo>
+                    <a:pt x="5564602" y="640187"/>
+                  </a:lnTo>
+                  <a:lnTo>
+                    <a:pt x="5641234" y="618261"/>
+                  </a:lnTo>
+                  <a:lnTo>
+                    <a:pt x="5717867" y="595971"/>
+                  </a:lnTo>
+                  <a:lnTo>
+                    <a:pt x="5794499" y="573310"/>
+                  </a:lnTo>
+                  <a:lnTo>
+                    <a:pt x="5871132" y="550273"/>
+                  </a:lnTo>
+                  <a:lnTo>
+                    <a:pt x="5947764" y="526853"/>
+                  </a:lnTo>
+                  <a:lnTo>
+                    <a:pt x="6024397" y="503044"/>
+                  </a:lnTo>
+                  <a:lnTo>
+                    <a:pt x="6101029" y="478839"/>
+                  </a:lnTo>
+                  <a:lnTo>
+                    <a:pt x="6177662" y="454232"/>
+                  </a:lnTo>
+                  <a:lnTo>
+                    <a:pt x="6254294" y="429216"/>
+                  </a:lnTo>
+                  <a:lnTo>
+                    <a:pt x="6330927" y="403784"/>
+                  </a:lnTo>
+                  <a:lnTo>
+                    <a:pt x="6407560" y="377929"/>
+                  </a:lnTo>
+                  <a:lnTo>
+                    <a:pt x="6484192" y="351645"/>
+                  </a:lnTo>
+                  <a:lnTo>
+                    <a:pt x="6560825" y="324924"/>
+                  </a:lnTo>
+                  <a:lnTo>
+                    <a:pt x="6637457" y="297759"/>
+                  </a:lnTo>
+                  <a:lnTo>
+                    <a:pt x="6714090" y="270143"/>
+                  </a:lnTo>
+                  <a:lnTo>
+                    <a:pt x="6790722" y="242067"/>
+                  </a:lnTo>
+                  <a:lnTo>
+                    <a:pt x="6867355" y="213525"/>
+                  </a:lnTo>
+                  <a:lnTo>
+                    <a:pt x="6943987" y="184509"/>
+                  </a:lnTo>
+                  <a:lnTo>
+                    <a:pt x="7020620" y="155010"/>
+                  </a:lnTo>
+                  <a:lnTo>
+                    <a:pt x="7097253" y="125022"/>
+                  </a:lnTo>
+                  <a:lnTo>
+                    <a:pt x="7173885" y="94535"/>
+                  </a:lnTo>
+                  <a:lnTo>
+                    <a:pt x="7250518" y="63541"/>
+                  </a:lnTo>
+                  <a:lnTo>
+                    <a:pt x="7327150" y="32032"/>
                   </a:lnTo>
                   <a:lnTo>
                     <a:pt x="7403783" y="0"/>
                   </a:lnTo>
                   <a:lnTo>
-                    <a:pt x="7403783" y="1655980"/>
-                  </a:lnTo>
-                  <a:lnTo>
-                    <a:pt x="7327150" y="1649973"/>
-                  </a:lnTo>
-                  <a:lnTo>
-                    <a:pt x="7250518" y="1643875"/>
-                  </a:lnTo>
-                  <a:lnTo>
-                    <a:pt x="7173885" y="1637686"/>
-                  </a:lnTo>
-                  <a:lnTo>
-                    <a:pt x="7097253" y="1631403"/>
-                  </a:lnTo>
-                  <a:lnTo>
-                    <a:pt x="7020620" y="1625025"/>
-                  </a:lnTo>
-                  <a:lnTo>
-                    <a:pt x="6943987" y="1618552"/>
-                  </a:lnTo>
-                  <a:lnTo>
-                    <a:pt x="6867355" y="1611980"/>
-                  </a:lnTo>
-                  <a:lnTo>
-                    <a:pt x="6790722" y="1605310"/>
-                  </a:lnTo>
-                  <a:lnTo>
-                    <a:pt x="6714090" y="1598539"/>
-                  </a:lnTo>
-                  <a:lnTo>
-                    <a:pt x="6637457" y="1591666"/>
-                  </a:lnTo>
-                  <a:lnTo>
-                    <a:pt x="6560825" y="1584690"/>
-                  </a:lnTo>
-                  <a:lnTo>
-                    <a:pt x="6484192" y="1577608"/>
-                  </a:lnTo>
-                  <a:lnTo>
-                    <a:pt x="6407560" y="1570420"/>
-                  </a:lnTo>
-                  <a:lnTo>
-                    <a:pt x="6330927" y="1563123"/>
-                  </a:lnTo>
-                  <a:lnTo>
-                    <a:pt x="6254294" y="1555717"/>
-                  </a:lnTo>
-                  <a:lnTo>
-                    <a:pt x="6177662" y="1548198"/>
-                  </a:lnTo>
-                  <a:lnTo>
-                    <a:pt x="6101029" y="1540567"/>
-                  </a:lnTo>
-                  <a:lnTo>
-                    <a:pt x="6024397" y="1532820"/>
-                  </a:lnTo>
-                  <a:lnTo>
-                    <a:pt x="5947764" y="1524957"/>
-                  </a:lnTo>
-                  <a:lnTo>
-                    <a:pt x="5871132" y="1516975"/>
-                  </a:lnTo>
-                  <a:lnTo>
-                    <a:pt x="5794499" y="1508872"/>
-                  </a:lnTo>
-                  <a:lnTo>
-                    <a:pt x="5717867" y="1500648"/>
-                  </a:lnTo>
-                  <a:lnTo>
-                    <a:pt x="5641234" y="1492300"/>
-                  </a:lnTo>
-                  <a:lnTo>
-                    <a:pt x="5564602" y="1483826"/>
-                  </a:lnTo>
-                  <a:lnTo>
-                    <a:pt x="5487969" y="1475224"/>
-                  </a:lnTo>
-                  <a:lnTo>
-                    <a:pt x="5411336" y="1466492"/>
-                  </a:lnTo>
-                  <a:lnTo>
-                    <a:pt x="5334704" y="1457629"/>
-                  </a:lnTo>
-                  <a:lnTo>
-                    <a:pt x="5258071" y="1448632"/>
-                  </a:lnTo>
-                  <a:lnTo>
-                    <a:pt x="5181439" y="1439500"/>
-                  </a:lnTo>
-                  <a:lnTo>
-                    <a:pt x="5104806" y="1430230"/>
-                  </a:lnTo>
-                  <a:lnTo>
-                    <a:pt x="5028174" y="1420821"/>
-                  </a:lnTo>
-                  <a:lnTo>
-                    <a:pt x="4951541" y="1411269"/>
-                  </a:lnTo>
-                  <a:lnTo>
-                    <a:pt x="4874909" y="1401574"/>
-                  </a:lnTo>
-                  <a:lnTo>
-                    <a:pt x="4798276" y="1391732"/>
-                  </a:lnTo>
-                  <a:lnTo>
-                    <a:pt x="4721644" y="1381742"/>
-                  </a:lnTo>
-                  <a:lnTo>
-                    <a:pt x="4645011" y="1371602"/>
-                  </a:lnTo>
-                  <a:lnTo>
-                    <a:pt x="4568378" y="1361308"/>
-                  </a:lnTo>
-                  <a:lnTo>
-                    <a:pt x="4491746" y="1350860"/>
-                  </a:lnTo>
-                  <a:lnTo>
-                    <a:pt x="4415113" y="1340254"/>
-                  </a:lnTo>
-                  <a:lnTo>
-                    <a:pt x="4338481" y="1329488"/>
-                  </a:lnTo>
-                  <a:lnTo>
-                    <a:pt x="4261848" y="1318560"/>
-                  </a:lnTo>
-                  <a:lnTo>
-                    <a:pt x="4185216" y="1307467"/>
-                  </a:lnTo>
-                  <a:lnTo>
-                    <a:pt x="4108583" y="1296207"/>
-                  </a:lnTo>
-                  <a:lnTo>
-                    <a:pt x="4031951" y="1284777"/>
-                  </a:lnTo>
-                  <a:lnTo>
-                    <a:pt x="3955318" y="1273175"/>
-                  </a:lnTo>
-                  <a:lnTo>
-                    <a:pt x="3878685" y="1261398"/>
-                  </a:lnTo>
-                  <a:lnTo>
-                    <a:pt x="3802053" y="1249444"/>
-                  </a:lnTo>
-                  <a:lnTo>
-                    <a:pt x="3725420" y="1237310"/>
-                  </a:lnTo>
-                  <a:lnTo>
-                    <a:pt x="3648788" y="1224992"/>
-                  </a:lnTo>
-                  <a:lnTo>
-                    <a:pt x="3572155" y="1212489"/>
-                  </a:lnTo>
-                  <a:lnTo>
-                    <a:pt x="3495523" y="1199798"/>
-                  </a:lnTo>
-                  <a:lnTo>
-                    <a:pt x="3418890" y="1186915"/>
-                  </a:lnTo>
-                  <a:lnTo>
-                    <a:pt x="3342258" y="1196834"/>
-                  </a:lnTo>
-                  <a:lnTo>
-                    <a:pt x="3265625" y="1210855"/>
-                  </a:lnTo>
-                  <a:lnTo>
-                    <a:pt x="3188993" y="1224646"/>
-                  </a:lnTo>
-                  <a:lnTo>
-                    <a:pt x="3112360" y="1238212"/>
-                  </a:lnTo>
-                  <a:lnTo>
-                    <a:pt x="3035727" y="1251557"/>
-                  </a:lnTo>
-                  <a:lnTo>
-                    <a:pt x="2959095" y="1264683"/>
-                  </a:lnTo>
-                  <a:lnTo>
-                    <a:pt x="2882462" y="1277595"/>
-                  </a:lnTo>
-                  <a:lnTo>
-                    <a:pt x="2805830" y="1290295"/>
-                  </a:lnTo>
-                  <a:lnTo>
-                    <a:pt x="2729197" y="1302788"/>
-                  </a:lnTo>
-                  <a:lnTo>
-                    <a:pt x="2652565" y="1315077"/>
-                  </a:lnTo>
-                  <a:lnTo>
-                    <a:pt x="2575932" y="1327165"/>
-                  </a:lnTo>
-                  <a:lnTo>
-                    <a:pt x="2499300" y="1339055"/>
-                  </a:lnTo>
-                  <a:lnTo>
-                    <a:pt x="2422667" y="1350751"/>
-                  </a:lnTo>
-                  <a:lnTo>
-                    <a:pt x="2346034" y="1362256"/>
-                  </a:lnTo>
-                  <a:lnTo>
-                    <a:pt x="2269402" y="1373572"/>
-                  </a:lnTo>
-                  <a:lnTo>
-                    <a:pt x="2192769" y="1384704"/>
-                  </a:lnTo>
-                  <a:lnTo>
-                    <a:pt x="2116137" y="1395654"/>
-                  </a:lnTo>
-                  <a:lnTo>
-                    <a:pt x="2039504" y="1406424"/>
-                  </a:lnTo>
-                  <a:lnTo>
-                    <a:pt x="1962872" y="1417019"/>
-                  </a:lnTo>
-                  <a:lnTo>
-                    <a:pt x="1886239" y="1427440"/>
-                  </a:lnTo>
-                  <a:lnTo>
-                    <a:pt x="1809607" y="1437692"/>
-                  </a:lnTo>
-                  <a:lnTo>
-                    <a:pt x="1732974" y="1447775"/>
-                  </a:lnTo>
-                  <a:lnTo>
-                    <a:pt x="1656342" y="1457694"/>
-                  </a:lnTo>
-                  <a:lnTo>
-                    <a:pt x="1579709" y="1467450"/>
-                  </a:lnTo>
-                  <a:lnTo>
-                    <a:pt x="1503076" y="1477047"/>
-                  </a:lnTo>
-                  <a:lnTo>
-                    <a:pt x="1426444" y="1486487"/>
-                  </a:lnTo>
-                  <a:lnTo>
-                    <a:pt x="1349811" y="1495773"/>
-                  </a:lnTo>
-                  <a:lnTo>
-                    <a:pt x="1273179" y="1504907"/>
-                  </a:lnTo>
-                  <a:lnTo>
-                    <a:pt x="1196546" y="1513892"/>
-                  </a:lnTo>
-                  <a:lnTo>
-                    <a:pt x="1119914" y="1522730"/>
-                  </a:lnTo>
-                  <a:lnTo>
-                    <a:pt x="1043281" y="1531423"/>
-                  </a:lnTo>
-                  <a:lnTo>
-                    <a:pt x="966649" y="1539974"/>
-                  </a:lnTo>
-                  <a:lnTo>
-                    <a:pt x="890016" y="1548386"/>
-                  </a:lnTo>
-                  <a:lnTo>
-                    <a:pt x="813384" y="1556660"/>
-                  </a:lnTo>
-                  <a:lnTo>
-                    <a:pt x="736751" y="1564799"/>
-                  </a:lnTo>
-                  <a:lnTo>
-                    <a:pt x="660118" y="1572804"/>
-                  </a:lnTo>
-                  <a:lnTo>
-                    <a:pt x="583486" y="1580679"/>
-                  </a:lnTo>
-                  <a:lnTo>
-                    <a:pt x="506853" y="1588425"/>
-                  </a:lnTo>
-                  <a:lnTo>
-                    <a:pt x="430221" y="1596045"/>
-                  </a:lnTo>
-                  <a:lnTo>
-                    <a:pt x="353588" y="1603540"/>
-                  </a:lnTo>
-                  <a:lnTo>
-                    <a:pt x="276956" y="1610912"/>
-                  </a:lnTo>
-                  <a:lnTo>
-                    <a:pt x="200323" y="1618164"/>
-                  </a:lnTo>
-                  <a:lnTo>
-                    <a:pt x="123691" y="1625297"/>
-                  </a:lnTo>
-                  <a:lnTo>
-                    <a:pt x="47058" y="1632314"/>
-                  </a:lnTo>
-                  <a:lnTo>
-                    <a:pt x="0" y="1636552"/>
+                    <a:pt x="7403783" y="1579408"/>
+                  </a:lnTo>
+                  <a:lnTo>
+                    <a:pt x="7327150" y="1573679"/>
+                  </a:lnTo>
+                  <a:lnTo>
+                    <a:pt x="7250518" y="1567863"/>
+                  </a:lnTo>
+                  <a:lnTo>
+                    <a:pt x="7173885" y="1561960"/>
+                  </a:lnTo>
+                  <a:lnTo>
+                    <a:pt x="7097253" y="1555967"/>
+                  </a:lnTo>
+                  <a:lnTo>
+                    <a:pt x="7020620" y="1549885"/>
+                  </a:lnTo>
+                  <a:lnTo>
+                    <a:pt x="6943987" y="1543710"/>
+                  </a:lnTo>
+                  <a:lnTo>
+                    <a:pt x="6867355" y="1537443"/>
+                  </a:lnTo>
+                  <a:lnTo>
+                    <a:pt x="6790722" y="1531081"/>
+                  </a:lnTo>
+                  <a:lnTo>
+                    <a:pt x="6714090" y="1524623"/>
+                  </a:lnTo>
+                  <a:lnTo>
+                    <a:pt x="6637457" y="1518068"/>
+                  </a:lnTo>
+                  <a:lnTo>
+                    <a:pt x="6560825" y="1511414"/>
+                  </a:lnTo>
+                  <a:lnTo>
+                    <a:pt x="6484192" y="1504660"/>
+                  </a:lnTo>
+                  <a:lnTo>
+                    <a:pt x="6407560" y="1497804"/>
+                  </a:lnTo>
+                  <a:lnTo>
+                    <a:pt x="6330927" y="1490845"/>
+                  </a:lnTo>
+                  <a:lnTo>
+                    <a:pt x="6254294" y="1483781"/>
+                  </a:lnTo>
+                  <a:lnTo>
+                    <a:pt x="6177662" y="1476610"/>
+                  </a:lnTo>
+                  <a:lnTo>
+                    <a:pt x="6101029" y="1469331"/>
+                  </a:lnTo>
+                  <a:lnTo>
+                    <a:pt x="6024397" y="1461943"/>
+                  </a:lnTo>
+                  <a:lnTo>
+                    <a:pt x="5947764" y="1454443"/>
+                  </a:lnTo>
+                  <a:lnTo>
+                    <a:pt x="5871132" y="1446830"/>
+                  </a:lnTo>
+                  <a:lnTo>
+                    <a:pt x="5794499" y="1439103"/>
+                  </a:lnTo>
+                  <a:lnTo>
+                    <a:pt x="5717867" y="1431259"/>
+                  </a:lnTo>
+                  <a:lnTo>
+                    <a:pt x="5641234" y="1423296"/>
+                  </a:lnTo>
+                  <a:lnTo>
+                    <a:pt x="5564602" y="1415214"/>
+                  </a:lnTo>
+                  <a:lnTo>
+                    <a:pt x="5487969" y="1407010"/>
+                  </a:lnTo>
+                  <a:lnTo>
+                    <a:pt x="5411336" y="1398682"/>
+                  </a:lnTo>
+                  <a:lnTo>
+                    <a:pt x="5334704" y="1390229"/>
+                  </a:lnTo>
+                  <a:lnTo>
+                    <a:pt x="5258071" y="1381648"/>
+                  </a:lnTo>
+                  <a:lnTo>
+                    <a:pt x="5181439" y="1372938"/>
+                  </a:lnTo>
+                  <a:lnTo>
+                    <a:pt x="5104806" y="1364097"/>
+                  </a:lnTo>
+                  <a:lnTo>
+                    <a:pt x="5028174" y="1355122"/>
+                  </a:lnTo>
+                  <a:lnTo>
+                    <a:pt x="4951541" y="1346012"/>
+                  </a:lnTo>
+                  <a:lnTo>
+                    <a:pt x="4874909" y="1336765"/>
+                  </a:lnTo>
+                  <a:lnTo>
+                    <a:pt x="4798276" y="1327379"/>
+                  </a:lnTo>
+                  <a:lnTo>
+                    <a:pt x="4721644" y="1317851"/>
+                  </a:lnTo>
+                  <a:lnTo>
+                    <a:pt x="4645011" y="1308179"/>
+                  </a:lnTo>
+                  <a:lnTo>
+                    <a:pt x="4568378" y="1298362"/>
+                  </a:lnTo>
+                  <a:lnTo>
+                    <a:pt x="4491746" y="1288396"/>
+                  </a:lnTo>
+                  <a:lnTo>
+                    <a:pt x="4415113" y="1278281"/>
+                  </a:lnTo>
+                  <a:lnTo>
+                    <a:pt x="4338481" y="1268013"/>
+                  </a:lnTo>
+                  <a:lnTo>
+                    <a:pt x="4261848" y="1257590"/>
+                  </a:lnTo>
+                  <a:lnTo>
+                    <a:pt x="4185216" y="1247010"/>
+                  </a:lnTo>
+                  <a:lnTo>
+                    <a:pt x="4108583" y="1236271"/>
+                  </a:lnTo>
+                  <a:lnTo>
+                    <a:pt x="4031951" y="1225370"/>
+                  </a:lnTo>
+                  <a:lnTo>
+                    <a:pt x="3955318" y="1214304"/>
+                  </a:lnTo>
+                  <a:lnTo>
+                    <a:pt x="3878685" y="1203072"/>
+                  </a:lnTo>
+                  <a:lnTo>
+                    <a:pt x="3802053" y="1191670"/>
+                  </a:lnTo>
+                  <a:lnTo>
+                    <a:pt x="3725420" y="1180097"/>
+                  </a:lnTo>
+                  <a:lnTo>
+                    <a:pt x="3648788" y="1168349"/>
+                  </a:lnTo>
+                  <a:lnTo>
+                    <a:pt x="3572155" y="1156424"/>
+                  </a:lnTo>
+                  <a:lnTo>
+                    <a:pt x="3495523" y="1144319"/>
+                  </a:lnTo>
+                  <a:lnTo>
+                    <a:pt x="3418890" y="1132032"/>
+                  </a:lnTo>
+                  <a:lnTo>
+                    <a:pt x="3342258" y="1141493"/>
+                  </a:lnTo>
+                  <a:lnTo>
+                    <a:pt x="3265625" y="1154865"/>
+                  </a:lnTo>
+                  <a:lnTo>
+                    <a:pt x="3188993" y="1168019"/>
+                  </a:lnTo>
+                  <a:lnTo>
+                    <a:pt x="3112360" y="1180958"/>
+                  </a:lnTo>
+                  <a:lnTo>
+                    <a:pt x="3035727" y="1193685"/>
+                  </a:lnTo>
+                  <a:lnTo>
+                    <a:pt x="2959095" y="1206204"/>
+                  </a:lnTo>
+                  <a:lnTo>
+                    <a:pt x="2882462" y="1218519"/>
+                  </a:lnTo>
+                  <a:lnTo>
+                    <a:pt x="2805830" y="1230632"/>
+                  </a:lnTo>
+                  <a:lnTo>
+                    <a:pt x="2729197" y="1242548"/>
+                  </a:lnTo>
+                  <a:lnTo>
+                    <a:pt x="2652565" y="1254268"/>
+                  </a:lnTo>
+                  <a:lnTo>
+                    <a:pt x="2575932" y="1265797"/>
+                  </a:lnTo>
+                  <a:lnTo>
+                    <a:pt x="2499300" y="1277138"/>
+                  </a:lnTo>
+                  <a:lnTo>
+                    <a:pt x="2422667" y="1288293"/>
+                  </a:lnTo>
+                  <a:lnTo>
+                    <a:pt x="2346034" y="1299266"/>
+                  </a:lnTo>
+                  <a:lnTo>
+                    <a:pt x="2269402" y="1310059"/>
+                  </a:lnTo>
+                  <a:lnTo>
+                    <a:pt x="2192769" y="1320676"/>
+                  </a:lnTo>
+                  <a:lnTo>
+                    <a:pt x="2116137" y="1331119"/>
+                  </a:lnTo>
+                  <a:lnTo>
+                    <a:pt x="2039504" y="1341392"/>
+                  </a:lnTo>
+                  <a:lnTo>
+                    <a:pt x="1962872" y="1351497"/>
+                  </a:lnTo>
+                  <a:lnTo>
+                    <a:pt x="1886239" y="1361436"/>
+                  </a:lnTo>
+                  <a:lnTo>
+                    <a:pt x="1809607" y="1371213"/>
+                  </a:lnTo>
+                  <a:lnTo>
+                    <a:pt x="1732974" y="1380830"/>
+                  </a:lnTo>
+                  <a:lnTo>
+                    <a:pt x="1656342" y="1390290"/>
+                  </a:lnTo>
+                  <a:lnTo>
+                    <a:pt x="1579709" y="1399596"/>
+                  </a:lnTo>
+                  <a:lnTo>
+                    <a:pt x="1503076" y="1408749"/>
+                  </a:lnTo>
+                  <a:lnTo>
+                    <a:pt x="1426444" y="1417753"/>
+                  </a:lnTo>
+                  <a:lnTo>
+                    <a:pt x="1349811" y="1426609"/>
+                  </a:lnTo>
+                  <a:lnTo>
+                    <a:pt x="1273179" y="1435321"/>
+                  </a:lnTo>
+                  <a:lnTo>
+                    <a:pt x="1196546" y="1443890"/>
+                  </a:lnTo>
+                  <a:lnTo>
+                    <a:pt x="1119914" y="1452319"/>
+                  </a:lnTo>
+                  <a:lnTo>
+                    <a:pt x="1043281" y="1460611"/>
+                  </a:lnTo>
+                  <a:lnTo>
+                    <a:pt x="966649" y="1468767"/>
+                  </a:lnTo>
+                  <a:lnTo>
+                    <a:pt x="890016" y="1476789"/>
+                  </a:lnTo>
+                  <a:lnTo>
+                    <a:pt x="813384" y="1484681"/>
+                  </a:lnTo>
+                  <a:lnTo>
+                    <a:pt x="736751" y="1492443"/>
+                  </a:lnTo>
+                  <a:lnTo>
+                    <a:pt x="660118" y="1500078"/>
+                  </a:lnTo>
+                  <a:lnTo>
+                    <a:pt x="583486" y="1507589"/>
+                  </a:lnTo>
+                  <a:lnTo>
+                    <a:pt x="506853" y="1514977"/>
+                  </a:lnTo>
+                  <a:lnTo>
+                    <a:pt x="430221" y="1522244"/>
+                  </a:lnTo>
+                  <a:lnTo>
+                    <a:pt x="353588" y="1529392"/>
+                  </a:lnTo>
+                  <a:lnTo>
+                    <a:pt x="276956" y="1536424"/>
+                  </a:lnTo>
+                  <a:lnTo>
+                    <a:pt x="200323" y="1543341"/>
+                  </a:lnTo>
+                  <a:lnTo>
+                    <a:pt x="123691" y="1550144"/>
+                  </a:lnTo>
+                  <a:lnTo>
+                    <a:pt x="47058" y="1556836"/>
+                  </a:lnTo>
+                  <a:lnTo>
+                    <a:pt x="0" y="1560879"/>
                   </a:lnTo>
                   <a:close/>
                 </a:path>
@@ -3621,303 +3621,303 @@
           </p:nvSpPr>
           <p:spPr>
             <a:xfrm>
-              <a:off x="817517" y="3494674"/>
-              <a:ext cx="7403783" cy="1182580"/>
+              <a:off x="817517" y="3597718"/>
+              <a:ext cx="7403783" cy="1127898"/>
             </a:xfrm>
             <a:custGeom>
               <a:avLst/>
               <a:pathLst>
-                <a:path w="7403783" h="1182580">
+                <a:path w="7403783" h="1127898">
                   <a:moveTo>
-                    <a:pt x="0" y="363326"/>
+                    <a:pt x="0" y="346525"/>
                   </a:moveTo>
                   <a:lnTo>
-                    <a:pt x="47058" y="378835"/>
-                  </a:lnTo>
-                  <a:lnTo>
-                    <a:pt x="123691" y="403717"/>
-                  </a:lnTo>
-                  <a:lnTo>
-                    <a:pt x="200323" y="428229"/>
-                  </a:lnTo>
-                  <a:lnTo>
-                    <a:pt x="276956" y="452377"/>
-                  </a:lnTo>
-                  <a:lnTo>
-                    <a:pt x="353588" y="476167"/>
-                  </a:lnTo>
-                  <a:lnTo>
-                    <a:pt x="430221" y="499603"/>
-                  </a:lnTo>
-                  <a:lnTo>
-                    <a:pt x="506853" y="522691"/>
-                  </a:lnTo>
-                  <a:lnTo>
-                    <a:pt x="583486" y="545437"/>
-                  </a:lnTo>
-                  <a:lnTo>
-                    <a:pt x="660118" y="567845"/>
-                  </a:lnTo>
-                  <a:lnTo>
-                    <a:pt x="736751" y="589920"/>
-                  </a:lnTo>
-                  <a:lnTo>
-                    <a:pt x="813384" y="611667"/>
-                  </a:lnTo>
-                  <a:lnTo>
-                    <a:pt x="890016" y="633092"/>
-                  </a:lnTo>
-                  <a:lnTo>
-                    <a:pt x="966649" y="654198"/>
-                  </a:lnTo>
-                  <a:lnTo>
-                    <a:pt x="1043281" y="674991"/>
-                  </a:lnTo>
-                  <a:lnTo>
-                    <a:pt x="1119914" y="695475"/>
-                  </a:lnTo>
-                  <a:lnTo>
-                    <a:pt x="1196546" y="715655"/>
-                  </a:lnTo>
-                  <a:lnTo>
-                    <a:pt x="1273179" y="735535"/>
-                  </a:lnTo>
-                  <a:lnTo>
-                    <a:pt x="1349811" y="755120"/>
-                  </a:lnTo>
-                  <a:lnTo>
-                    <a:pt x="1426444" y="774415"/>
-                  </a:lnTo>
-                  <a:lnTo>
-                    <a:pt x="1503076" y="793423"/>
-                  </a:lnTo>
-                  <a:lnTo>
-                    <a:pt x="1579709" y="812148"/>
-                  </a:lnTo>
-                  <a:lnTo>
-                    <a:pt x="1656342" y="830596"/>
-                  </a:lnTo>
-                  <a:lnTo>
-                    <a:pt x="1732974" y="848769"/>
-                  </a:lnTo>
-                  <a:lnTo>
-                    <a:pt x="1809607" y="866673"/>
-                  </a:lnTo>
-                  <a:lnTo>
-                    <a:pt x="1886239" y="884311"/>
-                  </a:lnTo>
-                  <a:lnTo>
-                    <a:pt x="1962872" y="901687"/>
-                  </a:lnTo>
-                  <a:lnTo>
-                    <a:pt x="2039504" y="918805"/>
-                  </a:lnTo>
-                  <a:lnTo>
-                    <a:pt x="2116137" y="935669"/>
-                  </a:lnTo>
-                  <a:lnTo>
-                    <a:pt x="2192769" y="952282"/>
-                  </a:lnTo>
-                  <a:lnTo>
-                    <a:pt x="2269402" y="968649"/>
-                  </a:lnTo>
-                  <a:lnTo>
-                    <a:pt x="2346034" y="984773"/>
-                  </a:lnTo>
-                  <a:lnTo>
-                    <a:pt x="2422667" y="1000657"/>
-                  </a:lnTo>
-                  <a:lnTo>
-                    <a:pt x="2499300" y="1016306"/>
-                  </a:lnTo>
-                  <a:lnTo>
-                    <a:pt x="2575932" y="1031722"/>
-                  </a:lnTo>
-                  <a:lnTo>
-                    <a:pt x="2652565" y="1046909"/>
-                  </a:lnTo>
-                  <a:lnTo>
-                    <a:pt x="2729197" y="1061871"/>
-                  </a:lnTo>
-                  <a:lnTo>
-                    <a:pt x="2805830" y="1076610"/>
-                  </a:lnTo>
-                  <a:lnTo>
-                    <a:pt x="2882462" y="1091131"/>
-                  </a:lnTo>
-                  <a:lnTo>
-                    <a:pt x="2959095" y="1105436"/>
-                  </a:lnTo>
-                  <a:lnTo>
-                    <a:pt x="3035727" y="1119529"/>
-                  </a:lnTo>
-                  <a:lnTo>
-                    <a:pt x="3112360" y="1133412"/>
-                  </a:lnTo>
-                  <a:lnTo>
-                    <a:pt x="3188993" y="1147089"/>
-                  </a:lnTo>
-                  <a:lnTo>
-                    <a:pt x="3265625" y="1160564"/>
-                  </a:lnTo>
-                  <a:lnTo>
-                    <a:pt x="3342258" y="1173838"/>
-                  </a:lnTo>
-                  <a:lnTo>
-                    <a:pt x="3418890" y="1182580"/>
-                  </a:lnTo>
-                  <a:lnTo>
-                    <a:pt x="3495523" y="1168089"/>
-                  </a:lnTo>
-                  <a:lnTo>
-                    <a:pt x="3572155" y="1153358"/>
-                  </a:lnTo>
-                  <a:lnTo>
-                    <a:pt x="3648788" y="1138381"/>
-                  </a:lnTo>
-                  <a:lnTo>
-                    <a:pt x="3725420" y="1123156"/>
-                  </a:lnTo>
-                  <a:lnTo>
-                    <a:pt x="3802053" y="1107678"/>
-                  </a:lnTo>
-                  <a:lnTo>
-                    <a:pt x="3878685" y="1091942"/>
-                  </a:lnTo>
-                  <a:lnTo>
-                    <a:pt x="3955318" y="1075946"/>
-                  </a:lnTo>
-                  <a:lnTo>
-                    <a:pt x="4031951" y="1059683"/>
-                  </a:lnTo>
-                  <a:lnTo>
-                    <a:pt x="4108583" y="1043150"/>
-                  </a:lnTo>
-                  <a:lnTo>
-                    <a:pt x="4185216" y="1026342"/>
-                  </a:lnTo>
-                  <a:lnTo>
-                    <a:pt x="4261848" y="1009255"/>
-                  </a:lnTo>
-                  <a:lnTo>
-                    <a:pt x="4338481" y="991883"/>
-                  </a:lnTo>
-                  <a:lnTo>
-                    <a:pt x="4415113" y="974224"/>
-                  </a:lnTo>
-                  <a:lnTo>
-                    <a:pt x="4491746" y="956270"/>
-                  </a:lnTo>
-                  <a:lnTo>
-                    <a:pt x="4568378" y="938019"/>
-                  </a:lnTo>
-                  <a:lnTo>
-                    <a:pt x="4645011" y="919464"/>
-                  </a:lnTo>
-                  <a:lnTo>
-                    <a:pt x="4721644" y="900600"/>
-                  </a:lnTo>
-                  <a:lnTo>
-                    <a:pt x="4798276" y="881424"/>
-                  </a:lnTo>
-                  <a:lnTo>
-                    <a:pt x="4874909" y="861928"/>
-                  </a:lnTo>
-                  <a:lnTo>
-                    <a:pt x="4951541" y="842109"/>
-                  </a:lnTo>
-                  <a:lnTo>
-                    <a:pt x="5028174" y="821960"/>
-                  </a:lnTo>
-                  <a:lnTo>
-                    <a:pt x="5104806" y="801476"/>
-                  </a:lnTo>
-                  <a:lnTo>
-                    <a:pt x="5181439" y="780652"/>
-                  </a:lnTo>
-                  <a:lnTo>
-                    <a:pt x="5258071" y="759482"/>
-                  </a:lnTo>
-                  <a:lnTo>
-                    <a:pt x="5334704" y="737960"/>
-                  </a:lnTo>
-                  <a:lnTo>
-                    <a:pt x="5411336" y="716080"/>
-                  </a:lnTo>
-                  <a:lnTo>
-                    <a:pt x="5487969" y="693837"/>
-                  </a:lnTo>
-                  <a:lnTo>
-                    <a:pt x="5564602" y="671224"/>
-                  </a:lnTo>
-                  <a:lnTo>
-                    <a:pt x="5641234" y="648235"/>
-                  </a:lnTo>
-                  <a:lnTo>
-                    <a:pt x="5717867" y="624864"/>
-                  </a:lnTo>
-                  <a:lnTo>
-                    <a:pt x="5794499" y="601105"/>
-                  </a:lnTo>
-                  <a:lnTo>
-                    <a:pt x="5871132" y="576951"/>
-                  </a:lnTo>
-                  <a:lnTo>
-                    <a:pt x="5947764" y="552395"/>
-                  </a:lnTo>
-                  <a:lnTo>
-                    <a:pt x="6024397" y="527432"/>
-                  </a:lnTo>
-                  <a:lnTo>
-                    <a:pt x="6101029" y="502054"/>
-                  </a:lnTo>
-                  <a:lnTo>
-                    <a:pt x="6177662" y="476253"/>
-                  </a:lnTo>
-                  <a:lnTo>
-                    <a:pt x="6254294" y="450025"/>
-                  </a:lnTo>
-                  <a:lnTo>
-                    <a:pt x="6330927" y="423360"/>
-                  </a:lnTo>
-                  <a:lnTo>
-                    <a:pt x="6407560" y="396252"/>
-                  </a:lnTo>
-                  <a:lnTo>
-                    <a:pt x="6484192" y="368693"/>
-                  </a:lnTo>
-                  <a:lnTo>
-                    <a:pt x="6560825" y="340677"/>
-                  </a:lnTo>
-                  <a:lnTo>
-                    <a:pt x="6637457" y="312195"/>
-                  </a:lnTo>
-                  <a:lnTo>
-                    <a:pt x="6714090" y="283240"/>
-                  </a:lnTo>
-                  <a:lnTo>
-                    <a:pt x="6790722" y="253803"/>
-                  </a:lnTo>
-                  <a:lnTo>
-                    <a:pt x="6867355" y="223877"/>
-                  </a:lnTo>
-                  <a:lnTo>
-                    <a:pt x="6943987" y="193454"/>
-                  </a:lnTo>
-                  <a:lnTo>
-                    <a:pt x="7020620" y="162526"/>
-                  </a:lnTo>
-                  <a:lnTo>
-                    <a:pt x="7097253" y="131083"/>
-                  </a:lnTo>
-                  <a:lnTo>
-                    <a:pt x="7173885" y="99118"/>
-                  </a:lnTo>
-                  <a:lnTo>
-                    <a:pt x="7250518" y="66621"/>
-                  </a:lnTo>
-                  <a:lnTo>
-                    <a:pt x="7327150" y="33585"/>
+                    <a:pt x="47058" y="361318"/>
+                  </a:lnTo>
+                  <a:lnTo>
+                    <a:pt x="123691" y="385049"/>
+                  </a:lnTo>
+                  <a:lnTo>
+                    <a:pt x="200323" y="408428"/>
+                  </a:lnTo>
+                  <a:lnTo>
+                    <a:pt x="276956" y="431459"/>
+                  </a:lnTo>
+                  <a:lnTo>
+                    <a:pt x="353588" y="454149"/>
+                  </a:lnTo>
+                  <a:lnTo>
+                    <a:pt x="430221" y="476502"/>
+                  </a:lnTo>
+                  <a:lnTo>
+                    <a:pt x="506853" y="498522"/>
+                  </a:lnTo>
+                  <a:lnTo>
+                    <a:pt x="583486" y="520216"/>
+                  </a:lnTo>
+                  <a:lnTo>
+                    <a:pt x="660118" y="541588"/>
+                  </a:lnTo>
+                  <a:lnTo>
+                    <a:pt x="736751" y="562642"/>
+                  </a:lnTo>
+                  <a:lnTo>
+                    <a:pt x="813384" y="583384"/>
+                  </a:lnTo>
+                  <a:lnTo>
+                    <a:pt x="890016" y="603818"/>
+                  </a:lnTo>
+                  <a:lnTo>
+                    <a:pt x="966649" y="623948"/>
+                  </a:lnTo>
+                  <a:lnTo>
+                    <a:pt x="1043281" y="643779"/>
+                  </a:lnTo>
+                  <a:lnTo>
+                    <a:pt x="1119914" y="663316"/>
+                  </a:lnTo>
+                  <a:lnTo>
+                    <a:pt x="1196546" y="682563"/>
+                  </a:lnTo>
+                  <a:lnTo>
+                    <a:pt x="1273179" y="701524"/>
+                  </a:lnTo>
+                  <a:lnTo>
+                    <a:pt x="1349811" y="720204"/>
+                  </a:lnTo>
+                  <a:lnTo>
+                    <a:pt x="1426444" y="738606"/>
+                  </a:lnTo>
+                  <a:lnTo>
+                    <a:pt x="1503076" y="756735"/>
+                  </a:lnTo>
+                  <a:lnTo>
+                    <a:pt x="1579709" y="774595"/>
+                  </a:lnTo>
+                  <a:lnTo>
+                    <a:pt x="1656342" y="792189"/>
+                  </a:lnTo>
+                  <a:lnTo>
+                    <a:pt x="1732974" y="809523"/>
+                  </a:lnTo>
+                  <a:lnTo>
+                    <a:pt x="1809607" y="826598"/>
+                  </a:lnTo>
+                  <a:lnTo>
+                    <a:pt x="1886239" y="843421"/>
+                  </a:lnTo>
+                  <a:lnTo>
+                    <a:pt x="1962872" y="859993"/>
+                  </a:lnTo>
+                  <a:lnTo>
+                    <a:pt x="2039504" y="876320"/>
+                  </a:lnTo>
+                  <a:lnTo>
+                    <a:pt x="2116137" y="892404"/>
+                  </a:lnTo>
+                  <a:lnTo>
+                    <a:pt x="2192769" y="908249"/>
+                  </a:lnTo>
+                  <a:lnTo>
+                    <a:pt x="2269402" y="923859"/>
+                  </a:lnTo>
+                  <a:lnTo>
+                    <a:pt x="2346034" y="939237"/>
+                  </a:lnTo>
+                  <a:lnTo>
+                    <a:pt x="2422667" y="954387"/>
+                  </a:lnTo>
+                  <a:lnTo>
+                    <a:pt x="2499300" y="969312"/>
+                  </a:lnTo>
+                  <a:lnTo>
+                    <a:pt x="2575932" y="984015"/>
+                  </a:lnTo>
+                  <a:lnTo>
+                    <a:pt x="2652565" y="998500"/>
+                  </a:lnTo>
+                  <a:lnTo>
+                    <a:pt x="2729197" y="1012770"/>
+                  </a:lnTo>
+                  <a:lnTo>
+                    <a:pt x="2805830" y="1026828"/>
+                  </a:lnTo>
+                  <a:lnTo>
+                    <a:pt x="2882462" y="1040677"/>
+                  </a:lnTo>
+                  <a:lnTo>
+                    <a:pt x="2959095" y="1054321"/>
+                  </a:lnTo>
+                  <a:lnTo>
+                    <a:pt x="3035727" y="1067762"/>
+                  </a:lnTo>
+                  <a:lnTo>
+                    <a:pt x="3112360" y="1081004"/>
+                  </a:lnTo>
+                  <a:lnTo>
+                    <a:pt x="3188993" y="1094048"/>
+                  </a:lnTo>
+                  <a:lnTo>
+                    <a:pt x="3265625" y="1106900"/>
+                  </a:lnTo>
+                  <a:lnTo>
+                    <a:pt x="3342258" y="1119560"/>
+                  </a:lnTo>
+                  <a:lnTo>
+                    <a:pt x="3418890" y="1127898"/>
+                  </a:lnTo>
+                  <a:lnTo>
+                    <a:pt x="3495523" y="1114077"/>
+                  </a:lnTo>
+                  <a:lnTo>
+                    <a:pt x="3572155" y="1100027"/>
+                  </a:lnTo>
+                  <a:lnTo>
+                    <a:pt x="3648788" y="1085743"/>
+                  </a:lnTo>
+                  <a:lnTo>
+                    <a:pt x="3725420" y="1071222"/>
+                  </a:lnTo>
+                  <a:lnTo>
+                    <a:pt x="3802053" y="1056459"/>
+                  </a:lnTo>
+                  <a:lnTo>
+                    <a:pt x="3878685" y="1041451"/>
+                  </a:lnTo>
+                  <a:lnTo>
+                    <a:pt x="3955318" y="1026194"/>
+                  </a:lnTo>
+                  <a:lnTo>
+                    <a:pt x="4031951" y="1010683"/>
+                  </a:lnTo>
+                  <a:lnTo>
+                    <a:pt x="4108583" y="994915"/>
+                  </a:lnTo>
+                  <a:lnTo>
+                    <a:pt x="4185216" y="978884"/>
+                  </a:lnTo>
+                  <a:lnTo>
+                    <a:pt x="4261848" y="962587"/>
+                  </a:lnTo>
+                  <a:lnTo>
+                    <a:pt x="4338481" y="946019"/>
+                  </a:lnTo>
+                  <a:lnTo>
+                    <a:pt x="4415113" y="929176"/>
+                  </a:lnTo>
+                  <a:lnTo>
+                    <a:pt x="4491746" y="912053"/>
+                  </a:lnTo>
+                  <a:lnTo>
+                    <a:pt x="4568378" y="894645"/>
+                  </a:lnTo>
+                  <a:lnTo>
+                    <a:pt x="4645011" y="876948"/>
+                  </a:lnTo>
+                  <a:lnTo>
+                    <a:pt x="4721644" y="858957"/>
+                  </a:lnTo>
+                  <a:lnTo>
+                    <a:pt x="4798276" y="840667"/>
+                  </a:lnTo>
+                  <a:lnTo>
+                    <a:pt x="4874909" y="822073"/>
+                  </a:lnTo>
+                  <a:lnTo>
+                    <a:pt x="4951541" y="803170"/>
+                  </a:lnTo>
+                  <a:lnTo>
+                    <a:pt x="5028174" y="783953"/>
+                  </a:lnTo>
+                  <a:lnTo>
+                    <a:pt x="5104806" y="764416"/>
+                  </a:lnTo>
+                  <a:lnTo>
+                    <a:pt x="5181439" y="744555"/>
+                  </a:lnTo>
+                  <a:lnTo>
+                    <a:pt x="5258071" y="724363"/>
+                  </a:lnTo>
+                  <a:lnTo>
+                    <a:pt x="5334704" y="703837"/>
+                  </a:lnTo>
+                  <a:lnTo>
+                    <a:pt x="5411336" y="682969"/>
+                  </a:lnTo>
+                  <a:lnTo>
+                    <a:pt x="5487969" y="661754"/>
+                  </a:lnTo>
+                  <a:lnTo>
+                    <a:pt x="5564602" y="640187"/>
+                  </a:lnTo>
+                  <a:lnTo>
+                    <a:pt x="5641234" y="618261"/>
+                  </a:lnTo>
+                  <a:lnTo>
+                    <a:pt x="5717867" y="595971"/>
+                  </a:lnTo>
+                  <a:lnTo>
+                    <a:pt x="5794499" y="573310"/>
+                  </a:lnTo>
+                  <a:lnTo>
+                    <a:pt x="5871132" y="550273"/>
+                  </a:lnTo>
+                  <a:lnTo>
+                    <a:pt x="5947764" y="526853"/>
+                  </a:lnTo>
+                  <a:lnTo>
+                    <a:pt x="6024397" y="503044"/>
+                  </a:lnTo>
+                  <a:lnTo>
+                    <a:pt x="6101029" y="478839"/>
+                  </a:lnTo>
+                  <a:lnTo>
+                    <a:pt x="6177662" y="454232"/>
+                  </a:lnTo>
+                  <a:lnTo>
+                    <a:pt x="6254294" y="429216"/>
+                  </a:lnTo>
+                  <a:lnTo>
+                    <a:pt x="6330927" y="403784"/>
+                  </a:lnTo>
+                  <a:lnTo>
+                    <a:pt x="6407560" y="377929"/>
+                  </a:lnTo>
+                  <a:lnTo>
+                    <a:pt x="6484192" y="351645"/>
+                  </a:lnTo>
+                  <a:lnTo>
+                    <a:pt x="6560825" y="324924"/>
+                  </a:lnTo>
+                  <a:lnTo>
+                    <a:pt x="6637457" y="297759"/>
+                  </a:lnTo>
+                  <a:lnTo>
+                    <a:pt x="6714090" y="270143"/>
+                  </a:lnTo>
+                  <a:lnTo>
+                    <a:pt x="6790722" y="242067"/>
+                  </a:lnTo>
+                  <a:lnTo>
+                    <a:pt x="6867355" y="213525"/>
+                  </a:lnTo>
+                  <a:lnTo>
+                    <a:pt x="6943987" y="184509"/>
+                  </a:lnTo>
+                  <a:lnTo>
+                    <a:pt x="7020620" y="155010"/>
+                  </a:lnTo>
+                  <a:lnTo>
+                    <a:pt x="7097253" y="125022"/>
+                  </a:lnTo>
+                  <a:lnTo>
+                    <a:pt x="7173885" y="94535"/>
+                  </a:lnTo>
+                  <a:lnTo>
+                    <a:pt x="7250518" y="63541"/>
+                  </a:lnTo>
+                  <a:lnTo>
+                    <a:pt x="7327150" y="32032"/>
                   </a:lnTo>
                   <a:lnTo>
                     <a:pt x="7403783" y="0"/>
@@ -3940,306 +3940,306 @@
           </p:nvSpPr>
           <p:spPr>
             <a:xfrm>
-              <a:off x="817517" y="4681589"/>
-              <a:ext cx="7403783" cy="469065"/>
+              <a:off x="817517" y="4729750"/>
+              <a:ext cx="7403783" cy="447375"/>
             </a:xfrm>
             <a:custGeom>
               <a:avLst/>
               <a:pathLst>
-                <a:path w="7403783" h="469065">
+                <a:path w="7403783" h="447375">
                   <a:moveTo>
-                    <a:pt x="7403783" y="469065"/>
+                    <a:pt x="7403783" y="447375"/>
                   </a:moveTo>
                   <a:lnTo>
-                    <a:pt x="7327150" y="463058"/>
-                  </a:lnTo>
-                  <a:lnTo>
-                    <a:pt x="7250518" y="456960"/>
-                  </a:lnTo>
-                  <a:lnTo>
-                    <a:pt x="7173885" y="450770"/>
-                  </a:lnTo>
-                  <a:lnTo>
-                    <a:pt x="7097253" y="444488"/>
-                  </a:lnTo>
-                  <a:lnTo>
-                    <a:pt x="7020620" y="438110"/>
-                  </a:lnTo>
-                  <a:lnTo>
-                    <a:pt x="6943987" y="431636"/>
-                  </a:lnTo>
-                  <a:lnTo>
-                    <a:pt x="6867355" y="425065"/>
-                  </a:lnTo>
-                  <a:lnTo>
-                    <a:pt x="6790722" y="418395"/>
-                  </a:lnTo>
-                  <a:lnTo>
-                    <a:pt x="6714090" y="411624"/>
-                  </a:lnTo>
-                  <a:lnTo>
-                    <a:pt x="6637457" y="404751"/>
-                  </a:lnTo>
-                  <a:lnTo>
-                    <a:pt x="6560825" y="397775"/>
-                  </a:lnTo>
-                  <a:lnTo>
-                    <a:pt x="6484192" y="390693"/>
-                  </a:lnTo>
-                  <a:lnTo>
-                    <a:pt x="6407560" y="383505"/>
-                  </a:lnTo>
-                  <a:lnTo>
-                    <a:pt x="6330927" y="376208"/>
-                  </a:lnTo>
-                  <a:lnTo>
-                    <a:pt x="6254294" y="368801"/>
-                  </a:lnTo>
-                  <a:lnTo>
-                    <a:pt x="6177662" y="361283"/>
-                  </a:lnTo>
-                  <a:lnTo>
-                    <a:pt x="6101029" y="353652"/>
-                  </a:lnTo>
-                  <a:lnTo>
-                    <a:pt x="6024397" y="345905"/>
-                  </a:lnTo>
-                  <a:lnTo>
-                    <a:pt x="5947764" y="338041"/>
-                  </a:lnTo>
-                  <a:lnTo>
-                    <a:pt x="5871132" y="330060"/>
-                  </a:lnTo>
-                  <a:lnTo>
-                    <a:pt x="5794499" y="321957"/>
-                  </a:lnTo>
-                  <a:lnTo>
-                    <a:pt x="5717867" y="313733"/>
-                  </a:lnTo>
-                  <a:lnTo>
-                    <a:pt x="5641234" y="305385"/>
-                  </a:lnTo>
-                  <a:lnTo>
-                    <a:pt x="5564602" y="296910"/>
-                  </a:lnTo>
-                  <a:lnTo>
-                    <a:pt x="5487969" y="288309"/>
-                  </a:lnTo>
-                  <a:lnTo>
-                    <a:pt x="5411336" y="279577"/>
-                  </a:lnTo>
-                  <a:lnTo>
-                    <a:pt x="5334704" y="270714"/>
-                  </a:lnTo>
-                  <a:lnTo>
-                    <a:pt x="5258071" y="261717"/>
-                  </a:lnTo>
-                  <a:lnTo>
-                    <a:pt x="5181439" y="252585"/>
-                  </a:lnTo>
-                  <a:lnTo>
-                    <a:pt x="5104806" y="243315"/>
-                  </a:lnTo>
-                  <a:lnTo>
-                    <a:pt x="5028174" y="233905"/>
-                  </a:lnTo>
-                  <a:lnTo>
-                    <a:pt x="4951541" y="224354"/>
-                  </a:lnTo>
-                  <a:lnTo>
-                    <a:pt x="4874909" y="214658"/>
-                  </a:lnTo>
-                  <a:lnTo>
-                    <a:pt x="4798276" y="204817"/>
-                  </a:lnTo>
-                  <a:lnTo>
-                    <a:pt x="4721644" y="194827"/>
-                  </a:lnTo>
-                  <a:lnTo>
-                    <a:pt x="4645011" y="184686"/>
-                  </a:lnTo>
-                  <a:lnTo>
-                    <a:pt x="4568378" y="174393"/>
-                  </a:lnTo>
-                  <a:lnTo>
-                    <a:pt x="4491746" y="163945"/>
-                  </a:lnTo>
-                  <a:lnTo>
-                    <a:pt x="4415113" y="153339"/>
-                  </a:lnTo>
-                  <a:lnTo>
-                    <a:pt x="4338481" y="142573"/>
-                  </a:lnTo>
-                  <a:lnTo>
-                    <a:pt x="4261848" y="131645"/>
-                  </a:lnTo>
-                  <a:lnTo>
-                    <a:pt x="4185216" y="120552"/>
-                  </a:lnTo>
-                  <a:lnTo>
-                    <a:pt x="4108583" y="109292"/>
-                  </a:lnTo>
-                  <a:lnTo>
-                    <a:pt x="4031951" y="97862"/>
-                  </a:lnTo>
-                  <a:lnTo>
-                    <a:pt x="3955318" y="86260"/>
-                  </a:lnTo>
-                  <a:lnTo>
-                    <a:pt x="3878685" y="74483"/>
-                  </a:lnTo>
-                  <a:lnTo>
-                    <a:pt x="3802053" y="62529"/>
-                  </a:lnTo>
-                  <a:lnTo>
-                    <a:pt x="3725420" y="50394"/>
-                  </a:lnTo>
-                  <a:lnTo>
-                    <a:pt x="3648788" y="38077"/>
-                  </a:lnTo>
-                  <a:lnTo>
-                    <a:pt x="3572155" y="25574"/>
-                  </a:lnTo>
-                  <a:lnTo>
-                    <a:pt x="3495523" y="12882"/>
+                    <a:pt x="7327150" y="441646"/>
+                  </a:lnTo>
+                  <a:lnTo>
+                    <a:pt x="7250518" y="435830"/>
+                  </a:lnTo>
+                  <a:lnTo>
+                    <a:pt x="7173885" y="429927"/>
+                  </a:lnTo>
+                  <a:lnTo>
+                    <a:pt x="7097253" y="423935"/>
+                  </a:lnTo>
+                  <a:lnTo>
+                    <a:pt x="7020620" y="417852"/>
+                  </a:lnTo>
+                  <a:lnTo>
+                    <a:pt x="6943987" y="411678"/>
+                  </a:lnTo>
+                  <a:lnTo>
+                    <a:pt x="6867355" y="405410"/>
+                  </a:lnTo>
+                  <a:lnTo>
+                    <a:pt x="6790722" y="399048"/>
+                  </a:lnTo>
+                  <a:lnTo>
+                    <a:pt x="6714090" y="392591"/>
+                  </a:lnTo>
+                  <a:lnTo>
+                    <a:pt x="6637457" y="386036"/>
+                  </a:lnTo>
+                  <a:lnTo>
+                    <a:pt x="6560825" y="379382"/>
+                  </a:lnTo>
+                  <a:lnTo>
+                    <a:pt x="6484192" y="372628"/>
+                  </a:lnTo>
+                  <a:lnTo>
+                    <a:pt x="6407560" y="365772"/>
+                  </a:lnTo>
+                  <a:lnTo>
+                    <a:pt x="6330927" y="358812"/>
+                  </a:lnTo>
+                  <a:lnTo>
+                    <a:pt x="6254294" y="351748"/>
+                  </a:lnTo>
+                  <a:lnTo>
+                    <a:pt x="6177662" y="344578"/>
+                  </a:lnTo>
+                  <a:lnTo>
+                    <a:pt x="6101029" y="337299"/>
+                  </a:lnTo>
+                  <a:lnTo>
+                    <a:pt x="6024397" y="329910"/>
+                  </a:lnTo>
+                  <a:lnTo>
+                    <a:pt x="5947764" y="322411"/>
+                  </a:lnTo>
+                  <a:lnTo>
+                    <a:pt x="5871132" y="314798"/>
+                  </a:lnTo>
+                  <a:lnTo>
+                    <a:pt x="5794499" y="307070"/>
+                  </a:lnTo>
+                  <a:lnTo>
+                    <a:pt x="5717867" y="299226"/>
+                  </a:lnTo>
+                  <a:lnTo>
+                    <a:pt x="5641234" y="291264"/>
+                  </a:lnTo>
+                  <a:lnTo>
+                    <a:pt x="5564602" y="283181"/>
+                  </a:lnTo>
+                  <a:lnTo>
+                    <a:pt x="5487969" y="274977"/>
+                  </a:lnTo>
+                  <a:lnTo>
+                    <a:pt x="5411336" y="266650"/>
+                  </a:lnTo>
+                  <a:lnTo>
+                    <a:pt x="5334704" y="258196"/>
+                  </a:lnTo>
+                  <a:lnTo>
+                    <a:pt x="5258071" y="249616"/>
+                  </a:lnTo>
+                  <a:lnTo>
+                    <a:pt x="5181439" y="240906"/>
+                  </a:lnTo>
+                  <a:lnTo>
+                    <a:pt x="5104806" y="232064"/>
+                  </a:lnTo>
+                  <a:lnTo>
+                    <a:pt x="5028174" y="223090"/>
+                  </a:lnTo>
+                  <a:lnTo>
+                    <a:pt x="4951541" y="213980"/>
+                  </a:lnTo>
+                  <a:lnTo>
+                    <a:pt x="4874909" y="204733"/>
+                  </a:lnTo>
+                  <a:lnTo>
+                    <a:pt x="4798276" y="195346"/>
+                  </a:lnTo>
+                  <a:lnTo>
+                    <a:pt x="4721644" y="185818"/>
+                  </a:lnTo>
+                  <a:lnTo>
+                    <a:pt x="4645011" y="176147"/>
+                  </a:lnTo>
+                  <a:lnTo>
+                    <a:pt x="4568378" y="166329"/>
+                  </a:lnTo>
+                  <a:lnTo>
+                    <a:pt x="4491746" y="156364"/>
+                  </a:lnTo>
+                  <a:lnTo>
+                    <a:pt x="4415113" y="146248"/>
+                  </a:lnTo>
+                  <a:lnTo>
+                    <a:pt x="4338481" y="135980"/>
+                  </a:lnTo>
+                  <a:lnTo>
+                    <a:pt x="4261848" y="125557"/>
+                  </a:lnTo>
+                  <a:lnTo>
+                    <a:pt x="4185216" y="114978"/>
+                  </a:lnTo>
+                  <a:lnTo>
+                    <a:pt x="4108583" y="104238"/>
+                  </a:lnTo>
+                  <a:lnTo>
+                    <a:pt x="4031951" y="93337"/>
+                  </a:lnTo>
+                  <a:lnTo>
+                    <a:pt x="3955318" y="82271"/>
+                  </a:lnTo>
+                  <a:lnTo>
+                    <a:pt x="3878685" y="71039"/>
+                  </a:lnTo>
+                  <a:lnTo>
+                    <a:pt x="3802053" y="59638"/>
+                  </a:lnTo>
+                  <a:lnTo>
+                    <a:pt x="3725420" y="48064"/>
+                  </a:lnTo>
+                  <a:lnTo>
+                    <a:pt x="3648788" y="36316"/>
+                  </a:lnTo>
+                  <a:lnTo>
+                    <a:pt x="3572155" y="24391"/>
+                  </a:lnTo>
+                  <a:lnTo>
+                    <a:pt x="3495523" y="12287"/>
                   </a:lnTo>
                   <a:lnTo>
                     <a:pt x="3418890" y="0"/>
                   </a:lnTo>
                   <a:lnTo>
-                    <a:pt x="3342258" y="9919"/>
-                  </a:lnTo>
-                  <a:lnTo>
-                    <a:pt x="3265625" y="23939"/>
-                  </a:lnTo>
-                  <a:lnTo>
-                    <a:pt x="3188993" y="37731"/>
-                  </a:lnTo>
-                  <a:lnTo>
-                    <a:pt x="3112360" y="51297"/>
-                  </a:lnTo>
-                  <a:lnTo>
-                    <a:pt x="3035727" y="64642"/>
-                  </a:lnTo>
-                  <a:lnTo>
-                    <a:pt x="2959095" y="77768"/>
-                  </a:lnTo>
-                  <a:lnTo>
-                    <a:pt x="2882462" y="90679"/>
-                  </a:lnTo>
-                  <a:lnTo>
-                    <a:pt x="2805830" y="103380"/>
-                  </a:lnTo>
-                  <a:lnTo>
-                    <a:pt x="2729197" y="115873"/>
-                  </a:lnTo>
-                  <a:lnTo>
-                    <a:pt x="2652565" y="128162"/>
-                  </a:lnTo>
-                  <a:lnTo>
-                    <a:pt x="2575932" y="140250"/>
-                  </a:lnTo>
-                  <a:lnTo>
-                    <a:pt x="2499300" y="152140"/>
-                  </a:lnTo>
-                  <a:lnTo>
-                    <a:pt x="2422667" y="163836"/>
-                  </a:lnTo>
-                  <a:lnTo>
-                    <a:pt x="2346034" y="175341"/>
-                  </a:lnTo>
-                  <a:lnTo>
-                    <a:pt x="2269402" y="186657"/>
-                  </a:lnTo>
-                  <a:lnTo>
-                    <a:pt x="2192769" y="197789"/>
-                  </a:lnTo>
-                  <a:lnTo>
-                    <a:pt x="2116137" y="208739"/>
-                  </a:lnTo>
-                  <a:lnTo>
-                    <a:pt x="2039504" y="219509"/>
-                  </a:lnTo>
-                  <a:lnTo>
-                    <a:pt x="1962872" y="230104"/>
-                  </a:lnTo>
-                  <a:lnTo>
-                    <a:pt x="1886239" y="240525"/>
-                  </a:lnTo>
-                  <a:lnTo>
-                    <a:pt x="1809607" y="250776"/>
-                  </a:lnTo>
-                  <a:lnTo>
-                    <a:pt x="1732974" y="260860"/>
-                  </a:lnTo>
-                  <a:lnTo>
-                    <a:pt x="1656342" y="270779"/>
-                  </a:lnTo>
-                  <a:lnTo>
-                    <a:pt x="1579709" y="280535"/>
-                  </a:lnTo>
-                  <a:lnTo>
-                    <a:pt x="1503076" y="290132"/>
-                  </a:lnTo>
-                  <a:lnTo>
-                    <a:pt x="1426444" y="299572"/>
-                  </a:lnTo>
-                  <a:lnTo>
-                    <a:pt x="1349811" y="308858"/>
-                  </a:lnTo>
-                  <a:lnTo>
-                    <a:pt x="1273179" y="317992"/>
-                  </a:lnTo>
-                  <a:lnTo>
-                    <a:pt x="1196546" y="326977"/>
-                  </a:lnTo>
-                  <a:lnTo>
-                    <a:pt x="1119914" y="335815"/>
-                  </a:lnTo>
-                  <a:lnTo>
-                    <a:pt x="1043281" y="344508"/>
-                  </a:lnTo>
-                  <a:lnTo>
-                    <a:pt x="966649" y="353059"/>
-                  </a:lnTo>
-                  <a:lnTo>
-                    <a:pt x="890016" y="361471"/>
-                  </a:lnTo>
-                  <a:lnTo>
-                    <a:pt x="813384" y="369745"/>
-                  </a:lnTo>
-                  <a:lnTo>
-                    <a:pt x="736751" y="377883"/>
-                  </a:lnTo>
-                  <a:lnTo>
-                    <a:pt x="660118" y="385889"/>
-                  </a:lnTo>
-                  <a:lnTo>
-                    <a:pt x="583486" y="393764"/>
-                  </a:lnTo>
-                  <a:lnTo>
-                    <a:pt x="506853" y="401510"/>
-                  </a:lnTo>
-                  <a:lnTo>
-                    <a:pt x="430221" y="409130"/>
-                  </a:lnTo>
-                  <a:lnTo>
-                    <a:pt x="353588" y="416624"/>
-                  </a:lnTo>
-                  <a:lnTo>
-                    <a:pt x="276956" y="423997"/>
-                  </a:lnTo>
-                  <a:lnTo>
-                    <a:pt x="200323" y="431249"/>
-                  </a:lnTo>
-                  <a:lnTo>
-                    <a:pt x="123691" y="438382"/>
-                  </a:lnTo>
-                  <a:lnTo>
-                    <a:pt x="47058" y="445399"/>
-                  </a:lnTo>
-                  <a:lnTo>
-                    <a:pt x="0" y="449637"/>
+                    <a:pt x="3342258" y="9460"/>
+                  </a:lnTo>
+                  <a:lnTo>
+                    <a:pt x="3265625" y="22832"/>
+                  </a:lnTo>
+                  <a:lnTo>
+                    <a:pt x="3188993" y="35986"/>
+                  </a:lnTo>
+                  <a:lnTo>
+                    <a:pt x="3112360" y="48925"/>
+                  </a:lnTo>
+                  <a:lnTo>
+                    <a:pt x="3035727" y="61652"/>
+                  </a:lnTo>
+                  <a:lnTo>
+                    <a:pt x="2959095" y="74172"/>
+                  </a:lnTo>
+                  <a:lnTo>
+                    <a:pt x="2882462" y="86486"/>
+                  </a:lnTo>
+                  <a:lnTo>
+                    <a:pt x="2805830" y="98600"/>
+                  </a:lnTo>
+                  <a:lnTo>
+                    <a:pt x="2729197" y="110515"/>
+                  </a:lnTo>
+                  <a:lnTo>
+                    <a:pt x="2652565" y="122236"/>
+                  </a:lnTo>
+                  <a:lnTo>
+                    <a:pt x="2575932" y="133765"/>
+                  </a:lnTo>
+                  <a:lnTo>
+                    <a:pt x="2499300" y="145105"/>
+                  </a:lnTo>
+                  <a:lnTo>
+                    <a:pt x="2422667" y="156260"/>
+                  </a:lnTo>
+                  <a:lnTo>
+                    <a:pt x="2346034" y="167233"/>
+                  </a:lnTo>
+                  <a:lnTo>
+                    <a:pt x="2269402" y="178026"/>
+                  </a:lnTo>
+                  <a:lnTo>
+                    <a:pt x="2192769" y="188643"/>
+                  </a:lnTo>
+                  <a:lnTo>
+                    <a:pt x="2116137" y="199087"/>
+                  </a:lnTo>
+                  <a:lnTo>
+                    <a:pt x="2039504" y="209359"/>
+                  </a:lnTo>
+                  <a:lnTo>
+                    <a:pt x="1962872" y="219464"/>
+                  </a:lnTo>
+                  <a:lnTo>
+                    <a:pt x="1886239" y="229403"/>
+                  </a:lnTo>
+                  <a:lnTo>
+                    <a:pt x="1809607" y="239181"/>
+                  </a:lnTo>
+                  <a:lnTo>
+                    <a:pt x="1732974" y="248798"/>
+                  </a:lnTo>
+                  <a:lnTo>
+                    <a:pt x="1656342" y="258258"/>
+                  </a:lnTo>
+                  <a:lnTo>
+                    <a:pt x="1579709" y="267563"/>
+                  </a:lnTo>
+                  <a:lnTo>
+                    <a:pt x="1503076" y="276716"/>
+                  </a:lnTo>
+                  <a:lnTo>
+                    <a:pt x="1426444" y="285720"/>
+                  </a:lnTo>
+                  <a:lnTo>
+                    <a:pt x="1349811" y="294577"/>
+                  </a:lnTo>
+                  <a:lnTo>
+                    <a:pt x="1273179" y="303288"/>
+                  </a:lnTo>
+                  <a:lnTo>
+                    <a:pt x="1196546" y="311858"/>
+                  </a:lnTo>
+                  <a:lnTo>
+                    <a:pt x="1119914" y="320287"/>
+                  </a:lnTo>
+                  <a:lnTo>
+                    <a:pt x="1043281" y="328578"/>
+                  </a:lnTo>
+                  <a:lnTo>
+                    <a:pt x="966649" y="336734"/>
+                  </a:lnTo>
+                  <a:lnTo>
+                    <a:pt x="890016" y="344756"/>
+                  </a:lnTo>
+                  <a:lnTo>
+                    <a:pt x="813384" y="352648"/>
+                  </a:lnTo>
+                  <a:lnTo>
+                    <a:pt x="736751" y="360410"/>
+                  </a:lnTo>
+                  <a:lnTo>
+                    <a:pt x="660118" y="368046"/>
+                  </a:lnTo>
+                  <a:lnTo>
+                    <a:pt x="583486" y="375556"/>
+                  </a:lnTo>
+                  <a:lnTo>
+                    <a:pt x="506853" y="382944"/>
+                  </a:lnTo>
+                  <a:lnTo>
+                    <a:pt x="430221" y="390211"/>
+                  </a:lnTo>
+                  <a:lnTo>
+                    <a:pt x="353588" y="397360"/>
+                  </a:lnTo>
+                  <a:lnTo>
+                    <a:pt x="276956" y="404391"/>
+                  </a:lnTo>
+                  <a:lnTo>
+                    <a:pt x="200323" y="411308"/>
+                  </a:lnTo>
+                  <a:lnTo>
+                    <a:pt x="123691" y="418111"/>
+                  </a:lnTo>
+                  <a:lnTo>
+                    <a:pt x="47058" y="424804"/>
+                  </a:lnTo>
+                  <a:lnTo>
+                    <a:pt x="0" y="428846"/>
                   </a:lnTo>
                 </a:path>
               </a:pathLst>
@@ -4259,303 +4259,303 @@
           </p:nvSpPr>
           <p:spPr>
             <a:xfrm>
-              <a:off x="817517" y="4644310"/>
-              <a:ext cx="7403783" cy="64153"/>
+              <a:off x="817517" y="4694195"/>
+              <a:ext cx="7403783" cy="61187"/>
             </a:xfrm>
             <a:custGeom>
               <a:avLst/>
               <a:pathLst>
-                <a:path w="7403783" h="64153">
+                <a:path w="7403783" h="61187">
                   <a:moveTo>
-                    <a:pt x="0" y="64153"/>
+                    <a:pt x="0" y="61187"/>
                   </a:moveTo>
                   <a:lnTo>
-                    <a:pt x="47058" y="63760"/>
-                  </a:lnTo>
-                  <a:lnTo>
-                    <a:pt x="123691" y="63120"/>
-                  </a:lnTo>
-                  <a:lnTo>
-                    <a:pt x="200323" y="62479"/>
-                  </a:lnTo>
-                  <a:lnTo>
-                    <a:pt x="276956" y="61838"/>
-                  </a:lnTo>
-                  <a:lnTo>
-                    <a:pt x="353588" y="61196"/>
-                  </a:lnTo>
-                  <a:lnTo>
-                    <a:pt x="430221" y="60553"/>
-                  </a:lnTo>
-                  <a:lnTo>
-                    <a:pt x="506853" y="59910"/>
-                  </a:lnTo>
-                  <a:lnTo>
-                    <a:pt x="583486" y="59267"/>
-                  </a:lnTo>
-                  <a:lnTo>
-                    <a:pt x="660118" y="58623"/>
-                  </a:lnTo>
-                  <a:lnTo>
-                    <a:pt x="736751" y="57979"/>
-                  </a:lnTo>
-                  <a:lnTo>
-                    <a:pt x="813384" y="57334"/>
-                  </a:lnTo>
-                  <a:lnTo>
-                    <a:pt x="890016" y="56689"/>
-                  </a:lnTo>
-                  <a:lnTo>
-                    <a:pt x="966649" y="56043"/>
-                  </a:lnTo>
-                  <a:lnTo>
-                    <a:pt x="1043281" y="55396"/>
-                  </a:lnTo>
-                  <a:lnTo>
-                    <a:pt x="1119914" y="54750"/>
-                  </a:lnTo>
-                  <a:lnTo>
-                    <a:pt x="1196546" y="54102"/>
-                  </a:lnTo>
-                  <a:lnTo>
-                    <a:pt x="1273179" y="53454"/>
-                  </a:lnTo>
-                  <a:lnTo>
-                    <a:pt x="1349811" y="52806"/>
-                  </a:lnTo>
-                  <a:lnTo>
-                    <a:pt x="1426444" y="52157"/>
-                  </a:lnTo>
-                  <a:lnTo>
-                    <a:pt x="1503076" y="51508"/>
-                  </a:lnTo>
-                  <a:lnTo>
-                    <a:pt x="1579709" y="50858"/>
-                  </a:lnTo>
-                  <a:lnTo>
-                    <a:pt x="1656342" y="50208"/>
-                  </a:lnTo>
-                  <a:lnTo>
-                    <a:pt x="1732974" y="49557"/>
-                  </a:lnTo>
-                  <a:lnTo>
-                    <a:pt x="1809607" y="48906"/>
-                  </a:lnTo>
-                  <a:lnTo>
-                    <a:pt x="1886239" y="48254"/>
-                  </a:lnTo>
-                  <a:lnTo>
-                    <a:pt x="1962872" y="47602"/>
-                  </a:lnTo>
-                  <a:lnTo>
-                    <a:pt x="2039504" y="46949"/>
-                  </a:lnTo>
-                  <a:lnTo>
-                    <a:pt x="2116137" y="46296"/>
-                  </a:lnTo>
-                  <a:lnTo>
-                    <a:pt x="2192769" y="45642"/>
-                  </a:lnTo>
-                  <a:lnTo>
-                    <a:pt x="2269402" y="44988"/>
-                  </a:lnTo>
-                  <a:lnTo>
-                    <a:pt x="2346034" y="44333"/>
-                  </a:lnTo>
-                  <a:lnTo>
-                    <a:pt x="2422667" y="43678"/>
-                  </a:lnTo>
-                  <a:lnTo>
-                    <a:pt x="2499300" y="43022"/>
-                  </a:lnTo>
-                  <a:lnTo>
-                    <a:pt x="2575932" y="42366"/>
-                  </a:lnTo>
-                  <a:lnTo>
-                    <a:pt x="2652565" y="41709"/>
-                  </a:lnTo>
-                  <a:lnTo>
-                    <a:pt x="2729197" y="41052"/>
-                  </a:lnTo>
-                  <a:lnTo>
-                    <a:pt x="2805830" y="40394"/>
-                  </a:lnTo>
-                  <a:lnTo>
-                    <a:pt x="2882462" y="39736"/>
-                  </a:lnTo>
-                  <a:lnTo>
-                    <a:pt x="2959095" y="39077"/>
-                  </a:lnTo>
-                  <a:lnTo>
-                    <a:pt x="3035727" y="38418"/>
-                  </a:lnTo>
-                  <a:lnTo>
-                    <a:pt x="3112360" y="37758"/>
-                  </a:lnTo>
-                  <a:lnTo>
-                    <a:pt x="3188993" y="37098"/>
-                  </a:lnTo>
-                  <a:lnTo>
-                    <a:pt x="3265625" y="36437"/>
-                  </a:lnTo>
-                  <a:lnTo>
-                    <a:pt x="3342258" y="35776"/>
-                  </a:lnTo>
-                  <a:lnTo>
-                    <a:pt x="3418890" y="35114"/>
-                  </a:lnTo>
-                  <a:lnTo>
-                    <a:pt x="3495523" y="34452"/>
-                  </a:lnTo>
-                  <a:lnTo>
-                    <a:pt x="3572155" y="33789"/>
-                  </a:lnTo>
-                  <a:lnTo>
-                    <a:pt x="3648788" y="33126"/>
-                  </a:lnTo>
-                  <a:lnTo>
-                    <a:pt x="3725420" y="32462"/>
-                  </a:lnTo>
-                  <a:lnTo>
-                    <a:pt x="3802053" y="31798"/>
-                  </a:lnTo>
-                  <a:lnTo>
-                    <a:pt x="3878685" y="31133"/>
-                  </a:lnTo>
-                  <a:lnTo>
-                    <a:pt x="3955318" y="30468"/>
-                  </a:lnTo>
-                  <a:lnTo>
-                    <a:pt x="4031951" y="29802"/>
-                  </a:lnTo>
-                  <a:lnTo>
-                    <a:pt x="4108583" y="29136"/>
-                  </a:lnTo>
-                  <a:lnTo>
-                    <a:pt x="4185216" y="28469"/>
-                  </a:lnTo>
-                  <a:lnTo>
-                    <a:pt x="4261848" y="27802"/>
-                  </a:lnTo>
-                  <a:lnTo>
-                    <a:pt x="4338481" y="27134"/>
-                  </a:lnTo>
-                  <a:lnTo>
-                    <a:pt x="4415113" y="26465"/>
-                  </a:lnTo>
-                  <a:lnTo>
-                    <a:pt x="4491746" y="25797"/>
-                  </a:lnTo>
-                  <a:lnTo>
-                    <a:pt x="4568378" y="25127"/>
-                  </a:lnTo>
-                  <a:lnTo>
-                    <a:pt x="4645011" y="24457"/>
-                  </a:lnTo>
-                  <a:lnTo>
-                    <a:pt x="4721644" y="23787"/>
-                  </a:lnTo>
-                  <a:lnTo>
-                    <a:pt x="4798276" y="23116"/>
-                  </a:lnTo>
-                  <a:lnTo>
-                    <a:pt x="4874909" y="22445"/>
-                  </a:lnTo>
-                  <a:lnTo>
-                    <a:pt x="4951541" y="21773"/>
-                  </a:lnTo>
-                  <a:lnTo>
-                    <a:pt x="5028174" y="21100"/>
-                  </a:lnTo>
-                  <a:lnTo>
-                    <a:pt x="5104806" y="20427"/>
-                  </a:lnTo>
-                  <a:lnTo>
-                    <a:pt x="5181439" y="19754"/>
-                  </a:lnTo>
-                  <a:lnTo>
-                    <a:pt x="5258071" y="19080"/>
-                  </a:lnTo>
-                  <a:lnTo>
-                    <a:pt x="5334704" y="18406"/>
-                  </a:lnTo>
-                  <a:lnTo>
-                    <a:pt x="5411336" y="17731"/>
-                  </a:lnTo>
-                  <a:lnTo>
-                    <a:pt x="5487969" y="17055"/>
-                  </a:lnTo>
-                  <a:lnTo>
-                    <a:pt x="5564602" y="16379"/>
-                  </a:lnTo>
-                  <a:lnTo>
-                    <a:pt x="5641234" y="15703"/>
-                  </a:lnTo>
-                  <a:lnTo>
-                    <a:pt x="5717867" y="15026"/>
-                  </a:lnTo>
-                  <a:lnTo>
-                    <a:pt x="5794499" y="14348"/>
-                  </a:lnTo>
-                  <a:lnTo>
-                    <a:pt x="5871132" y="13670"/>
-                  </a:lnTo>
-                  <a:lnTo>
-                    <a:pt x="5947764" y="12991"/>
-                  </a:lnTo>
-                  <a:lnTo>
-                    <a:pt x="6024397" y="12312"/>
-                  </a:lnTo>
-                  <a:lnTo>
-                    <a:pt x="6101029" y="11633"/>
-                  </a:lnTo>
-                  <a:lnTo>
-                    <a:pt x="6177662" y="10952"/>
-                  </a:lnTo>
-                  <a:lnTo>
-                    <a:pt x="6254294" y="10272"/>
-                  </a:lnTo>
-                  <a:lnTo>
-                    <a:pt x="6330927" y="9591"/>
-                  </a:lnTo>
-                  <a:lnTo>
-                    <a:pt x="6407560" y="8909"/>
-                  </a:lnTo>
-                  <a:lnTo>
-                    <a:pt x="6484192" y="8227"/>
-                  </a:lnTo>
-                  <a:lnTo>
-                    <a:pt x="6560825" y="7544"/>
-                  </a:lnTo>
-                  <a:lnTo>
-                    <a:pt x="6637457" y="6861"/>
-                  </a:lnTo>
-                  <a:lnTo>
-                    <a:pt x="6714090" y="6177"/>
-                  </a:lnTo>
-                  <a:lnTo>
-                    <a:pt x="6790722" y="5493"/>
-                  </a:lnTo>
-                  <a:lnTo>
-                    <a:pt x="6867355" y="4808"/>
-                  </a:lnTo>
-                  <a:lnTo>
-                    <a:pt x="6943987" y="4122"/>
-                  </a:lnTo>
-                  <a:lnTo>
-                    <a:pt x="7020620" y="3437"/>
-                  </a:lnTo>
-                  <a:lnTo>
-                    <a:pt x="7097253" y="2750"/>
-                  </a:lnTo>
-                  <a:lnTo>
-                    <a:pt x="7173885" y="2063"/>
-                  </a:lnTo>
-                  <a:lnTo>
-                    <a:pt x="7250518" y="1376"/>
-                  </a:lnTo>
-                  <a:lnTo>
-                    <a:pt x="7327150" y="688"/>
+                    <a:pt x="47058" y="60812"/>
+                  </a:lnTo>
+                  <a:lnTo>
+                    <a:pt x="123691" y="60201"/>
+                  </a:lnTo>
+                  <a:lnTo>
+                    <a:pt x="200323" y="59590"/>
+                  </a:lnTo>
+                  <a:lnTo>
+                    <a:pt x="276956" y="58978"/>
+                  </a:lnTo>
+                  <a:lnTo>
+                    <a:pt x="353588" y="58366"/>
+                  </a:lnTo>
+                  <a:lnTo>
+                    <a:pt x="430221" y="57753"/>
+                  </a:lnTo>
+                  <a:lnTo>
+                    <a:pt x="506853" y="57140"/>
+                  </a:lnTo>
+                  <a:lnTo>
+                    <a:pt x="583486" y="56526"/>
+                  </a:lnTo>
+                  <a:lnTo>
+                    <a:pt x="660118" y="55912"/>
+                  </a:lnTo>
+                  <a:lnTo>
+                    <a:pt x="736751" y="55298"/>
+                  </a:lnTo>
+                  <a:lnTo>
+                    <a:pt x="813384" y="54683"/>
+                  </a:lnTo>
+                  <a:lnTo>
+                    <a:pt x="890016" y="54067"/>
+                  </a:lnTo>
+                  <a:lnTo>
+                    <a:pt x="966649" y="53451"/>
+                  </a:lnTo>
+                  <a:lnTo>
+                    <a:pt x="1043281" y="52835"/>
+                  </a:lnTo>
+                  <a:lnTo>
+                    <a:pt x="1119914" y="52218"/>
+                  </a:lnTo>
+                  <a:lnTo>
+                    <a:pt x="1196546" y="51601"/>
+                  </a:lnTo>
+                  <a:lnTo>
+                    <a:pt x="1273179" y="50983"/>
+                  </a:lnTo>
+                  <a:lnTo>
+                    <a:pt x="1349811" y="50364"/>
+                  </a:lnTo>
+                  <a:lnTo>
+                    <a:pt x="1426444" y="49746"/>
+                  </a:lnTo>
+                  <a:lnTo>
+                    <a:pt x="1503076" y="49126"/>
+                  </a:lnTo>
+                  <a:lnTo>
+                    <a:pt x="1579709" y="48507"/>
+                  </a:lnTo>
+                  <a:lnTo>
+                    <a:pt x="1656342" y="47886"/>
+                  </a:lnTo>
+                  <a:lnTo>
+                    <a:pt x="1732974" y="47266"/>
+                  </a:lnTo>
+                  <a:lnTo>
+                    <a:pt x="1809607" y="46645"/>
+                  </a:lnTo>
+                  <a:lnTo>
+                    <a:pt x="1886239" y="46023"/>
+                  </a:lnTo>
+                  <a:lnTo>
+                    <a:pt x="1962872" y="45401"/>
+                  </a:lnTo>
+                  <a:lnTo>
+                    <a:pt x="2039504" y="44778"/>
+                  </a:lnTo>
+                  <a:lnTo>
+                    <a:pt x="2116137" y="44155"/>
+                  </a:lnTo>
+                  <a:lnTo>
+                    <a:pt x="2192769" y="43532"/>
+                  </a:lnTo>
+                  <a:lnTo>
+                    <a:pt x="2269402" y="42908"/>
+                  </a:lnTo>
+                  <a:lnTo>
+                    <a:pt x="2346034" y="42283"/>
+                  </a:lnTo>
+                  <a:lnTo>
+                    <a:pt x="2422667" y="41658"/>
+                  </a:lnTo>
+                  <a:lnTo>
+                    <a:pt x="2499300" y="41033"/>
+                  </a:lnTo>
+                  <a:lnTo>
+                    <a:pt x="2575932" y="40407"/>
+                  </a:lnTo>
+                  <a:lnTo>
+                    <a:pt x="2652565" y="39781"/>
+                  </a:lnTo>
+                  <a:lnTo>
+                    <a:pt x="2729197" y="39154"/>
+                  </a:lnTo>
+                  <a:lnTo>
+                    <a:pt x="2805830" y="38526"/>
+                  </a:lnTo>
+                  <a:lnTo>
+                    <a:pt x="2882462" y="37899"/>
+                  </a:lnTo>
+                  <a:lnTo>
+                    <a:pt x="2959095" y="37270"/>
+                  </a:lnTo>
+                  <a:lnTo>
+                    <a:pt x="3035727" y="36642"/>
+                  </a:lnTo>
+                  <a:lnTo>
+                    <a:pt x="3112360" y="36012"/>
+                  </a:lnTo>
+                  <a:lnTo>
+                    <a:pt x="3188993" y="35383"/>
+                  </a:lnTo>
+                  <a:lnTo>
+                    <a:pt x="3265625" y="34752"/>
+                  </a:lnTo>
+                  <a:lnTo>
+                    <a:pt x="3342258" y="34122"/>
+                  </a:lnTo>
+                  <a:lnTo>
+                    <a:pt x="3418890" y="33491"/>
+                  </a:lnTo>
+                  <a:lnTo>
+                    <a:pt x="3495523" y="32859"/>
+                  </a:lnTo>
+                  <a:lnTo>
+                    <a:pt x="3572155" y="32227"/>
+                  </a:lnTo>
+                  <a:lnTo>
+                    <a:pt x="3648788" y="31594"/>
+                  </a:lnTo>
+                  <a:lnTo>
+                    <a:pt x="3725420" y="30961"/>
+                  </a:lnTo>
+                  <a:lnTo>
+                    <a:pt x="3802053" y="30328"/>
+                  </a:lnTo>
+                  <a:lnTo>
+                    <a:pt x="3878685" y="29694"/>
+                  </a:lnTo>
+                  <a:lnTo>
+                    <a:pt x="3955318" y="29059"/>
+                  </a:lnTo>
+                  <a:lnTo>
+                    <a:pt x="4031951" y="28424"/>
+                  </a:lnTo>
+                  <a:lnTo>
+                    <a:pt x="4108583" y="27789"/>
+                  </a:lnTo>
+                  <a:lnTo>
+                    <a:pt x="4185216" y="27153"/>
+                  </a:lnTo>
+                  <a:lnTo>
+                    <a:pt x="4261848" y="26516"/>
+                  </a:lnTo>
+                  <a:lnTo>
+                    <a:pt x="4338481" y="25879"/>
+                  </a:lnTo>
+                  <a:lnTo>
+                    <a:pt x="4415113" y="25242"/>
+                  </a:lnTo>
+                  <a:lnTo>
+                    <a:pt x="4491746" y="24604"/>
+                  </a:lnTo>
+                  <a:lnTo>
+                    <a:pt x="4568378" y="23965"/>
+                  </a:lnTo>
+                  <a:lnTo>
+                    <a:pt x="4645011" y="23326"/>
+                  </a:lnTo>
+                  <a:lnTo>
+                    <a:pt x="4721644" y="22687"/>
+                  </a:lnTo>
+                  <a:lnTo>
+                    <a:pt x="4798276" y="22047"/>
+                  </a:lnTo>
+                  <a:lnTo>
+                    <a:pt x="4874909" y="21407"/>
+                  </a:lnTo>
+                  <a:lnTo>
+                    <a:pt x="4951541" y="20766"/>
+                  </a:lnTo>
+                  <a:lnTo>
+                    <a:pt x="5028174" y="20125"/>
+                  </a:lnTo>
+                  <a:lnTo>
+                    <a:pt x="5104806" y="19483"/>
+                  </a:lnTo>
+                  <a:lnTo>
+                    <a:pt x="5181439" y="18841"/>
+                  </a:lnTo>
+                  <a:lnTo>
+                    <a:pt x="5258071" y="18198"/>
+                  </a:lnTo>
+                  <a:lnTo>
+                    <a:pt x="5334704" y="17555"/>
+                  </a:lnTo>
+                  <a:lnTo>
+                    <a:pt x="5411336" y="16911"/>
+                  </a:lnTo>
+                  <a:lnTo>
+                    <a:pt x="5487969" y="16266"/>
+                  </a:lnTo>
+                  <a:lnTo>
+                    <a:pt x="5564602" y="15622"/>
+                  </a:lnTo>
+                  <a:lnTo>
+                    <a:pt x="5641234" y="14976"/>
+                  </a:lnTo>
+                  <a:lnTo>
+                    <a:pt x="5717867" y="14331"/>
+                  </a:lnTo>
+                  <a:lnTo>
+                    <a:pt x="5794499" y="13685"/>
+                  </a:lnTo>
+                  <a:lnTo>
+                    <a:pt x="5871132" y="13038"/>
+                  </a:lnTo>
+                  <a:lnTo>
+                    <a:pt x="5947764" y="12391"/>
+                  </a:lnTo>
+                  <a:lnTo>
+                    <a:pt x="6024397" y="11743"/>
+                  </a:lnTo>
+                  <a:lnTo>
+                    <a:pt x="6101029" y="11095"/>
+                  </a:lnTo>
+                  <a:lnTo>
+                    <a:pt x="6177662" y="10446"/>
+                  </a:lnTo>
+                  <a:lnTo>
+                    <a:pt x="6254294" y="9797"/>
+                  </a:lnTo>
+                  <a:lnTo>
+                    <a:pt x="6330927" y="9147"/>
+                  </a:lnTo>
+                  <a:lnTo>
+                    <a:pt x="6407560" y="8497"/>
+                  </a:lnTo>
+                  <a:lnTo>
+                    <a:pt x="6484192" y="7846"/>
+                  </a:lnTo>
+                  <a:lnTo>
+                    <a:pt x="6560825" y="7195"/>
+                  </a:lnTo>
+                  <a:lnTo>
+                    <a:pt x="6637457" y="6543"/>
+                  </a:lnTo>
+                  <a:lnTo>
+                    <a:pt x="6714090" y="5891"/>
+                  </a:lnTo>
+                  <a:lnTo>
+                    <a:pt x="6790722" y="5239"/>
+                  </a:lnTo>
+                  <a:lnTo>
+                    <a:pt x="6867355" y="4585"/>
+                  </a:lnTo>
+                  <a:lnTo>
+                    <a:pt x="6943987" y="3932"/>
+                  </a:lnTo>
+                  <a:lnTo>
+                    <a:pt x="7020620" y="3278"/>
+                  </a:lnTo>
+                  <a:lnTo>
+                    <a:pt x="7097253" y="2623"/>
+                  </a:lnTo>
+                  <a:lnTo>
+                    <a:pt x="7173885" y="1968"/>
+                  </a:lnTo>
+                  <a:lnTo>
+                    <a:pt x="7250518" y="1312"/>
+                  </a:lnTo>
+                  <a:lnTo>
+                    <a:pt x="7327150" y="656"/>
                   </a:lnTo>
                   <a:lnTo>
                     <a:pt x="7403783" y="0"/>
@@ -4587,7 +4587,7 @@
           </p:nvSpPr>
           <p:spPr>
             <a:xfrm>
-              <a:off x="817517" y="4679530"/>
+              <a:off x="817517" y="4727786"/>
               <a:ext cx="7799693" cy="0"/>
             </a:xfrm>
             <a:custGeom>
@@ -4630,15 +4630,15 @@
           </p:nvSpPr>
           <p:spPr>
             <a:xfrm>
-              <a:off x="4224261" y="1896563"/>
-              <a:ext cx="0" cy="3826579"/>
+              <a:off x="4224261" y="2073503"/>
+              <a:ext cx="0" cy="3649639"/>
             </a:xfrm>
             <a:custGeom>
               <a:avLst/>
               <a:pathLst>
-                <a:path w="0" h="3826579">
+                <a:path w="0" h="3649639">
                   <a:moveTo>
-                    <a:pt x="0" y="3826579"/>
+                    <a:pt x="0" y="3649639"/>
                   </a:moveTo>
                   <a:lnTo>
                     <a:pt x="0" y="0"/>
@@ -4673,7 +4673,7 @@
           </p:nvSpPr>
           <p:spPr>
             <a:xfrm>
-              <a:off x="692708" y="5509156"/>
+              <a:off x="692708" y="5517199"/>
               <a:ext cx="62179" cy="80101"/>
             </a:xfrm>
             <a:prstGeom prst="rect">
@@ -4719,7 +4719,7 @@
           </p:nvSpPr>
           <p:spPr>
             <a:xfrm>
-              <a:off x="692708" y="4639479"/>
+              <a:off x="692708" y="4687735"/>
               <a:ext cx="62179" cy="80101"/>
             </a:xfrm>
             <a:prstGeom prst="rect">
@@ -4765,7 +4765,7 @@
           </p:nvSpPr>
           <p:spPr>
             <a:xfrm>
-              <a:off x="692708" y="3769802"/>
+              <a:off x="692708" y="3858272"/>
               <a:ext cx="62179" cy="80101"/>
             </a:xfrm>
             <a:prstGeom prst="rect">
@@ -4811,7 +4811,7 @@
           </p:nvSpPr>
           <p:spPr>
             <a:xfrm>
-              <a:off x="692708" y="2900125"/>
+              <a:off x="692708" y="3028808"/>
               <a:ext cx="62179" cy="80101"/>
             </a:xfrm>
             <a:prstGeom prst="rect">
@@ -4857,7 +4857,7 @@
           </p:nvSpPr>
           <p:spPr>
             <a:xfrm>
-              <a:off x="692708" y="2030448"/>
+              <a:off x="692708" y="2199345"/>
               <a:ext cx="62179" cy="80101"/>
             </a:xfrm>
             <a:prstGeom prst="rect">
@@ -5133,7 +5133,7 @@
           </p:nvSpPr>
           <p:spPr>
             <a:xfrm rot="-5400000">
-              <a:off x="68446" y="3759743"/>
+              <a:off x="68446" y="3848213"/>
               <a:ext cx="1016904" cy="100218"/>
             </a:xfrm>
             <a:prstGeom prst="rect">
@@ -5174,6 +5174,52 @@
         <p:sp>
           <p:nvSpPr>
             <p:cNvPr id="38" name="tx38"/>
+            <p:cNvSpPr/>
+            <p:nvPr/>
+          </p:nvSpPr>
+          <p:spPr>
+            <a:xfrm>
+              <a:off x="817517" y="1896563"/>
+              <a:ext cx="5626211" cy="82021"/>
+            </a:xfrm>
+            <a:prstGeom prst="rect">
+              <a:avLst/>
+            </a:prstGeom>
+            <a:noFill/>
+          </p:spPr>
+          <p:txBody>
+            <a:bodyPr lIns="0" rIns="0" tIns="0" bIns="0" anchorCtr="1" anchor="ctr" wrap="none"/>
+            <a:lstStyle/>
+            <a:p>
+              <a:pPr algn="l" marL="0" marR="0" indent="0">
+                <a:lnSpc>
+                  <a:spcPts val="900"/>
+                </a:lnSpc>
+                <a:spcBef>
+                  <a:spcPts val="0"/>
+                </a:spcBef>
+                <a:spcAft>
+                  <a:spcPts val="0"/>
+                </a:spcAft>
+              </a:pPr>
+              <a:r>
+                <a:rPr sz="900">
+                  <a:solidFill>
+                    <a:srgbClr val="404040">
+                      <a:alpha val="100000"/>
+                    </a:srgbClr>
+                  </a:solidFill>
+                  <a:latin typeface="Helvetica"/>
+                  <a:cs typeface="Helvetica"/>
+                </a:rPr>
+                <a:t>subHR per 0.1 ratio decline: 0.99 (0.83-1.19)  |  per IQR decline (Δ = 0.30): 0.97 (0.57-1.68)  |  IQR: [0.85, 1.15]</a:t>
+              </a:r>
+            </a:p>
+          </p:txBody>
+        </p:sp>
+        <p:sp>
+          <p:nvSpPr>
+            <p:cNvPr id="39" name="tx39"/>
             <p:cNvSpPr/>
             <p:nvPr/>
           </p:nvSpPr>

--- a/docs/pptx/carbo/jx-carbo-linsubhr-ratio-hosp10.pptx
+++ b/docs/pptx/carbo/jx-carbo-linsubhr-ratio-hosp10.pptx
@@ -5180,7 +5180,7 @@
           <p:spPr>
             <a:xfrm>
               <a:off x="817517" y="1896563"/>
-              <a:ext cx="5626211" cy="82021"/>
+              <a:ext cx="6169365" cy="82021"/>
             </a:xfrm>
             <a:prstGeom prst="rect">
               <a:avLst/>
@@ -5212,7 +5212,7 @@
                   <a:latin typeface="Helvetica"/>
                   <a:cs typeface="Helvetica"/>
                 </a:rPr>
-                <a:t>subHR per 0.1 ratio decline: 0.99 (0.83-1.19)  |  per IQR decline (Δ = 0.30): 0.97 (0.57-1.68)  |  IQR: [0.85, 1.15]</a:t>
+                <a:t>subHR per 0.1 ratio decline: 0.99 (0.83-1.19), p = 0.924  |  per IQR decline (Δ = 0.30): 0.97 (0.57-1.68)  |  IQR: [0.85, 1.15]</a:t>
               </a:r>
             </a:p>
           </p:txBody>

--- a/docs/pptx/carbo/jx-carbo-linsubhr-ratio-hosp10.pptx
+++ b/docs/pptx/carbo/jx-carbo-linsubhr-ratio-hosp10.pptx
@@ -2443,7 +2443,7 @@
           </p:nvSpPr>
           <p:spPr>
             <a:xfrm>
-              <a:off x="1615213" y="2073503"/>
+              <a:off x="1467192" y="2073503"/>
               <a:ext cx="0" cy="3649639"/>
             </a:xfrm>
             <a:custGeom>
@@ -2486,7 +2486,7 @@
           </p:nvSpPr>
           <p:spPr>
             <a:xfrm>
-              <a:off x="3387871" y="2073503"/>
+              <a:off x="3538150" y="2073503"/>
               <a:ext cx="0" cy="3649639"/>
             </a:xfrm>
             <a:custGeom>
@@ -2529,7 +2529,7 @@
           </p:nvSpPr>
           <p:spPr>
             <a:xfrm>
-              <a:off x="5160528" y="2073503"/>
+              <a:off x="5609107" y="2073503"/>
               <a:ext cx="0" cy="3649639"/>
             </a:xfrm>
             <a:custGeom>
@@ -2572,7 +2572,7 @@
           </p:nvSpPr>
           <p:spPr>
             <a:xfrm>
-              <a:off x="6933186" y="2073503"/>
+              <a:off x="7680065" y="2073503"/>
               <a:ext cx="0" cy="3649639"/>
             </a:xfrm>
             <a:custGeom>
@@ -2830,7 +2830,7 @@
           </p:nvSpPr>
           <p:spPr>
             <a:xfrm>
-              <a:off x="2501542" y="2073503"/>
+              <a:off x="2502671" y="2073503"/>
               <a:ext cx="0" cy="3649639"/>
             </a:xfrm>
             <a:custGeom>
@@ -2873,7 +2873,7 @@
           </p:nvSpPr>
           <p:spPr>
             <a:xfrm>
-              <a:off x="4274200" y="2073503"/>
+              <a:off x="4573628" y="2073503"/>
               <a:ext cx="0" cy="3649639"/>
             </a:xfrm>
             <a:custGeom>
@@ -2916,7 +2916,7 @@
           </p:nvSpPr>
           <p:spPr>
             <a:xfrm>
-              <a:off x="6046857" y="2073503"/>
+              <a:off x="6644586" y="2073503"/>
               <a:ext cx="0" cy="3649639"/>
             </a:xfrm>
             <a:custGeom>
@@ -2953,649 +2953,618 @@
         </p:sp>
         <p:sp>
           <p:nvSpPr>
-            <p:cNvPr id="20" name="pl20"/>
+            <p:cNvPr id="20" name="pg20"/>
             <p:cNvSpPr/>
             <p:nvPr/>
           </p:nvSpPr>
           <p:spPr>
             <a:xfrm>
-              <a:off x="7819515" y="2073503"/>
-              <a:ext cx="0" cy="3649639"/>
+              <a:off x="1172049" y="3597718"/>
+              <a:ext cx="7090630" cy="1579408"/>
             </a:xfrm>
             <a:custGeom>
               <a:avLst/>
               <a:pathLst>
-                <a:path w="0" h="3649639">
+                <a:path w="7090630" h="1579408">
                   <a:moveTo>
-                    <a:pt x="0" y="3649639"/>
+                    <a:pt x="0" y="287957"/>
                   </a:moveTo>
                   <a:lnTo>
-                    <a:pt x="0" y="0"/>
-                  </a:lnTo>
-                  <a:lnTo>
-                    <a:pt x="0" y="0"/>
-                  </a:lnTo>
-                </a:path>
-              </a:pathLst>
-            </a:custGeom>
-            <a:ln w="13550" cap="flat">
-              <a:solidFill>
-                <a:srgbClr val="EBEBEB">
-                  <a:alpha val="100000"/>
-                </a:srgbClr>
-              </a:solidFill>
-              <a:prstDash val="solid"/>
-              <a:round/>
-            </a:ln>
-          </p:spPr>
-          <p:txBody>
-            <a:bodyPr/>
-            <a:lstStyle/>
-            <a:p/>
-          </p:txBody>
-        </p:sp>
-        <p:sp>
-          <p:nvSpPr>
-            <p:cNvPr id="21" name="pg21"/>
-            <p:cNvSpPr/>
-            <p:nvPr/>
-          </p:nvSpPr>
-          <p:spPr>
-            <a:xfrm>
-              <a:off x="817517" y="3597718"/>
-              <a:ext cx="7403783" cy="1579408"/>
-            </a:xfrm>
-            <a:custGeom>
-              <a:avLst/>
-              <a:pathLst>
-                <a:path w="7403783" h="1579408">
-                  <a:moveTo>
-                    <a:pt x="0" y="346525"/>
-                  </a:moveTo>
-                  <a:lnTo>
-                    <a:pt x="47058" y="361318"/>
-                  </a:lnTo>
-                  <a:lnTo>
-                    <a:pt x="123691" y="385049"/>
-                  </a:lnTo>
-                  <a:lnTo>
-                    <a:pt x="200323" y="408428"/>
-                  </a:lnTo>
-                  <a:lnTo>
-                    <a:pt x="276956" y="431459"/>
-                  </a:lnTo>
-                  <a:lnTo>
-                    <a:pt x="353588" y="454149"/>
-                  </a:lnTo>
-                  <a:lnTo>
-                    <a:pt x="430221" y="476502"/>
-                  </a:lnTo>
-                  <a:lnTo>
-                    <a:pt x="506853" y="498522"/>
-                  </a:lnTo>
-                  <a:lnTo>
-                    <a:pt x="583486" y="520216"/>
-                  </a:lnTo>
-                  <a:lnTo>
-                    <a:pt x="660118" y="541588"/>
-                  </a:lnTo>
-                  <a:lnTo>
-                    <a:pt x="736751" y="562642"/>
-                  </a:lnTo>
-                  <a:lnTo>
-                    <a:pt x="813384" y="583384"/>
-                  </a:lnTo>
-                  <a:lnTo>
-                    <a:pt x="890016" y="603818"/>
-                  </a:lnTo>
-                  <a:lnTo>
-                    <a:pt x="966649" y="623948"/>
-                  </a:lnTo>
-                  <a:lnTo>
-                    <a:pt x="1043281" y="643779"/>
-                  </a:lnTo>
-                  <a:lnTo>
-                    <a:pt x="1119914" y="663316"/>
-                  </a:lnTo>
-                  <a:lnTo>
-                    <a:pt x="1196546" y="682563"/>
-                  </a:lnTo>
-                  <a:lnTo>
-                    <a:pt x="1273179" y="701524"/>
-                  </a:lnTo>
-                  <a:lnTo>
-                    <a:pt x="1349811" y="720204"/>
-                  </a:lnTo>
-                  <a:lnTo>
-                    <a:pt x="1426444" y="738606"/>
-                  </a:lnTo>
-                  <a:lnTo>
-                    <a:pt x="1503076" y="756735"/>
-                  </a:lnTo>
-                  <a:lnTo>
-                    <a:pt x="1579709" y="774595"/>
-                  </a:lnTo>
-                  <a:lnTo>
-                    <a:pt x="1656342" y="792189"/>
-                  </a:lnTo>
-                  <a:lnTo>
-                    <a:pt x="1732974" y="809523"/>
-                  </a:lnTo>
-                  <a:lnTo>
-                    <a:pt x="1809607" y="826598"/>
-                  </a:lnTo>
-                  <a:lnTo>
-                    <a:pt x="1886239" y="843421"/>
-                  </a:lnTo>
-                  <a:lnTo>
-                    <a:pt x="1962872" y="859993"/>
-                  </a:lnTo>
-                  <a:lnTo>
-                    <a:pt x="2039504" y="876320"/>
-                  </a:lnTo>
-                  <a:lnTo>
-                    <a:pt x="2116137" y="892404"/>
-                  </a:lnTo>
-                  <a:lnTo>
-                    <a:pt x="2192769" y="908249"/>
-                  </a:lnTo>
-                  <a:lnTo>
-                    <a:pt x="2269402" y="923859"/>
-                  </a:lnTo>
-                  <a:lnTo>
-                    <a:pt x="2346034" y="939237"/>
-                  </a:lnTo>
-                  <a:lnTo>
-                    <a:pt x="2422667" y="954387"/>
-                  </a:lnTo>
-                  <a:lnTo>
-                    <a:pt x="2499300" y="969312"/>
-                  </a:lnTo>
-                  <a:lnTo>
-                    <a:pt x="2575932" y="984015"/>
-                  </a:lnTo>
-                  <a:lnTo>
-                    <a:pt x="2652565" y="998500"/>
-                  </a:lnTo>
-                  <a:lnTo>
-                    <a:pt x="2729197" y="1012770"/>
-                  </a:lnTo>
-                  <a:lnTo>
-                    <a:pt x="2805830" y="1026828"/>
-                  </a:lnTo>
-                  <a:lnTo>
-                    <a:pt x="2882462" y="1040677"/>
-                  </a:lnTo>
-                  <a:lnTo>
-                    <a:pt x="2959095" y="1054321"/>
-                  </a:lnTo>
-                  <a:lnTo>
-                    <a:pt x="3035727" y="1067762"/>
-                  </a:lnTo>
-                  <a:lnTo>
-                    <a:pt x="3112360" y="1081004"/>
-                  </a:lnTo>
-                  <a:lnTo>
-                    <a:pt x="3188993" y="1094048"/>
-                  </a:lnTo>
-                  <a:lnTo>
-                    <a:pt x="3265625" y="1106900"/>
-                  </a:lnTo>
-                  <a:lnTo>
-                    <a:pt x="3342258" y="1119560"/>
-                  </a:lnTo>
-                  <a:lnTo>
-                    <a:pt x="3418890" y="1127898"/>
-                  </a:lnTo>
-                  <a:lnTo>
-                    <a:pt x="3495523" y="1114077"/>
-                  </a:lnTo>
-                  <a:lnTo>
-                    <a:pt x="3572155" y="1100027"/>
-                  </a:lnTo>
-                  <a:lnTo>
-                    <a:pt x="3648788" y="1085743"/>
-                  </a:lnTo>
-                  <a:lnTo>
-                    <a:pt x="3725420" y="1071222"/>
-                  </a:lnTo>
-                  <a:lnTo>
-                    <a:pt x="3802053" y="1056459"/>
-                  </a:lnTo>
-                  <a:lnTo>
-                    <a:pt x="3878685" y="1041451"/>
-                  </a:lnTo>
-                  <a:lnTo>
-                    <a:pt x="3955318" y="1026194"/>
-                  </a:lnTo>
-                  <a:lnTo>
-                    <a:pt x="4031951" y="1010683"/>
-                  </a:lnTo>
-                  <a:lnTo>
-                    <a:pt x="4108583" y="994915"/>
-                  </a:lnTo>
-                  <a:lnTo>
-                    <a:pt x="4185216" y="978884"/>
-                  </a:lnTo>
-                  <a:lnTo>
-                    <a:pt x="4261848" y="962587"/>
-                  </a:lnTo>
-                  <a:lnTo>
-                    <a:pt x="4338481" y="946019"/>
-                  </a:lnTo>
-                  <a:lnTo>
-                    <a:pt x="4415113" y="929176"/>
-                  </a:lnTo>
-                  <a:lnTo>
-                    <a:pt x="4491746" y="912053"/>
-                  </a:lnTo>
-                  <a:lnTo>
-                    <a:pt x="4568378" y="894645"/>
-                  </a:lnTo>
-                  <a:lnTo>
-                    <a:pt x="4645011" y="876948"/>
-                  </a:lnTo>
-                  <a:lnTo>
-                    <a:pt x="4721644" y="858957"/>
-                  </a:lnTo>
-                  <a:lnTo>
-                    <a:pt x="4798276" y="840667"/>
-                  </a:lnTo>
-                  <a:lnTo>
-                    <a:pt x="4874909" y="822073"/>
-                  </a:lnTo>
-                  <a:lnTo>
-                    <a:pt x="4951541" y="803170"/>
-                  </a:lnTo>
-                  <a:lnTo>
-                    <a:pt x="5028174" y="783953"/>
-                  </a:lnTo>
-                  <a:lnTo>
-                    <a:pt x="5104806" y="764416"/>
-                  </a:lnTo>
-                  <a:lnTo>
-                    <a:pt x="5181439" y="744555"/>
-                  </a:lnTo>
-                  <a:lnTo>
-                    <a:pt x="5258071" y="724363"/>
-                  </a:lnTo>
-                  <a:lnTo>
-                    <a:pt x="5334704" y="703837"/>
-                  </a:lnTo>
-                  <a:lnTo>
-                    <a:pt x="5411336" y="682969"/>
-                  </a:lnTo>
-                  <a:lnTo>
-                    <a:pt x="5487969" y="661754"/>
-                  </a:lnTo>
-                  <a:lnTo>
-                    <a:pt x="5564602" y="640187"/>
-                  </a:lnTo>
-                  <a:lnTo>
-                    <a:pt x="5641234" y="618261"/>
-                  </a:lnTo>
-                  <a:lnTo>
-                    <a:pt x="5717867" y="595971"/>
-                  </a:lnTo>
-                  <a:lnTo>
-                    <a:pt x="5794499" y="573310"/>
-                  </a:lnTo>
-                  <a:lnTo>
-                    <a:pt x="5871132" y="550273"/>
-                  </a:lnTo>
-                  <a:lnTo>
-                    <a:pt x="5947764" y="526853"/>
-                  </a:lnTo>
-                  <a:lnTo>
-                    <a:pt x="6024397" y="503044"/>
-                  </a:lnTo>
-                  <a:lnTo>
-                    <a:pt x="6101029" y="478839"/>
-                  </a:lnTo>
-                  <a:lnTo>
-                    <a:pt x="6177662" y="454232"/>
-                  </a:lnTo>
-                  <a:lnTo>
-                    <a:pt x="6254294" y="429216"/>
-                  </a:lnTo>
-                  <a:lnTo>
-                    <a:pt x="6330927" y="403784"/>
-                  </a:lnTo>
-                  <a:lnTo>
-                    <a:pt x="6407560" y="377929"/>
-                  </a:lnTo>
-                  <a:lnTo>
-                    <a:pt x="6484192" y="351645"/>
-                  </a:lnTo>
-                  <a:lnTo>
-                    <a:pt x="6560825" y="324924"/>
-                  </a:lnTo>
-                  <a:lnTo>
-                    <a:pt x="6637457" y="297759"/>
-                  </a:lnTo>
-                  <a:lnTo>
-                    <a:pt x="6714090" y="270143"/>
-                  </a:lnTo>
-                  <a:lnTo>
-                    <a:pt x="6790722" y="242067"/>
-                  </a:lnTo>
-                  <a:lnTo>
-                    <a:pt x="6867355" y="213525"/>
-                  </a:lnTo>
-                  <a:lnTo>
-                    <a:pt x="6943987" y="184509"/>
-                  </a:lnTo>
-                  <a:lnTo>
-                    <a:pt x="7020620" y="155010"/>
-                  </a:lnTo>
-                  <a:lnTo>
-                    <a:pt x="7097253" y="125022"/>
-                  </a:lnTo>
-                  <a:lnTo>
-                    <a:pt x="7173885" y="94535"/>
-                  </a:lnTo>
-                  <a:lnTo>
-                    <a:pt x="7250518" y="63541"/>
-                  </a:lnTo>
-                  <a:lnTo>
-                    <a:pt x="7327150" y="32032"/>
-                  </a:lnTo>
-                  <a:lnTo>
-                    <a:pt x="7403783" y="0"/>
-                  </a:lnTo>
-                  <a:lnTo>
-                    <a:pt x="7403783" y="1579408"/>
-                  </a:lnTo>
-                  <a:lnTo>
-                    <a:pt x="7327150" y="1573679"/>
-                  </a:lnTo>
-                  <a:lnTo>
-                    <a:pt x="7250518" y="1567863"/>
-                  </a:lnTo>
-                  <a:lnTo>
-                    <a:pt x="7173885" y="1561960"/>
-                  </a:lnTo>
-                  <a:lnTo>
-                    <a:pt x="7097253" y="1555967"/>
-                  </a:lnTo>
-                  <a:lnTo>
-                    <a:pt x="7020620" y="1549885"/>
-                  </a:lnTo>
-                  <a:lnTo>
-                    <a:pt x="6943987" y="1543710"/>
-                  </a:lnTo>
-                  <a:lnTo>
-                    <a:pt x="6867355" y="1537443"/>
-                  </a:lnTo>
-                  <a:lnTo>
-                    <a:pt x="6790722" y="1531081"/>
-                  </a:lnTo>
-                  <a:lnTo>
-                    <a:pt x="6714090" y="1524623"/>
-                  </a:lnTo>
-                  <a:lnTo>
-                    <a:pt x="6637457" y="1518068"/>
-                  </a:lnTo>
-                  <a:lnTo>
-                    <a:pt x="6560825" y="1511414"/>
-                  </a:lnTo>
-                  <a:lnTo>
-                    <a:pt x="6484192" y="1504660"/>
-                  </a:lnTo>
-                  <a:lnTo>
-                    <a:pt x="6407560" y="1497804"/>
-                  </a:lnTo>
-                  <a:lnTo>
-                    <a:pt x="6330927" y="1490845"/>
-                  </a:lnTo>
-                  <a:lnTo>
-                    <a:pt x="6254294" y="1483781"/>
-                  </a:lnTo>
-                  <a:lnTo>
-                    <a:pt x="6177662" y="1476610"/>
-                  </a:lnTo>
-                  <a:lnTo>
-                    <a:pt x="6101029" y="1469331"/>
-                  </a:lnTo>
-                  <a:lnTo>
-                    <a:pt x="6024397" y="1461943"/>
-                  </a:lnTo>
-                  <a:lnTo>
-                    <a:pt x="5947764" y="1454443"/>
-                  </a:lnTo>
-                  <a:lnTo>
-                    <a:pt x="5871132" y="1446830"/>
-                  </a:lnTo>
-                  <a:lnTo>
-                    <a:pt x="5794499" y="1439103"/>
-                  </a:lnTo>
-                  <a:lnTo>
-                    <a:pt x="5717867" y="1431259"/>
-                  </a:lnTo>
-                  <a:lnTo>
-                    <a:pt x="5641234" y="1423296"/>
-                  </a:lnTo>
-                  <a:lnTo>
-                    <a:pt x="5564602" y="1415214"/>
-                  </a:lnTo>
-                  <a:lnTo>
-                    <a:pt x="5487969" y="1407010"/>
-                  </a:lnTo>
-                  <a:lnTo>
-                    <a:pt x="5411336" y="1398682"/>
-                  </a:lnTo>
-                  <a:lnTo>
-                    <a:pt x="5334704" y="1390229"/>
-                  </a:lnTo>
-                  <a:lnTo>
-                    <a:pt x="5258071" y="1381648"/>
-                  </a:lnTo>
-                  <a:lnTo>
-                    <a:pt x="5181439" y="1372938"/>
-                  </a:lnTo>
-                  <a:lnTo>
-                    <a:pt x="5104806" y="1364097"/>
-                  </a:lnTo>
-                  <a:lnTo>
-                    <a:pt x="5028174" y="1355122"/>
-                  </a:lnTo>
-                  <a:lnTo>
-                    <a:pt x="4951541" y="1346012"/>
-                  </a:lnTo>
-                  <a:lnTo>
-                    <a:pt x="4874909" y="1336765"/>
-                  </a:lnTo>
-                  <a:lnTo>
-                    <a:pt x="4798276" y="1327379"/>
-                  </a:lnTo>
-                  <a:lnTo>
-                    <a:pt x="4721644" y="1317851"/>
-                  </a:lnTo>
-                  <a:lnTo>
-                    <a:pt x="4645011" y="1308179"/>
-                  </a:lnTo>
-                  <a:lnTo>
-                    <a:pt x="4568378" y="1298362"/>
-                  </a:lnTo>
-                  <a:lnTo>
-                    <a:pt x="4491746" y="1288396"/>
-                  </a:lnTo>
-                  <a:lnTo>
-                    <a:pt x="4415113" y="1278281"/>
-                  </a:lnTo>
-                  <a:lnTo>
-                    <a:pt x="4338481" y="1268013"/>
-                  </a:lnTo>
-                  <a:lnTo>
-                    <a:pt x="4261848" y="1257590"/>
-                  </a:lnTo>
-                  <a:lnTo>
-                    <a:pt x="4185216" y="1247010"/>
-                  </a:lnTo>
-                  <a:lnTo>
-                    <a:pt x="4108583" y="1236271"/>
-                  </a:lnTo>
-                  <a:lnTo>
-                    <a:pt x="4031951" y="1225370"/>
-                  </a:lnTo>
-                  <a:lnTo>
-                    <a:pt x="3955318" y="1214304"/>
-                  </a:lnTo>
-                  <a:lnTo>
-                    <a:pt x="3878685" y="1203072"/>
-                  </a:lnTo>
-                  <a:lnTo>
-                    <a:pt x="3802053" y="1191670"/>
-                  </a:lnTo>
-                  <a:lnTo>
-                    <a:pt x="3725420" y="1180097"/>
-                  </a:lnTo>
-                  <a:lnTo>
-                    <a:pt x="3648788" y="1168349"/>
-                  </a:lnTo>
-                  <a:lnTo>
-                    <a:pt x="3572155" y="1156424"/>
-                  </a:lnTo>
-                  <a:lnTo>
-                    <a:pt x="3495523" y="1144319"/>
-                  </a:lnTo>
-                  <a:lnTo>
-                    <a:pt x="3418890" y="1132032"/>
-                  </a:lnTo>
-                  <a:lnTo>
-                    <a:pt x="3342258" y="1141493"/>
-                  </a:lnTo>
-                  <a:lnTo>
-                    <a:pt x="3265625" y="1154865"/>
-                  </a:lnTo>
-                  <a:lnTo>
-                    <a:pt x="3188993" y="1168019"/>
-                  </a:lnTo>
-                  <a:lnTo>
-                    <a:pt x="3112360" y="1180958"/>
-                  </a:lnTo>
-                  <a:lnTo>
-                    <a:pt x="3035727" y="1193685"/>
-                  </a:lnTo>
-                  <a:lnTo>
-                    <a:pt x="2959095" y="1206204"/>
-                  </a:lnTo>
-                  <a:lnTo>
-                    <a:pt x="2882462" y="1218519"/>
-                  </a:lnTo>
-                  <a:lnTo>
-                    <a:pt x="2805830" y="1230632"/>
-                  </a:lnTo>
-                  <a:lnTo>
-                    <a:pt x="2729197" y="1242548"/>
-                  </a:lnTo>
-                  <a:lnTo>
-                    <a:pt x="2652565" y="1254268"/>
-                  </a:lnTo>
-                  <a:lnTo>
-                    <a:pt x="2575932" y="1265797"/>
-                  </a:lnTo>
-                  <a:lnTo>
-                    <a:pt x="2499300" y="1277138"/>
-                  </a:lnTo>
-                  <a:lnTo>
-                    <a:pt x="2422667" y="1288293"/>
-                  </a:lnTo>
-                  <a:lnTo>
-                    <a:pt x="2346034" y="1299266"/>
-                  </a:lnTo>
-                  <a:lnTo>
-                    <a:pt x="2269402" y="1310059"/>
-                  </a:lnTo>
-                  <a:lnTo>
-                    <a:pt x="2192769" y="1320676"/>
-                  </a:lnTo>
-                  <a:lnTo>
-                    <a:pt x="2116137" y="1331119"/>
-                  </a:lnTo>
-                  <a:lnTo>
-                    <a:pt x="2039504" y="1341392"/>
-                  </a:lnTo>
-                  <a:lnTo>
-                    <a:pt x="1962872" y="1351497"/>
-                  </a:lnTo>
-                  <a:lnTo>
-                    <a:pt x="1886239" y="1361436"/>
-                  </a:lnTo>
-                  <a:lnTo>
-                    <a:pt x="1809607" y="1371213"/>
-                  </a:lnTo>
-                  <a:lnTo>
-                    <a:pt x="1732974" y="1380830"/>
-                  </a:lnTo>
-                  <a:lnTo>
-                    <a:pt x="1656342" y="1390290"/>
-                  </a:lnTo>
-                  <a:lnTo>
-                    <a:pt x="1579709" y="1399596"/>
-                  </a:lnTo>
-                  <a:lnTo>
-                    <a:pt x="1503076" y="1408749"/>
-                  </a:lnTo>
-                  <a:lnTo>
-                    <a:pt x="1426444" y="1417753"/>
-                  </a:lnTo>
-                  <a:lnTo>
-                    <a:pt x="1349811" y="1426609"/>
-                  </a:lnTo>
-                  <a:lnTo>
-                    <a:pt x="1273179" y="1435321"/>
-                  </a:lnTo>
-                  <a:lnTo>
-                    <a:pt x="1196546" y="1443890"/>
-                  </a:lnTo>
-                  <a:lnTo>
-                    <a:pt x="1119914" y="1452319"/>
-                  </a:lnTo>
-                  <a:lnTo>
-                    <a:pt x="1043281" y="1460611"/>
-                  </a:lnTo>
-                  <a:lnTo>
-                    <a:pt x="966649" y="1468767"/>
-                  </a:lnTo>
-                  <a:lnTo>
-                    <a:pt x="890016" y="1476789"/>
-                  </a:lnTo>
-                  <a:lnTo>
-                    <a:pt x="813384" y="1484681"/>
-                  </a:lnTo>
-                  <a:lnTo>
-                    <a:pt x="736751" y="1492443"/>
-                  </a:lnTo>
-                  <a:lnTo>
-                    <a:pt x="660118" y="1500078"/>
-                  </a:lnTo>
-                  <a:lnTo>
-                    <a:pt x="583486" y="1507589"/>
-                  </a:lnTo>
-                  <a:lnTo>
-                    <a:pt x="506853" y="1514977"/>
-                  </a:lnTo>
-                  <a:lnTo>
-                    <a:pt x="430221" y="1522244"/>
-                  </a:lnTo>
-                  <a:lnTo>
-                    <a:pt x="353588" y="1529392"/>
-                  </a:lnTo>
-                  <a:lnTo>
-                    <a:pt x="276956" y="1536424"/>
-                  </a:lnTo>
-                  <a:lnTo>
-                    <a:pt x="200323" y="1543341"/>
-                  </a:lnTo>
-                  <a:lnTo>
-                    <a:pt x="123691" y="1550144"/>
-                  </a:lnTo>
-                  <a:lnTo>
-                    <a:pt x="47058" y="1556836"/>
-                  </a:lnTo>
-                  <a:lnTo>
-                    <a:pt x="0" y="1560879"/>
+                    <a:pt x="71622" y="312777"/>
+                  </a:lnTo>
+                  <a:lnTo>
+                    <a:pt x="143245" y="337229"/>
+                  </a:lnTo>
+                  <a:lnTo>
+                    <a:pt x="214867" y="361318"/>
+                  </a:lnTo>
+                  <a:lnTo>
+                    <a:pt x="286490" y="385049"/>
+                  </a:lnTo>
+                  <a:lnTo>
+                    <a:pt x="358112" y="408428"/>
+                  </a:lnTo>
+                  <a:lnTo>
+                    <a:pt x="429735" y="431459"/>
+                  </a:lnTo>
+                  <a:lnTo>
+                    <a:pt x="501357" y="454149"/>
+                  </a:lnTo>
+                  <a:lnTo>
+                    <a:pt x="572980" y="476502"/>
+                  </a:lnTo>
+                  <a:lnTo>
+                    <a:pt x="644602" y="498522"/>
+                  </a:lnTo>
+                  <a:lnTo>
+                    <a:pt x="716225" y="520216"/>
+                  </a:lnTo>
+                  <a:lnTo>
+                    <a:pt x="787847" y="541588"/>
+                  </a:lnTo>
+                  <a:lnTo>
+                    <a:pt x="859470" y="562642"/>
+                  </a:lnTo>
+                  <a:lnTo>
+                    <a:pt x="931092" y="583384"/>
+                  </a:lnTo>
+                  <a:lnTo>
+                    <a:pt x="1002715" y="603818"/>
+                  </a:lnTo>
+                  <a:lnTo>
+                    <a:pt x="1074337" y="623948"/>
+                  </a:lnTo>
+                  <a:lnTo>
+                    <a:pt x="1145960" y="643779"/>
+                  </a:lnTo>
+                  <a:lnTo>
+                    <a:pt x="1217582" y="663316"/>
+                  </a:lnTo>
+                  <a:lnTo>
+                    <a:pt x="1289205" y="682563"/>
+                  </a:lnTo>
+                  <a:lnTo>
+                    <a:pt x="1360827" y="701524"/>
+                  </a:lnTo>
+                  <a:lnTo>
+                    <a:pt x="1432450" y="720204"/>
+                  </a:lnTo>
+                  <a:lnTo>
+                    <a:pt x="1504073" y="738606"/>
+                  </a:lnTo>
+                  <a:lnTo>
+                    <a:pt x="1575695" y="756735"/>
+                  </a:lnTo>
+                  <a:lnTo>
+                    <a:pt x="1647318" y="774595"/>
+                  </a:lnTo>
+                  <a:lnTo>
+                    <a:pt x="1718940" y="792189"/>
+                  </a:lnTo>
+                  <a:lnTo>
+                    <a:pt x="1790563" y="809523"/>
+                  </a:lnTo>
+                  <a:lnTo>
+                    <a:pt x="1862185" y="826598"/>
+                  </a:lnTo>
+                  <a:lnTo>
+                    <a:pt x="1933808" y="843421"/>
+                  </a:lnTo>
+                  <a:lnTo>
+                    <a:pt x="2005430" y="859993"/>
+                  </a:lnTo>
+                  <a:lnTo>
+                    <a:pt x="2077053" y="876320"/>
+                  </a:lnTo>
+                  <a:lnTo>
+                    <a:pt x="2148675" y="892404"/>
+                  </a:lnTo>
+                  <a:lnTo>
+                    <a:pt x="2220298" y="908249"/>
+                  </a:lnTo>
+                  <a:lnTo>
+                    <a:pt x="2291920" y="923859"/>
+                  </a:lnTo>
+                  <a:lnTo>
+                    <a:pt x="2363543" y="939237"/>
+                  </a:lnTo>
+                  <a:lnTo>
+                    <a:pt x="2435165" y="954387"/>
+                  </a:lnTo>
+                  <a:lnTo>
+                    <a:pt x="2506788" y="969312"/>
+                  </a:lnTo>
+                  <a:lnTo>
+                    <a:pt x="2578410" y="984015"/>
+                  </a:lnTo>
+                  <a:lnTo>
+                    <a:pt x="2650033" y="998500"/>
+                  </a:lnTo>
+                  <a:lnTo>
+                    <a:pt x="2721655" y="1012770"/>
+                  </a:lnTo>
+                  <a:lnTo>
+                    <a:pt x="2793278" y="1026828"/>
+                  </a:lnTo>
+                  <a:lnTo>
+                    <a:pt x="2864901" y="1040677"/>
+                  </a:lnTo>
+                  <a:lnTo>
+                    <a:pt x="2936523" y="1054321"/>
+                  </a:lnTo>
+                  <a:lnTo>
+                    <a:pt x="3008146" y="1067762"/>
+                  </a:lnTo>
+                  <a:lnTo>
+                    <a:pt x="3079768" y="1081004"/>
+                  </a:lnTo>
+                  <a:lnTo>
+                    <a:pt x="3151391" y="1094048"/>
+                  </a:lnTo>
+                  <a:lnTo>
+                    <a:pt x="3223013" y="1106900"/>
+                  </a:lnTo>
+                  <a:lnTo>
+                    <a:pt x="3294636" y="1119560"/>
+                  </a:lnTo>
+                  <a:lnTo>
+                    <a:pt x="3366258" y="1127898"/>
+                  </a:lnTo>
+                  <a:lnTo>
+                    <a:pt x="3437881" y="1114077"/>
+                  </a:lnTo>
+                  <a:lnTo>
+                    <a:pt x="3509503" y="1100027"/>
+                  </a:lnTo>
+                  <a:lnTo>
+                    <a:pt x="3581126" y="1085743"/>
+                  </a:lnTo>
+                  <a:lnTo>
+                    <a:pt x="3652748" y="1071222"/>
+                  </a:lnTo>
+                  <a:lnTo>
+                    <a:pt x="3724371" y="1056459"/>
+                  </a:lnTo>
+                  <a:lnTo>
+                    <a:pt x="3795993" y="1041451"/>
+                  </a:lnTo>
+                  <a:lnTo>
+                    <a:pt x="3867616" y="1026194"/>
+                  </a:lnTo>
+                  <a:lnTo>
+                    <a:pt x="3939238" y="1010683"/>
+                  </a:lnTo>
+                  <a:lnTo>
+                    <a:pt x="4010861" y="994915"/>
+                  </a:lnTo>
+                  <a:lnTo>
+                    <a:pt x="4082483" y="978884"/>
+                  </a:lnTo>
+                  <a:lnTo>
+                    <a:pt x="4154106" y="962587"/>
+                  </a:lnTo>
+                  <a:lnTo>
+                    <a:pt x="4225729" y="946019"/>
+                  </a:lnTo>
+                  <a:lnTo>
+                    <a:pt x="4297351" y="929176"/>
+                  </a:lnTo>
+                  <a:lnTo>
+                    <a:pt x="4368974" y="912053"/>
+                  </a:lnTo>
+                  <a:lnTo>
+                    <a:pt x="4440596" y="894645"/>
+                  </a:lnTo>
+                  <a:lnTo>
+                    <a:pt x="4512219" y="876948"/>
+                  </a:lnTo>
+                  <a:lnTo>
+                    <a:pt x="4583841" y="858957"/>
+                  </a:lnTo>
+                  <a:lnTo>
+                    <a:pt x="4655464" y="840667"/>
+                  </a:lnTo>
+                  <a:lnTo>
+                    <a:pt x="4727086" y="822073"/>
+                  </a:lnTo>
+                  <a:lnTo>
+                    <a:pt x="4798709" y="803170"/>
+                  </a:lnTo>
+                  <a:lnTo>
+                    <a:pt x="4870331" y="783953"/>
+                  </a:lnTo>
+                  <a:lnTo>
+                    <a:pt x="4941954" y="764416"/>
+                  </a:lnTo>
+                  <a:lnTo>
+                    <a:pt x="5013576" y="744555"/>
+                  </a:lnTo>
+                  <a:lnTo>
+                    <a:pt x="5085199" y="724363"/>
+                  </a:lnTo>
+                  <a:lnTo>
+                    <a:pt x="5156821" y="703837"/>
+                  </a:lnTo>
+                  <a:lnTo>
+                    <a:pt x="5228444" y="682969"/>
+                  </a:lnTo>
+                  <a:lnTo>
+                    <a:pt x="5300066" y="661754"/>
+                  </a:lnTo>
+                  <a:lnTo>
+                    <a:pt x="5371689" y="640187"/>
+                  </a:lnTo>
+                  <a:lnTo>
+                    <a:pt x="5443311" y="618261"/>
+                  </a:lnTo>
+                  <a:lnTo>
+                    <a:pt x="5514934" y="595971"/>
+                  </a:lnTo>
+                  <a:lnTo>
+                    <a:pt x="5586557" y="573310"/>
+                  </a:lnTo>
+                  <a:lnTo>
+                    <a:pt x="5658179" y="550273"/>
+                  </a:lnTo>
+                  <a:lnTo>
+                    <a:pt x="5729802" y="526853"/>
+                  </a:lnTo>
+                  <a:lnTo>
+                    <a:pt x="5801424" y="503044"/>
+                  </a:lnTo>
+                  <a:lnTo>
+                    <a:pt x="5873047" y="478839"/>
+                  </a:lnTo>
+                  <a:lnTo>
+                    <a:pt x="5944669" y="454232"/>
+                  </a:lnTo>
+                  <a:lnTo>
+                    <a:pt x="6016292" y="429216"/>
+                  </a:lnTo>
+                  <a:lnTo>
+                    <a:pt x="6087914" y="403784"/>
+                  </a:lnTo>
+                  <a:lnTo>
+                    <a:pt x="6159537" y="377929"/>
+                  </a:lnTo>
+                  <a:lnTo>
+                    <a:pt x="6231159" y="351645"/>
+                  </a:lnTo>
+                  <a:lnTo>
+                    <a:pt x="6302782" y="324924"/>
+                  </a:lnTo>
+                  <a:lnTo>
+                    <a:pt x="6374404" y="297759"/>
+                  </a:lnTo>
+                  <a:lnTo>
+                    <a:pt x="6446027" y="270143"/>
+                  </a:lnTo>
+                  <a:lnTo>
+                    <a:pt x="6517649" y="242067"/>
+                  </a:lnTo>
+                  <a:lnTo>
+                    <a:pt x="6589272" y="213525"/>
+                  </a:lnTo>
+                  <a:lnTo>
+                    <a:pt x="6660894" y="184509"/>
+                  </a:lnTo>
+                  <a:lnTo>
+                    <a:pt x="6732517" y="155010"/>
+                  </a:lnTo>
+                  <a:lnTo>
+                    <a:pt x="6804139" y="125022"/>
+                  </a:lnTo>
+                  <a:lnTo>
+                    <a:pt x="6875762" y="94535"/>
+                  </a:lnTo>
+                  <a:lnTo>
+                    <a:pt x="6947385" y="63541"/>
+                  </a:lnTo>
+                  <a:lnTo>
+                    <a:pt x="7019007" y="32032"/>
+                  </a:lnTo>
+                  <a:lnTo>
+                    <a:pt x="7090630" y="0"/>
+                  </a:lnTo>
+                  <a:lnTo>
+                    <a:pt x="7090630" y="1579408"/>
+                  </a:lnTo>
+                  <a:lnTo>
+                    <a:pt x="7019007" y="1573679"/>
+                  </a:lnTo>
+                  <a:lnTo>
+                    <a:pt x="6947385" y="1567863"/>
+                  </a:lnTo>
+                  <a:lnTo>
+                    <a:pt x="6875762" y="1561960"/>
+                  </a:lnTo>
+                  <a:lnTo>
+                    <a:pt x="6804139" y="1555967"/>
+                  </a:lnTo>
+                  <a:lnTo>
+                    <a:pt x="6732517" y="1549885"/>
+                  </a:lnTo>
+                  <a:lnTo>
+                    <a:pt x="6660894" y="1543710"/>
+                  </a:lnTo>
+                  <a:lnTo>
+                    <a:pt x="6589272" y="1537443"/>
+                  </a:lnTo>
+                  <a:lnTo>
+                    <a:pt x="6517649" y="1531081"/>
+                  </a:lnTo>
+                  <a:lnTo>
+                    <a:pt x="6446027" y="1524623"/>
+                  </a:lnTo>
+                  <a:lnTo>
+                    <a:pt x="6374404" y="1518068"/>
+                  </a:lnTo>
+                  <a:lnTo>
+                    <a:pt x="6302782" y="1511414"/>
+                  </a:lnTo>
+                  <a:lnTo>
+                    <a:pt x="6231159" y="1504660"/>
+                  </a:lnTo>
+                  <a:lnTo>
+                    <a:pt x="6159537" y="1497804"/>
+                  </a:lnTo>
+                  <a:lnTo>
+                    <a:pt x="6087914" y="1490845"/>
+                  </a:lnTo>
+                  <a:lnTo>
+                    <a:pt x="6016292" y="1483781"/>
+                  </a:lnTo>
+                  <a:lnTo>
+                    <a:pt x="5944669" y="1476610"/>
+                  </a:lnTo>
+                  <a:lnTo>
+                    <a:pt x="5873047" y="1469331"/>
+                  </a:lnTo>
+                  <a:lnTo>
+                    <a:pt x="5801424" y="1461943"/>
+                  </a:lnTo>
+                  <a:lnTo>
+                    <a:pt x="5729802" y="1454443"/>
+                  </a:lnTo>
+                  <a:lnTo>
+                    <a:pt x="5658179" y="1446830"/>
+                  </a:lnTo>
+                  <a:lnTo>
+                    <a:pt x="5586557" y="1439103"/>
+                  </a:lnTo>
+                  <a:lnTo>
+                    <a:pt x="5514934" y="1431259"/>
+                  </a:lnTo>
+                  <a:lnTo>
+                    <a:pt x="5443311" y="1423296"/>
+                  </a:lnTo>
+                  <a:lnTo>
+                    <a:pt x="5371689" y="1415214"/>
+                  </a:lnTo>
+                  <a:lnTo>
+                    <a:pt x="5300066" y="1407010"/>
+                  </a:lnTo>
+                  <a:lnTo>
+                    <a:pt x="5228444" y="1398682"/>
+                  </a:lnTo>
+                  <a:lnTo>
+                    <a:pt x="5156821" y="1390229"/>
+                  </a:lnTo>
+                  <a:lnTo>
+                    <a:pt x="5085199" y="1381648"/>
+                  </a:lnTo>
+                  <a:lnTo>
+                    <a:pt x="5013576" y="1372938"/>
+                  </a:lnTo>
+                  <a:lnTo>
+                    <a:pt x="4941954" y="1364097"/>
+                  </a:lnTo>
+                  <a:lnTo>
+                    <a:pt x="4870331" y="1355122"/>
+                  </a:lnTo>
+                  <a:lnTo>
+                    <a:pt x="4798709" y="1346012"/>
+                  </a:lnTo>
+                  <a:lnTo>
+                    <a:pt x="4727086" y="1336765"/>
+                  </a:lnTo>
+                  <a:lnTo>
+                    <a:pt x="4655464" y="1327379"/>
+                  </a:lnTo>
+                  <a:lnTo>
+                    <a:pt x="4583841" y="1317851"/>
+                  </a:lnTo>
+                  <a:lnTo>
+                    <a:pt x="4512219" y="1308179"/>
+                  </a:lnTo>
+                  <a:lnTo>
+                    <a:pt x="4440596" y="1298362"/>
+                  </a:lnTo>
+                  <a:lnTo>
+                    <a:pt x="4368974" y="1288396"/>
+                  </a:lnTo>
+                  <a:lnTo>
+                    <a:pt x="4297351" y="1278281"/>
+                  </a:lnTo>
+                  <a:lnTo>
+                    <a:pt x="4225729" y="1268013"/>
+                  </a:lnTo>
+                  <a:lnTo>
+                    <a:pt x="4154106" y="1257590"/>
+                  </a:lnTo>
+                  <a:lnTo>
+                    <a:pt x="4082483" y="1247010"/>
+                  </a:lnTo>
+                  <a:lnTo>
+                    <a:pt x="4010861" y="1236271"/>
+                  </a:lnTo>
+                  <a:lnTo>
+                    <a:pt x="3939238" y="1225370"/>
+                  </a:lnTo>
+                  <a:lnTo>
+                    <a:pt x="3867616" y="1214304"/>
+                  </a:lnTo>
+                  <a:lnTo>
+                    <a:pt x="3795993" y="1203072"/>
+                  </a:lnTo>
+                  <a:lnTo>
+                    <a:pt x="3724371" y="1191670"/>
+                  </a:lnTo>
+                  <a:lnTo>
+                    <a:pt x="3652748" y="1180097"/>
+                  </a:lnTo>
+                  <a:lnTo>
+                    <a:pt x="3581126" y="1168349"/>
+                  </a:lnTo>
+                  <a:lnTo>
+                    <a:pt x="3509503" y="1156424"/>
+                  </a:lnTo>
+                  <a:lnTo>
+                    <a:pt x="3437881" y="1144319"/>
+                  </a:lnTo>
+                  <a:lnTo>
+                    <a:pt x="3366258" y="1132032"/>
+                  </a:lnTo>
+                  <a:lnTo>
+                    <a:pt x="3294636" y="1141493"/>
+                  </a:lnTo>
+                  <a:lnTo>
+                    <a:pt x="3223013" y="1154865"/>
+                  </a:lnTo>
+                  <a:lnTo>
+                    <a:pt x="3151391" y="1168019"/>
+                  </a:lnTo>
+                  <a:lnTo>
+                    <a:pt x="3079768" y="1180958"/>
+                  </a:lnTo>
+                  <a:lnTo>
+                    <a:pt x="3008146" y="1193685"/>
+                  </a:lnTo>
+                  <a:lnTo>
+                    <a:pt x="2936523" y="1206204"/>
+                  </a:lnTo>
+                  <a:lnTo>
+                    <a:pt x="2864901" y="1218519"/>
+                  </a:lnTo>
+                  <a:lnTo>
+                    <a:pt x="2793278" y="1230632"/>
+                  </a:lnTo>
+                  <a:lnTo>
+                    <a:pt x="2721655" y="1242548"/>
+                  </a:lnTo>
+                  <a:lnTo>
+                    <a:pt x="2650033" y="1254268"/>
+                  </a:lnTo>
+                  <a:lnTo>
+                    <a:pt x="2578410" y="1265797"/>
+                  </a:lnTo>
+                  <a:lnTo>
+                    <a:pt x="2506788" y="1277138"/>
+                  </a:lnTo>
+                  <a:lnTo>
+                    <a:pt x="2435165" y="1288293"/>
+                  </a:lnTo>
+                  <a:lnTo>
+                    <a:pt x="2363543" y="1299266"/>
+                  </a:lnTo>
+                  <a:lnTo>
+                    <a:pt x="2291920" y="1310059"/>
+                  </a:lnTo>
+                  <a:lnTo>
+                    <a:pt x="2220298" y="1320676"/>
+                  </a:lnTo>
+                  <a:lnTo>
+                    <a:pt x="2148675" y="1331119"/>
+                  </a:lnTo>
+                  <a:lnTo>
+                    <a:pt x="2077053" y="1341392"/>
+                  </a:lnTo>
+                  <a:lnTo>
+                    <a:pt x="2005430" y="1351497"/>
+                  </a:lnTo>
+                  <a:lnTo>
+                    <a:pt x="1933808" y="1361436"/>
+                  </a:lnTo>
+                  <a:lnTo>
+                    <a:pt x="1862185" y="1371213"/>
+                  </a:lnTo>
+                  <a:lnTo>
+                    <a:pt x="1790563" y="1380830"/>
+                  </a:lnTo>
+                  <a:lnTo>
+                    <a:pt x="1718940" y="1390290"/>
+                  </a:lnTo>
+                  <a:lnTo>
+                    <a:pt x="1647318" y="1399596"/>
+                  </a:lnTo>
+                  <a:lnTo>
+                    <a:pt x="1575695" y="1408749"/>
+                  </a:lnTo>
+                  <a:lnTo>
+                    <a:pt x="1504073" y="1417753"/>
+                  </a:lnTo>
+                  <a:lnTo>
+                    <a:pt x="1432450" y="1426609"/>
+                  </a:lnTo>
+                  <a:lnTo>
+                    <a:pt x="1360827" y="1435321"/>
+                  </a:lnTo>
+                  <a:lnTo>
+                    <a:pt x="1289205" y="1443890"/>
+                  </a:lnTo>
+                  <a:lnTo>
+                    <a:pt x="1217582" y="1452319"/>
+                  </a:lnTo>
+                  <a:lnTo>
+                    <a:pt x="1145960" y="1460611"/>
+                  </a:lnTo>
+                  <a:lnTo>
+                    <a:pt x="1074337" y="1468767"/>
+                  </a:lnTo>
+                  <a:lnTo>
+                    <a:pt x="1002715" y="1476789"/>
+                  </a:lnTo>
+                  <a:lnTo>
+                    <a:pt x="931092" y="1484681"/>
+                  </a:lnTo>
+                  <a:lnTo>
+                    <a:pt x="859470" y="1492443"/>
+                  </a:lnTo>
+                  <a:lnTo>
+                    <a:pt x="787847" y="1500078"/>
+                  </a:lnTo>
+                  <a:lnTo>
+                    <a:pt x="716225" y="1507589"/>
+                  </a:lnTo>
+                  <a:lnTo>
+                    <a:pt x="644602" y="1514977"/>
+                  </a:lnTo>
+                  <a:lnTo>
+                    <a:pt x="572980" y="1522244"/>
+                  </a:lnTo>
+                  <a:lnTo>
+                    <a:pt x="501357" y="1529392"/>
+                  </a:lnTo>
+                  <a:lnTo>
+                    <a:pt x="429735" y="1536424"/>
+                  </a:lnTo>
+                  <a:lnTo>
+                    <a:pt x="358112" y="1543341"/>
+                  </a:lnTo>
+                  <a:lnTo>
+                    <a:pt x="286490" y="1550144"/>
+                  </a:lnTo>
+                  <a:lnTo>
+                    <a:pt x="214867" y="1556836"/>
+                  </a:lnTo>
+                  <a:lnTo>
+                    <a:pt x="143245" y="1563419"/>
+                  </a:lnTo>
+                  <a:lnTo>
+                    <a:pt x="71622" y="1569894"/>
+                  </a:lnTo>
+                  <a:lnTo>
+                    <a:pt x="0" y="1576264"/>
                   </a:lnTo>
                   <a:close/>
                 </a:path>
@@ -3615,312 +3584,643 @@
         </p:sp>
         <p:sp>
           <p:nvSpPr>
+            <p:cNvPr id="21" name="pl21"/>
+            <p:cNvSpPr/>
+            <p:nvPr/>
+          </p:nvSpPr>
+          <p:spPr>
+            <a:xfrm>
+              <a:off x="1172049" y="3597718"/>
+              <a:ext cx="7090630" cy="1127898"/>
+            </a:xfrm>
+            <a:custGeom>
+              <a:avLst/>
+              <a:pathLst>
+                <a:path w="7090630" h="1127898">
+                  <a:moveTo>
+                    <a:pt x="0" y="287957"/>
+                  </a:moveTo>
+                  <a:lnTo>
+                    <a:pt x="71622" y="312777"/>
+                  </a:lnTo>
+                  <a:lnTo>
+                    <a:pt x="143245" y="337229"/>
+                  </a:lnTo>
+                  <a:lnTo>
+                    <a:pt x="214867" y="361318"/>
+                  </a:lnTo>
+                  <a:lnTo>
+                    <a:pt x="286490" y="385049"/>
+                  </a:lnTo>
+                  <a:lnTo>
+                    <a:pt x="358112" y="408428"/>
+                  </a:lnTo>
+                  <a:lnTo>
+                    <a:pt x="429735" y="431459"/>
+                  </a:lnTo>
+                  <a:lnTo>
+                    <a:pt x="501357" y="454149"/>
+                  </a:lnTo>
+                  <a:lnTo>
+                    <a:pt x="572980" y="476502"/>
+                  </a:lnTo>
+                  <a:lnTo>
+                    <a:pt x="644602" y="498522"/>
+                  </a:lnTo>
+                  <a:lnTo>
+                    <a:pt x="716225" y="520216"/>
+                  </a:lnTo>
+                  <a:lnTo>
+                    <a:pt x="787847" y="541588"/>
+                  </a:lnTo>
+                  <a:lnTo>
+                    <a:pt x="859470" y="562642"/>
+                  </a:lnTo>
+                  <a:lnTo>
+                    <a:pt x="931092" y="583384"/>
+                  </a:lnTo>
+                  <a:lnTo>
+                    <a:pt x="1002715" y="603818"/>
+                  </a:lnTo>
+                  <a:lnTo>
+                    <a:pt x="1074337" y="623948"/>
+                  </a:lnTo>
+                  <a:lnTo>
+                    <a:pt x="1145960" y="643779"/>
+                  </a:lnTo>
+                  <a:lnTo>
+                    <a:pt x="1217582" y="663316"/>
+                  </a:lnTo>
+                  <a:lnTo>
+                    <a:pt x="1289205" y="682563"/>
+                  </a:lnTo>
+                  <a:lnTo>
+                    <a:pt x="1360827" y="701524"/>
+                  </a:lnTo>
+                  <a:lnTo>
+                    <a:pt x="1432450" y="720204"/>
+                  </a:lnTo>
+                  <a:lnTo>
+                    <a:pt x="1504073" y="738606"/>
+                  </a:lnTo>
+                  <a:lnTo>
+                    <a:pt x="1575695" y="756735"/>
+                  </a:lnTo>
+                  <a:lnTo>
+                    <a:pt x="1647318" y="774595"/>
+                  </a:lnTo>
+                  <a:lnTo>
+                    <a:pt x="1718940" y="792189"/>
+                  </a:lnTo>
+                  <a:lnTo>
+                    <a:pt x="1790563" y="809523"/>
+                  </a:lnTo>
+                  <a:lnTo>
+                    <a:pt x="1862185" y="826598"/>
+                  </a:lnTo>
+                  <a:lnTo>
+                    <a:pt x="1933808" y="843421"/>
+                  </a:lnTo>
+                  <a:lnTo>
+                    <a:pt x="2005430" y="859993"/>
+                  </a:lnTo>
+                  <a:lnTo>
+                    <a:pt x="2077053" y="876320"/>
+                  </a:lnTo>
+                  <a:lnTo>
+                    <a:pt x="2148675" y="892404"/>
+                  </a:lnTo>
+                  <a:lnTo>
+                    <a:pt x="2220298" y="908249"/>
+                  </a:lnTo>
+                  <a:lnTo>
+                    <a:pt x="2291920" y="923859"/>
+                  </a:lnTo>
+                  <a:lnTo>
+                    <a:pt x="2363543" y="939237"/>
+                  </a:lnTo>
+                  <a:lnTo>
+                    <a:pt x="2435165" y="954387"/>
+                  </a:lnTo>
+                  <a:lnTo>
+                    <a:pt x="2506788" y="969312"/>
+                  </a:lnTo>
+                  <a:lnTo>
+                    <a:pt x="2578410" y="984015"/>
+                  </a:lnTo>
+                  <a:lnTo>
+                    <a:pt x="2650033" y="998500"/>
+                  </a:lnTo>
+                  <a:lnTo>
+                    <a:pt x="2721655" y="1012770"/>
+                  </a:lnTo>
+                  <a:lnTo>
+                    <a:pt x="2793278" y="1026828"/>
+                  </a:lnTo>
+                  <a:lnTo>
+                    <a:pt x="2864901" y="1040677"/>
+                  </a:lnTo>
+                  <a:lnTo>
+                    <a:pt x="2936523" y="1054321"/>
+                  </a:lnTo>
+                  <a:lnTo>
+                    <a:pt x="3008146" y="1067762"/>
+                  </a:lnTo>
+                  <a:lnTo>
+                    <a:pt x="3079768" y="1081004"/>
+                  </a:lnTo>
+                  <a:lnTo>
+                    <a:pt x="3151391" y="1094048"/>
+                  </a:lnTo>
+                  <a:lnTo>
+                    <a:pt x="3223013" y="1106900"/>
+                  </a:lnTo>
+                  <a:lnTo>
+                    <a:pt x="3294636" y="1119560"/>
+                  </a:lnTo>
+                  <a:lnTo>
+                    <a:pt x="3366258" y="1127898"/>
+                  </a:lnTo>
+                  <a:lnTo>
+                    <a:pt x="3437881" y="1114077"/>
+                  </a:lnTo>
+                  <a:lnTo>
+                    <a:pt x="3509503" y="1100027"/>
+                  </a:lnTo>
+                  <a:lnTo>
+                    <a:pt x="3581126" y="1085743"/>
+                  </a:lnTo>
+                  <a:lnTo>
+                    <a:pt x="3652748" y="1071222"/>
+                  </a:lnTo>
+                  <a:lnTo>
+                    <a:pt x="3724371" y="1056459"/>
+                  </a:lnTo>
+                  <a:lnTo>
+                    <a:pt x="3795993" y="1041451"/>
+                  </a:lnTo>
+                  <a:lnTo>
+                    <a:pt x="3867616" y="1026194"/>
+                  </a:lnTo>
+                  <a:lnTo>
+                    <a:pt x="3939238" y="1010683"/>
+                  </a:lnTo>
+                  <a:lnTo>
+                    <a:pt x="4010861" y="994915"/>
+                  </a:lnTo>
+                  <a:lnTo>
+                    <a:pt x="4082483" y="978884"/>
+                  </a:lnTo>
+                  <a:lnTo>
+                    <a:pt x="4154106" y="962587"/>
+                  </a:lnTo>
+                  <a:lnTo>
+                    <a:pt x="4225729" y="946019"/>
+                  </a:lnTo>
+                  <a:lnTo>
+                    <a:pt x="4297351" y="929176"/>
+                  </a:lnTo>
+                  <a:lnTo>
+                    <a:pt x="4368974" y="912053"/>
+                  </a:lnTo>
+                  <a:lnTo>
+                    <a:pt x="4440596" y="894645"/>
+                  </a:lnTo>
+                  <a:lnTo>
+                    <a:pt x="4512219" y="876948"/>
+                  </a:lnTo>
+                  <a:lnTo>
+                    <a:pt x="4583841" y="858957"/>
+                  </a:lnTo>
+                  <a:lnTo>
+                    <a:pt x="4655464" y="840667"/>
+                  </a:lnTo>
+                  <a:lnTo>
+                    <a:pt x="4727086" y="822073"/>
+                  </a:lnTo>
+                  <a:lnTo>
+                    <a:pt x="4798709" y="803170"/>
+                  </a:lnTo>
+                  <a:lnTo>
+                    <a:pt x="4870331" y="783953"/>
+                  </a:lnTo>
+                  <a:lnTo>
+                    <a:pt x="4941954" y="764416"/>
+                  </a:lnTo>
+                  <a:lnTo>
+                    <a:pt x="5013576" y="744555"/>
+                  </a:lnTo>
+                  <a:lnTo>
+                    <a:pt x="5085199" y="724363"/>
+                  </a:lnTo>
+                  <a:lnTo>
+                    <a:pt x="5156821" y="703837"/>
+                  </a:lnTo>
+                  <a:lnTo>
+                    <a:pt x="5228444" y="682969"/>
+                  </a:lnTo>
+                  <a:lnTo>
+                    <a:pt x="5300066" y="661754"/>
+                  </a:lnTo>
+                  <a:lnTo>
+                    <a:pt x="5371689" y="640187"/>
+                  </a:lnTo>
+                  <a:lnTo>
+                    <a:pt x="5443311" y="618261"/>
+                  </a:lnTo>
+                  <a:lnTo>
+                    <a:pt x="5514934" y="595971"/>
+                  </a:lnTo>
+                  <a:lnTo>
+                    <a:pt x="5586557" y="573310"/>
+                  </a:lnTo>
+                  <a:lnTo>
+                    <a:pt x="5658179" y="550273"/>
+                  </a:lnTo>
+                  <a:lnTo>
+                    <a:pt x="5729802" y="526853"/>
+                  </a:lnTo>
+                  <a:lnTo>
+                    <a:pt x="5801424" y="503044"/>
+                  </a:lnTo>
+                  <a:lnTo>
+                    <a:pt x="5873047" y="478839"/>
+                  </a:lnTo>
+                  <a:lnTo>
+                    <a:pt x="5944669" y="454232"/>
+                  </a:lnTo>
+                  <a:lnTo>
+                    <a:pt x="6016292" y="429216"/>
+                  </a:lnTo>
+                  <a:lnTo>
+                    <a:pt x="6087914" y="403784"/>
+                  </a:lnTo>
+                  <a:lnTo>
+                    <a:pt x="6159537" y="377929"/>
+                  </a:lnTo>
+                  <a:lnTo>
+                    <a:pt x="6231159" y="351645"/>
+                  </a:lnTo>
+                  <a:lnTo>
+                    <a:pt x="6302782" y="324924"/>
+                  </a:lnTo>
+                  <a:lnTo>
+                    <a:pt x="6374404" y="297759"/>
+                  </a:lnTo>
+                  <a:lnTo>
+                    <a:pt x="6446027" y="270143"/>
+                  </a:lnTo>
+                  <a:lnTo>
+                    <a:pt x="6517649" y="242067"/>
+                  </a:lnTo>
+                  <a:lnTo>
+                    <a:pt x="6589272" y="213525"/>
+                  </a:lnTo>
+                  <a:lnTo>
+                    <a:pt x="6660894" y="184509"/>
+                  </a:lnTo>
+                  <a:lnTo>
+                    <a:pt x="6732517" y="155010"/>
+                  </a:lnTo>
+                  <a:lnTo>
+                    <a:pt x="6804139" y="125022"/>
+                  </a:lnTo>
+                  <a:lnTo>
+                    <a:pt x="6875762" y="94535"/>
+                  </a:lnTo>
+                  <a:lnTo>
+                    <a:pt x="6947385" y="63541"/>
+                  </a:lnTo>
+                  <a:lnTo>
+                    <a:pt x="7019007" y="32032"/>
+                  </a:lnTo>
+                  <a:lnTo>
+                    <a:pt x="7090630" y="0"/>
+                  </a:lnTo>
+                </a:path>
+              </a:pathLst>
+            </a:custGeom>
+          </p:spPr>
+          <p:txBody>
+            <a:bodyPr/>
+            <a:lstStyle/>
+            <a:p/>
+          </p:txBody>
+        </p:sp>
+        <p:sp>
+          <p:nvSpPr>
             <p:cNvPr id="22" name="pl22"/>
             <p:cNvSpPr/>
             <p:nvPr/>
           </p:nvSpPr>
           <p:spPr>
             <a:xfrm>
-              <a:off x="817517" y="3597718"/>
-              <a:ext cx="7403783" cy="1127898"/>
+              <a:off x="1172049" y="4729750"/>
+              <a:ext cx="7090630" cy="447375"/>
             </a:xfrm>
             <a:custGeom>
               <a:avLst/>
               <a:pathLst>
-                <a:path w="7403783" h="1127898">
+                <a:path w="7090630" h="447375">
                   <a:moveTo>
-                    <a:pt x="0" y="346525"/>
+                    <a:pt x="7090630" y="447375"/>
                   </a:moveTo>
                   <a:lnTo>
-                    <a:pt x="47058" y="361318"/>
-                  </a:lnTo>
-                  <a:lnTo>
-                    <a:pt x="123691" y="385049"/>
-                  </a:lnTo>
-                  <a:lnTo>
-                    <a:pt x="200323" y="408428"/>
-                  </a:lnTo>
-                  <a:lnTo>
-                    <a:pt x="276956" y="431459"/>
-                  </a:lnTo>
-                  <a:lnTo>
-                    <a:pt x="353588" y="454149"/>
-                  </a:lnTo>
-                  <a:lnTo>
-                    <a:pt x="430221" y="476502"/>
-                  </a:lnTo>
-                  <a:lnTo>
-                    <a:pt x="506853" y="498522"/>
-                  </a:lnTo>
-                  <a:lnTo>
-                    <a:pt x="583486" y="520216"/>
-                  </a:lnTo>
-                  <a:lnTo>
-                    <a:pt x="660118" y="541588"/>
-                  </a:lnTo>
-                  <a:lnTo>
-                    <a:pt x="736751" y="562642"/>
-                  </a:lnTo>
-                  <a:lnTo>
-                    <a:pt x="813384" y="583384"/>
-                  </a:lnTo>
-                  <a:lnTo>
-                    <a:pt x="890016" y="603818"/>
-                  </a:lnTo>
-                  <a:lnTo>
-                    <a:pt x="966649" y="623948"/>
-                  </a:lnTo>
-                  <a:lnTo>
-                    <a:pt x="1043281" y="643779"/>
-                  </a:lnTo>
-                  <a:lnTo>
-                    <a:pt x="1119914" y="663316"/>
-                  </a:lnTo>
-                  <a:lnTo>
-                    <a:pt x="1196546" y="682563"/>
-                  </a:lnTo>
-                  <a:lnTo>
-                    <a:pt x="1273179" y="701524"/>
-                  </a:lnTo>
-                  <a:lnTo>
-                    <a:pt x="1349811" y="720204"/>
-                  </a:lnTo>
-                  <a:lnTo>
-                    <a:pt x="1426444" y="738606"/>
-                  </a:lnTo>
-                  <a:lnTo>
-                    <a:pt x="1503076" y="756735"/>
-                  </a:lnTo>
-                  <a:lnTo>
-                    <a:pt x="1579709" y="774595"/>
-                  </a:lnTo>
-                  <a:lnTo>
-                    <a:pt x="1656342" y="792189"/>
-                  </a:lnTo>
-                  <a:lnTo>
-                    <a:pt x="1732974" y="809523"/>
-                  </a:lnTo>
-                  <a:lnTo>
-                    <a:pt x="1809607" y="826598"/>
-                  </a:lnTo>
-                  <a:lnTo>
-                    <a:pt x="1886239" y="843421"/>
-                  </a:lnTo>
-                  <a:lnTo>
-                    <a:pt x="1962872" y="859993"/>
-                  </a:lnTo>
-                  <a:lnTo>
-                    <a:pt x="2039504" y="876320"/>
-                  </a:lnTo>
-                  <a:lnTo>
-                    <a:pt x="2116137" y="892404"/>
-                  </a:lnTo>
-                  <a:lnTo>
-                    <a:pt x="2192769" y="908249"/>
-                  </a:lnTo>
-                  <a:lnTo>
-                    <a:pt x="2269402" y="923859"/>
-                  </a:lnTo>
-                  <a:lnTo>
-                    <a:pt x="2346034" y="939237"/>
-                  </a:lnTo>
-                  <a:lnTo>
-                    <a:pt x="2422667" y="954387"/>
-                  </a:lnTo>
-                  <a:lnTo>
-                    <a:pt x="2499300" y="969312"/>
-                  </a:lnTo>
-                  <a:lnTo>
-                    <a:pt x="2575932" y="984015"/>
-                  </a:lnTo>
-                  <a:lnTo>
-                    <a:pt x="2652565" y="998500"/>
-                  </a:lnTo>
-                  <a:lnTo>
-                    <a:pt x="2729197" y="1012770"/>
-                  </a:lnTo>
-                  <a:lnTo>
-                    <a:pt x="2805830" y="1026828"/>
-                  </a:lnTo>
-                  <a:lnTo>
-                    <a:pt x="2882462" y="1040677"/>
-                  </a:lnTo>
-                  <a:lnTo>
-                    <a:pt x="2959095" y="1054321"/>
-                  </a:lnTo>
-                  <a:lnTo>
-                    <a:pt x="3035727" y="1067762"/>
-                  </a:lnTo>
-                  <a:lnTo>
-                    <a:pt x="3112360" y="1081004"/>
-                  </a:lnTo>
-                  <a:lnTo>
-                    <a:pt x="3188993" y="1094048"/>
-                  </a:lnTo>
-                  <a:lnTo>
-                    <a:pt x="3265625" y="1106900"/>
-                  </a:lnTo>
-                  <a:lnTo>
-                    <a:pt x="3342258" y="1119560"/>
-                  </a:lnTo>
-                  <a:lnTo>
-                    <a:pt x="3418890" y="1127898"/>
-                  </a:lnTo>
-                  <a:lnTo>
-                    <a:pt x="3495523" y="1114077"/>
-                  </a:lnTo>
-                  <a:lnTo>
-                    <a:pt x="3572155" y="1100027"/>
-                  </a:lnTo>
-                  <a:lnTo>
-                    <a:pt x="3648788" y="1085743"/>
-                  </a:lnTo>
-                  <a:lnTo>
-                    <a:pt x="3725420" y="1071222"/>
-                  </a:lnTo>
-                  <a:lnTo>
-                    <a:pt x="3802053" y="1056459"/>
-                  </a:lnTo>
-                  <a:lnTo>
-                    <a:pt x="3878685" y="1041451"/>
-                  </a:lnTo>
-                  <a:lnTo>
-                    <a:pt x="3955318" y="1026194"/>
-                  </a:lnTo>
-                  <a:lnTo>
-                    <a:pt x="4031951" y="1010683"/>
-                  </a:lnTo>
-                  <a:lnTo>
-                    <a:pt x="4108583" y="994915"/>
-                  </a:lnTo>
-                  <a:lnTo>
-                    <a:pt x="4185216" y="978884"/>
-                  </a:lnTo>
-                  <a:lnTo>
-                    <a:pt x="4261848" y="962587"/>
-                  </a:lnTo>
-                  <a:lnTo>
-                    <a:pt x="4338481" y="946019"/>
-                  </a:lnTo>
-                  <a:lnTo>
-                    <a:pt x="4415113" y="929176"/>
-                  </a:lnTo>
-                  <a:lnTo>
-                    <a:pt x="4491746" y="912053"/>
-                  </a:lnTo>
-                  <a:lnTo>
-                    <a:pt x="4568378" y="894645"/>
-                  </a:lnTo>
-                  <a:lnTo>
-                    <a:pt x="4645011" y="876948"/>
-                  </a:lnTo>
-                  <a:lnTo>
-                    <a:pt x="4721644" y="858957"/>
-                  </a:lnTo>
-                  <a:lnTo>
-                    <a:pt x="4798276" y="840667"/>
-                  </a:lnTo>
-                  <a:lnTo>
-                    <a:pt x="4874909" y="822073"/>
-                  </a:lnTo>
-                  <a:lnTo>
-                    <a:pt x="4951541" y="803170"/>
-                  </a:lnTo>
-                  <a:lnTo>
-                    <a:pt x="5028174" y="783953"/>
-                  </a:lnTo>
-                  <a:lnTo>
-                    <a:pt x="5104806" y="764416"/>
-                  </a:lnTo>
-                  <a:lnTo>
-                    <a:pt x="5181439" y="744555"/>
-                  </a:lnTo>
-                  <a:lnTo>
-                    <a:pt x="5258071" y="724363"/>
-                  </a:lnTo>
-                  <a:lnTo>
-                    <a:pt x="5334704" y="703837"/>
-                  </a:lnTo>
-                  <a:lnTo>
-                    <a:pt x="5411336" y="682969"/>
-                  </a:lnTo>
-                  <a:lnTo>
-                    <a:pt x="5487969" y="661754"/>
-                  </a:lnTo>
-                  <a:lnTo>
-                    <a:pt x="5564602" y="640187"/>
-                  </a:lnTo>
-                  <a:lnTo>
-                    <a:pt x="5641234" y="618261"/>
-                  </a:lnTo>
-                  <a:lnTo>
-                    <a:pt x="5717867" y="595971"/>
-                  </a:lnTo>
-                  <a:lnTo>
-                    <a:pt x="5794499" y="573310"/>
-                  </a:lnTo>
-                  <a:lnTo>
-                    <a:pt x="5871132" y="550273"/>
-                  </a:lnTo>
-                  <a:lnTo>
-                    <a:pt x="5947764" y="526853"/>
-                  </a:lnTo>
-                  <a:lnTo>
-                    <a:pt x="6024397" y="503044"/>
-                  </a:lnTo>
-                  <a:lnTo>
-                    <a:pt x="6101029" y="478839"/>
-                  </a:lnTo>
-                  <a:lnTo>
-                    <a:pt x="6177662" y="454232"/>
-                  </a:lnTo>
-                  <a:lnTo>
-                    <a:pt x="6254294" y="429216"/>
-                  </a:lnTo>
-                  <a:lnTo>
-                    <a:pt x="6330927" y="403784"/>
-                  </a:lnTo>
-                  <a:lnTo>
-                    <a:pt x="6407560" y="377929"/>
-                  </a:lnTo>
-                  <a:lnTo>
-                    <a:pt x="6484192" y="351645"/>
-                  </a:lnTo>
-                  <a:lnTo>
-                    <a:pt x="6560825" y="324924"/>
-                  </a:lnTo>
-                  <a:lnTo>
-                    <a:pt x="6637457" y="297759"/>
-                  </a:lnTo>
-                  <a:lnTo>
-                    <a:pt x="6714090" y="270143"/>
-                  </a:lnTo>
-                  <a:lnTo>
-                    <a:pt x="6790722" y="242067"/>
-                  </a:lnTo>
-                  <a:lnTo>
-                    <a:pt x="6867355" y="213525"/>
-                  </a:lnTo>
-                  <a:lnTo>
-                    <a:pt x="6943987" y="184509"/>
-                  </a:lnTo>
-                  <a:lnTo>
-                    <a:pt x="7020620" y="155010"/>
-                  </a:lnTo>
-                  <a:lnTo>
-                    <a:pt x="7097253" y="125022"/>
-                  </a:lnTo>
-                  <a:lnTo>
-                    <a:pt x="7173885" y="94535"/>
-                  </a:lnTo>
-                  <a:lnTo>
-                    <a:pt x="7250518" y="63541"/>
-                  </a:lnTo>
-                  <a:lnTo>
-                    <a:pt x="7327150" y="32032"/>
-                  </a:lnTo>
-                  <a:lnTo>
-                    <a:pt x="7403783" y="0"/>
+                    <a:pt x="7019007" y="441646"/>
+                  </a:lnTo>
+                  <a:lnTo>
+                    <a:pt x="6947385" y="435830"/>
+                  </a:lnTo>
+                  <a:lnTo>
+                    <a:pt x="6875762" y="429927"/>
+                  </a:lnTo>
+                  <a:lnTo>
+                    <a:pt x="6804139" y="423935"/>
+                  </a:lnTo>
+                  <a:lnTo>
+                    <a:pt x="6732517" y="417852"/>
+                  </a:lnTo>
+                  <a:lnTo>
+                    <a:pt x="6660894" y="411678"/>
+                  </a:lnTo>
+                  <a:lnTo>
+                    <a:pt x="6589272" y="405410"/>
+                  </a:lnTo>
+                  <a:lnTo>
+                    <a:pt x="6517649" y="399048"/>
+                  </a:lnTo>
+                  <a:lnTo>
+                    <a:pt x="6446027" y="392591"/>
+                  </a:lnTo>
+                  <a:lnTo>
+                    <a:pt x="6374404" y="386036"/>
+                  </a:lnTo>
+                  <a:lnTo>
+                    <a:pt x="6302782" y="379382"/>
+                  </a:lnTo>
+                  <a:lnTo>
+                    <a:pt x="6231159" y="372628"/>
+                  </a:lnTo>
+                  <a:lnTo>
+                    <a:pt x="6159537" y="365772"/>
+                  </a:lnTo>
+                  <a:lnTo>
+                    <a:pt x="6087914" y="358812"/>
+                  </a:lnTo>
+                  <a:lnTo>
+                    <a:pt x="6016292" y="351748"/>
+                  </a:lnTo>
+                  <a:lnTo>
+                    <a:pt x="5944669" y="344578"/>
+                  </a:lnTo>
+                  <a:lnTo>
+                    <a:pt x="5873047" y="337299"/>
+                  </a:lnTo>
+                  <a:lnTo>
+                    <a:pt x="5801424" y="329910"/>
+                  </a:lnTo>
+                  <a:lnTo>
+                    <a:pt x="5729802" y="322411"/>
+                  </a:lnTo>
+                  <a:lnTo>
+                    <a:pt x="5658179" y="314798"/>
+                  </a:lnTo>
+                  <a:lnTo>
+                    <a:pt x="5586557" y="307070"/>
+                  </a:lnTo>
+                  <a:lnTo>
+                    <a:pt x="5514934" y="299226"/>
+                  </a:lnTo>
+                  <a:lnTo>
+                    <a:pt x="5443311" y="291264"/>
+                  </a:lnTo>
+                  <a:lnTo>
+                    <a:pt x="5371689" y="283181"/>
+                  </a:lnTo>
+                  <a:lnTo>
+                    <a:pt x="5300066" y="274977"/>
+                  </a:lnTo>
+                  <a:lnTo>
+                    <a:pt x="5228444" y="266650"/>
+                  </a:lnTo>
+                  <a:lnTo>
+                    <a:pt x="5156821" y="258196"/>
+                  </a:lnTo>
+                  <a:lnTo>
+                    <a:pt x="5085199" y="249616"/>
+                  </a:lnTo>
+                  <a:lnTo>
+                    <a:pt x="5013576" y="240906"/>
+                  </a:lnTo>
+                  <a:lnTo>
+                    <a:pt x="4941954" y="232064"/>
+                  </a:lnTo>
+                  <a:lnTo>
+                    <a:pt x="4870331" y="223090"/>
+                  </a:lnTo>
+                  <a:lnTo>
+                    <a:pt x="4798709" y="213980"/>
+                  </a:lnTo>
+                  <a:lnTo>
+                    <a:pt x="4727086" y="204733"/>
+                  </a:lnTo>
+                  <a:lnTo>
+                    <a:pt x="4655464" y="195346"/>
+                  </a:lnTo>
+                  <a:lnTo>
+                    <a:pt x="4583841" y="185818"/>
+                  </a:lnTo>
+                  <a:lnTo>
+                    <a:pt x="4512219" y="176147"/>
+                  </a:lnTo>
+                  <a:lnTo>
+                    <a:pt x="4440596" y="166329"/>
+                  </a:lnTo>
+                  <a:lnTo>
+                    <a:pt x="4368974" y="156364"/>
+                  </a:lnTo>
+                  <a:lnTo>
+                    <a:pt x="4297351" y="146248"/>
+                  </a:lnTo>
+                  <a:lnTo>
+                    <a:pt x="4225729" y="135980"/>
+                  </a:lnTo>
+                  <a:lnTo>
+                    <a:pt x="4154106" y="125557"/>
+                  </a:lnTo>
+                  <a:lnTo>
+                    <a:pt x="4082483" y="114978"/>
+                  </a:lnTo>
+                  <a:lnTo>
+                    <a:pt x="4010861" y="104238"/>
+                  </a:lnTo>
+                  <a:lnTo>
+                    <a:pt x="3939238" y="93337"/>
+                  </a:lnTo>
+                  <a:lnTo>
+                    <a:pt x="3867616" y="82271"/>
+                  </a:lnTo>
+                  <a:lnTo>
+                    <a:pt x="3795993" y="71039"/>
+                  </a:lnTo>
+                  <a:lnTo>
+                    <a:pt x="3724371" y="59638"/>
+                  </a:lnTo>
+                  <a:lnTo>
+                    <a:pt x="3652748" y="48064"/>
+                  </a:lnTo>
+                  <a:lnTo>
+                    <a:pt x="3581126" y="36316"/>
+                  </a:lnTo>
+                  <a:lnTo>
+                    <a:pt x="3509503" y="24391"/>
+                  </a:lnTo>
+                  <a:lnTo>
+                    <a:pt x="3437881" y="12287"/>
+                  </a:lnTo>
+                  <a:lnTo>
+                    <a:pt x="3366258" y="0"/>
+                  </a:lnTo>
+                  <a:lnTo>
+                    <a:pt x="3294636" y="9460"/>
+                  </a:lnTo>
+                  <a:lnTo>
+                    <a:pt x="3223013" y="22832"/>
+                  </a:lnTo>
+                  <a:lnTo>
+                    <a:pt x="3151391" y="35986"/>
+                  </a:lnTo>
+                  <a:lnTo>
+                    <a:pt x="3079768" y="48925"/>
+                  </a:lnTo>
+                  <a:lnTo>
+                    <a:pt x="3008146" y="61652"/>
+                  </a:lnTo>
+                  <a:lnTo>
+                    <a:pt x="2936523" y="74172"/>
+                  </a:lnTo>
+                  <a:lnTo>
+                    <a:pt x="2864901" y="86486"/>
+                  </a:lnTo>
+                  <a:lnTo>
+                    <a:pt x="2793278" y="98600"/>
+                  </a:lnTo>
+                  <a:lnTo>
+                    <a:pt x="2721655" y="110515"/>
+                  </a:lnTo>
+                  <a:lnTo>
+                    <a:pt x="2650033" y="122236"/>
+                  </a:lnTo>
+                  <a:lnTo>
+                    <a:pt x="2578410" y="133765"/>
+                  </a:lnTo>
+                  <a:lnTo>
+                    <a:pt x="2506788" y="145105"/>
+                  </a:lnTo>
+                  <a:lnTo>
+                    <a:pt x="2435165" y="156260"/>
+                  </a:lnTo>
+                  <a:lnTo>
+                    <a:pt x="2363543" y="167233"/>
+                  </a:lnTo>
+                  <a:lnTo>
+                    <a:pt x="2291920" y="178026"/>
+                  </a:lnTo>
+                  <a:lnTo>
+                    <a:pt x="2220298" y="188643"/>
+                  </a:lnTo>
+                  <a:lnTo>
+                    <a:pt x="2148675" y="199087"/>
+                  </a:lnTo>
+                  <a:lnTo>
+                    <a:pt x="2077053" y="209359"/>
+                  </a:lnTo>
+                  <a:lnTo>
+                    <a:pt x="2005430" y="219464"/>
+                  </a:lnTo>
+                  <a:lnTo>
+                    <a:pt x="1933808" y="229403"/>
+                  </a:lnTo>
+                  <a:lnTo>
+                    <a:pt x="1862185" y="239181"/>
+                  </a:lnTo>
+                  <a:lnTo>
+                    <a:pt x="1790563" y="248798"/>
+                  </a:lnTo>
+                  <a:lnTo>
+                    <a:pt x="1718940" y="258258"/>
+                  </a:lnTo>
+                  <a:lnTo>
+                    <a:pt x="1647318" y="267563"/>
+                  </a:lnTo>
+                  <a:lnTo>
+                    <a:pt x="1575695" y="276716"/>
+                  </a:lnTo>
+                  <a:lnTo>
+                    <a:pt x="1504073" y="285720"/>
+                  </a:lnTo>
+                  <a:lnTo>
+                    <a:pt x="1432450" y="294577"/>
+                  </a:lnTo>
+                  <a:lnTo>
+                    <a:pt x="1360827" y="303288"/>
+                  </a:lnTo>
+                  <a:lnTo>
+                    <a:pt x="1289205" y="311858"/>
+                  </a:lnTo>
+                  <a:lnTo>
+                    <a:pt x="1217582" y="320287"/>
+                  </a:lnTo>
+                  <a:lnTo>
+                    <a:pt x="1145960" y="328578"/>
+                  </a:lnTo>
+                  <a:lnTo>
+                    <a:pt x="1074337" y="336734"/>
+                  </a:lnTo>
+                  <a:lnTo>
+                    <a:pt x="1002715" y="344756"/>
+                  </a:lnTo>
+                  <a:lnTo>
+                    <a:pt x="931092" y="352648"/>
+                  </a:lnTo>
+                  <a:lnTo>
+                    <a:pt x="859470" y="360410"/>
+                  </a:lnTo>
+                  <a:lnTo>
+                    <a:pt x="787847" y="368046"/>
+                  </a:lnTo>
+                  <a:lnTo>
+                    <a:pt x="716225" y="375556"/>
+                  </a:lnTo>
+                  <a:lnTo>
+                    <a:pt x="644602" y="382944"/>
+                  </a:lnTo>
+                  <a:lnTo>
+                    <a:pt x="572980" y="390211"/>
+                  </a:lnTo>
+                  <a:lnTo>
+                    <a:pt x="501357" y="397360"/>
+                  </a:lnTo>
+                  <a:lnTo>
+                    <a:pt x="429735" y="404391"/>
+                  </a:lnTo>
+                  <a:lnTo>
+                    <a:pt x="358112" y="411308"/>
+                  </a:lnTo>
+                  <a:lnTo>
+                    <a:pt x="286490" y="418111"/>
+                  </a:lnTo>
+                  <a:lnTo>
+                    <a:pt x="214867" y="424804"/>
+                  </a:lnTo>
+                  <a:lnTo>
+                    <a:pt x="143245" y="431386"/>
+                  </a:lnTo>
+                  <a:lnTo>
+                    <a:pt x="71622" y="437862"/>
+                  </a:lnTo>
+                  <a:lnTo>
+                    <a:pt x="0" y="444231"/>
                   </a:lnTo>
                 </a:path>
               </a:pathLst>
@@ -3940,625 +4240,312 @@
           </p:nvSpPr>
           <p:spPr>
             <a:xfrm>
-              <a:off x="817517" y="4729750"/>
-              <a:ext cx="7403783" cy="447375"/>
+              <a:off x="1172049" y="4694195"/>
+              <a:ext cx="7090630" cy="62642"/>
             </a:xfrm>
             <a:custGeom>
               <a:avLst/>
               <a:pathLst>
-                <a:path w="7403783" h="447375">
+                <a:path w="7090630" h="62642">
                   <a:moveTo>
-                    <a:pt x="7403783" y="447375"/>
+                    <a:pt x="0" y="62642"/>
                   </a:moveTo>
                   <a:lnTo>
-                    <a:pt x="7327150" y="441646"/>
-                  </a:lnTo>
-                  <a:lnTo>
-                    <a:pt x="7250518" y="435830"/>
-                  </a:lnTo>
-                  <a:lnTo>
-                    <a:pt x="7173885" y="429927"/>
-                  </a:lnTo>
-                  <a:lnTo>
-                    <a:pt x="7097253" y="423935"/>
-                  </a:lnTo>
-                  <a:lnTo>
-                    <a:pt x="7020620" y="417852"/>
-                  </a:lnTo>
-                  <a:lnTo>
-                    <a:pt x="6943987" y="411678"/>
-                  </a:lnTo>
-                  <a:lnTo>
-                    <a:pt x="6867355" y="405410"/>
-                  </a:lnTo>
-                  <a:lnTo>
-                    <a:pt x="6790722" y="399048"/>
-                  </a:lnTo>
-                  <a:lnTo>
-                    <a:pt x="6714090" y="392591"/>
-                  </a:lnTo>
-                  <a:lnTo>
-                    <a:pt x="6637457" y="386036"/>
-                  </a:lnTo>
-                  <a:lnTo>
-                    <a:pt x="6560825" y="379382"/>
-                  </a:lnTo>
-                  <a:lnTo>
-                    <a:pt x="6484192" y="372628"/>
-                  </a:lnTo>
-                  <a:lnTo>
-                    <a:pt x="6407560" y="365772"/>
-                  </a:lnTo>
-                  <a:lnTo>
-                    <a:pt x="6330927" y="358812"/>
-                  </a:lnTo>
-                  <a:lnTo>
-                    <a:pt x="6254294" y="351748"/>
-                  </a:lnTo>
-                  <a:lnTo>
-                    <a:pt x="6177662" y="344578"/>
-                  </a:lnTo>
-                  <a:lnTo>
-                    <a:pt x="6101029" y="337299"/>
-                  </a:lnTo>
-                  <a:lnTo>
-                    <a:pt x="6024397" y="329910"/>
-                  </a:lnTo>
-                  <a:lnTo>
-                    <a:pt x="5947764" y="322411"/>
-                  </a:lnTo>
-                  <a:lnTo>
-                    <a:pt x="5871132" y="314798"/>
-                  </a:lnTo>
-                  <a:lnTo>
-                    <a:pt x="5794499" y="307070"/>
-                  </a:lnTo>
-                  <a:lnTo>
-                    <a:pt x="5717867" y="299226"/>
-                  </a:lnTo>
-                  <a:lnTo>
-                    <a:pt x="5641234" y="291264"/>
-                  </a:lnTo>
-                  <a:lnTo>
-                    <a:pt x="5564602" y="283181"/>
-                  </a:lnTo>
-                  <a:lnTo>
-                    <a:pt x="5487969" y="274977"/>
-                  </a:lnTo>
-                  <a:lnTo>
-                    <a:pt x="5411336" y="266650"/>
-                  </a:lnTo>
-                  <a:lnTo>
-                    <a:pt x="5334704" y="258196"/>
-                  </a:lnTo>
-                  <a:lnTo>
-                    <a:pt x="5258071" y="249616"/>
-                  </a:lnTo>
-                  <a:lnTo>
-                    <a:pt x="5181439" y="240906"/>
-                  </a:lnTo>
-                  <a:lnTo>
-                    <a:pt x="5104806" y="232064"/>
-                  </a:lnTo>
-                  <a:lnTo>
-                    <a:pt x="5028174" y="223090"/>
-                  </a:lnTo>
-                  <a:lnTo>
-                    <a:pt x="4951541" y="213980"/>
-                  </a:lnTo>
-                  <a:lnTo>
-                    <a:pt x="4874909" y="204733"/>
-                  </a:lnTo>
-                  <a:lnTo>
-                    <a:pt x="4798276" y="195346"/>
-                  </a:lnTo>
-                  <a:lnTo>
-                    <a:pt x="4721644" y="185818"/>
-                  </a:lnTo>
-                  <a:lnTo>
-                    <a:pt x="4645011" y="176147"/>
-                  </a:lnTo>
-                  <a:lnTo>
-                    <a:pt x="4568378" y="166329"/>
-                  </a:lnTo>
-                  <a:lnTo>
-                    <a:pt x="4491746" y="156364"/>
-                  </a:lnTo>
-                  <a:lnTo>
-                    <a:pt x="4415113" y="146248"/>
-                  </a:lnTo>
-                  <a:lnTo>
-                    <a:pt x="4338481" y="135980"/>
-                  </a:lnTo>
-                  <a:lnTo>
-                    <a:pt x="4261848" y="125557"/>
-                  </a:lnTo>
-                  <a:lnTo>
-                    <a:pt x="4185216" y="114978"/>
-                  </a:lnTo>
-                  <a:lnTo>
-                    <a:pt x="4108583" y="104238"/>
-                  </a:lnTo>
-                  <a:lnTo>
-                    <a:pt x="4031951" y="93337"/>
-                  </a:lnTo>
-                  <a:lnTo>
-                    <a:pt x="3955318" y="82271"/>
-                  </a:lnTo>
-                  <a:lnTo>
-                    <a:pt x="3878685" y="71039"/>
-                  </a:lnTo>
-                  <a:lnTo>
-                    <a:pt x="3802053" y="59638"/>
-                  </a:lnTo>
-                  <a:lnTo>
-                    <a:pt x="3725420" y="48064"/>
-                  </a:lnTo>
-                  <a:lnTo>
-                    <a:pt x="3648788" y="36316"/>
-                  </a:lnTo>
-                  <a:lnTo>
-                    <a:pt x="3572155" y="24391"/>
-                  </a:lnTo>
-                  <a:lnTo>
-                    <a:pt x="3495523" y="12287"/>
-                  </a:lnTo>
-                  <a:lnTo>
-                    <a:pt x="3418890" y="0"/>
-                  </a:lnTo>
-                  <a:lnTo>
-                    <a:pt x="3342258" y="9460"/>
-                  </a:lnTo>
-                  <a:lnTo>
-                    <a:pt x="3265625" y="22832"/>
-                  </a:lnTo>
-                  <a:lnTo>
-                    <a:pt x="3188993" y="35986"/>
-                  </a:lnTo>
-                  <a:lnTo>
-                    <a:pt x="3112360" y="48925"/>
-                  </a:lnTo>
-                  <a:lnTo>
-                    <a:pt x="3035727" y="61652"/>
-                  </a:lnTo>
-                  <a:lnTo>
-                    <a:pt x="2959095" y="74172"/>
-                  </a:lnTo>
-                  <a:lnTo>
-                    <a:pt x="2882462" y="86486"/>
-                  </a:lnTo>
-                  <a:lnTo>
-                    <a:pt x="2805830" y="98600"/>
-                  </a:lnTo>
-                  <a:lnTo>
-                    <a:pt x="2729197" y="110515"/>
-                  </a:lnTo>
-                  <a:lnTo>
-                    <a:pt x="2652565" y="122236"/>
-                  </a:lnTo>
-                  <a:lnTo>
-                    <a:pt x="2575932" y="133765"/>
-                  </a:lnTo>
-                  <a:lnTo>
-                    <a:pt x="2499300" y="145105"/>
-                  </a:lnTo>
-                  <a:lnTo>
-                    <a:pt x="2422667" y="156260"/>
-                  </a:lnTo>
-                  <a:lnTo>
-                    <a:pt x="2346034" y="167233"/>
-                  </a:lnTo>
-                  <a:lnTo>
-                    <a:pt x="2269402" y="178026"/>
-                  </a:lnTo>
-                  <a:lnTo>
-                    <a:pt x="2192769" y="188643"/>
-                  </a:lnTo>
-                  <a:lnTo>
-                    <a:pt x="2116137" y="199087"/>
-                  </a:lnTo>
-                  <a:lnTo>
-                    <a:pt x="2039504" y="209359"/>
-                  </a:lnTo>
-                  <a:lnTo>
-                    <a:pt x="1962872" y="219464"/>
-                  </a:lnTo>
-                  <a:lnTo>
-                    <a:pt x="1886239" y="229403"/>
-                  </a:lnTo>
-                  <a:lnTo>
-                    <a:pt x="1809607" y="239181"/>
-                  </a:lnTo>
-                  <a:lnTo>
-                    <a:pt x="1732974" y="248798"/>
-                  </a:lnTo>
-                  <a:lnTo>
-                    <a:pt x="1656342" y="258258"/>
-                  </a:lnTo>
-                  <a:lnTo>
-                    <a:pt x="1579709" y="267563"/>
-                  </a:lnTo>
-                  <a:lnTo>
-                    <a:pt x="1503076" y="276716"/>
-                  </a:lnTo>
-                  <a:lnTo>
-                    <a:pt x="1426444" y="285720"/>
-                  </a:lnTo>
-                  <a:lnTo>
-                    <a:pt x="1349811" y="294577"/>
-                  </a:lnTo>
-                  <a:lnTo>
-                    <a:pt x="1273179" y="303288"/>
-                  </a:lnTo>
-                  <a:lnTo>
-                    <a:pt x="1196546" y="311858"/>
-                  </a:lnTo>
-                  <a:lnTo>
-                    <a:pt x="1119914" y="320287"/>
-                  </a:lnTo>
-                  <a:lnTo>
-                    <a:pt x="1043281" y="328578"/>
-                  </a:lnTo>
-                  <a:lnTo>
-                    <a:pt x="966649" y="336734"/>
-                  </a:lnTo>
-                  <a:lnTo>
-                    <a:pt x="890016" y="344756"/>
-                  </a:lnTo>
-                  <a:lnTo>
-                    <a:pt x="813384" y="352648"/>
-                  </a:lnTo>
-                  <a:lnTo>
-                    <a:pt x="736751" y="360410"/>
-                  </a:lnTo>
-                  <a:lnTo>
-                    <a:pt x="660118" y="368046"/>
-                  </a:lnTo>
-                  <a:lnTo>
-                    <a:pt x="583486" y="375556"/>
-                  </a:lnTo>
-                  <a:lnTo>
-                    <a:pt x="506853" y="382944"/>
-                  </a:lnTo>
-                  <a:lnTo>
-                    <a:pt x="430221" y="390211"/>
-                  </a:lnTo>
-                  <a:lnTo>
-                    <a:pt x="353588" y="397360"/>
-                  </a:lnTo>
-                  <a:lnTo>
-                    <a:pt x="276956" y="404391"/>
-                  </a:lnTo>
-                  <a:lnTo>
-                    <a:pt x="200323" y="411308"/>
-                  </a:lnTo>
-                  <a:lnTo>
-                    <a:pt x="123691" y="418111"/>
-                  </a:lnTo>
-                  <a:lnTo>
-                    <a:pt x="47058" y="424804"/>
-                  </a:lnTo>
-                  <a:lnTo>
-                    <a:pt x="0" y="428846"/>
-                  </a:lnTo>
-                </a:path>
-              </a:pathLst>
-            </a:custGeom>
-          </p:spPr>
-          <p:txBody>
-            <a:bodyPr/>
-            <a:lstStyle/>
-            <a:p/>
-          </p:txBody>
-        </p:sp>
-        <p:sp>
-          <p:nvSpPr>
-            <p:cNvPr id="24" name="pl24"/>
-            <p:cNvSpPr/>
-            <p:nvPr/>
-          </p:nvSpPr>
-          <p:spPr>
-            <a:xfrm>
-              <a:off x="817517" y="4694195"/>
-              <a:ext cx="7403783" cy="61187"/>
-            </a:xfrm>
-            <a:custGeom>
-              <a:avLst/>
-              <a:pathLst>
-                <a:path w="7403783" h="61187">
-                  <a:moveTo>
-                    <a:pt x="0" y="61187"/>
-                  </a:moveTo>
-                  <a:lnTo>
-                    <a:pt x="47058" y="60812"/>
-                  </a:lnTo>
-                  <a:lnTo>
-                    <a:pt x="123691" y="60201"/>
-                  </a:lnTo>
-                  <a:lnTo>
-                    <a:pt x="200323" y="59590"/>
-                  </a:lnTo>
-                  <a:lnTo>
-                    <a:pt x="276956" y="58978"/>
-                  </a:lnTo>
-                  <a:lnTo>
-                    <a:pt x="353588" y="58366"/>
-                  </a:lnTo>
-                  <a:lnTo>
-                    <a:pt x="430221" y="57753"/>
-                  </a:lnTo>
-                  <a:lnTo>
-                    <a:pt x="506853" y="57140"/>
-                  </a:lnTo>
-                  <a:lnTo>
-                    <a:pt x="583486" y="56526"/>
-                  </a:lnTo>
-                  <a:lnTo>
-                    <a:pt x="660118" y="55912"/>
-                  </a:lnTo>
-                  <a:lnTo>
-                    <a:pt x="736751" y="55298"/>
-                  </a:lnTo>
-                  <a:lnTo>
-                    <a:pt x="813384" y="54683"/>
-                  </a:lnTo>
-                  <a:lnTo>
-                    <a:pt x="890016" y="54067"/>
-                  </a:lnTo>
-                  <a:lnTo>
-                    <a:pt x="966649" y="53451"/>
-                  </a:lnTo>
-                  <a:lnTo>
-                    <a:pt x="1043281" y="52835"/>
-                  </a:lnTo>
-                  <a:lnTo>
-                    <a:pt x="1119914" y="52218"/>
-                  </a:lnTo>
-                  <a:lnTo>
-                    <a:pt x="1196546" y="51601"/>
-                  </a:lnTo>
-                  <a:lnTo>
-                    <a:pt x="1273179" y="50983"/>
-                  </a:lnTo>
-                  <a:lnTo>
-                    <a:pt x="1349811" y="50364"/>
-                  </a:lnTo>
-                  <a:lnTo>
-                    <a:pt x="1426444" y="49746"/>
-                  </a:lnTo>
-                  <a:lnTo>
-                    <a:pt x="1503076" y="49126"/>
-                  </a:lnTo>
-                  <a:lnTo>
-                    <a:pt x="1579709" y="48507"/>
-                  </a:lnTo>
-                  <a:lnTo>
-                    <a:pt x="1656342" y="47886"/>
-                  </a:lnTo>
-                  <a:lnTo>
-                    <a:pt x="1732974" y="47266"/>
-                  </a:lnTo>
-                  <a:lnTo>
-                    <a:pt x="1809607" y="46645"/>
-                  </a:lnTo>
-                  <a:lnTo>
-                    <a:pt x="1886239" y="46023"/>
-                  </a:lnTo>
-                  <a:lnTo>
-                    <a:pt x="1962872" y="45401"/>
-                  </a:lnTo>
-                  <a:lnTo>
-                    <a:pt x="2039504" y="44778"/>
-                  </a:lnTo>
-                  <a:lnTo>
-                    <a:pt x="2116137" y="44155"/>
-                  </a:lnTo>
-                  <a:lnTo>
-                    <a:pt x="2192769" y="43532"/>
-                  </a:lnTo>
-                  <a:lnTo>
-                    <a:pt x="2269402" y="42908"/>
-                  </a:lnTo>
-                  <a:lnTo>
-                    <a:pt x="2346034" y="42283"/>
-                  </a:lnTo>
-                  <a:lnTo>
-                    <a:pt x="2422667" y="41658"/>
-                  </a:lnTo>
-                  <a:lnTo>
-                    <a:pt x="2499300" y="41033"/>
-                  </a:lnTo>
-                  <a:lnTo>
-                    <a:pt x="2575932" y="40407"/>
-                  </a:lnTo>
-                  <a:lnTo>
-                    <a:pt x="2652565" y="39781"/>
-                  </a:lnTo>
-                  <a:lnTo>
-                    <a:pt x="2729197" y="39154"/>
-                  </a:lnTo>
-                  <a:lnTo>
-                    <a:pt x="2805830" y="38526"/>
-                  </a:lnTo>
-                  <a:lnTo>
-                    <a:pt x="2882462" y="37899"/>
-                  </a:lnTo>
-                  <a:lnTo>
-                    <a:pt x="2959095" y="37270"/>
-                  </a:lnTo>
-                  <a:lnTo>
-                    <a:pt x="3035727" y="36642"/>
-                  </a:lnTo>
-                  <a:lnTo>
-                    <a:pt x="3112360" y="36012"/>
-                  </a:lnTo>
-                  <a:lnTo>
-                    <a:pt x="3188993" y="35383"/>
-                  </a:lnTo>
-                  <a:lnTo>
-                    <a:pt x="3265625" y="34752"/>
-                  </a:lnTo>
-                  <a:lnTo>
-                    <a:pt x="3342258" y="34122"/>
-                  </a:lnTo>
-                  <a:lnTo>
-                    <a:pt x="3418890" y="33491"/>
-                  </a:lnTo>
-                  <a:lnTo>
-                    <a:pt x="3495523" y="32859"/>
-                  </a:lnTo>
-                  <a:lnTo>
-                    <a:pt x="3572155" y="32227"/>
-                  </a:lnTo>
-                  <a:lnTo>
-                    <a:pt x="3648788" y="31594"/>
-                  </a:lnTo>
-                  <a:lnTo>
-                    <a:pt x="3725420" y="30961"/>
-                  </a:lnTo>
-                  <a:lnTo>
-                    <a:pt x="3802053" y="30328"/>
-                  </a:lnTo>
-                  <a:lnTo>
-                    <a:pt x="3878685" y="29694"/>
-                  </a:lnTo>
-                  <a:lnTo>
-                    <a:pt x="3955318" y="29059"/>
-                  </a:lnTo>
-                  <a:lnTo>
-                    <a:pt x="4031951" y="28424"/>
-                  </a:lnTo>
-                  <a:lnTo>
-                    <a:pt x="4108583" y="27789"/>
-                  </a:lnTo>
-                  <a:lnTo>
-                    <a:pt x="4185216" y="27153"/>
-                  </a:lnTo>
-                  <a:lnTo>
-                    <a:pt x="4261848" y="26516"/>
-                  </a:lnTo>
-                  <a:lnTo>
-                    <a:pt x="4338481" y="25879"/>
-                  </a:lnTo>
-                  <a:lnTo>
-                    <a:pt x="4415113" y="25242"/>
-                  </a:lnTo>
-                  <a:lnTo>
-                    <a:pt x="4491746" y="24604"/>
-                  </a:lnTo>
-                  <a:lnTo>
-                    <a:pt x="4568378" y="23965"/>
-                  </a:lnTo>
-                  <a:lnTo>
-                    <a:pt x="4645011" y="23326"/>
-                  </a:lnTo>
-                  <a:lnTo>
-                    <a:pt x="4721644" y="22687"/>
-                  </a:lnTo>
-                  <a:lnTo>
-                    <a:pt x="4798276" y="22047"/>
-                  </a:lnTo>
-                  <a:lnTo>
-                    <a:pt x="4874909" y="21407"/>
-                  </a:lnTo>
-                  <a:lnTo>
-                    <a:pt x="4951541" y="20766"/>
-                  </a:lnTo>
-                  <a:lnTo>
-                    <a:pt x="5028174" y="20125"/>
-                  </a:lnTo>
-                  <a:lnTo>
-                    <a:pt x="5104806" y="19483"/>
-                  </a:lnTo>
-                  <a:lnTo>
-                    <a:pt x="5181439" y="18841"/>
-                  </a:lnTo>
-                  <a:lnTo>
-                    <a:pt x="5258071" y="18198"/>
-                  </a:lnTo>
-                  <a:lnTo>
-                    <a:pt x="5334704" y="17555"/>
-                  </a:lnTo>
-                  <a:lnTo>
-                    <a:pt x="5411336" y="16911"/>
-                  </a:lnTo>
-                  <a:lnTo>
-                    <a:pt x="5487969" y="16266"/>
-                  </a:lnTo>
-                  <a:lnTo>
-                    <a:pt x="5564602" y="15622"/>
-                  </a:lnTo>
-                  <a:lnTo>
-                    <a:pt x="5641234" y="14976"/>
-                  </a:lnTo>
-                  <a:lnTo>
-                    <a:pt x="5717867" y="14331"/>
-                  </a:lnTo>
-                  <a:lnTo>
-                    <a:pt x="5794499" y="13685"/>
-                  </a:lnTo>
-                  <a:lnTo>
-                    <a:pt x="5871132" y="13038"/>
-                  </a:lnTo>
-                  <a:lnTo>
-                    <a:pt x="5947764" y="12391"/>
-                  </a:lnTo>
-                  <a:lnTo>
-                    <a:pt x="6024397" y="11743"/>
-                  </a:lnTo>
-                  <a:lnTo>
-                    <a:pt x="6101029" y="11095"/>
-                  </a:lnTo>
-                  <a:lnTo>
-                    <a:pt x="6177662" y="10446"/>
-                  </a:lnTo>
-                  <a:lnTo>
-                    <a:pt x="6254294" y="9797"/>
-                  </a:lnTo>
-                  <a:lnTo>
-                    <a:pt x="6330927" y="9147"/>
-                  </a:lnTo>
-                  <a:lnTo>
-                    <a:pt x="6407560" y="8497"/>
-                  </a:lnTo>
-                  <a:lnTo>
-                    <a:pt x="6484192" y="7846"/>
-                  </a:lnTo>
-                  <a:lnTo>
-                    <a:pt x="6560825" y="7195"/>
-                  </a:lnTo>
-                  <a:lnTo>
-                    <a:pt x="6637457" y="6543"/>
-                  </a:lnTo>
-                  <a:lnTo>
-                    <a:pt x="6714090" y="5891"/>
-                  </a:lnTo>
-                  <a:lnTo>
-                    <a:pt x="6790722" y="5239"/>
-                  </a:lnTo>
-                  <a:lnTo>
-                    <a:pt x="6867355" y="4585"/>
-                  </a:lnTo>
-                  <a:lnTo>
-                    <a:pt x="6943987" y="3932"/>
-                  </a:lnTo>
-                  <a:lnTo>
-                    <a:pt x="7020620" y="3278"/>
-                  </a:lnTo>
-                  <a:lnTo>
-                    <a:pt x="7097253" y="2623"/>
-                  </a:lnTo>
-                  <a:lnTo>
-                    <a:pt x="7173885" y="1968"/>
-                  </a:lnTo>
-                  <a:lnTo>
-                    <a:pt x="7250518" y="1312"/>
-                  </a:lnTo>
-                  <a:lnTo>
-                    <a:pt x="7327150" y="656"/>
-                  </a:lnTo>
-                  <a:lnTo>
-                    <a:pt x="7403783" y="0"/>
+                    <a:pt x="71622" y="62032"/>
+                  </a:lnTo>
+                  <a:lnTo>
+                    <a:pt x="143245" y="61422"/>
+                  </a:lnTo>
+                  <a:lnTo>
+                    <a:pt x="214867" y="60812"/>
+                  </a:lnTo>
+                  <a:lnTo>
+                    <a:pt x="286490" y="60201"/>
+                  </a:lnTo>
+                  <a:lnTo>
+                    <a:pt x="358112" y="59590"/>
+                  </a:lnTo>
+                  <a:lnTo>
+                    <a:pt x="429735" y="58978"/>
+                  </a:lnTo>
+                  <a:lnTo>
+                    <a:pt x="501357" y="58366"/>
+                  </a:lnTo>
+                  <a:lnTo>
+                    <a:pt x="572980" y="57753"/>
+                  </a:lnTo>
+                  <a:lnTo>
+                    <a:pt x="644602" y="57140"/>
+                  </a:lnTo>
+                  <a:lnTo>
+                    <a:pt x="716225" y="56526"/>
+                  </a:lnTo>
+                  <a:lnTo>
+                    <a:pt x="787847" y="55912"/>
+                  </a:lnTo>
+                  <a:lnTo>
+                    <a:pt x="859470" y="55298"/>
+                  </a:lnTo>
+                  <a:lnTo>
+                    <a:pt x="931092" y="54683"/>
+                  </a:lnTo>
+                  <a:lnTo>
+                    <a:pt x="1002715" y="54067"/>
+                  </a:lnTo>
+                  <a:lnTo>
+                    <a:pt x="1074337" y="53451"/>
+                  </a:lnTo>
+                  <a:lnTo>
+                    <a:pt x="1145960" y="52835"/>
+                  </a:lnTo>
+                  <a:lnTo>
+                    <a:pt x="1217582" y="52218"/>
+                  </a:lnTo>
+                  <a:lnTo>
+                    <a:pt x="1289205" y="51601"/>
+                  </a:lnTo>
+                  <a:lnTo>
+                    <a:pt x="1360827" y="50983"/>
+                  </a:lnTo>
+                  <a:lnTo>
+                    <a:pt x="1432450" y="50364"/>
+                  </a:lnTo>
+                  <a:lnTo>
+                    <a:pt x="1504073" y="49746"/>
+                  </a:lnTo>
+                  <a:lnTo>
+                    <a:pt x="1575695" y="49126"/>
+                  </a:lnTo>
+                  <a:lnTo>
+                    <a:pt x="1647318" y="48507"/>
+                  </a:lnTo>
+                  <a:lnTo>
+                    <a:pt x="1718940" y="47886"/>
+                  </a:lnTo>
+                  <a:lnTo>
+                    <a:pt x="1790563" y="47266"/>
+                  </a:lnTo>
+                  <a:lnTo>
+                    <a:pt x="1862185" y="46645"/>
+                  </a:lnTo>
+                  <a:lnTo>
+                    <a:pt x="1933808" y="46023"/>
+                  </a:lnTo>
+                  <a:lnTo>
+                    <a:pt x="2005430" y="45401"/>
+                  </a:lnTo>
+                  <a:lnTo>
+                    <a:pt x="2077053" y="44778"/>
+                  </a:lnTo>
+                  <a:lnTo>
+                    <a:pt x="2148675" y="44155"/>
+                  </a:lnTo>
+                  <a:lnTo>
+                    <a:pt x="2220298" y="43532"/>
+                  </a:lnTo>
+                  <a:lnTo>
+                    <a:pt x="2291920" y="42908"/>
+                  </a:lnTo>
+                  <a:lnTo>
+                    <a:pt x="2363543" y="42283"/>
+                  </a:lnTo>
+                  <a:lnTo>
+                    <a:pt x="2435165" y="41658"/>
+                  </a:lnTo>
+                  <a:lnTo>
+                    <a:pt x="2506788" y="41033"/>
+                  </a:lnTo>
+                  <a:lnTo>
+                    <a:pt x="2578410" y="40407"/>
+                  </a:lnTo>
+                  <a:lnTo>
+                    <a:pt x="2650033" y="39781"/>
+                  </a:lnTo>
+                  <a:lnTo>
+                    <a:pt x="2721655" y="39154"/>
+                  </a:lnTo>
+                  <a:lnTo>
+                    <a:pt x="2793278" y="38526"/>
+                  </a:lnTo>
+                  <a:lnTo>
+                    <a:pt x="2864901" y="37899"/>
+                  </a:lnTo>
+                  <a:lnTo>
+                    <a:pt x="2936523" y="37270"/>
+                  </a:lnTo>
+                  <a:lnTo>
+                    <a:pt x="3008146" y="36642"/>
+                  </a:lnTo>
+                  <a:lnTo>
+                    <a:pt x="3079768" y="36012"/>
+                  </a:lnTo>
+                  <a:lnTo>
+                    <a:pt x="3151391" y="35383"/>
+                  </a:lnTo>
+                  <a:lnTo>
+                    <a:pt x="3223013" y="34752"/>
+                  </a:lnTo>
+                  <a:lnTo>
+                    <a:pt x="3294636" y="34122"/>
+                  </a:lnTo>
+                  <a:lnTo>
+                    <a:pt x="3366258" y="33491"/>
+                  </a:lnTo>
+                  <a:lnTo>
+                    <a:pt x="3437881" y="32859"/>
+                  </a:lnTo>
+                  <a:lnTo>
+                    <a:pt x="3509503" y="32227"/>
+                  </a:lnTo>
+                  <a:lnTo>
+                    <a:pt x="3581126" y="31594"/>
+                  </a:lnTo>
+                  <a:lnTo>
+                    <a:pt x="3652748" y="30961"/>
+                  </a:lnTo>
+                  <a:lnTo>
+                    <a:pt x="3724371" y="30328"/>
+                  </a:lnTo>
+                  <a:lnTo>
+                    <a:pt x="3795993" y="29694"/>
+                  </a:lnTo>
+                  <a:lnTo>
+                    <a:pt x="3867616" y="29059"/>
+                  </a:lnTo>
+                  <a:lnTo>
+                    <a:pt x="3939238" y="28424"/>
+                  </a:lnTo>
+                  <a:lnTo>
+                    <a:pt x="4010861" y="27789"/>
+                  </a:lnTo>
+                  <a:lnTo>
+                    <a:pt x="4082483" y="27153"/>
+                  </a:lnTo>
+                  <a:lnTo>
+                    <a:pt x="4154106" y="26516"/>
+                  </a:lnTo>
+                  <a:lnTo>
+                    <a:pt x="4225729" y="25879"/>
+                  </a:lnTo>
+                  <a:lnTo>
+                    <a:pt x="4297351" y="25242"/>
+                  </a:lnTo>
+                  <a:lnTo>
+                    <a:pt x="4368974" y="24604"/>
+                  </a:lnTo>
+                  <a:lnTo>
+                    <a:pt x="4440596" y="23965"/>
+                  </a:lnTo>
+                  <a:lnTo>
+                    <a:pt x="4512219" y="23326"/>
+                  </a:lnTo>
+                  <a:lnTo>
+                    <a:pt x="4583841" y="22687"/>
+                  </a:lnTo>
+                  <a:lnTo>
+                    <a:pt x="4655464" y="22047"/>
+                  </a:lnTo>
+                  <a:lnTo>
+                    <a:pt x="4727086" y="21407"/>
+                  </a:lnTo>
+                  <a:lnTo>
+                    <a:pt x="4798709" y="20766"/>
+                  </a:lnTo>
+                  <a:lnTo>
+                    <a:pt x="4870331" y="20125"/>
+                  </a:lnTo>
+                  <a:lnTo>
+                    <a:pt x="4941954" y="19483"/>
+                  </a:lnTo>
+                  <a:lnTo>
+                    <a:pt x="5013576" y="18841"/>
+                  </a:lnTo>
+                  <a:lnTo>
+                    <a:pt x="5085199" y="18198"/>
+                  </a:lnTo>
+                  <a:lnTo>
+                    <a:pt x="5156821" y="17555"/>
+                  </a:lnTo>
+                  <a:lnTo>
+                    <a:pt x="5228444" y="16911"/>
+                  </a:lnTo>
+                  <a:lnTo>
+                    <a:pt x="5300066" y="16266"/>
+                  </a:lnTo>
+                  <a:lnTo>
+                    <a:pt x="5371689" y="15622"/>
+                  </a:lnTo>
+                  <a:lnTo>
+                    <a:pt x="5443311" y="14976"/>
+                  </a:lnTo>
+                  <a:lnTo>
+                    <a:pt x="5514934" y="14331"/>
+                  </a:lnTo>
+                  <a:lnTo>
+                    <a:pt x="5586557" y="13685"/>
+                  </a:lnTo>
+                  <a:lnTo>
+                    <a:pt x="5658179" y="13038"/>
+                  </a:lnTo>
+                  <a:lnTo>
+                    <a:pt x="5729802" y="12391"/>
+                  </a:lnTo>
+                  <a:lnTo>
+                    <a:pt x="5801424" y="11743"/>
+                  </a:lnTo>
+                  <a:lnTo>
+                    <a:pt x="5873047" y="11095"/>
+                  </a:lnTo>
+                  <a:lnTo>
+                    <a:pt x="5944669" y="10446"/>
+                  </a:lnTo>
+                  <a:lnTo>
+                    <a:pt x="6016292" y="9797"/>
+                  </a:lnTo>
+                  <a:lnTo>
+                    <a:pt x="6087914" y="9147"/>
+                  </a:lnTo>
+                  <a:lnTo>
+                    <a:pt x="6159537" y="8497"/>
+                  </a:lnTo>
+                  <a:lnTo>
+                    <a:pt x="6231159" y="7846"/>
+                  </a:lnTo>
+                  <a:lnTo>
+                    <a:pt x="6302782" y="7195"/>
+                  </a:lnTo>
+                  <a:lnTo>
+                    <a:pt x="6374404" y="6543"/>
+                  </a:lnTo>
+                  <a:lnTo>
+                    <a:pt x="6446027" y="5891"/>
+                  </a:lnTo>
+                  <a:lnTo>
+                    <a:pt x="6517649" y="5239"/>
+                  </a:lnTo>
+                  <a:lnTo>
+                    <a:pt x="6589272" y="4585"/>
+                  </a:lnTo>
+                  <a:lnTo>
+                    <a:pt x="6660894" y="3932"/>
+                  </a:lnTo>
+                  <a:lnTo>
+                    <a:pt x="6732517" y="3278"/>
+                  </a:lnTo>
+                  <a:lnTo>
+                    <a:pt x="6804139" y="2623"/>
+                  </a:lnTo>
+                  <a:lnTo>
+                    <a:pt x="6875762" y="1968"/>
+                  </a:lnTo>
+                  <a:lnTo>
+                    <a:pt x="6947385" y="1312"/>
+                  </a:lnTo>
+                  <a:lnTo>
+                    <a:pt x="7019007" y="656"/>
+                  </a:lnTo>
+                  <a:lnTo>
+                    <a:pt x="7090630" y="0"/>
                   </a:lnTo>
                 </a:path>
               </a:pathLst>
@@ -4581,7 +4568,7 @@
         </p:sp>
         <p:sp>
           <p:nvSpPr>
-            <p:cNvPr id="25" name="pl25"/>
+            <p:cNvPr id="24" name="pl24"/>
             <p:cNvSpPr/>
             <p:nvPr/>
           </p:nvSpPr>
@@ -4624,13 +4611,13 @@
         </p:sp>
         <p:sp>
           <p:nvSpPr>
-            <p:cNvPr id="26" name="pl26"/>
+            <p:cNvPr id="25" name="pl25"/>
             <p:cNvSpPr/>
             <p:nvPr/>
           </p:nvSpPr>
           <p:spPr>
             <a:xfrm>
-              <a:off x="4224261" y="2073503"/>
+              <a:off x="4526955" y="2073503"/>
               <a:ext cx="0" cy="3649639"/>
             </a:xfrm>
             <a:custGeom>
@@ -4667,7 +4654,7 @@
         </p:sp>
         <p:sp>
           <p:nvSpPr>
-            <p:cNvPr id="27" name="tx27"/>
+            <p:cNvPr id="26" name="tx26"/>
             <p:cNvSpPr/>
             <p:nvPr/>
           </p:nvSpPr>
@@ -4713,7 +4700,7 @@
         </p:sp>
         <p:sp>
           <p:nvSpPr>
-            <p:cNvPr id="28" name="tx28"/>
+            <p:cNvPr id="27" name="tx27"/>
             <p:cNvSpPr/>
             <p:nvPr/>
           </p:nvSpPr>
@@ -4759,7 +4746,7 @@
         </p:sp>
         <p:sp>
           <p:nvSpPr>
-            <p:cNvPr id="29" name="tx29"/>
+            <p:cNvPr id="28" name="tx28"/>
             <p:cNvSpPr/>
             <p:nvPr/>
           </p:nvSpPr>
@@ -4805,7 +4792,7 @@
         </p:sp>
         <p:sp>
           <p:nvSpPr>
-            <p:cNvPr id="30" name="tx30"/>
+            <p:cNvPr id="29" name="tx29"/>
             <p:cNvSpPr/>
             <p:nvPr/>
           </p:nvSpPr>
@@ -4851,7 +4838,7 @@
         </p:sp>
         <p:sp>
           <p:nvSpPr>
-            <p:cNvPr id="31" name="tx31"/>
+            <p:cNvPr id="30" name="tx30"/>
             <p:cNvSpPr/>
             <p:nvPr/>
           </p:nvSpPr>
@@ -4897,14 +4884,14 @@
         </p:sp>
         <p:sp>
           <p:nvSpPr>
-            <p:cNvPr id="32" name="tx32"/>
+            <p:cNvPr id="31" name="tx31"/>
             <p:cNvSpPr/>
             <p:nvPr/>
           </p:nvSpPr>
           <p:spPr>
             <a:xfrm>
-              <a:off x="2423864" y="5785772"/>
-              <a:ext cx="155356" cy="80101"/>
+              <a:off x="2421884" y="5785772"/>
+              <a:ext cx="161574" cy="80101"/>
             </a:xfrm>
             <a:prstGeom prst="rect">
               <a:avLst/>
@@ -4936,21 +4923,21 @@
                   <a:latin typeface="Helvetica"/>
                   <a:cs typeface="Helvetica"/>
                 </a:rPr>
-                <a:t>0.8</a:t>
+                <a:t>-25</a:t>
               </a:r>
             </a:p>
           </p:txBody>
         </p:sp>
         <p:sp>
           <p:nvSpPr>
-            <p:cNvPr id="33" name="tx33"/>
+            <p:cNvPr id="32" name="tx32"/>
             <p:cNvSpPr/>
             <p:nvPr/>
           </p:nvSpPr>
           <p:spPr>
             <a:xfrm>
-              <a:off x="4196521" y="5785772"/>
-              <a:ext cx="155356" cy="80101"/>
+              <a:off x="4542539" y="5785772"/>
+              <a:ext cx="62179" cy="80101"/>
             </a:xfrm>
             <a:prstGeom prst="rect">
               <a:avLst/>
@@ -4982,21 +4969,21 @@
                   <a:latin typeface="Helvetica"/>
                   <a:cs typeface="Helvetica"/>
                 </a:rPr>
-                <a:t>1.0</a:t>
+                <a:t>0</a:t>
               </a:r>
             </a:p>
           </p:txBody>
         </p:sp>
         <p:sp>
           <p:nvSpPr>
-            <p:cNvPr id="34" name="tx34"/>
+            <p:cNvPr id="33" name="tx33"/>
             <p:cNvSpPr/>
             <p:nvPr/>
           </p:nvSpPr>
           <p:spPr>
             <a:xfrm>
-              <a:off x="5969179" y="5785772"/>
-              <a:ext cx="155356" cy="80101"/>
+              <a:off x="6582407" y="5785772"/>
+              <a:ext cx="124358" cy="80101"/>
             </a:xfrm>
             <a:prstGeom prst="rect">
               <a:avLst/>
@@ -5028,67 +5015,21 @@
                   <a:latin typeface="Helvetica"/>
                   <a:cs typeface="Helvetica"/>
                 </a:rPr>
-                <a:t>1.2</a:t>
+                <a:t>25</a:t>
               </a:r>
             </a:p>
           </p:txBody>
         </p:sp>
         <p:sp>
           <p:nvSpPr>
-            <p:cNvPr id="35" name="tx35"/>
+            <p:cNvPr id="34" name="tx34"/>
             <p:cNvSpPr/>
             <p:nvPr/>
           </p:nvSpPr>
           <p:spPr>
             <a:xfrm>
-              <a:off x="7741836" y="5785772"/>
-              <a:ext cx="155356" cy="80101"/>
-            </a:xfrm>
-            <a:prstGeom prst="rect">
-              <a:avLst/>
-            </a:prstGeom>
-            <a:noFill/>
-          </p:spPr>
-          <p:txBody>
-            <a:bodyPr lIns="0" rIns="0" tIns="0" bIns="0" anchorCtr="1" anchor="ctr" wrap="none"/>
-            <a:lstStyle/>
-            <a:p>
-              <a:pPr algn="l" marL="0" marR="0" indent="0">
-                <a:lnSpc>
-                  <a:spcPts val="880"/>
-                </a:lnSpc>
-                <a:spcBef>
-                  <a:spcPts val="0"/>
-                </a:spcBef>
-                <a:spcAft>
-                  <a:spcPts val="0"/>
-                </a:spcAft>
-              </a:pPr>
-              <a:r>
-                <a:rPr sz="880">
-                  <a:solidFill>
-                    <a:srgbClr val="4D4D4D">
-                      <a:alpha val="100000"/>
-                    </a:srgbClr>
-                  </a:solidFill>
-                  <a:latin typeface="Helvetica"/>
-                  <a:cs typeface="Helvetica"/>
-                </a:rPr>
-                <a:t>1.4</a:t>
-              </a:r>
-            </a:p>
-          </p:txBody>
-        </p:sp>
-        <p:sp>
-          <p:nvSpPr>
-            <p:cNvPr id="36" name="tx36"/>
-            <p:cNvSpPr/>
-            <p:nvPr/>
-          </p:nvSpPr>
-          <p:spPr>
-            <a:xfrm>
-              <a:off x="3879271" y="5925448"/>
-              <a:ext cx="1676186" cy="100218"/>
+              <a:off x="2928340" y="5925448"/>
+              <a:ext cx="3578047" cy="100218"/>
             </a:xfrm>
             <a:prstGeom prst="rect">
               <a:avLst/>
@@ -5120,14 +5061,14 @@
                   <a:latin typeface="Helvetica"/>
                   <a:cs typeface="Helvetica"/>
                 </a:rPr>
-                <a:t>CKD-EPI Cr-Cys / CG ratio</a:t>
+                <a:t>eGFR difference (%): 100 × (CKD-EPI Cr-Cys − CG) / CG</a:t>
               </a:r>
             </a:p>
           </p:txBody>
         </p:sp>
         <p:sp>
           <p:nvSpPr>
-            <p:cNvPr id="37" name="tx37"/>
+            <p:cNvPr id="35" name="tx35"/>
             <p:cNvSpPr/>
             <p:nvPr/>
           </p:nvSpPr>
@@ -5173,14 +5114,14 @@
         </p:sp>
         <p:sp>
           <p:nvSpPr>
-            <p:cNvPr id="38" name="tx38"/>
+            <p:cNvPr id="36" name="tx36"/>
             <p:cNvSpPr/>
             <p:nvPr/>
           </p:nvSpPr>
           <p:spPr>
             <a:xfrm>
               <a:off x="817517" y="1896563"/>
-              <a:ext cx="6169365" cy="82021"/>
+              <a:ext cx="6321612" cy="82021"/>
             </a:xfrm>
             <a:prstGeom prst="rect">
               <a:avLst/>
@@ -5212,14 +5153,14 @@
                   <a:latin typeface="Helvetica"/>
                   <a:cs typeface="Helvetica"/>
                 </a:rPr>
-                <a:t>subHR per 0.1 ratio decline: 0.99 (0.83-1.19), p = 0.924  |  per IQR decline (Δ = 0.30): 0.97 (0.57-1.68)  |  IQR: [0.85, 1.15]</a:t>
+                <a:t>subHR per 10 % decline: 0.99 (0.83-1.19), p = 0.924  |  per IQR decline (Δ = 29.9 %): 0.97 (0.57-1.68)  |  IQR: [-15.0, 14.9] %</a:t>
               </a:r>
             </a:p>
           </p:txBody>
         </p:sp>
         <p:sp>
           <p:nvSpPr>
-            <p:cNvPr id="39" name="tx39"/>
+            <p:cNvPr id="37" name="tx37"/>
             <p:cNvSpPr/>
             <p:nvPr/>
           </p:nvSpPr>

--- a/docs/pptx/carbo/jx-carbo-linsubhr-ratio-hosp10.pptx
+++ b/docs/pptx/carbo/jx-carbo-linsubhr-ratio-hosp10.pptx
@@ -2265,34 +2265,26 @@
         </p:sp>
         <p:sp>
           <p:nvSpPr>
-            <p:cNvPr id="4" name="pl4"/>
+            <p:cNvPr id="4" name="rc4"/>
             <p:cNvSpPr/>
             <p:nvPr/>
           </p:nvSpPr>
           <p:spPr>
             <a:xfrm>
-              <a:off x="817517" y="5142518"/>
-              <a:ext cx="7799693" cy="0"/>
+              <a:off x="457200" y="1600200"/>
+              <a:ext cx="8229600" cy="4525962"/>
             </a:xfrm>
-            <a:custGeom>
+            <a:prstGeom prst="rect">
               <a:avLst/>
-              <a:pathLst>
-                <a:path w="7799693" h="0">
-                  <a:moveTo>
-                    <a:pt x="0" y="0"/>
-                  </a:moveTo>
-                  <a:lnTo>
-                    <a:pt x="7799693" y="0"/>
-                  </a:lnTo>
-                  <a:lnTo>
-                    <a:pt x="7799693" y="0"/>
-                  </a:lnTo>
-                </a:path>
-              </a:pathLst>
-            </a:custGeom>
-            <a:ln w="6775" cap="flat">
+            </a:prstGeom>
+            <a:solidFill>
+              <a:srgbClr val="FFFFFF">
+                <a:alpha val="100000"/>
+              </a:srgbClr>
+            </a:solidFill>
+            <a:ln w="13550" cap="rnd">
               <a:solidFill>
-                <a:srgbClr val="EBEBEB">
+                <a:srgbClr val="FFFFFF">
                   <a:alpha val="100000"/>
                 </a:srgbClr>
               </a:solidFill>
@@ -2314,21 +2306,21 @@
           </p:nvSpPr>
           <p:spPr>
             <a:xfrm>
-              <a:off x="817517" y="4313054"/>
-              <a:ext cx="7799693" cy="0"/>
+              <a:off x="887106" y="3250627"/>
+              <a:ext cx="7660515" cy="0"/>
             </a:xfrm>
             <a:custGeom>
               <a:avLst/>
               <a:pathLst>
-                <a:path w="7799693" h="0">
+                <a:path w="7660515" h="0">
                   <a:moveTo>
                     <a:pt x="0" y="0"/>
                   </a:moveTo>
                   <a:lnTo>
-                    <a:pt x="7799693" y="0"/>
-                  </a:lnTo>
-                  <a:lnTo>
-                    <a:pt x="7799693" y="0"/>
+                    <a:pt x="7660515" y="0"/>
+                  </a:lnTo>
+                  <a:lnTo>
+                    <a:pt x="7660515" y="0"/>
                   </a:lnTo>
                 </a:path>
               </a:pathLst>
@@ -2357,21 +2349,21 @@
           </p:nvSpPr>
           <p:spPr>
             <a:xfrm>
-              <a:off x="817517" y="3483591"/>
-              <a:ext cx="7799693" cy="0"/>
+              <a:off x="887106" y="2951293"/>
+              <a:ext cx="7660515" cy="0"/>
             </a:xfrm>
             <a:custGeom>
               <a:avLst/>
               <a:pathLst>
-                <a:path w="7799693" h="0">
+                <a:path w="7660515" h="0">
                   <a:moveTo>
                     <a:pt x="0" y="0"/>
                   </a:moveTo>
                   <a:lnTo>
-                    <a:pt x="7799693" y="0"/>
-                  </a:lnTo>
-                  <a:lnTo>
-                    <a:pt x="7799693" y="0"/>
+                    <a:pt x="7660515" y="0"/>
+                  </a:lnTo>
+                  <a:lnTo>
+                    <a:pt x="7660515" y="0"/>
                   </a:lnTo>
                 </a:path>
               </a:pathLst>
@@ -2400,21 +2392,21 @@
           </p:nvSpPr>
           <p:spPr>
             <a:xfrm>
-              <a:off x="817517" y="2654127"/>
-              <a:ext cx="7799693" cy="0"/>
+              <a:off x="887106" y="2651959"/>
+              <a:ext cx="7660515" cy="0"/>
             </a:xfrm>
             <a:custGeom>
               <a:avLst/>
               <a:pathLst>
-                <a:path w="7799693" h="0">
+                <a:path w="7660515" h="0">
                   <a:moveTo>
                     <a:pt x="0" y="0"/>
                   </a:moveTo>
                   <a:lnTo>
-                    <a:pt x="7799693" y="0"/>
-                  </a:lnTo>
-                  <a:lnTo>
-                    <a:pt x="7799693" y="0"/>
+                    <a:pt x="7660515" y="0"/>
+                  </a:lnTo>
+                  <a:lnTo>
+                    <a:pt x="7660515" y="0"/>
                   </a:lnTo>
                 </a:path>
               </a:pathLst>
@@ -2443,21 +2435,21 @@
           </p:nvSpPr>
           <p:spPr>
             <a:xfrm>
-              <a:off x="1467192" y="2073503"/>
-              <a:ext cx="0" cy="3649639"/>
+              <a:off x="887106" y="2352625"/>
+              <a:ext cx="7660515" cy="0"/>
             </a:xfrm>
             <a:custGeom>
               <a:avLst/>
               <a:pathLst>
-                <a:path w="0" h="3649639">
+                <a:path w="7660515" h="0">
                   <a:moveTo>
-                    <a:pt x="0" y="3649639"/>
+                    <a:pt x="0" y="0"/>
                   </a:moveTo>
                   <a:lnTo>
-                    <a:pt x="0" y="0"/>
-                  </a:lnTo>
-                  <a:lnTo>
-                    <a:pt x="0" y="0"/>
+                    <a:pt x="7660515" y="0"/>
+                  </a:lnTo>
+                  <a:lnTo>
+                    <a:pt x="7660515" y="0"/>
                   </a:lnTo>
                 </a:path>
               </a:pathLst>
@@ -2486,15 +2478,15 @@
           </p:nvSpPr>
           <p:spPr>
             <a:xfrm>
-              <a:off x="3538150" y="2073503"/>
-              <a:ext cx="0" cy="3649639"/>
+              <a:off x="1525188" y="2143092"/>
+              <a:ext cx="0" cy="1317069"/>
             </a:xfrm>
             <a:custGeom>
               <a:avLst/>
               <a:pathLst>
-                <a:path w="0" h="3649639">
+                <a:path w="0" h="1317069">
                   <a:moveTo>
-                    <a:pt x="0" y="3649639"/>
+                    <a:pt x="0" y="1317069"/>
                   </a:moveTo>
                   <a:lnTo>
                     <a:pt x="0" y="0"/>
@@ -2529,15 +2521,15 @@
           </p:nvSpPr>
           <p:spPr>
             <a:xfrm>
-              <a:off x="5609107" y="2073503"/>
-              <a:ext cx="0" cy="3649639"/>
+              <a:off x="3559192" y="2143092"/>
+              <a:ext cx="0" cy="1317069"/>
             </a:xfrm>
             <a:custGeom>
               <a:avLst/>
               <a:pathLst>
-                <a:path w="0" h="3649639">
+                <a:path w="0" h="1317069">
                   <a:moveTo>
-                    <a:pt x="0" y="3649639"/>
+                    <a:pt x="0" y="1317069"/>
                   </a:moveTo>
                   <a:lnTo>
                     <a:pt x="0" y="0"/>
@@ -2572,15 +2564,15 @@
           </p:nvSpPr>
           <p:spPr>
             <a:xfrm>
-              <a:off x="7680065" y="2073503"/>
-              <a:ext cx="0" cy="3649639"/>
+              <a:off x="5593195" y="2143092"/>
+              <a:ext cx="0" cy="1317069"/>
             </a:xfrm>
             <a:custGeom>
               <a:avLst/>
               <a:pathLst>
-                <a:path w="0" h="3649639">
+                <a:path w="0" h="1317069">
                   <a:moveTo>
-                    <a:pt x="0" y="3649639"/>
+                    <a:pt x="0" y="1317069"/>
                   </a:moveTo>
                   <a:lnTo>
                     <a:pt x="0" y="0"/>
@@ -2615,26 +2607,26 @@
           </p:nvSpPr>
           <p:spPr>
             <a:xfrm>
-              <a:off x="817517" y="5557249"/>
-              <a:ext cx="7799693" cy="0"/>
+              <a:off x="7627198" y="2143092"/>
+              <a:ext cx="0" cy="1317069"/>
             </a:xfrm>
             <a:custGeom>
               <a:avLst/>
               <a:pathLst>
-                <a:path w="7799693" h="0">
+                <a:path w="0" h="1317069">
                   <a:moveTo>
+                    <a:pt x="0" y="1317069"/>
+                  </a:moveTo>
+                  <a:lnTo>
                     <a:pt x="0" y="0"/>
-                  </a:moveTo>
-                  <a:lnTo>
-                    <a:pt x="7799693" y="0"/>
-                  </a:lnTo>
-                  <a:lnTo>
-                    <a:pt x="7799693" y="0"/>
+                  </a:lnTo>
+                  <a:lnTo>
+                    <a:pt x="0" y="0"/>
                   </a:lnTo>
                 </a:path>
               </a:pathLst>
             </a:custGeom>
-            <a:ln w="13550" cap="flat">
+            <a:ln w="6775" cap="flat">
               <a:solidFill>
                 <a:srgbClr val="EBEBEB">
                   <a:alpha val="100000"/>
@@ -2658,21 +2650,21 @@
           </p:nvSpPr>
           <p:spPr>
             <a:xfrm>
-              <a:off x="817517" y="4727786"/>
-              <a:ext cx="7799693" cy="0"/>
+              <a:off x="887106" y="3400294"/>
+              <a:ext cx="7660515" cy="0"/>
             </a:xfrm>
             <a:custGeom>
               <a:avLst/>
               <a:pathLst>
-                <a:path w="7799693" h="0">
+                <a:path w="7660515" h="0">
                   <a:moveTo>
                     <a:pt x="0" y="0"/>
                   </a:moveTo>
                   <a:lnTo>
-                    <a:pt x="7799693" y="0"/>
-                  </a:lnTo>
-                  <a:lnTo>
-                    <a:pt x="7799693" y="0"/>
+                    <a:pt x="7660515" y="0"/>
+                  </a:lnTo>
+                  <a:lnTo>
+                    <a:pt x="7660515" y="0"/>
                   </a:lnTo>
                 </a:path>
               </a:pathLst>
@@ -2701,21 +2693,21 @@
           </p:nvSpPr>
           <p:spPr>
             <a:xfrm>
-              <a:off x="817517" y="3898322"/>
-              <a:ext cx="7799693" cy="0"/>
+              <a:off x="887106" y="3100960"/>
+              <a:ext cx="7660515" cy="0"/>
             </a:xfrm>
             <a:custGeom>
               <a:avLst/>
               <a:pathLst>
-                <a:path w="7799693" h="0">
+                <a:path w="7660515" h="0">
                   <a:moveTo>
                     <a:pt x="0" y="0"/>
                   </a:moveTo>
                   <a:lnTo>
-                    <a:pt x="7799693" y="0"/>
-                  </a:lnTo>
-                  <a:lnTo>
-                    <a:pt x="7799693" y="0"/>
+                    <a:pt x="7660515" y="0"/>
+                  </a:lnTo>
+                  <a:lnTo>
+                    <a:pt x="7660515" y="0"/>
                   </a:lnTo>
                 </a:path>
               </a:pathLst>
@@ -2744,21 +2736,21 @@
           </p:nvSpPr>
           <p:spPr>
             <a:xfrm>
-              <a:off x="817517" y="3068859"/>
-              <a:ext cx="7799693" cy="0"/>
+              <a:off x="887106" y="2801626"/>
+              <a:ext cx="7660515" cy="0"/>
             </a:xfrm>
             <a:custGeom>
               <a:avLst/>
               <a:pathLst>
-                <a:path w="7799693" h="0">
+                <a:path w="7660515" h="0">
                   <a:moveTo>
                     <a:pt x="0" y="0"/>
                   </a:moveTo>
                   <a:lnTo>
-                    <a:pt x="7799693" y="0"/>
-                  </a:lnTo>
-                  <a:lnTo>
-                    <a:pt x="7799693" y="0"/>
+                    <a:pt x="7660515" y="0"/>
+                  </a:lnTo>
+                  <a:lnTo>
+                    <a:pt x="7660515" y="0"/>
                   </a:lnTo>
                 </a:path>
               </a:pathLst>
@@ -2787,21 +2779,21 @@
           </p:nvSpPr>
           <p:spPr>
             <a:xfrm>
-              <a:off x="817517" y="2239395"/>
-              <a:ext cx="7799693" cy="0"/>
+              <a:off x="887106" y="2502292"/>
+              <a:ext cx="7660515" cy="0"/>
             </a:xfrm>
             <a:custGeom>
               <a:avLst/>
               <a:pathLst>
-                <a:path w="7799693" h="0">
+                <a:path w="7660515" h="0">
                   <a:moveTo>
                     <a:pt x="0" y="0"/>
                   </a:moveTo>
                   <a:lnTo>
-                    <a:pt x="7799693" y="0"/>
-                  </a:lnTo>
-                  <a:lnTo>
-                    <a:pt x="7799693" y="0"/>
+                    <a:pt x="7660515" y="0"/>
+                  </a:lnTo>
+                  <a:lnTo>
+                    <a:pt x="7660515" y="0"/>
                   </a:lnTo>
                 </a:path>
               </a:pathLst>
@@ -2830,21 +2822,21 @@
           </p:nvSpPr>
           <p:spPr>
             <a:xfrm>
-              <a:off x="2502671" y="2073503"/>
-              <a:ext cx="0" cy="3649639"/>
+              <a:off x="887106" y="2202958"/>
+              <a:ext cx="7660515" cy="0"/>
             </a:xfrm>
             <a:custGeom>
               <a:avLst/>
               <a:pathLst>
-                <a:path w="0" h="3649639">
+                <a:path w="7660515" h="0">
                   <a:moveTo>
-                    <a:pt x="0" y="3649639"/>
+                    <a:pt x="0" y="0"/>
                   </a:moveTo>
                   <a:lnTo>
-                    <a:pt x="0" y="0"/>
-                  </a:lnTo>
-                  <a:lnTo>
-                    <a:pt x="0" y="0"/>
+                    <a:pt x="7660515" y="0"/>
+                  </a:lnTo>
+                  <a:lnTo>
+                    <a:pt x="7660515" y="0"/>
                   </a:lnTo>
                 </a:path>
               </a:pathLst>
@@ -2873,15 +2865,15 @@
           </p:nvSpPr>
           <p:spPr>
             <a:xfrm>
-              <a:off x="4573628" y="2073503"/>
-              <a:ext cx="0" cy="3649639"/>
+              <a:off x="2542190" y="2143092"/>
+              <a:ext cx="0" cy="1317069"/>
             </a:xfrm>
             <a:custGeom>
               <a:avLst/>
               <a:pathLst>
-                <a:path w="0" h="3649639">
+                <a:path w="0" h="1317069">
                   <a:moveTo>
-                    <a:pt x="0" y="3649639"/>
+                    <a:pt x="0" y="1317069"/>
                   </a:moveTo>
                   <a:lnTo>
                     <a:pt x="0" y="0"/>
@@ -2916,15 +2908,15 @@
           </p:nvSpPr>
           <p:spPr>
             <a:xfrm>
-              <a:off x="6644586" y="2073503"/>
-              <a:ext cx="0" cy="3649639"/>
+              <a:off x="4576193" y="2143092"/>
+              <a:ext cx="0" cy="1317069"/>
             </a:xfrm>
             <a:custGeom>
               <a:avLst/>
               <a:pathLst>
-                <a:path w="0" h="3649639">
+                <a:path w="0" h="1317069">
                   <a:moveTo>
-                    <a:pt x="0" y="3649639"/>
+                    <a:pt x="0" y="1317069"/>
                   </a:moveTo>
                   <a:lnTo>
                     <a:pt x="0" y="0"/>
@@ -2953,618 +2945,661 @@
         </p:sp>
         <p:sp>
           <p:nvSpPr>
-            <p:cNvPr id="20" name="pg20"/>
+            <p:cNvPr id="20" name="pl20"/>
             <p:cNvSpPr/>
             <p:nvPr/>
           </p:nvSpPr>
           <p:spPr>
             <a:xfrm>
-              <a:off x="1172049" y="3597718"/>
-              <a:ext cx="7090630" cy="1579408"/>
+              <a:off x="6610197" y="2143092"/>
+              <a:ext cx="0" cy="1317069"/>
             </a:xfrm>
             <a:custGeom>
               <a:avLst/>
               <a:pathLst>
-                <a:path w="7090630" h="1579408">
+                <a:path w="0" h="1317069">
                   <a:moveTo>
-                    <a:pt x="0" y="287957"/>
+                    <a:pt x="0" y="1317069"/>
                   </a:moveTo>
                   <a:lnTo>
-                    <a:pt x="71622" y="312777"/>
-                  </a:lnTo>
-                  <a:lnTo>
-                    <a:pt x="143245" y="337229"/>
-                  </a:lnTo>
-                  <a:lnTo>
-                    <a:pt x="214867" y="361318"/>
-                  </a:lnTo>
-                  <a:lnTo>
-                    <a:pt x="286490" y="385049"/>
-                  </a:lnTo>
-                  <a:lnTo>
-                    <a:pt x="358112" y="408428"/>
-                  </a:lnTo>
-                  <a:lnTo>
-                    <a:pt x="429735" y="431459"/>
-                  </a:lnTo>
-                  <a:lnTo>
-                    <a:pt x="501357" y="454149"/>
-                  </a:lnTo>
-                  <a:lnTo>
-                    <a:pt x="572980" y="476502"/>
-                  </a:lnTo>
-                  <a:lnTo>
-                    <a:pt x="644602" y="498522"/>
-                  </a:lnTo>
-                  <a:lnTo>
-                    <a:pt x="716225" y="520216"/>
-                  </a:lnTo>
-                  <a:lnTo>
-                    <a:pt x="787847" y="541588"/>
-                  </a:lnTo>
-                  <a:lnTo>
-                    <a:pt x="859470" y="562642"/>
-                  </a:lnTo>
-                  <a:lnTo>
-                    <a:pt x="931092" y="583384"/>
-                  </a:lnTo>
-                  <a:lnTo>
-                    <a:pt x="1002715" y="603818"/>
-                  </a:lnTo>
-                  <a:lnTo>
-                    <a:pt x="1074337" y="623948"/>
-                  </a:lnTo>
-                  <a:lnTo>
-                    <a:pt x="1145960" y="643779"/>
-                  </a:lnTo>
-                  <a:lnTo>
-                    <a:pt x="1217582" y="663316"/>
-                  </a:lnTo>
-                  <a:lnTo>
-                    <a:pt x="1289205" y="682563"/>
-                  </a:lnTo>
-                  <a:lnTo>
-                    <a:pt x="1360827" y="701524"/>
-                  </a:lnTo>
-                  <a:lnTo>
-                    <a:pt x="1432450" y="720204"/>
-                  </a:lnTo>
-                  <a:lnTo>
-                    <a:pt x="1504073" y="738606"/>
-                  </a:lnTo>
-                  <a:lnTo>
-                    <a:pt x="1575695" y="756735"/>
-                  </a:lnTo>
-                  <a:lnTo>
-                    <a:pt x="1647318" y="774595"/>
-                  </a:lnTo>
-                  <a:lnTo>
-                    <a:pt x="1718940" y="792189"/>
-                  </a:lnTo>
-                  <a:lnTo>
-                    <a:pt x="1790563" y="809523"/>
-                  </a:lnTo>
-                  <a:lnTo>
-                    <a:pt x="1862185" y="826598"/>
-                  </a:lnTo>
-                  <a:lnTo>
-                    <a:pt x="1933808" y="843421"/>
-                  </a:lnTo>
-                  <a:lnTo>
-                    <a:pt x="2005430" y="859993"/>
-                  </a:lnTo>
-                  <a:lnTo>
-                    <a:pt x="2077053" y="876320"/>
-                  </a:lnTo>
-                  <a:lnTo>
-                    <a:pt x="2148675" y="892404"/>
-                  </a:lnTo>
-                  <a:lnTo>
-                    <a:pt x="2220298" y="908249"/>
-                  </a:lnTo>
-                  <a:lnTo>
-                    <a:pt x="2291920" y="923859"/>
-                  </a:lnTo>
-                  <a:lnTo>
-                    <a:pt x="2363543" y="939237"/>
-                  </a:lnTo>
-                  <a:lnTo>
-                    <a:pt x="2435165" y="954387"/>
-                  </a:lnTo>
-                  <a:lnTo>
-                    <a:pt x="2506788" y="969312"/>
-                  </a:lnTo>
-                  <a:lnTo>
-                    <a:pt x="2578410" y="984015"/>
-                  </a:lnTo>
-                  <a:lnTo>
-                    <a:pt x="2650033" y="998500"/>
-                  </a:lnTo>
-                  <a:lnTo>
-                    <a:pt x="2721655" y="1012770"/>
-                  </a:lnTo>
-                  <a:lnTo>
-                    <a:pt x="2793278" y="1026828"/>
-                  </a:lnTo>
-                  <a:lnTo>
-                    <a:pt x="2864901" y="1040677"/>
-                  </a:lnTo>
-                  <a:lnTo>
-                    <a:pt x="2936523" y="1054321"/>
-                  </a:lnTo>
-                  <a:lnTo>
-                    <a:pt x="3008146" y="1067762"/>
-                  </a:lnTo>
-                  <a:lnTo>
-                    <a:pt x="3079768" y="1081004"/>
-                  </a:lnTo>
-                  <a:lnTo>
-                    <a:pt x="3151391" y="1094048"/>
-                  </a:lnTo>
-                  <a:lnTo>
-                    <a:pt x="3223013" y="1106900"/>
-                  </a:lnTo>
-                  <a:lnTo>
-                    <a:pt x="3294636" y="1119560"/>
-                  </a:lnTo>
-                  <a:lnTo>
-                    <a:pt x="3366258" y="1127898"/>
-                  </a:lnTo>
-                  <a:lnTo>
-                    <a:pt x="3437881" y="1114077"/>
-                  </a:lnTo>
-                  <a:lnTo>
-                    <a:pt x="3509503" y="1100027"/>
-                  </a:lnTo>
-                  <a:lnTo>
-                    <a:pt x="3581126" y="1085743"/>
-                  </a:lnTo>
-                  <a:lnTo>
-                    <a:pt x="3652748" y="1071222"/>
-                  </a:lnTo>
-                  <a:lnTo>
-                    <a:pt x="3724371" y="1056459"/>
-                  </a:lnTo>
-                  <a:lnTo>
-                    <a:pt x="3795993" y="1041451"/>
-                  </a:lnTo>
-                  <a:lnTo>
-                    <a:pt x="3867616" y="1026194"/>
-                  </a:lnTo>
-                  <a:lnTo>
-                    <a:pt x="3939238" y="1010683"/>
-                  </a:lnTo>
-                  <a:lnTo>
-                    <a:pt x="4010861" y="994915"/>
-                  </a:lnTo>
-                  <a:lnTo>
-                    <a:pt x="4082483" y="978884"/>
-                  </a:lnTo>
-                  <a:lnTo>
-                    <a:pt x="4154106" y="962587"/>
-                  </a:lnTo>
-                  <a:lnTo>
-                    <a:pt x="4225729" y="946019"/>
-                  </a:lnTo>
-                  <a:lnTo>
-                    <a:pt x="4297351" y="929176"/>
-                  </a:lnTo>
-                  <a:lnTo>
-                    <a:pt x="4368974" y="912053"/>
-                  </a:lnTo>
-                  <a:lnTo>
-                    <a:pt x="4440596" y="894645"/>
-                  </a:lnTo>
-                  <a:lnTo>
-                    <a:pt x="4512219" y="876948"/>
-                  </a:lnTo>
-                  <a:lnTo>
-                    <a:pt x="4583841" y="858957"/>
-                  </a:lnTo>
-                  <a:lnTo>
-                    <a:pt x="4655464" y="840667"/>
-                  </a:lnTo>
-                  <a:lnTo>
-                    <a:pt x="4727086" y="822073"/>
-                  </a:lnTo>
-                  <a:lnTo>
-                    <a:pt x="4798709" y="803170"/>
-                  </a:lnTo>
-                  <a:lnTo>
-                    <a:pt x="4870331" y="783953"/>
-                  </a:lnTo>
-                  <a:lnTo>
-                    <a:pt x="4941954" y="764416"/>
-                  </a:lnTo>
-                  <a:lnTo>
-                    <a:pt x="5013576" y="744555"/>
-                  </a:lnTo>
-                  <a:lnTo>
-                    <a:pt x="5085199" y="724363"/>
-                  </a:lnTo>
-                  <a:lnTo>
-                    <a:pt x="5156821" y="703837"/>
-                  </a:lnTo>
-                  <a:lnTo>
-                    <a:pt x="5228444" y="682969"/>
-                  </a:lnTo>
-                  <a:lnTo>
-                    <a:pt x="5300066" y="661754"/>
-                  </a:lnTo>
-                  <a:lnTo>
-                    <a:pt x="5371689" y="640187"/>
-                  </a:lnTo>
-                  <a:lnTo>
-                    <a:pt x="5443311" y="618261"/>
-                  </a:lnTo>
-                  <a:lnTo>
-                    <a:pt x="5514934" y="595971"/>
-                  </a:lnTo>
-                  <a:lnTo>
-                    <a:pt x="5586557" y="573310"/>
-                  </a:lnTo>
-                  <a:lnTo>
-                    <a:pt x="5658179" y="550273"/>
-                  </a:lnTo>
-                  <a:lnTo>
-                    <a:pt x="5729802" y="526853"/>
-                  </a:lnTo>
-                  <a:lnTo>
-                    <a:pt x="5801424" y="503044"/>
-                  </a:lnTo>
-                  <a:lnTo>
-                    <a:pt x="5873047" y="478839"/>
-                  </a:lnTo>
-                  <a:lnTo>
-                    <a:pt x="5944669" y="454232"/>
-                  </a:lnTo>
-                  <a:lnTo>
-                    <a:pt x="6016292" y="429216"/>
-                  </a:lnTo>
-                  <a:lnTo>
-                    <a:pt x="6087914" y="403784"/>
-                  </a:lnTo>
-                  <a:lnTo>
-                    <a:pt x="6159537" y="377929"/>
-                  </a:lnTo>
-                  <a:lnTo>
-                    <a:pt x="6231159" y="351645"/>
-                  </a:lnTo>
-                  <a:lnTo>
-                    <a:pt x="6302782" y="324924"/>
-                  </a:lnTo>
-                  <a:lnTo>
-                    <a:pt x="6374404" y="297759"/>
-                  </a:lnTo>
-                  <a:lnTo>
-                    <a:pt x="6446027" y="270143"/>
-                  </a:lnTo>
-                  <a:lnTo>
-                    <a:pt x="6517649" y="242067"/>
-                  </a:lnTo>
-                  <a:lnTo>
-                    <a:pt x="6589272" y="213525"/>
-                  </a:lnTo>
-                  <a:lnTo>
-                    <a:pt x="6660894" y="184509"/>
-                  </a:lnTo>
-                  <a:lnTo>
-                    <a:pt x="6732517" y="155010"/>
-                  </a:lnTo>
-                  <a:lnTo>
-                    <a:pt x="6804139" y="125022"/>
-                  </a:lnTo>
-                  <a:lnTo>
-                    <a:pt x="6875762" y="94535"/>
-                  </a:lnTo>
-                  <a:lnTo>
-                    <a:pt x="6947385" y="63541"/>
-                  </a:lnTo>
-                  <a:lnTo>
-                    <a:pt x="7019007" y="32032"/>
-                  </a:lnTo>
-                  <a:lnTo>
-                    <a:pt x="7090630" y="0"/>
-                  </a:lnTo>
-                  <a:lnTo>
-                    <a:pt x="7090630" y="1579408"/>
-                  </a:lnTo>
-                  <a:lnTo>
-                    <a:pt x="7019007" y="1573679"/>
-                  </a:lnTo>
-                  <a:lnTo>
-                    <a:pt x="6947385" y="1567863"/>
-                  </a:lnTo>
-                  <a:lnTo>
-                    <a:pt x="6875762" y="1561960"/>
-                  </a:lnTo>
-                  <a:lnTo>
-                    <a:pt x="6804139" y="1555967"/>
-                  </a:lnTo>
-                  <a:lnTo>
-                    <a:pt x="6732517" y="1549885"/>
-                  </a:lnTo>
-                  <a:lnTo>
-                    <a:pt x="6660894" y="1543710"/>
-                  </a:lnTo>
-                  <a:lnTo>
-                    <a:pt x="6589272" y="1537443"/>
-                  </a:lnTo>
-                  <a:lnTo>
-                    <a:pt x="6517649" y="1531081"/>
-                  </a:lnTo>
-                  <a:lnTo>
-                    <a:pt x="6446027" y="1524623"/>
-                  </a:lnTo>
-                  <a:lnTo>
-                    <a:pt x="6374404" y="1518068"/>
-                  </a:lnTo>
-                  <a:lnTo>
-                    <a:pt x="6302782" y="1511414"/>
-                  </a:lnTo>
-                  <a:lnTo>
-                    <a:pt x="6231159" y="1504660"/>
-                  </a:lnTo>
-                  <a:lnTo>
-                    <a:pt x="6159537" y="1497804"/>
-                  </a:lnTo>
-                  <a:lnTo>
-                    <a:pt x="6087914" y="1490845"/>
-                  </a:lnTo>
-                  <a:lnTo>
-                    <a:pt x="6016292" y="1483781"/>
-                  </a:lnTo>
-                  <a:lnTo>
-                    <a:pt x="5944669" y="1476610"/>
-                  </a:lnTo>
-                  <a:lnTo>
-                    <a:pt x="5873047" y="1469331"/>
-                  </a:lnTo>
-                  <a:lnTo>
-                    <a:pt x="5801424" y="1461943"/>
-                  </a:lnTo>
-                  <a:lnTo>
-                    <a:pt x="5729802" y="1454443"/>
-                  </a:lnTo>
-                  <a:lnTo>
-                    <a:pt x="5658179" y="1446830"/>
-                  </a:lnTo>
-                  <a:lnTo>
-                    <a:pt x="5586557" y="1439103"/>
-                  </a:lnTo>
-                  <a:lnTo>
-                    <a:pt x="5514934" y="1431259"/>
-                  </a:lnTo>
-                  <a:lnTo>
-                    <a:pt x="5443311" y="1423296"/>
-                  </a:lnTo>
-                  <a:lnTo>
-                    <a:pt x="5371689" y="1415214"/>
-                  </a:lnTo>
-                  <a:lnTo>
-                    <a:pt x="5300066" y="1407010"/>
-                  </a:lnTo>
-                  <a:lnTo>
-                    <a:pt x="5228444" y="1398682"/>
-                  </a:lnTo>
-                  <a:lnTo>
-                    <a:pt x="5156821" y="1390229"/>
-                  </a:lnTo>
-                  <a:lnTo>
-                    <a:pt x="5085199" y="1381648"/>
-                  </a:lnTo>
-                  <a:lnTo>
-                    <a:pt x="5013576" y="1372938"/>
-                  </a:lnTo>
-                  <a:lnTo>
-                    <a:pt x="4941954" y="1364097"/>
-                  </a:lnTo>
-                  <a:lnTo>
-                    <a:pt x="4870331" y="1355122"/>
-                  </a:lnTo>
-                  <a:lnTo>
-                    <a:pt x="4798709" y="1346012"/>
-                  </a:lnTo>
-                  <a:lnTo>
-                    <a:pt x="4727086" y="1336765"/>
-                  </a:lnTo>
-                  <a:lnTo>
-                    <a:pt x="4655464" y="1327379"/>
-                  </a:lnTo>
-                  <a:lnTo>
-                    <a:pt x="4583841" y="1317851"/>
-                  </a:lnTo>
-                  <a:lnTo>
-                    <a:pt x="4512219" y="1308179"/>
-                  </a:lnTo>
-                  <a:lnTo>
-                    <a:pt x="4440596" y="1298362"/>
-                  </a:lnTo>
-                  <a:lnTo>
-                    <a:pt x="4368974" y="1288396"/>
-                  </a:lnTo>
-                  <a:lnTo>
-                    <a:pt x="4297351" y="1278281"/>
-                  </a:lnTo>
-                  <a:lnTo>
-                    <a:pt x="4225729" y="1268013"/>
-                  </a:lnTo>
-                  <a:lnTo>
-                    <a:pt x="4154106" y="1257590"/>
-                  </a:lnTo>
-                  <a:lnTo>
-                    <a:pt x="4082483" y="1247010"/>
-                  </a:lnTo>
-                  <a:lnTo>
-                    <a:pt x="4010861" y="1236271"/>
-                  </a:lnTo>
-                  <a:lnTo>
-                    <a:pt x="3939238" y="1225370"/>
-                  </a:lnTo>
-                  <a:lnTo>
-                    <a:pt x="3867616" y="1214304"/>
-                  </a:lnTo>
-                  <a:lnTo>
-                    <a:pt x="3795993" y="1203072"/>
-                  </a:lnTo>
-                  <a:lnTo>
-                    <a:pt x="3724371" y="1191670"/>
-                  </a:lnTo>
-                  <a:lnTo>
-                    <a:pt x="3652748" y="1180097"/>
-                  </a:lnTo>
-                  <a:lnTo>
-                    <a:pt x="3581126" y="1168349"/>
-                  </a:lnTo>
-                  <a:lnTo>
-                    <a:pt x="3509503" y="1156424"/>
-                  </a:lnTo>
-                  <a:lnTo>
-                    <a:pt x="3437881" y="1144319"/>
-                  </a:lnTo>
-                  <a:lnTo>
-                    <a:pt x="3366258" y="1132032"/>
-                  </a:lnTo>
-                  <a:lnTo>
-                    <a:pt x="3294636" y="1141493"/>
-                  </a:lnTo>
-                  <a:lnTo>
-                    <a:pt x="3223013" y="1154865"/>
-                  </a:lnTo>
-                  <a:lnTo>
-                    <a:pt x="3151391" y="1168019"/>
-                  </a:lnTo>
-                  <a:lnTo>
-                    <a:pt x="3079768" y="1180958"/>
-                  </a:lnTo>
-                  <a:lnTo>
-                    <a:pt x="3008146" y="1193685"/>
-                  </a:lnTo>
-                  <a:lnTo>
-                    <a:pt x="2936523" y="1206204"/>
-                  </a:lnTo>
-                  <a:lnTo>
-                    <a:pt x="2864901" y="1218519"/>
-                  </a:lnTo>
-                  <a:lnTo>
-                    <a:pt x="2793278" y="1230632"/>
-                  </a:lnTo>
-                  <a:lnTo>
-                    <a:pt x="2721655" y="1242548"/>
-                  </a:lnTo>
-                  <a:lnTo>
-                    <a:pt x="2650033" y="1254268"/>
-                  </a:lnTo>
-                  <a:lnTo>
-                    <a:pt x="2578410" y="1265797"/>
-                  </a:lnTo>
-                  <a:lnTo>
-                    <a:pt x="2506788" y="1277138"/>
-                  </a:lnTo>
-                  <a:lnTo>
-                    <a:pt x="2435165" y="1288293"/>
-                  </a:lnTo>
-                  <a:lnTo>
-                    <a:pt x="2363543" y="1299266"/>
-                  </a:lnTo>
-                  <a:lnTo>
-                    <a:pt x="2291920" y="1310059"/>
-                  </a:lnTo>
-                  <a:lnTo>
-                    <a:pt x="2220298" y="1320676"/>
-                  </a:lnTo>
-                  <a:lnTo>
-                    <a:pt x="2148675" y="1331119"/>
-                  </a:lnTo>
-                  <a:lnTo>
-                    <a:pt x="2077053" y="1341392"/>
-                  </a:lnTo>
-                  <a:lnTo>
-                    <a:pt x="2005430" y="1351497"/>
-                  </a:lnTo>
-                  <a:lnTo>
-                    <a:pt x="1933808" y="1361436"/>
-                  </a:lnTo>
-                  <a:lnTo>
-                    <a:pt x="1862185" y="1371213"/>
-                  </a:lnTo>
-                  <a:lnTo>
-                    <a:pt x="1790563" y="1380830"/>
-                  </a:lnTo>
-                  <a:lnTo>
-                    <a:pt x="1718940" y="1390290"/>
-                  </a:lnTo>
-                  <a:lnTo>
-                    <a:pt x="1647318" y="1399596"/>
-                  </a:lnTo>
-                  <a:lnTo>
-                    <a:pt x="1575695" y="1408749"/>
-                  </a:lnTo>
-                  <a:lnTo>
-                    <a:pt x="1504073" y="1417753"/>
-                  </a:lnTo>
-                  <a:lnTo>
-                    <a:pt x="1432450" y="1426609"/>
-                  </a:lnTo>
-                  <a:lnTo>
-                    <a:pt x="1360827" y="1435321"/>
-                  </a:lnTo>
-                  <a:lnTo>
-                    <a:pt x="1289205" y="1443890"/>
-                  </a:lnTo>
-                  <a:lnTo>
-                    <a:pt x="1217582" y="1452319"/>
-                  </a:lnTo>
-                  <a:lnTo>
-                    <a:pt x="1145960" y="1460611"/>
-                  </a:lnTo>
-                  <a:lnTo>
-                    <a:pt x="1074337" y="1468767"/>
-                  </a:lnTo>
-                  <a:lnTo>
-                    <a:pt x="1002715" y="1476789"/>
-                  </a:lnTo>
-                  <a:lnTo>
-                    <a:pt x="931092" y="1484681"/>
-                  </a:lnTo>
-                  <a:lnTo>
-                    <a:pt x="859470" y="1492443"/>
-                  </a:lnTo>
-                  <a:lnTo>
-                    <a:pt x="787847" y="1500078"/>
-                  </a:lnTo>
-                  <a:lnTo>
-                    <a:pt x="716225" y="1507589"/>
-                  </a:lnTo>
-                  <a:lnTo>
-                    <a:pt x="644602" y="1514977"/>
-                  </a:lnTo>
-                  <a:lnTo>
-                    <a:pt x="572980" y="1522244"/>
-                  </a:lnTo>
-                  <a:lnTo>
-                    <a:pt x="501357" y="1529392"/>
-                  </a:lnTo>
-                  <a:lnTo>
-                    <a:pt x="429735" y="1536424"/>
-                  </a:lnTo>
-                  <a:lnTo>
-                    <a:pt x="358112" y="1543341"/>
-                  </a:lnTo>
-                  <a:lnTo>
-                    <a:pt x="286490" y="1550144"/>
-                  </a:lnTo>
-                  <a:lnTo>
-                    <a:pt x="214867" y="1556836"/>
-                  </a:lnTo>
-                  <a:lnTo>
-                    <a:pt x="143245" y="1563419"/>
-                  </a:lnTo>
-                  <a:lnTo>
-                    <a:pt x="71622" y="1569894"/>
-                  </a:lnTo>
-                  <a:lnTo>
-                    <a:pt x="0" y="1576264"/>
+                    <a:pt x="0" y="0"/>
+                  </a:lnTo>
+                  <a:lnTo>
+                    <a:pt x="0" y="0"/>
+                  </a:lnTo>
+                </a:path>
+              </a:pathLst>
+            </a:custGeom>
+            <a:ln w="13550" cap="flat">
+              <a:solidFill>
+                <a:srgbClr val="EBEBEB">
+                  <a:alpha val="100000"/>
+                </a:srgbClr>
+              </a:solidFill>
+              <a:prstDash val="solid"/>
+              <a:round/>
+            </a:ln>
+          </p:spPr>
+          <p:txBody>
+            <a:bodyPr/>
+            <a:lstStyle/>
+            <a:p/>
+          </p:txBody>
+        </p:sp>
+        <p:sp>
+          <p:nvSpPr>
+            <p:cNvPr id="21" name="pg21"/>
+            <p:cNvSpPr/>
+            <p:nvPr/>
+          </p:nvSpPr>
+          <p:spPr>
+            <a:xfrm>
+              <a:off x="1235312" y="2693145"/>
+              <a:ext cx="6964104" cy="569971"/>
+            </a:xfrm>
+            <a:custGeom>
+              <a:avLst/>
+              <a:pathLst>
+                <a:path w="6964104" h="569971">
+                  <a:moveTo>
+                    <a:pt x="0" y="103917"/>
+                  </a:moveTo>
+                  <a:lnTo>
+                    <a:pt x="70344" y="112874"/>
+                  </a:lnTo>
+                  <a:lnTo>
+                    <a:pt x="140688" y="121698"/>
+                  </a:lnTo>
+                  <a:lnTo>
+                    <a:pt x="211033" y="130391"/>
+                  </a:lnTo>
+                  <a:lnTo>
+                    <a:pt x="281377" y="138955"/>
+                  </a:lnTo>
+                  <a:lnTo>
+                    <a:pt x="351722" y="147392"/>
+                  </a:lnTo>
+                  <a:lnTo>
+                    <a:pt x="422066" y="155703"/>
+                  </a:lnTo>
+                  <a:lnTo>
+                    <a:pt x="492411" y="163891"/>
+                  </a:lnTo>
+                  <a:lnTo>
+                    <a:pt x="562755" y="171958"/>
+                  </a:lnTo>
+                  <a:lnTo>
+                    <a:pt x="633100" y="179905"/>
+                  </a:lnTo>
+                  <a:lnTo>
+                    <a:pt x="703444" y="187733"/>
+                  </a:lnTo>
+                  <a:lnTo>
+                    <a:pt x="773789" y="195446"/>
+                  </a:lnTo>
+                  <a:lnTo>
+                    <a:pt x="844133" y="203044"/>
+                  </a:lnTo>
+                  <a:lnTo>
+                    <a:pt x="914478" y="210529"/>
+                  </a:lnTo>
+                  <a:lnTo>
+                    <a:pt x="984822" y="217903"/>
+                  </a:lnTo>
+                  <a:lnTo>
+                    <a:pt x="1055167" y="225168"/>
+                  </a:lnTo>
+                  <a:lnTo>
+                    <a:pt x="1125511" y="232325"/>
+                  </a:lnTo>
+                  <a:lnTo>
+                    <a:pt x="1195856" y="239375"/>
+                  </a:lnTo>
+                  <a:lnTo>
+                    <a:pt x="1266200" y="246321"/>
+                  </a:lnTo>
+                  <a:lnTo>
+                    <a:pt x="1336545" y="253163"/>
+                  </a:lnTo>
+                  <a:lnTo>
+                    <a:pt x="1406889" y="259904"/>
+                  </a:lnTo>
+                  <a:lnTo>
+                    <a:pt x="1477234" y="266545"/>
+                  </a:lnTo>
+                  <a:lnTo>
+                    <a:pt x="1547578" y="273088"/>
+                  </a:lnTo>
+                  <a:lnTo>
+                    <a:pt x="1617923" y="279533"/>
+                  </a:lnTo>
+                  <a:lnTo>
+                    <a:pt x="1688267" y="285882"/>
+                  </a:lnTo>
+                  <a:lnTo>
+                    <a:pt x="1758612" y="292137"/>
+                  </a:lnTo>
+                  <a:lnTo>
+                    <a:pt x="1828956" y="298300"/>
+                  </a:lnTo>
+                  <a:lnTo>
+                    <a:pt x="1899301" y="304370"/>
+                  </a:lnTo>
+                  <a:lnTo>
+                    <a:pt x="1969645" y="310351"/>
+                  </a:lnTo>
+                  <a:lnTo>
+                    <a:pt x="2039990" y="316243"/>
+                  </a:lnTo>
+                  <a:lnTo>
+                    <a:pt x="2110334" y="322047"/>
+                  </a:lnTo>
+                  <a:lnTo>
+                    <a:pt x="2180679" y="327765"/>
+                  </a:lnTo>
+                  <a:lnTo>
+                    <a:pt x="2251023" y="333399"/>
+                  </a:lnTo>
+                  <a:lnTo>
+                    <a:pt x="2321368" y="338948"/>
+                  </a:lnTo>
+                  <a:lnTo>
+                    <a:pt x="2391712" y="344416"/>
+                  </a:lnTo>
+                  <a:lnTo>
+                    <a:pt x="2462057" y="349802"/>
+                  </a:lnTo>
+                  <a:lnTo>
+                    <a:pt x="2532401" y="355108"/>
+                  </a:lnTo>
+                  <a:lnTo>
+                    <a:pt x="2602746" y="360335"/>
+                  </a:lnTo>
+                  <a:lnTo>
+                    <a:pt x="2673090" y="365485"/>
+                  </a:lnTo>
+                  <a:lnTo>
+                    <a:pt x="2743435" y="370558"/>
+                  </a:lnTo>
+                  <a:lnTo>
+                    <a:pt x="2813779" y="375556"/>
+                  </a:lnTo>
+                  <a:lnTo>
+                    <a:pt x="2884124" y="380479"/>
+                  </a:lnTo>
+                  <a:lnTo>
+                    <a:pt x="2954468" y="385330"/>
+                  </a:lnTo>
+                  <a:lnTo>
+                    <a:pt x="3024813" y="390108"/>
+                  </a:lnTo>
+                  <a:lnTo>
+                    <a:pt x="3095157" y="394816"/>
+                  </a:lnTo>
+                  <a:lnTo>
+                    <a:pt x="3165502" y="399454"/>
+                  </a:lnTo>
+                  <a:lnTo>
+                    <a:pt x="3235846" y="404022"/>
+                  </a:lnTo>
+                  <a:lnTo>
+                    <a:pt x="3306191" y="407031"/>
+                  </a:lnTo>
+                  <a:lnTo>
+                    <a:pt x="3376535" y="402044"/>
+                  </a:lnTo>
+                  <a:lnTo>
+                    <a:pt x="3446880" y="396973"/>
+                  </a:lnTo>
+                  <a:lnTo>
+                    <a:pt x="3517224" y="391819"/>
+                  </a:lnTo>
+                  <a:lnTo>
+                    <a:pt x="3587569" y="386578"/>
+                  </a:lnTo>
+                  <a:lnTo>
+                    <a:pt x="3657913" y="381251"/>
+                  </a:lnTo>
+                  <a:lnTo>
+                    <a:pt x="3728257" y="375835"/>
+                  </a:lnTo>
+                  <a:lnTo>
+                    <a:pt x="3798602" y="370329"/>
+                  </a:lnTo>
+                  <a:lnTo>
+                    <a:pt x="3868946" y="364732"/>
+                  </a:lnTo>
+                  <a:lnTo>
+                    <a:pt x="3939291" y="359041"/>
+                  </a:lnTo>
+                  <a:lnTo>
+                    <a:pt x="4009635" y="353256"/>
+                  </a:lnTo>
+                  <a:lnTo>
+                    <a:pt x="4079980" y="347375"/>
+                  </a:lnTo>
+                  <a:lnTo>
+                    <a:pt x="4150324" y="341396"/>
+                  </a:lnTo>
+                  <a:lnTo>
+                    <a:pt x="4220669" y="335317"/>
+                  </a:lnTo>
+                  <a:lnTo>
+                    <a:pt x="4291013" y="329138"/>
+                  </a:lnTo>
+                  <a:lnTo>
+                    <a:pt x="4361358" y="322856"/>
+                  </a:lnTo>
+                  <a:lnTo>
+                    <a:pt x="4431702" y="316470"/>
+                  </a:lnTo>
+                  <a:lnTo>
+                    <a:pt x="4502047" y="309977"/>
+                  </a:lnTo>
+                  <a:lnTo>
+                    <a:pt x="4572391" y="303377"/>
+                  </a:lnTo>
+                  <a:lnTo>
+                    <a:pt x="4642736" y="296666"/>
+                  </a:lnTo>
+                  <a:lnTo>
+                    <a:pt x="4713080" y="289845"/>
+                  </a:lnTo>
+                  <a:lnTo>
+                    <a:pt x="4783425" y="282910"/>
+                  </a:lnTo>
+                  <a:lnTo>
+                    <a:pt x="4853769" y="275859"/>
+                  </a:lnTo>
+                  <a:lnTo>
+                    <a:pt x="4924114" y="268692"/>
+                  </a:lnTo>
+                  <a:lnTo>
+                    <a:pt x="4994458" y="261405"/>
+                  </a:lnTo>
+                  <a:lnTo>
+                    <a:pt x="5064803" y="253998"/>
+                  </a:lnTo>
+                  <a:lnTo>
+                    <a:pt x="5135147" y="246467"/>
+                  </a:lnTo>
+                  <a:lnTo>
+                    <a:pt x="5205492" y="238811"/>
+                  </a:lnTo>
+                  <a:lnTo>
+                    <a:pt x="5275836" y="231028"/>
+                  </a:lnTo>
+                  <a:lnTo>
+                    <a:pt x="5346181" y="223115"/>
+                  </a:lnTo>
+                  <a:lnTo>
+                    <a:pt x="5416525" y="215071"/>
+                  </a:lnTo>
+                  <a:lnTo>
+                    <a:pt x="5486870" y="206894"/>
+                  </a:lnTo>
+                  <a:lnTo>
+                    <a:pt x="5557214" y="198580"/>
+                  </a:lnTo>
+                  <a:lnTo>
+                    <a:pt x="5627559" y="190128"/>
+                  </a:lnTo>
+                  <a:lnTo>
+                    <a:pt x="5697903" y="181536"/>
+                  </a:lnTo>
+                  <a:lnTo>
+                    <a:pt x="5768248" y="172801"/>
+                  </a:lnTo>
+                  <a:lnTo>
+                    <a:pt x="5838592" y="163921"/>
+                  </a:lnTo>
+                  <a:lnTo>
+                    <a:pt x="5908937" y="154893"/>
+                  </a:lnTo>
+                  <a:lnTo>
+                    <a:pt x="5979281" y="145716"/>
+                  </a:lnTo>
+                  <a:lnTo>
+                    <a:pt x="6049626" y="136385"/>
+                  </a:lnTo>
+                  <a:lnTo>
+                    <a:pt x="6119970" y="126900"/>
+                  </a:lnTo>
+                  <a:lnTo>
+                    <a:pt x="6190315" y="117257"/>
+                  </a:lnTo>
+                  <a:lnTo>
+                    <a:pt x="6260659" y="107454"/>
+                  </a:lnTo>
+                  <a:lnTo>
+                    <a:pt x="6331004" y="97488"/>
+                  </a:lnTo>
+                  <a:lnTo>
+                    <a:pt x="6401348" y="87356"/>
+                  </a:lnTo>
+                  <a:lnTo>
+                    <a:pt x="6471693" y="77056"/>
+                  </a:lnTo>
+                  <a:lnTo>
+                    <a:pt x="6542037" y="66585"/>
+                  </a:lnTo>
+                  <a:lnTo>
+                    <a:pt x="6612382" y="55939"/>
+                  </a:lnTo>
+                  <a:lnTo>
+                    <a:pt x="6682726" y="45117"/>
+                  </a:lnTo>
+                  <a:lnTo>
+                    <a:pt x="6753071" y="34115"/>
+                  </a:lnTo>
+                  <a:lnTo>
+                    <a:pt x="6823415" y="22930"/>
+                  </a:lnTo>
+                  <a:lnTo>
+                    <a:pt x="6893760" y="11559"/>
+                  </a:lnTo>
+                  <a:lnTo>
+                    <a:pt x="6964104" y="0"/>
+                  </a:lnTo>
+                  <a:lnTo>
+                    <a:pt x="6964104" y="569971"/>
+                  </a:lnTo>
+                  <a:lnTo>
+                    <a:pt x="6893760" y="567903"/>
+                  </a:lnTo>
+                  <a:lnTo>
+                    <a:pt x="6823415" y="565805"/>
+                  </a:lnTo>
+                  <a:lnTo>
+                    <a:pt x="6753071" y="563674"/>
+                  </a:lnTo>
+                  <a:lnTo>
+                    <a:pt x="6682726" y="561512"/>
+                  </a:lnTo>
+                  <a:lnTo>
+                    <a:pt x="6612382" y="559317"/>
+                  </a:lnTo>
+                  <a:lnTo>
+                    <a:pt x="6542037" y="557088"/>
+                  </a:lnTo>
+                  <a:lnTo>
+                    <a:pt x="6471693" y="554827"/>
+                  </a:lnTo>
+                  <a:lnTo>
+                    <a:pt x="6401348" y="552531"/>
+                  </a:lnTo>
+                  <a:lnTo>
+                    <a:pt x="6331004" y="550200"/>
+                  </a:lnTo>
+                  <a:lnTo>
+                    <a:pt x="6260659" y="547835"/>
+                  </a:lnTo>
+                  <a:lnTo>
+                    <a:pt x="6190315" y="545434"/>
+                  </a:lnTo>
+                  <a:lnTo>
+                    <a:pt x="6119970" y="542996"/>
+                  </a:lnTo>
+                  <a:lnTo>
+                    <a:pt x="6049626" y="540522"/>
+                  </a:lnTo>
+                  <a:lnTo>
+                    <a:pt x="5979281" y="538011"/>
+                  </a:lnTo>
+                  <a:lnTo>
+                    <a:pt x="5908937" y="535461"/>
+                  </a:lnTo>
+                  <a:lnTo>
+                    <a:pt x="5838592" y="532874"/>
+                  </a:lnTo>
+                  <a:lnTo>
+                    <a:pt x="5768248" y="530247"/>
+                  </a:lnTo>
+                  <a:lnTo>
+                    <a:pt x="5697903" y="527581"/>
+                  </a:lnTo>
+                  <a:lnTo>
+                    <a:pt x="5627559" y="524874"/>
+                  </a:lnTo>
+                  <a:lnTo>
+                    <a:pt x="5557214" y="522127"/>
+                  </a:lnTo>
+                  <a:lnTo>
+                    <a:pt x="5486870" y="519338"/>
+                  </a:lnTo>
+                  <a:lnTo>
+                    <a:pt x="5416525" y="516507"/>
+                  </a:lnTo>
+                  <a:lnTo>
+                    <a:pt x="5346181" y="513634"/>
+                  </a:lnTo>
+                  <a:lnTo>
+                    <a:pt x="5275836" y="510717"/>
+                  </a:lnTo>
+                  <a:lnTo>
+                    <a:pt x="5205492" y="507756"/>
+                  </a:lnTo>
+                  <a:lnTo>
+                    <a:pt x="5135147" y="504751"/>
+                  </a:lnTo>
+                  <a:lnTo>
+                    <a:pt x="5064803" y="501701"/>
+                  </a:lnTo>
+                  <a:lnTo>
+                    <a:pt x="4994458" y="498604"/>
+                  </a:lnTo>
+                  <a:lnTo>
+                    <a:pt x="4924114" y="495461"/>
+                  </a:lnTo>
+                  <a:lnTo>
+                    <a:pt x="4853769" y="492270"/>
+                  </a:lnTo>
+                  <a:lnTo>
+                    <a:pt x="4783425" y="489031"/>
+                  </a:lnTo>
+                  <a:lnTo>
+                    <a:pt x="4713080" y="485744"/>
+                  </a:lnTo>
+                  <a:lnTo>
+                    <a:pt x="4642736" y="482407"/>
+                  </a:lnTo>
+                  <a:lnTo>
+                    <a:pt x="4572391" y="479019"/>
+                  </a:lnTo>
+                  <a:lnTo>
+                    <a:pt x="4502047" y="475581"/>
+                  </a:lnTo>
+                  <a:lnTo>
+                    <a:pt x="4431702" y="472091"/>
+                  </a:lnTo>
+                  <a:lnTo>
+                    <a:pt x="4361358" y="468548"/>
+                  </a:lnTo>
+                  <a:lnTo>
+                    <a:pt x="4291013" y="464952"/>
+                  </a:lnTo>
+                  <a:lnTo>
+                    <a:pt x="4220669" y="461301"/>
+                  </a:lnTo>
+                  <a:lnTo>
+                    <a:pt x="4150324" y="457596"/>
+                  </a:lnTo>
+                  <a:lnTo>
+                    <a:pt x="4079980" y="453834"/>
+                  </a:lnTo>
+                  <a:lnTo>
+                    <a:pt x="4009635" y="450016"/>
+                  </a:lnTo>
+                  <a:lnTo>
+                    <a:pt x="3939291" y="446141"/>
+                  </a:lnTo>
+                  <a:lnTo>
+                    <a:pt x="3868946" y="442207"/>
+                  </a:lnTo>
+                  <a:lnTo>
+                    <a:pt x="3798602" y="438213"/>
+                  </a:lnTo>
+                  <a:lnTo>
+                    <a:pt x="3728257" y="434160"/>
+                  </a:lnTo>
+                  <a:lnTo>
+                    <a:pt x="3657913" y="430045"/>
+                  </a:lnTo>
+                  <a:lnTo>
+                    <a:pt x="3587569" y="425869"/>
+                  </a:lnTo>
+                  <a:lnTo>
+                    <a:pt x="3517224" y="421629"/>
+                  </a:lnTo>
+                  <a:lnTo>
+                    <a:pt x="3446880" y="417326"/>
+                  </a:lnTo>
+                  <a:lnTo>
+                    <a:pt x="3376535" y="412958"/>
+                  </a:lnTo>
+                  <a:lnTo>
+                    <a:pt x="3306191" y="408523"/>
+                  </a:lnTo>
+                  <a:lnTo>
+                    <a:pt x="3235846" y="411937"/>
+                  </a:lnTo>
+                  <a:lnTo>
+                    <a:pt x="3165502" y="416763"/>
+                  </a:lnTo>
+                  <a:lnTo>
+                    <a:pt x="3095157" y="421510"/>
+                  </a:lnTo>
+                  <a:lnTo>
+                    <a:pt x="3024813" y="426180"/>
+                  </a:lnTo>
+                  <a:lnTo>
+                    <a:pt x="2954468" y="430773"/>
+                  </a:lnTo>
+                  <a:lnTo>
+                    <a:pt x="2884124" y="435290"/>
+                  </a:lnTo>
+                  <a:lnTo>
+                    <a:pt x="2813779" y="439735"/>
+                  </a:lnTo>
+                  <a:lnTo>
+                    <a:pt x="2743435" y="444106"/>
+                  </a:lnTo>
+                  <a:lnTo>
+                    <a:pt x="2673090" y="448406"/>
+                  </a:lnTo>
+                  <a:lnTo>
+                    <a:pt x="2602746" y="452636"/>
+                  </a:lnTo>
+                  <a:lnTo>
+                    <a:pt x="2532401" y="456796"/>
+                  </a:lnTo>
+                  <a:lnTo>
+                    <a:pt x="2462057" y="460889"/>
+                  </a:lnTo>
+                  <a:lnTo>
+                    <a:pt x="2391712" y="464914"/>
+                  </a:lnTo>
+                  <a:lnTo>
+                    <a:pt x="2321368" y="468874"/>
+                  </a:lnTo>
+                  <a:lnTo>
+                    <a:pt x="2251023" y="472769"/>
+                  </a:lnTo>
+                  <a:lnTo>
+                    <a:pt x="2180679" y="476601"/>
+                  </a:lnTo>
+                  <a:lnTo>
+                    <a:pt x="2110334" y="480369"/>
+                  </a:lnTo>
+                  <a:lnTo>
+                    <a:pt x="2039990" y="484076"/>
+                  </a:lnTo>
+                  <a:lnTo>
+                    <a:pt x="1969645" y="487723"/>
+                  </a:lnTo>
+                  <a:lnTo>
+                    <a:pt x="1899301" y="491310"/>
+                  </a:lnTo>
+                  <a:lnTo>
+                    <a:pt x="1828956" y="494838"/>
+                  </a:lnTo>
+                  <a:lnTo>
+                    <a:pt x="1758612" y="498309"/>
+                  </a:lnTo>
+                  <a:lnTo>
+                    <a:pt x="1688267" y="501723"/>
+                  </a:lnTo>
+                  <a:lnTo>
+                    <a:pt x="1617923" y="505081"/>
+                  </a:lnTo>
+                  <a:lnTo>
+                    <a:pt x="1547578" y="508384"/>
+                  </a:lnTo>
+                  <a:lnTo>
+                    <a:pt x="1477234" y="511633"/>
+                  </a:lnTo>
+                  <a:lnTo>
+                    <a:pt x="1406889" y="514829"/>
+                  </a:lnTo>
+                  <a:lnTo>
+                    <a:pt x="1336545" y="517973"/>
+                  </a:lnTo>
+                  <a:lnTo>
+                    <a:pt x="1266200" y="521066"/>
+                  </a:lnTo>
+                  <a:lnTo>
+                    <a:pt x="1195856" y="524108"/>
+                  </a:lnTo>
+                  <a:lnTo>
+                    <a:pt x="1125511" y="527100"/>
+                  </a:lnTo>
+                  <a:lnTo>
+                    <a:pt x="1055167" y="530043"/>
+                  </a:lnTo>
+                  <a:lnTo>
+                    <a:pt x="984822" y="532938"/>
+                  </a:lnTo>
+                  <a:lnTo>
+                    <a:pt x="914478" y="535786"/>
+                  </a:lnTo>
+                  <a:lnTo>
+                    <a:pt x="844133" y="538587"/>
+                  </a:lnTo>
+                  <a:lnTo>
+                    <a:pt x="773789" y="541343"/>
+                  </a:lnTo>
+                  <a:lnTo>
+                    <a:pt x="703444" y="544053"/>
+                  </a:lnTo>
+                  <a:lnTo>
+                    <a:pt x="633100" y="546719"/>
+                  </a:lnTo>
+                  <a:lnTo>
+                    <a:pt x="562755" y="549342"/>
+                  </a:lnTo>
+                  <a:lnTo>
+                    <a:pt x="492411" y="551921"/>
+                  </a:lnTo>
+                  <a:lnTo>
+                    <a:pt x="422066" y="554459"/>
+                  </a:lnTo>
+                  <a:lnTo>
+                    <a:pt x="351722" y="556955"/>
+                  </a:lnTo>
+                  <a:lnTo>
+                    <a:pt x="281377" y="559410"/>
+                  </a:lnTo>
+                  <a:lnTo>
+                    <a:pt x="211033" y="561825"/>
+                  </a:lnTo>
+                  <a:lnTo>
+                    <a:pt x="140688" y="564201"/>
+                  </a:lnTo>
+                  <a:lnTo>
+                    <a:pt x="70344" y="566538"/>
+                  </a:lnTo>
+                  <a:lnTo>
+                    <a:pt x="0" y="568836"/>
                   </a:lnTo>
                   <a:close/>
                 </a:path>
@@ -3584,643 +3619,318 @@
         </p:sp>
         <p:sp>
           <p:nvSpPr>
-            <p:cNvPr id="21" name="pl21"/>
-            <p:cNvSpPr/>
-            <p:nvPr/>
-          </p:nvSpPr>
-          <p:spPr>
-            <a:xfrm>
-              <a:off x="1172049" y="3597718"/>
-              <a:ext cx="7090630" cy="1127898"/>
-            </a:xfrm>
-            <a:custGeom>
-              <a:avLst/>
-              <a:pathLst>
-                <a:path w="7090630" h="1127898">
-                  <a:moveTo>
-                    <a:pt x="0" y="287957"/>
-                  </a:moveTo>
-                  <a:lnTo>
-                    <a:pt x="71622" y="312777"/>
-                  </a:lnTo>
-                  <a:lnTo>
-                    <a:pt x="143245" y="337229"/>
-                  </a:lnTo>
-                  <a:lnTo>
-                    <a:pt x="214867" y="361318"/>
-                  </a:lnTo>
-                  <a:lnTo>
-                    <a:pt x="286490" y="385049"/>
-                  </a:lnTo>
-                  <a:lnTo>
-                    <a:pt x="358112" y="408428"/>
-                  </a:lnTo>
-                  <a:lnTo>
-                    <a:pt x="429735" y="431459"/>
-                  </a:lnTo>
-                  <a:lnTo>
-                    <a:pt x="501357" y="454149"/>
-                  </a:lnTo>
-                  <a:lnTo>
-                    <a:pt x="572980" y="476502"/>
-                  </a:lnTo>
-                  <a:lnTo>
-                    <a:pt x="644602" y="498522"/>
-                  </a:lnTo>
-                  <a:lnTo>
-                    <a:pt x="716225" y="520216"/>
-                  </a:lnTo>
-                  <a:lnTo>
-                    <a:pt x="787847" y="541588"/>
-                  </a:lnTo>
-                  <a:lnTo>
-                    <a:pt x="859470" y="562642"/>
-                  </a:lnTo>
-                  <a:lnTo>
-                    <a:pt x="931092" y="583384"/>
-                  </a:lnTo>
-                  <a:lnTo>
-                    <a:pt x="1002715" y="603818"/>
-                  </a:lnTo>
-                  <a:lnTo>
-                    <a:pt x="1074337" y="623948"/>
-                  </a:lnTo>
-                  <a:lnTo>
-                    <a:pt x="1145960" y="643779"/>
-                  </a:lnTo>
-                  <a:lnTo>
-                    <a:pt x="1217582" y="663316"/>
-                  </a:lnTo>
-                  <a:lnTo>
-                    <a:pt x="1289205" y="682563"/>
-                  </a:lnTo>
-                  <a:lnTo>
-                    <a:pt x="1360827" y="701524"/>
-                  </a:lnTo>
-                  <a:lnTo>
-                    <a:pt x="1432450" y="720204"/>
-                  </a:lnTo>
-                  <a:lnTo>
-                    <a:pt x="1504073" y="738606"/>
-                  </a:lnTo>
-                  <a:lnTo>
-                    <a:pt x="1575695" y="756735"/>
-                  </a:lnTo>
-                  <a:lnTo>
-                    <a:pt x="1647318" y="774595"/>
-                  </a:lnTo>
-                  <a:lnTo>
-                    <a:pt x="1718940" y="792189"/>
-                  </a:lnTo>
-                  <a:lnTo>
-                    <a:pt x="1790563" y="809523"/>
-                  </a:lnTo>
-                  <a:lnTo>
-                    <a:pt x="1862185" y="826598"/>
-                  </a:lnTo>
-                  <a:lnTo>
-                    <a:pt x="1933808" y="843421"/>
-                  </a:lnTo>
-                  <a:lnTo>
-                    <a:pt x="2005430" y="859993"/>
-                  </a:lnTo>
-                  <a:lnTo>
-                    <a:pt x="2077053" y="876320"/>
-                  </a:lnTo>
-                  <a:lnTo>
-                    <a:pt x="2148675" y="892404"/>
-                  </a:lnTo>
-                  <a:lnTo>
-                    <a:pt x="2220298" y="908249"/>
-                  </a:lnTo>
-                  <a:lnTo>
-                    <a:pt x="2291920" y="923859"/>
-                  </a:lnTo>
-                  <a:lnTo>
-                    <a:pt x="2363543" y="939237"/>
-                  </a:lnTo>
-                  <a:lnTo>
-                    <a:pt x="2435165" y="954387"/>
-                  </a:lnTo>
-                  <a:lnTo>
-                    <a:pt x="2506788" y="969312"/>
-                  </a:lnTo>
-                  <a:lnTo>
-                    <a:pt x="2578410" y="984015"/>
-                  </a:lnTo>
-                  <a:lnTo>
-                    <a:pt x="2650033" y="998500"/>
-                  </a:lnTo>
-                  <a:lnTo>
-                    <a:pt x="2721655" y="1012770"/>
-                  </a:lnTo>
-                  <a:lnTo>
-                    <a:pt x="2793278" y="1026828"/>
-                  </a:lnTo>
-                  <a:lnTo>
-                    <a:pt x="2864901" y="1040677"/>
-                  </a:lnTo>
-                  <a:lnTo>
-                    <a:pt x="2936523" y="1054321"/>
-                  </a:lnTo>
-                  <a:lnTo>
-                    <a:pt x="3008146" y="1067762"/>
-                  </a:lnTo>
-                  <a:lnTo>
-                    <a:pt x="3079768" y="1081004"/>
-                  </a:lnTo>
-                  <a:lnTo>
-                    <a:pt x="3151391" y="1094048"/>
-                  </a:lnTo>
-                  <a:lnTo>
-                    <a:pt x="3223013" y="1106900"/>
-                  </a:lnTo>
-                  <a:lnTo>
-                    <a:pt x="3294636" y="1119560"/>
-                  </a:lnTo>
-                  <a:lnTo>
-                    <a:pt x="3366258" y="1127898"/>
-                  </a:lnTo>
-                  <a:lnTo>
-                    <a:pt x="3437881" y="1114077"/>
-                  </a:lnTo>
-                  <a:lnTo>
-                    <a:pt x="3509503" y="1100027"/>
-                  </a:lnTo>
-                  <a:lnTo>
-                    <a:pt x="3581126" y="1085743"/>
-                  </a:lnTo>
-                  <a:lnTo>
-                    <a:pt x="3652748" y="1071222"/>
-                  </a:lnTo>
-                  <a:lnTo>
-                    <a:pt x="3724371" y="1056459"/>
-                  </a:lnTo>
-                  <a:lnTo>
-                    <a:pt x="3795993" y="1041451"/>
-                  </a:lnTo>
-                  <a:lnTo>
-                    <a:pt x="3867616" y="1026194"/>
-                  </a:lnTo>
-                  <a:lnTo>
-                    <a:pt x="3939238" y="1010683"/>
-                  </a:lnTo>
-                  <a:lnTo>
-                    <a:pt x="4010861" y="994915"/>
-                  </a:lnTo>
-                  <a:lnTo>
-                    <a:pt x="4082483" y="978884"/>
-                  </a:lnTo>
-                  <a:lnTo>
-                    <a:pt x="4154106" y="962587"/>
-                  </a:lnTo>
-                  <a:lnTo>
-                    <a:pt x="4225729" y="946019"/>
-                  </a:lnTo>
-                  <a:lnTo>
-                    <a:pt x="4297351" y="929176"/>
-                  </a:lnTo>
-                  <a:lnTo>
-                    <a:pt x="4368974" y="912053"/>
-                  </a:lnTo>
-                  <a:lnTo>
-                    <a:pt x="4440596" y="894645"/>
-                  </a:lnTo>
-                  <a:lnTo>
-                    <a:pt x="4512219" y="876948"/>
-                  </a:lnTo>
-                  <a:lnTo>
-                    <a:pt x="4583841" y="858957"/>
-                  </a:lnTo>
-                  <a:lnTo>
-                    <a:pt x="4655464" y="840667"/>
-                  </a:lnTo>
-                  <a:lnTo>
-                    <a:pt x="4727086" y="822073"/>
-                  </a:lnTo>
-                  <a:lnTo>
-                    <a:pt x="4798709" y="803170"/>
-                  </a:lnTo>
-                  <a:lnTo>
-                    <a:pt x="4870331" y="783953"/>
-                  </a:lnTo>
-                  <a:lnTo>
-                    <a:pt x="4941954" y="764416"/>
-                  </a:lnTo>
-                  <a:lnTo>
-                    <a:pt x="5013576" y="744555"/>
-                  </a:lnTo>
-                  <a:lnTo>
-                    <a:pt x="5085199" y="724363"/>
-                  </a:lnTo>
-                  <a:lnTo>
-                    <a:pt x="5156821" y="703837"/>
-                  </a:lnTo>
-                  <a:lnTo>
-                    <a:pt x="5228444" y="682969"/>
-                  </a:lnTo>
-                  <a:lnTo>
-                    <a:pt x="5300066" y="661754"/>
-                  </a:lnTo>
-                  <a:lnTo>
-                    <a:pt x="5371689" y="640187"/>
-                  </a:lnTo>
-                  <a:lnTo>
-                    <a:pt x="5443311" y="618261"/>
-                  </a:lnTo>
-                  <a:lnTo>
-                    <a:pt x="5514934" y="595971"/>
-                  </a:lnTo>
-                  <a:lnTo>
-                    <a:pt x="5586557" y="573310"/>
-                  </a:lnTo>
-                  <a:lnTo>
-                    <a:pt x="5658179" y="550273"/>
-                  </a:lnTo>
-                  <a:lnTo>
-                    <a:pt x="5729802" y="526853"/>
-                  </a:lnTo>
-                  <a:lnTo>
-                    <a:pt x="5801424" y="503044"/>
-                  </a:lnTo>
-                  <a:lnTo>
-                    <a:pt x="5873047" y="478839"/>
-                  </a:lnTo>
-                  <a:lnTo>
-                    <a:pt x="5944669" y="454232"/>
-                  </a:lnTo>
-                  <a:lnTo>
-                    <a:pt x="6016292" y="429216"/>
-                  </a:lnTo>
-                  <a:lnTo>
-                    <a:pt x="6087914" y="403784"/>
-                  </a:lnTo>
-                  <a:lnTo>
-                    <a:pt x="6159537" y="377929"/>
-                  </a:lnTo>
-                  <a:lnTo>
-                    <a:pt x="6231159" y="351645"/>
-                  </a:lnTo>
-                  <a:lnTo>
-                    <a:pt x="6302782" y="324924"/>
-                  </a:lnTo>
-                  <a:lnTo>
-                    <a:pt x="6374404" y="297759"/>
-                  </a:lnTo>
-                  <a:lnTo>
-                    <a:pt x="6446027" y="270143"/>
-                  </a:lnTo>
-                  <a:lnTo>
-                    <a:pt x="6517649" y="242067"/>
-                  </a:lnTo>
-                  <a:lnTo>
-                    <a:pt x="6589272" y="213525"/>
-                  </a:lnTo>
-                  <a:lnTo>
-                    <a:pt x="6660894" y="184509"/>
-                  </a:lnTo>
-                  <a:lnTo>
-                    <a:pt x="6732517" y="155010"/>
-                  </a:lnTo>
-                  <a:lnTo>
-                    <a:pt x="6804139" y="125022"/>
-                  </a:lnTo>
-                  <a:lnTo>
-                    <a:pt x="6875762" y="94535"/>
-                  </a:lnTo>
-                  <a:lnTo>
-                    <a:pt x="6947385" y="63541"/>
-                  </a:lnTo>
-                  <a:lnTo>
-                    <a:pt x="7019007" y="32032"/>
-                  </a:lnTo>
-                  <a:lnTo>
-                    <a:pt x="7090630" y="0"/>
-                  </a:lnTo>
-                </a:path>
-              </a:pathLst>
-            </a:custGeom>
-          </p:spPr>
-          <p:txBody>
-            <a:bodyPr/>
-            <a:lstStyle/>
-            <a:p/>
-          </p:txBody>
-        </p:sp>
-        <p:sp>
-          <p:nvSpPr>
             <p:cNvPr id="22" name="pl22"/>
             <p:cNvSpPr/>
             <p:nvPr/>
           </p:nvSpPr>
           <p:spPr>
             <a:xfrm>
-              <a:off x="1172049" y="4729750"/>
-              <a:ext cx="7090630" cy="447375"/>
+              <a:off x="1235312" y="2693145"/>
+              <a:ext cx="6964104" cy="407031"/>
             </a:xfrm>
             <a:custGeom>
               <a:avLst/>
               <a:pathLst>
-                <a:path w="7090630" h="447375">
+                <a:path w="6964104" h="407031">
                   <a:moveTo>
-                    <a:pt x="7090630" y="447375"/>
+                    <a:pt x="0" y="103917"/>
                   </a:moveTo>
                   <a:lnTo>
-                    <a:pt x="7019007" y="441646"/>
-                  </a:lnTo>
-                  <a:lnTo>
-                    <a:pt x="6947385" y="435830"/>
-                  </a:lnTo>
-                  <a:lnTo>
-                    <a:pt x="6875762" y="429927"/>
-                  </a:lnTo>
-                  <a:lnTo>
-                    <a:pt x="6804139" y="423935"/>
-                  </a:lnTo>
-                  <a:lnTo>
-                    <a:pt x="6732517" y="417852"/>
-                  </a:lnTo>
-                  <a:lnTo>
-                    <a:pt x="6660894" y="411678"/>
-                  </a:lnTo>
-                  <a:lnTo>
-                    <a:pt x="6589272" y="405410"/>
-                  </a:lnTo>
-                  <a:lnTo>
-                    <a:pt x="6517649" y="399048"/>
-                  </a:lnTo>
-                  <a:lnTo>
-                    <a:pt x="6446027" y="392591"/>
-                  </a:lnTo>
-                  <a:lnTo>
-                    <a:pt x="6374404" y="386036"/>
-                  </a:lnTo>
-                  <a:lnTo>
-                    <a:pt x="6302782" y="379382"/>
-                  </a:lnTo>
-                  <a:lnTo>
-                    <a:pt x="6231159" y="372628"/>
-                  </a:lnTo>
-                  <a:lnTo>
-                    <a:pt x="6159537" y="365772"/>
-                  </a:lnTo>
-                  <a:lnTo>
-                    <a:pt x="6087914" y="358812"/>
-                  </a:lnTo>
-                  <a:lnTo>
-                    <a:pt x="6016292" y="351748"/>
-                  </a:lnTo>
-                  <a:lnTo>
-                    <a:pt x="5944669" y="344578"/>
-                  </a:lnTo>
-                  <a:lnTo>
-                    <a:pt x="5873047" y="337299"/>
-                  </a:lnTo>
-                  <a:lnTo>
-                    <a:pt x="5801424" y="329910"/>
-                  </a:lnTo>
-                  <a:lnTo>
-                    <a:pt x="5729802" y="322411"/>
-                  </a:lnTo>
-                  <a:lnTo>
-                    <a:pt x="5658179" y="314798"/>
-                  </a:lnTo>
-                  <a:lnTo>
-                    <a:pt x="5586557" y="307070"/>
-                  </a:lnTo>
-                  <a:lnTo>
-                    <a:pt x="5514934" y="299226"/>
-                  </a:lnTo>
-                  <a:lnTo>
-                    <a:pt x="5443311" y="291264"/>
-                  </a:lnTo>
-                  <a:lnTo>
-                    <a:pt x="5371689" y="283181"/>
-                  </a:lnTo>
-                  <a:lnTo>
-                    <a:pt x="5300066" y="274977"/>
-                  </a:lnTo>
-                  <a:lnTo>
-                    <a:pt x="5228444" y="266650"/>
-                  </a:lnTo>
-                  <a:lnTo>
-                    <a:pt x="5156821" y="258196"/>
-                  </a:lnTo>
-                  <a:lnTo>
-                    <a:pt x="5085199" y="249616"/>
-                  </a:lnTo>
-                  <a:lnTo>
-                    <a:pt x="5013576" y="240906"/>
-                  </a:lnTo>
-                  <a:lnTo>
-                    <a:pt x="4941954" y="232064"/>
-                  </a:lnTo>
-                  <a:lnTo>
-                    <a:pt x="4870331" y="223090"/>
-                  </a:lnTo>
-                  <a:lnTo>
-                    <a:pt x="4798709" y="213980"/>
-                  </a:lnTo>
-                  <a:lnTo>
-                    <a:pt x="4727086" y="204733"/>
-                  </a:lnTo>
-                  <a:lnTo>
-                    <a:pt x="4655464" y="195346"/>
-                  </a:lnTo>
-                  <a:lnTo>
-                    <a:pt x="4583841" y="185818"/>
-                  </a:lnTo>
-                  <a:lnTo>
-                    <a:pt x="4512219" y="176147"/>
-                  </a:lnTo>
-                  <a:lnTo>
-                    <a:pt x="4440596" y="166329"/>
-                  </a:lnTo>
-                  <a:lnTo>
-                    <a:pt x="4368974" y="156364"/>
-                  </a:lnTo>
-                  <a:lnTo>
-                    <a:pt x="4297351" y="146248"/>
-                  </a:lnTo>
-                  <a:lnTo>
-                    <a:pt x="4225729" y="135980"/>
-                  </a:lnTo>
-                  <a:lnTo>
-                    <a:pt x="4154106" y="125557"/>
-                  </a:lnTo>
-                  <a:lnTo>
-                    <a:pt x="4082483" y="114978"/>
-                  </a:lnTo>
-                  <a:lnTo>
-                    <a:pt x="4010861" y="104238"/>
-                  </a:lnTo>
-                  <a:lnTo>
-                    <a:pt x="3939238" y="93337"/>
-                  </a:lnTo>
-                  <a:lnTo>
-                    <a:pt x="3867616" y="82271"/>
-                  </a:lnTo>
-                  <a:lnTo>
-                    <a:pt x="3795993" y="71039"/>
-                  </a:lnTo>
-                  <a:lnTo>
-                    <a:pt x="3724371" y="59638"/>
-                  </a:lnTo>
-                  <a:lnTo>
-                    <a:pt x="3652748" y="48064"/>
-                  </a:lnTo>
-                  <a:lnTo>
-                    <a:pt x="3581126" y="36316"/>
-                  </a:lnTo>
-                  <a:lnTo>
-                    <a:pt x="3509503" y="24391"/>
-                  </a:lnTo>
-                  <a:lnTo>
-                    <a:pt x="3437881" y="12287"/>
-                  </a:lnTo>
-                  <a:lnTo>
-                    <a:pt x="3366258" y="0"/>
-                  </a:lnTo>
-                  <a:lnTo>
-                    <a:pt x="3294636" y="9460"/>
-                  </a:lnTo>
-                  <a:lnTo>
-                    <a:pt x="3223013" y="22832"/>
-                  </a:lnTo>
-                  <a:lnTo>
-                    <a:pt x="3151391" y="35986"/>
-                  </a:lnTo>
-                  <a:lnTo>
-                    <a:pt x="3079768" y="48925"/>
-                  </a:lnTo>
-                  <a:lnTo>
-                    <a:pt x="3008146" y="61652"/>
-                  </a:lnTo>
-                  <a:lnTo>
-                    <a:pt x="2936523" y="74172"/>
-                  </a:lnTo>
-                  <a:lnTo>
-                    <a:pt x="2864901" y="86486"/>
-                  </a:lnTo>
-                  <a:lnTo>
-                    <a:pt x="2793278" y="98600"/>
-                  </a:lnTo>
-                  <a:lnTo>
-                    <a:pt x="2721655" y="110515"/>
-                  </a:lnTo>
-                  <a:lnTo>
-                    <a:pt x="2650033" y="122236"/>
-                  </a:lnTo>
-                  <a:lnTo>
-                    <a:pt x="2578410" y="133765"/>
-                  </a:lnTo>
-                  <a:lnTo>
-                    <a:pt x="2506788" y="145105"/>
-                  </a:lnTo>
-                  <a:lnTo>
-                    <a:pt x="2435165" y="156260"/>
-                  </a:lnTo>
-                  <a:lnTo>
-                    <a:pt x="2363543" y="167233"/>
-                  </a:lnTo>
-                  <a:lnTo>
-                    <a:pt x="2291920" y="178026"/>
-                  </a:lnTo>
-                  <a:lnTo>
-                    <a:pt x="2220298" y="188643"/>
-                  </a:lnTo>
-                  <a:lnTo>
-                    <a:pt x="2148675" y="199087"/>
-                  </a:lnTo>
-                  <a:lnTo>
-                    <a:pt x="2077053" y="209359"/>
-                  </a:lnTo>
-                  <a:lnTo>
-                    <a:pt x="2005430" y="219464"/>
-                  </a:lnTo>
-                  <a:lnTo>
-                    <a:pt x="1933808" y="229403"/>
-                  </a:lnTo>
-                  <a:lnTo>
-                    <a:pt x="1862185" y="239181"/>
-                  </a:lnTo>
-                  <a:lnTo>
-                    <a:pt x="1790563" y="248798"/>
-                  </a:lnTo>
-                  <a:lnTo>
-                    <a:pt x="1718940" y="258258"/>
-                  </a:lnTo>
-                  <a:lnTo>
-                    <a:pt x="1647318" y="267563"/>
-                  </a:lnTo>
-                  <a:lnTo>
-                    <a:pt x="1575695" y="276716"/>
-                  </a:lnTo>
-                  <a:lnTo>
-                    <a:pt x="1504073" y="285720"/>
-                  </a:lnTo>
-                  <a:lnTo>
-                    <a:pt x="1432450" y="294577"/>
-                  </a:lnTo>
-                  <a:lnTo>
-                    <a:pt x="1360827" y="303288"/>
-                  </a:lnTo>
-                  <a:lnTo>
-                    <a:pt x="1289205" y="311858"/>
-                  </a:lnTo>
-                  <a:lnTo>
-                    <a:pt x="1217582" y="320287"/>
-                  </a:lnTo>
-                  <a:lnTo>
-                    <a:pt x="1145960" y="328578"/>
-                  </a:lnTo>
-                  <a:lnTo>
-                    <a:pt x="1074337" y="336734"/>
-                  </a:lnTo>
-                  <a:lnTo>
-                    <a:pt x="1002715" y="344756"/>
-                  </a:lnTo>
-                  <a:lnTo>
-                    <a:pt x="931092" y="352648"/>
-                  </a:lnTo>
-                  <a:lnTo>
-                    <a:pt x="859470" y="360410"/>
-                  </a:lnTo>
-                  <a:lnTo>
-                    <a:pt x="787847" y="368046"/>
-                  </a:lnTo>
-                  <a:lnTo>
-                    <a:pt x="716225" y="375556"/>
-                  </a:lnTo>
-                  <a:lnTo>
-                    <a:pt x="644602" y="382944"/>
-                  </a:lnTo>
-                  <a:lnTo>
-                    <a:pt x="572980" y="390211"/>
-                  </a:lnTo>
-                  <a:lnTo>
-                    <a:pt x="501357" y="397360"/>
-                  </a:lnTo>
-                  <a:lnTo>
-                    <a:pt x="429735" y="404391"/>
-                  </a:lnTo>
-                  <a:lnTo>
-                    <a:pt x="358112" y="411308"/>
-                  </a:lnTo>
-                  <a:lnTo>
-                    <a:pt x="286490" y="418111"/>
-                  </a:lnTo>
-                  <a:lnTo>
-                    <a:pt x="214867" y="424804"/>
-                  </a:lnTo>
-                  <a:lnTo>
-                    <a:pt x="143245" y="431386"/>
-                  </a:lnTo>
-                  <a:lnTo>
-                    <a:pt x="71622" y="437862"/>
-                  </a:lnTo>
-                  <a:lnTo>
-                    <a:pt x="0" y="444231"/>
+                    <a:pt x="70344" y="112874"/>
+                  </a:lnTo>
+                  <a:lnTo>
+                    <a:pt x="140688" y="121698"/>
+                  </a:lnTo>
+                  <a:lnTo>
+                    <a:pt x="211033" y="130391"/>
+                  </a:lnTo>
+                  <a:lnTo>
+                    <a:pt x="281377" y="138955"/>
+                  </a:lnTo>
+                  <a:lnTo>
+                    <a:pt x="351722" y="147392"/>
+                  </a:lnTo>
+                  <a:lnTo>
+                    <a:pt x="422066" y="155703"/>
+                  </a:lnTo>
+                  <a:lnTo>
+                    <a:pt x="492411" y="163891"/>
+                  </a:lnTo>
+                  <a:lnTo>
+                    <a:pt x="562755" y="171958"/>
+                  </a:lnTo>
+                  <a:lnTo>
+                    <a:pt x="633100" y="179905"/>
+                  </a:lnTo>
+                  <a:lnTo>
+                    <a:pt x="703444" y="187733"/>
+                  </a:lnTo>
+                  <a:lnTo>
+                    <a:pt x="773789" y="195446"/>
+                  </a:lnTo>
+                  <a:lnTo>
+                    <a:pt x="844133" y="203044"/>
+                  </a:lnTo>
+                  <a:lnTo>
+                    <a:pt x="914478" y="210529"/>
+                  </a:lnTo>
+                  <a:lnTo>
+                    <a:pt x="984822" y="217903"/>
+                  </a:lnTo>
+                  <a:lnTo>
+                    <a:pt x="1055167" y="225168"/>
+                  </a:lnTo>
+                  <a:lnTo>
+                    <a:pt x="1125511" y="232325"/>
+                  </a:lnTo>
+                  <a:lnTo>
+                    <a:pt x="1195856" y="239375"/>
+                  </a:lnTo>
+                  <a:lnTo>
+                    <a:pt x="1266200" y="246321"/>
+                  </a:lnTo>
+                  <a:lnTo>
+                    <a:pt x="1336545" y="253163"/>
+                  </a:lnTo>
+                  <a:lnTo>
+                    <a:pt x="1406889" y="259904"/>
+                  </a:lnTo>
+                  <a:lnTo>
+                    <a:pt x="1477234" y="266545"/>
+                  </a:lnTo>
+                  <a:lnTo>
+                    <a:pt x="1547578" y="273088"/>
+                  </a:lnTo>
+                  <a:lnTo>
+                    <a:pt x="1617923" y="279533"/>
+                  </a:lnTo>
+                  <a:lnTo>
+                    <a:pt x="1688267" y="285882"/>
+                  </a:lnTo>
+                  <a:lnTo>
+                    <a:pt x="1758612" y="292137"/>
+                  </a:lnTo>
+                  <a:lnTo>
+                    <a:pt x="1828956" y="298300"/>
+                  </a:lnTo>
+                  <a:lnTo>
+                    <a:pt x="1899301" y="304370"/>
+                  </a:lnTo>
+                  <a:lnTo>
+                    <a:pt x="1969645" y="310351"/>
+                  </a:lnTo>
+                  <a:lnTo>
+                    <a:pt x="2039990" y="316243"/>
+                  </a:lnTo>
+                  <a:lnTo>
+                    <a:pt x="2110334" y="322047"/>
+                  </a:lnTo>
+                  <a:lnTo>
+                    <a:pt x="2180679" y="327765"/>
+                  </a:lnTo>
+                  <a:lnTo>
+                    <a:pt x="2251023" y="333399"/>
+                  </a:lnTo>
+                  <a:lnTo>
+                    <a:pt x="2321368" y="338948"/>
+                  </a:lnTo>
+                  <a:lnTo>
+                    <a:pt x="2391712" y="344416"/>
+                  </a:lnTo>
+                  <a:lnTo>
+                    <a:pt x="2462057" y="349802"/>
+                  </a:lnTo>
+                  <a:lnTo>
+                    <a:pt x="2532401" y="355108"/>
+                  </a:lnTo>
+                  <a:lnTo>
+                    <a:pt x="2602746" y="360335"/>
+                  </a:lnTo>
+                  <a:lnTo>
+                    <a:pt x="2673090" y="365485"/>
+                  </a:lnTo>
+                  <a:lnTo>
+                    <a:pt x="2743435" y="370558"/>
+                  </a:lnTo>
+                  <a:lnTo>
+                    <a:pt x="2813779" y="375556"/>
+                  </a:lnTo>
+                  <a:lnTo>
+                    <a:pt x="2884124" y="380479"/>
+                  </a:lnTo>
+                  <a:lnTo>
+                    <a:pt x="2954468" y="385330"/>
+                  </a:lnTo>
+                  <a:lnTo>
+                    <a:pt x="3024813" y="390108"/>
+                  </a:lnTo>
+                  <a:lnTo>
+                    <a:pt x="3095157" y="394816"/>
+                  </a:lnTo>
+                  <a:lnTo>
+                    <a:pt x="3165502" y="399454"/>
+                  </a:lnTo>
+                  <a:lnTo>
+                    <a:pt x="3235846" y="404022"/>
+                  </a:lnTo>
+                  <a:lnTo>
+                    <a:pt x="3306191" y="407031"/>
+                  </a:lnTo>
+                  <a:lnTo>
+                    <a:pt x="3376535" y="402044"/>
+                  </a:lnTo>
+                  <a:lnTo>
+                    <a:pt x="3446880" y="396973"/>
+                  </a:lnTo>
+                  <a:lnTo>
+                    <a:pt x="3517224" y="391819"/>
+                  </a:lnTo>
+                  <a:lnTo>
+                    <a:pt x="3587569" y="386578"/>
+                  </a:lnTo>
+                  <a:lnTo>
+                    <a:pt x="3657913" y="381251"/>
+                  </a:lnTo>
+                  <a:lnTo>
+                    <a:pt x="3728257" y="375835"/>
+                  </a:lnTo>
+                  <a:lnTo>
+                    <a:pt x="3798602" y="370329"/>
+                  </a:lnTo>
+                  <a:lnTo>
+                    <a:pt x="3868946" y="364732"/>
+                  </a:lnTo>
+                  <a:lnTo>
+                    <a:pt x="3939291" y="359041"/>
+                  </a:lnTo>
+                  <a:lnTo>
+                    <a:pt x="4009635" y="353256"/>
+                  </a:lnTo>
+                  <a:lnTo>
+                    <a:pt x="4079980" y="347375"/>
+                  </a:lnTo>
+                  <a:lnTo>
+                    <a:pt x="4150324" y="341396"/>
+                  </a:lnTo>
+                  <a:lnTo>
+                    <a:pt x="4220669" y="335317"/>
+                  </a:lnTo>
+                  <a:lnTo>
+                    <a:pt x="4291013" y="329138"/>
+                  </a:lnTo>
+                  <a:lnTo>
+                    <a:pt x="4361358" y="322856"/>
+                  </a:lnTo>
+                  <a:lnTo>
+                    <a:pt x="4431702" y="316470"/>
+                  </a:lnTo>
+                  <a:lnTo>
+                    <a:pt x="4502047" y="309977"/>
+                  </a:lnTo>
+                  <a:lnTo>
+                    <a:pt x="4572391" y="303377"/>
+                  </a:lnTo>
+                  <a:lnTo>
+                    <a:pt x="4642736" y="296666"/>
+                  </a:lnTo>
+                  <a:lnTo>
+                    <a:pt x="4713080" y="289845"/>
+                  </a:lnTo>
+                  <a:lnTo>
+                    <a:pt x="4783425" y="282910"/>
+                  </a:lnTo>
+                  <a:lnTo>
+                    <a:pt x="4853769" y="275859"/>
+                  </a:lnTo>
+                  <a:lnTo>
+                    <a:pt x="4924114" y="268692"/>
+                  </a:lnTo>
+                  <a:lnTo>
+                    <a:pt x="4994458" y="261405"/>
+                  </a:lnTo>
+                  <a:lnTo>
+                    <a:pt x="5064803" y="253998"/>
+                  </a:lnTo>
+                  <a:lnTo>
+                    <a:pt x="5135147" y="246467"/>
+                  </a:lnTo>
+                  <a:lnTo>
+                    <a:pt x="5205492" y="238811"/>
+                  </a:lnTo>
+                  <a:lnTo>
+                    <a:pt x="5275836" y="231028"/>
+                  </a:lnTo>
+                  <a:lnTo>
+                    <a:pt x="5346181" y="223115"/>
+                  </a:lnTo>
+                  <a:lnTo>
+                    <a:pt x="5416525" y="215071"/>
+                  </a:lnTo>
+                  <a:lnTo>
+                    <a:pt x="5486870" y="206894"/>
+                  </a:lnTo>
+                  <a:lnTo>
+                    <a:pt x="5557214" y="198580"/>
+                  </a:lnTo>
+                  <a:lnTo>
+                    <a:pt x="5627559" y="190128"/>
+                  </a:lnTo>
+                  <a:lnTo>
+                    <a:pt x="5697903" y="181536"/>
+                  </a:lnTo>
+                  <a:lnTo>
+                    <a:pt x="5768248" y="172801"/>
+                  </a:lnTo>
+                  <a:lnTo>
+                    <a:pt x="5838592" y="163921"/>
+                  </a:lnTo>
+                  <a:lnTo>
+                    <a:pt x="5908937" y="154893"/>
+                  </a:lnTo>
+                  <a:lnTo>
+                    <a:pt x="5979281" y="145716"/>
+                  </a:lnTo>
+                  <a:lnTo>
+                    <a:pt x="6049626" y="136385"/>
+                  </a:lnTo>
+                  <a:lnTo>
+                    <a:pt x="6119970" y="126900"/>
+                  </a:lnTo>
+                  <a:lnTo>
+                    <a:pt x="6190315" y="117257"/>
+                  </a:lnTo>
+                  <a:lnTo>
+                    <a:pt x="6260659" y="107454"/>
+                  </a:lnTo>
+                  <a:lnTo>
+                    <a:pt x="6331004" y="97488"/>
+                  </a:lnTo>
+                  <a:lnTo>
+                    <a:pt x="6401348" y="87356"/>
+                  </a:lnTo>
+                  <a:lnTo>
+                    <a:pt x="6471693" y="77056"/>
+                  </a:lnTo>
+                  <a:lnTo>
+                    <a:pt x="6542037" y="66585"/>
+                  </a:lnTo>
+                  <a:lnTo>
+                    <a:pt x="6612382" y="55939"/>
+                  </a:lnTo>
+                  <a:lnTo>
+                    <a:pt x="6682726" y="45117"/>
+                  </a:lnTo>
+                  <a:lnTo>
+                    <a:pt x="6753071" y="34115"/>
+                  </a:lnTo>
+                  <a:lnTo>
+                    <a:pt x="6823415" y="22930"/>
+                  </a:lnTo>
+                  <a:lnTo>
+                    <a:pt x="6893760" y="11559"/>
+                  </a:lnTo>
+                  <a:lnTo>
+                    <a:pt x="6964104" y="0"/>
                   </a:lnTo>
                 </a:path>
               </a:pathLst>
@@ -4240,312 +3950,637 @@
           </p:nvSpPr>
           <p:spPr>
             <a:xfrm>
-              <a:off x="1172049" y="4694195"/>
-              <a:ext cx="7090630" cy="62642"/>
+              <a:off x="1235312" y="3101669"/>
+              <a:ext cx="6964104" cy="161447"/>
             </a:xfrm>
             <a:custGeom>
               <a:avLst/>
               <a:pathLst>
-                <a:path w="7090630" h="62642">
+                <a:path w="6964104" h="161447">
                   <a:moveTo>
-                    <a:pt x="0" y="62642"/>
+                    <a:pt x="6964104" y="161447"/>
                   </a:moveTo>
                   <a:lnTo>
-                    <a:pt x="71622" y="62032"/>
-                  </a:lnTo>
-                  <a:lnTo>
-                    <a:pt x="143245" y="61422"/>
-                  </a:lnTo>
-                  <a:lnTo>
-                    <a:pt x="214867" y="60812"/>
-                  </a:lnTo>
-                  <a:lnTo>
-                    <a:pt x="286490" y="60201"/>
-                  </a:lnTo>
-                  <a:lnTo>
-                    <a:pt x="358112" y="59590"/>
-                  </a:lnTo>
-                  <a:lnTo>
-                    <a:pt x="429735" y="58978"/>
-                  </a:lnTo>
-                  <a:lnTo>
-                    <a:pt x="501357" y="58366"/>
-                  </a:lnTo>
-                  <a:lnTo>
-                    <a:pt x="572980" y="57753"/>
-                  </a:lnTo>
-                  <a:lnTo>
-                    <a:pt x="644602" y="57140"/>
-                  </a:lnTo>
-                  <a:lnTo>
-                    <a:pt x="716225" y="56526"/>
-                  </a:lnTo>
-                  <a:lnTo>
-                    <a:pt x="787847" y="55912"/>
-                  </a:lnTo>
-                  <a:lnTo>
-                    <a:pt x="859470" y="55298"/>
-                  </a:lnTo>
-                  <a:lnTo>
-                    <a:pt x="931092" y="54683"/>
-                  </a:lnTo>
-                  <a:lnTo>
-                    <a:pt x="1002715" y="54067"/>
-                  </a:lnTo>
-                  <a:lnTo>
-                    <a:pt x="1074337" y="53451"/>
-                  </a:lnTo>
-                  <a:lnTo>
-                    <a:pt x="1145960" y="52835"/>
-                  </a:lnTo>
-                  <a:lnTo>
-                    <a:pt x="1217582" y="52218"/>
-                  </a:lnTo>
-                  <a:lnTo>
-                    <a:pt x="1289205" y="51601"/>
-                  </a:lnTo>
-                  <a:lnTo>
-                    <a:pt x="1360827" y="50983"/>
-                  </a:lnTo>
-                  <a:lnTo>
-                    <a:pt x="1432450" y="50364"/>
-                  </a:lnTo>
-                  <a:lnTo>
-                    <a:pt x="1504073" y="49746"/>
-                  </a:lnTo>
-                  <a:lnTo>
-                    <a:pt x="1575695" y="49126"/>
-                  </a:lnTo>
-                  <a:lnTo>
-                    <a:pt x="1647318" y="48507"/>
-                  </a:lnTo>
-                  <a:lnTo>
-                    <a:pt x="1718940" y="47886"/>
-                  </a:lnTo>
-                  <a:lnTo>
-                    <a:pt x="1790563" y="47266"/>
-                  </a:lnTo>
-                  <a:lnTo>
-                    <a:pt x="1862185" y="46645"/>
-                  </a:lnTo>
-                  <a:lnTo>
-                    <a:pt x="1933808" y="46023"/>
-                  </a:lnTo>
-                  <a:lnTo>
-                    <a:pt x="2005430" y="45401"/>
-                  </a:lnTo>
-                  <a:lnTo>
-                    <a:pt x="2077053" y="44778"/>
-                  </a:lnTo>
-                  <a:lnTo>
-                    <a:pt x="2148675" y="44155"/>
-                  </a:lnTo>
-                  <a:lnTo>
-                    <a:pt x="2220298" y="43532"/>
-                  </a:lnTo>
-                  <a:lnTo>
-                    <a:pt x="2291920" y="42908"/>
-                  </a:lnTo>
-                  <a:lnTo>
-                    <a:pt x="2363543" y="42283"/>
-                  </a:lnTo>
-                  <a:lnTo>
-                    <a:pt x="2435165" y="41658"/>
-                  </a:lnTo>
-                  <a:lnTo>
-                    <a:pt x="2506788" y="41033"/>
-                  </a:lnTo>
-                  <a:lnTo>
-                    <a:pt x="2578410" y="40407"/>
-                  </a:lnTo>
-                  <a:lnTo>
-                    <a:pt x="2650033" y="39781"/>
-                  </a:lnTo>
-                  <a:lnTo>
-                    <a:pt x="2721655" y="39154"/>
-                  </a:lnTo>
-                  <a:lnTo>
-                    <a:pt x="2793278" y="38526"/>
-                  </a:lnTo>
-                  <a:lnTo>
-                    <a:pt x="2864901" y="37899"/>
-                  </a:lnTo>
-                  <a:lnTo>
-                    <a:pt x="2936523" y="37270"/>
-                  </a:lnTo>
-                  <a:lnTo>
-                    <a:pt x="3008146" y="36642"/>
-                  </a:lnTo>
-                  <a:lnTo>
-                    <a:pt x="3079768" y="36012"/>
-                  </a:lnTo>
-                  <a:lnTo>
-                    <a:pt x="3151391" y="35383"/>
-                  </a:lnTo>
-                  <a:lnTo>
-                    <a:pt x="3223013" y="34752"/>
-                  </a:lnTo>
-                  <a:lnTo>
-                    <a:pt x="3294636" y="34122"/>
-                  </a:lnTo>
-                  <a:lnTo>
-                    <a:pt x="3366258" y="33491"/>
-                  </a:lnTo>
-                  <a:lnTo>
-                    <a:pt x="3437881" y="32859"/>
-                  </a:lnTo>
-                  <a:lnTo>
-                    <a:pt x="3509503" y="32227"/>
-                  </a:lnTo>
-                  <a:lnTo>
-                    <a:pt x="3581126" y="31594"/>
-                  </a:lnTo>
-                  <a:lnTo>
-                    <a:pt x="3652748" y="30961"/>
-                  </a:lnTo>
-                  <a:lnTo>
-                    <a:pt x="3724371" y="30328"/>
-                  </a:lnTo>
-                  <a:lnTo>
-                    <a:pt x="3795993" y="29694"/>
-                  </a:lnTo>
-                  <a:lnTo>
-                    <a:pt x="3867616" y="29059"/>
-                  </a:lnTo>
-                  <a:lnTo>
-                    <a:pt x="3939238" y="28424"/>
-                  </a:lnTo>
-                  <a:lnTo>
-                    <a:pt x="4010861" y="27789"/>
-                  </a:lnTo>
-                  <a:lnTo>
-                    <a:pt x="4082483" y="27153"/>
-                  </a:lnTo>
-                  <a:lnTo>
-                    <a:pt x="4154106" y="26516"/>
-                  </a:lnTo>
-                  <a:lnTo>
-                    <a:pt x="4225729" y="25879"/>
-                  </a:lnTo>
-                  <a:lnTo>
-                    <a:pt x="4297351" y="25242"/>
-                  </a:lnTo>
-                  <a:lnTo>
-                    <a:pt x="4368974" y="24604"/>
-                  </a:lnTo>
-                  <a:lnTo>
-                    <a:pt x="4440596" y="23965"/>
-                  </a:lnTo>
-                  <a:lnTo>
-                    <a:pt x="4512219" y="23326"/>
-                  </a:lnTo>
-                  <a:lnTo>
-                    <a:pt x="4583841" y="22687"/>
-                  </a:lnTo>
-                  <a:lnTo>
-                    <a:pt x="4655464" y="22047"/>
-                  </a:lnTo>
-                  <a:lnTo>
-                    <a:pt x="4727086" y="21407"/>
-                  </a:lnTo>
-                  <a:lnTo>
-                    <a:pt x="4798709" y="20766"/>
-                  </a:lnTo>
-                  <a:lnTo>
-                    <a:pt x="4870331" y="20125"/>
-                  </a:lnTo>
-                  <a:lnTo>
-                    <a:pt x="4941954" y="19483"/>
-                  </a:lnTo>
-                  <a:lnTo>
-                    <a:pt x="5013576" y="18841"/>
-                  </a:lnTo>
-                  <a:lnTo>
-                    <a:pt x="5085199" y="18198"/>
-                  </a:lnTo>
-                  <a:lnTo>
-                    <a:pt x="5156821" y="17555"/>
-                  </a:lnTo>
-                  <a:lnTo>
-                    <a:pt x="5228444" y="16911"/>
-                  </a:lnTo>
-                  <a:lnTo>
-                    <a:pt x="5300066" y="16266"/>
-                  </a:lnTo>
-                  <a:lnTo>
-                    <a:pt x="5371689" y="15622"/>
-                  </a:lnTo>
-                  <a:lnTo>
-                    <a:pt x="5443311" y="14976"/>
-                  </a:lnTo>
-                  <a:lnTo>
-                    <a:pt x="5514934" y="14331"/>
-                  </a:lnTo>
-                  <a:lnTo>
-                    <a:pt x="5586557" y="13685"/>
-                  </a:lnTo>
-                  <a:lnTo>
-                    <a:pt x="5658179" y="13038"/>
-                  </a:lnTo>
-                  <a:lnTo>
-                    <a:pt x="5729802" y="12391"/>
-                  </a:lnTo>
-                  <a:lnTo>
-                    <a:pt x="5801424" y="11743"/>
-                  </a:lnTo>
-                  <a:lnTo>
-                    <a:pt x="5873047" y="11095"/>
-                  </a:lnTo>
-                  <a:lnTo>
-                    <a:pt x="5944669" y="10446"/>
-                  </a:lnTo>
-                  <a:lnTo>
-                    <a:pt x="6016292" y="9797"/>
-                  </a:lnTo>
-                  <a:lnTo>
-                    <a:pt x="6087914" y="9147"/>
-                  </a:lnTo>
-                  <a:lnTo>
-                    <a:pt x="6159537" y="8497"/>
-                  </a:lnTo>
-                  <a:lnTo>
-                    <a:pt x="6231159" y="7846"/>
-                  </a:lnTo>
-                  <a:lnTo>
-                    <a:pt x="6302782" y="7195"/>
-                  </a:lnTo>
-                  <a:lnTo>
-                    <a:pt x="6374404" y="6543"/>
-                  </a:lnTo>
-                  <a:lnTo>
-                    <a:pt x="6446027" y="5891"/>
-                  </a:lnTo>
-                  <a:lnTo>
-                    <a:pt x="6517649" y="5239"/>
-                  </a:lnTo>
-                  <a:lnTo>
-                    <a:pt x="6589272" y="4585"/>
-                  </a:lnTo>
-                  <a:lnTo>
-                    <a:pt x="6660894" y="3932"/>
-                  </a:lnTo>
-                  <a:lnTo>
-                    <a:pt x="6732517" y="3278"/>
-                  </a:lnTo>
-                  <a:lnTo>
-                    <a:pt x="6804139" y="2623"/>
-                  </a:lnTo>
-                  <a:lnTo>
-                    <a:pt x="6875762" y="1968"/>
-                  </a:lnTo>
-                  <a:lnTo>
-                    <a:pt x="6947385" y="1312"/>
-                  </a:lnTo>
-                  <a:lnTo>
-                    <a:pt x="7019007" y="656"/>
-                  </a:lnTo>
-                  <a:lnTo>
-                    <a:pt x="7090630" y="0"/>
+                    <a:pt x="6893760" y="159379"/>
+                  </a:lnTo>
+                  <a:lnTo>
+                    <a:pt x="6823415" y="157281"/>
+                  </a:lnTo>
+                  <a:lnTo>
+                    <a:pt x="6753071" y="155150"/>
+                  </a:lnTo>
+                  <a:lnTo>
+                    <a:pt x="6682726" y="152988"/>
+                  </a:lnTo>
+                  <a:lnTo>
+                    <a:pt x="6612382" y="150793"/>
+                  </a:lnTo>
+                  <a:lnTo>
+                    <a:pt x="6542037" y="148564"/>
+                  </a:lnTo>
+                  <a:lnTo>
+                    <a:pt x="6471693" y="146303"/>
+                  </a:lnTo>
+                  <a:lnTo>
+                    <a:pt x="6401348" y="144007"/>
+                  </a:lnTo>
+                  <a:lnTo>
+                    <a:pt x="6331004" y="141676"/>
+                  </a:lnTo>
+                  <a:lnTo>
+                    <a:pt x="6260659" y="139311"/>
+                  </a:lnTo>
+                  <a:lnTo>
+                    <a:pt x="6190315" y="136910"/>
+                  </a:lnTo>
+                  <a:lnTo>
+                    <a:pt x="6119970" y="134472"/>
+                  </a:lnTo>
+                  <a:lnTo>
+                    <a:pt x="6049626" y="131998"/>
+                  </a:lnTo>
+                  <a:lnTo>
+                    <a:pt x="5979281" y="129487"/>
+                  </a:lnTo>
+                  <a:lnTo>
+                    <a:pt x="5908937" y="126937"/>
+                  </a:lnTo>
+                  <a:lnTo>
+                    <a:pt x="5838592" y="124350"/>
+                  </a:lnTo>
+                  <a:lnTo>
+                    <a:pt x="5768248" y="121723"/>
+                  </a:lnTo>
+                  <a:lnTo>
+                    <a:pt x="5697903" y="119057"/>
+                  </a:lnTo>
+                  <a:lnTo>
+                    <a:pt x="5627559" y="116350"/>
+                  </a:lnTo>
+                  <a:lnTo>
+                    <a:pt x="5557214" y="113603"/>
+                  </a:lnTo>
+                  <a:lnTo>
+                    <a:pt x="5486870" y="110814"/>
+                  </a:lnTo>
+                  <a:lnTo>
+                    <a:pt x="5416525" y="107983"/>
+                  </a:lnTo>
+                  <a:lnTo>
+                    <a:pt x="5346181" y="105110"/>
+                  </a:lnTo>
+                  <a:lnTo>
+                    <a:pt x="5275836" y="102193"/>
+                  </a:lnTo>
+                  <a:lnTo>
+                    <a:pt x="5205492" y="99233"/>
+                  </a:lnTo>
+                  <a:lnTo>
+                    <a:pt x="5135147" y="96227"/>
+                  </a:lnTo>
+                  <a:lnTo>
+                    <a:pt x="5064803" y="93177"/>
+                  </a:lnTo>
+                  <a:lnTo>
+                    <a:pt x="4994458" y="90080"/>
+                  </a:lnTo>
+                  <a:lnTo>
+                    <a:pt x="4924114" y="86937"/>
+                  </a:lnTo>
+                  <a:lnTo>
+                    <a:pt x="4853769" y="83746"/>
+                  </a:lnTo>
+                  <a:lnTo>
+                    <a:pt x="4783425" y="80507"/>
+                  </a:lnTo>
+                  <a:lnTo>
+                    <a:pt x="4713080" y="77220"/>
+                  </a:lnTo>
+                  <a:lnTo>
+                    <a:pt x="4642736" y="73883"/>
+                  </a:lnTo>
+                  <a:lnTo>
+                    <a:pt x="4572391" y="70495"/>
+                  </a:lnTo>
+                  <a:lnTo>
+                    <a:pt x="4502047" y="67057"/>
+                  </a:lnTo>
+                  <a:lnTo>
+                    <a:pt x="4431702" y="63567"/>
+                  </a:lnTo>
+                  <a:lnTo>
+                    <a:pt x="4361358" y="60024"/>
+                  </a:lnTo>
+                  <a:lnTo>
+                    <a:pt x="4291013" y="56428"/>
+                  </a:lnTo>
+                  <a:lnTo>
+                    <a:pt x="4220669" y="52777"/>
+                  </a:lnTo>
+                  <a:lnTo>
+                    <a:pt x="4150324" y="49072"/>
+                  </a:lnTo>
+                  <a:lnTo>
+                    <a:pt x="4079980" y="45310"/>
+                  </a:lnTo>
+                  <a:lnTo>
+                    <a:pt x="4009635" y="41492"/>
+                  </a:lnTo>
+                  <a:lnTo>
+                    <a:pt x="3939291" y="37617"/>
+                  </a:lnTo>
+                  <a:lnTo>
+                    <a:pt x="3868946" y="33683"/>
+                  </a:lnTo>
+                  <a:lnTo>
+                    <a:pt x="3798602" y="29690"/>
+                  </a:lnTo>
+                  <a:lnTo>
+                    <a:pt x="3728257" y="25636"/>
+                  </a:lnTo>
+                  <a:lnTo>
+                    <a:pt x="3657913" y="21521"/>
+                  </a:lnTo>
+                  <a:lnTo>
+                    <a:pt x="3587569" y="17345"/>
+                  </a:lnTo>
+                  <a:lnTo>
+                    <a:pt x="3517224" y="13105"/>
+                  </a:lnTo>
+                  <a:lnTo>
+                    <a:pt x="3446880" y="8802"/>
+                  </a:lnTo>
+                  <a:lnTo>
+                    <a:pt x="3376535" y="4434"/>
+                  </a:lnTo>
+                  <a:lnTo>
+                    <a:pt x="3306191" y="0"/>
+                  </a:lnTo>
+                  <a:lnTo>
+                    <a:pt x="3235846" y="3414"/>
+                  </a:lnTo>
+                  <a:lnTo>
+                    <a:pt x="3165502" y="8239"/>
+                  </a:lnTo>
+                  <a:lnTo>
+                    <a:pt x="3095157" y="12986"/>
+                  </a:lnTo>
+                  <a:lnTo>
+                    <a:pt x="3024813" y="17656"/>
+                  </a:lnTo>
+                  <a:lnTo>
+                    <a:pt x="2954468" y="22249"/>
+                  </a:lnTo>
+                  <a:lnTo>
+                    <a:pt x="2884124" y="26767"/>
+                  </a:lnTo>
+                  <a:lnTo>
+                    <a:pt x="2813779" y="31211"/>
+                  </a:lnTo>
+                  <a:lnTo>
+                    <a:pt x="2743435" y="35582"/>
+                  </a:lnTo>
+                  <a:lnTo>
+                    <a:pt x="2673090" y="39882"/>
+                  </a:lnTo>
+                  <a:lnTo>
+                    <a:pt x="2602746" y="44112"/>
+                  </a:lnTo>
+                  <a:lnTo>
+                    <a:pt x="2532401" y="48272"/>
+                  </a:lnTo>
+                  <a:lnTo>
+                    <a:pt x="2462057" y="52365"/>
+                  </a:lnTo>
+                  <a:lnTo>
+                    <a:pt x="2391712" y="56390"/>
+                  </a:lnTo>
+                  <a:lnTo>
+                    <a:pt x="2321368" y="60350"/>
+                  </a:lnTo>
+                  <a:lnTo>
+                    <a:pt x="2251023" y="64245"/>
+                  </a:lnTo>
+                  <a:lnTo>
+                    <a:pt x="2180679" y="68077"/>
+                  </a:lnTo>
+                  <a:lnTo>
+                    <a:pt x="2110334" y="71845"/>
+                  </a:lnTo>
+                  <a:lnTo>
+                    <a:pt x="2039990" y="75552"/>
+                  </a:lnTo>
+                  <a:lnTo>
+                    <a:pt x="1969645" y="79199"/>
+                  </a:lnTo>
+                  <a:lnTo>
+                    <a:pt x="1899301" y="82786"/>
+                  </a:lnTo>
+                  <a:lnTo>
+                    <a:pt x="1828956" y="86314"/>
+                  </a:lnTo>
+                  <a:lnTo>
+                    <a:pt x="1758612" y="89785"/>
+                  </a:lnTo>
+                  <a:lnTo>
+                    <a:pt x="1688267" y="93199"/>
+                  </a:lnTo>
+                  <a:lnTo>
+                    <a:pt x="1617923" y="96557"/>
+                  </a:lnTo>
+                  <a:lnTo>
+                    <a:pt x="1547578" y="99860"/>
+                  </a:lnTo>
+                  <a:lnTo>
+                    <a:pt x="1477234" y="103109"/>
+                  </a:lnTo>
+                  <a:lnTo>
+                    <a:pt x="1406889" y="106305"/>
+                  </a:lnTo>
+                  <a:lnTo>
+                    <a:pt x="1336545" y="109449"/>
+                  </a:lnTo>
+                  <a:lnTo>
+                    <a:pt x="1266200" y="112542"/>
+                  </a:lnTo>
+                  <a:lnTo>
+                    <a:pt x="1195856" y="115584"/>
+                  </a:lnTo>
+                  <a:lnTo>
+                    <a:pt x="1125511" y="118576"/>
+                  </a:lnTo>
+                  <a:lnTo>
+                    <a:pt x="1055167" y="121519"/>
+                  </a:lnTo>
+                  <a:lnTo>
+                    <a:pt x="984822" y="124414"/>
+                  </a:lnTo>
+                  <a:lnTo>
+                    <a:pt x="914478" y="127262"/>
+                  </a:lnTo>
+                  <a:lnTo>
+                    <a:pt x="844133" y="130063"/>
+                  </a:lnTo>
+                  <a:lnTo>
+                    <a:pt x="773789" y="132819"/>
+                  </a:lnTo>
+                  <a:lnTo>
+                    <a:pt x="703444" y="135529"/>
+                  </a:lnTo>
+                  <a:lnTo>
+                    <a:pt x="633100" y="138195"/>
+                  </a:lnTo>
+                  <a:lnTo>
+                    <a:pt x="562755" y="140818"/>
+                  </a:lnTo>
+                  <a:lnTo>
+                    <a:pt x="492411" y="143397"/>
+                  </a:lnTo>
+                  <a:lnTo>
+                    <a:pt x="422066" y="145935"/>
+                  </a:lnTo>
+                  <a:lnTo>
+                    <a:pt x="351722" y="148431"/>
+                  </a:lnTo>
+                  <a:lnTo>
+                    <a:pt x="281377" y="150886"/>
+                  </a:lnTo>
+                  <a:lnTo>
+                    <a:pt x="211033" y="153301"/>
+                  </a:lnTo>
+                  <a:lnTo>
+                    <a:pt x="140688" y="155677"/>
+                  </a:lnTo>
+                  <a:lnTo>
+                    <a:pt x="70344" y="158014"/>
+                  </a:lnTo>
+                  <a:lnTo>
+                    <a:pt x="0" y="160312"/>
+                  </a:lnTo>
+                </a:path>
+              </a:pathLst>
+            </a:custGeom>
+          </p:spPr>
+          <p:txBody>
+            <a:bodyPr/>
+            <a:lstStyle/>
+            <a:p/>
+          </p:txBody>
+        </p:sp>
+        <p:sp>
+          <p:nvSpPr>
+            <p:cNvPr id="24" name="pl24"/>
+            <p:cNvSpPr/>
+            <p:nvPr/>
+          </p:nvSpPr>
+          <p:spPr>
+            <a:xfrm>
+              <a:off x="1235312" y="3088838"/>
+              <a:ext cx="6964104" cy="22606"/>
+            </a:xfrm>
+            <a:custGeom>
+              <a:avLst/>
+              <a:pathLst>
+                <a:path w="6964104" h="22606">
+                  <a:moveTo>
+                    <a:pt x="0" y="22606"/>
+                  </a:moveTo>
+                  <a:lnTo>
+                    <a:pt x="70344" y="22386"/>
+                  </a:lnTo>
+                  <a:lnTo>
+                    <a:pt x="140688" y="22166"/>
+                  </a:lnTo>
+                  <a:lnTo>
+                    <a:pt x="211033" y="21945"/>
+                  </a:lnTo>
+                  <a:lnTo>
+                    <a:pt x="281377" y="21725"/>
+                  </a:lnTo>
+                  <a:lnTo>
+                    <a:pt x="351722" y="21504"/>
+                  </a:lnTo>
+                  <a:lnTo>
+                    <a:pt x="422066" y="21284"/>
+                  </a:lnTo>
+                  <a:lnTo>
+                    <a:pt x="492411" y="21063"/>
+                  </a:lnTo>
+                  <a:lnTo>
+                    <a:pt x="562755" y="20841"/>
+                  </a:lnTo>
+                  <a:lnTo>
+                    <a:pt x="633100" y="20620"/>
+                  </a:lnTo>
+                  <a:lnTo>
+                    <a:pt x="703444" y="20399"/>
+                  </a:lnTo>
+                  <a:lnTo>
+                    <a:pt x="773789" y="20177"/>
+                  </a:lnTo>
+                  <a:lnTo>
+                    <a:pt x="844133" y="19955"/>
+                  </a:lnTo>
+                  <a:lnTo>
+                    <a:pt x="914478" y="19733"/>
+                  </a:lnTo>
+                  <a:lnTo>
+                    <a:pt x="984822" y="19511"/>
+                  </a:lnTo>
+                  <a:lnTo>
+                    <a:pt x="1055167" y="19289"/>
+                  </a:lnTo>
+                  <a:lnTo>
+                    <a:pt x="1125511" y="19067"/>
+                  </a:lnTo>
+                  <a:lnTo>
+                    <a:pt x="1195856" y="18844"/>
+                  </a:lnTo>
+                  <a:lnTo>
+                    <a:pt x="1266200" y="18621"/>
+                  </a:lnTo>
+                  <a:lnTo>
+                    <a:pt x="1336545" y="18398"/>
+                  </a:lnTo>
+                  <a:lnTo>
+                    <a:pt x="1406889" y="18175"/>
+                  </a:lnTo>
+                  <a:lnTo>
+                    <a:pt x="1477234" y="17952"/>
+                  </a:lnTo>
+                  <a:lnTo>
+                    <a:pt x="1547578" y="17728"/>
+                  </a:lnTo>
+                  <a:lnTo>
+                    <a:pt x="1617923" y="17505"/>
+                  </a:lnTo>
+                  <a:lnTo>
+                    <a:pt x="1688267" y="17281"/>
+                  </a:lnTo>
+                  <a:lnTo>
+                    <a:pt x="1758612" y="17057"/>
+                  </a:lnTo>
+                  <a:lnTo>
+                    <a:pt x="1828956" y="16833"/>
+                  </a:lnTo>
+                  <a:lnTo>
+                    <a:pt x="1899301" y="16608"/>
+                  </a:lnTo>
+                  <a:lnTo>
+                    <a:pt x="1969645" y="16384"/>
+                  </a:lnTo>
+                  <a:lnTo>
+                    <a:pt x="2039990" y="16159"/>
+                  </a:lnTo>
+                  <a:lnTo>
+                    <a:pt x="2110334" y="15934"/>
+                  </a:lnTo>
+                  <a:lnTo>
+                    <a:pt x="2180679" y="15709"/>
+                  </a:lnTo>
+                  <a:lnTo>
+                    <a:pt x="2251023" y="15484"/>
+                  </a:lnTo>
+                  <a:lnTo>
+                    <a:pt x="2321368" y="15259"/>
+                  </a:lnTo>
+                  <a:lnTo>
+                    <a:pt x="2391712" y="15033"/>
+                  </a:lnTo>
+                  <a:lnTo>
+                    <a:pt x="2462057" y="14807"/>
+                  </a:lnTo>
+                  <a:lnTo>
+                    <a:pt x="2532401" y="14582"/>
+                  </a:lnTo>
+                  <a:lnTo>
+                    <a:pt x="2602746" y="14356"/>
+                  </a:lnTo>
+                  <a:lnTo>
+                    <a:pt x="2673090" y="14129"/>
+                  </a:lnTo>
+                  <a:lnTo>
+                    <a:pt x="2743435" y="13903"/>
+                  </a:lnTo>
+                  <a:lnTo>
+                    <a:pt x="2813779" y="13676"/>
+                  </a:lnTo>
+                  <a:lnTo>
+                    <a:pt x="2884124" y="13450"/>
+                  </a:lnTo>
+                  <a:lnTo>
+                    <a:pt x="2954468" y="13223"/>
+                  </a:lnTo>
+                  <a:lnTo>
+                    <a:pt x="3024813" y="12996"/>
+                  </a:lnTo>
+                  <a:lnTo>
+                    <a:pt x="3095157" y="12768"/>
+                  </a:lnTo>
+                  <a:lnTo>
+                    <a:pt x="3165502" y="12541"/>
+                  </a:lnTo>
+                  <a:lnTo>
+                    <a:pt x="3235846" y="12313"/>
+                  </a:lnTo>
+                  <a:lnTo>
+                    <a:pt x="3306191" y="12086"/>
+                  </a:lnTo>
+                  <a:lnTo>
+                    <a:pt x="3376535" y="11858"/>
+                  </a:lnTo>
+                  <a:lnTo>
+                    <a:pt x="3446880" y="11630"/>
+                  </a:lnTo>
+                  <a:lnTo>
+                    <a:pt x="3517224" y="11401"/>
+                  </a:lnTo>
+                  <a:lnTo>
+                    <a:pt x="3587569" y="11173"/>
+                  </a:lnTo>
+                  <a:lnTo>
+                    <a:pt x="3657913" y="10944"/>
+                  </a:lnTo>
+                  <a:lnTo>
+                    <a:pt x="3728257" y="10715"/>
+                  </a:lnTo>
+                  <a:lnTo>
+                    <a:pt x="3798602" y="10486"/>
+                  </a:lnTo>
+                  <a:lnTo>
+                    <a:pt x="3868946" y="10257"/>
+                  </a:lnTo>
+                  <a:lnTo>
+                    <a:pt x="3939291" y="10028"/>
+                  </a:lnTo>
+                  <a:lnTo>
+                    <a:pt x="4009635" y="9798"/>
+                  </a:lnTo>
+                  <a:lnTo>
+                    <a:pt x="4079980" y="9569"/>
+                  </a:lnTo>
+                  <a:lnTo>
+                    <a:pt x="4150324" y="9339"/>
+                  </a:lnTo>
+                  <a:lnTo>
+                    <a:pt x="4220669" y="9109"/>
+                  </a:lnTo>
+                  <a:lnTo>
+                    <a:pt x="4291013" y="8879"/>
+                  </a:lnTo>
+                  <a:lnTo>
+                    <a:pt x="4361358" y="8648"/>
+                  </a:lnTo>
+                  <a:lnTo>
+                    <a:pt x="4431702" y="8418"/>
+                  </a:lnTo>
+                  <a:lnTo>
+                    <a:pt x="4502047" y="8187"/>
+                  </a:lnTo>
+                  <a:lnTo>
+                    <a:pt x="4572391" y="7956"/>
+                  </a:lnTo>
+                  <a:lnTo>
+                    <a:pt x="4642736" y="7725"/>
+                  </a:lnTo>
+                  <a:lnTo>
+                    <a:pt x="4713080" y="7494"/>
+                  </a:lnTo>
+                  <a:lnTo>
+                    <a:pt x="4783425" y="7262"/>
+                  </a:lnTo>
+                  <a:lnTo>
+                    <a:pt x="4853769" y="7031"/>
+                  </a:lnTo>
+                  <a:lnTo>
+                    <a:pt x="4924114" y="6799"/>
+                  </a:lnTo>
+                  <a:lnTo>
+                    <a:pt x="4994458" y="6567"/>
+                  </a:lnTo>
+                  <a:lnTo>
+                    <a:pt x="5064803" y="6335"/>
+                  </a:lnTo>
+                  <a:lnTo>
+                    <a:pt x="5135147" y="6102"/>
+                  </a:lnTo>
+                  <a:lnTo>
+                    <a:pt x="5205492" y="5870"/>
+                  </a:lnTo>
+                  <a:lnTo>
+                    <a:pt x="5275836" y="5637"/>
+                  </a:lnTo>
+                  <a:lnTo>
+                    <a:pt x="5346181" y="5404"/>
+                  </a:lnTo>
+                  <a:lnTo>
+                    <a:pt x="5416525" y="5171"/>
+                  </a:lnTo>
+                  <a:lnTo>
+                    <a:pt x="5486870" y="4938"/>
+                  </a:lnTo>
+                  <a:lnTo>
+                    <a:pt x="5557214" y="4705"/>
+                  </a:lnTo>
+                  <a:lnTo>
+                    <a:pt x="5627559" y="4471"/>
+                  </a:lnTo>
+                  <a:lnTo>
+                    <a:pt x="5697903" y="4237"/>
+                  </a:lnTo>
+                  <a:lnTo>
+                    <a:pt x="5768248" y="4003"/>
+                  </a:lnTo>
+                  <a:lnTo>
+                    <a:pt x="5838592" y="3769"/>
+                  </a:lnTo>
+                  <a:lnTo>
+                    <a:pt x="5908937" y="3535"/>
+                  </a:lnTo>
+                  <a:lnTo>
+                    <a:pt x="5979281" y="3301"/>
+                  </a:lnTo>
+                  <a:lnTo>
+                    <a:pt x="6049626" y="3066"/>
+                  </a:lnTo>
+                  <a:lnTo>
+                    <a:pt x="6119970" y="2831"/>
+                  </a:lnTo>
+                  <a:lnTo>
+                    <a:pt x="6190315" y="2596"/>
+                  </a:lnTo>
+                  <a:lnTo>
+                    <a:pt x="6260659" y="2361"/>
+                  </a:lnTo>
+                  <a:lnTo>
+                    <a:pt x="6331004" y="2126"/>
+                  </a:lnTo>
+                  <a:lnTo>
+                    <a:pt x="6401348" y="1890"/>
+                  </a:lnTo>
+                  <a:lnTo>
+                    <a:pt x="6471693" y="1654"/>
+                  </a:lnTo>
+                  <a:lnTo>
+                    <a:pt x="6542037" y="1419"/>
+                  </a:lnTo>
+                  <a:lnTo>
+                    <a:pt x="6612382" y="1183"/>
+                  </a:lnTo>
+                  <a:lnTo>
+                    <a:pt x="6682726" y="946"/>
+                  </a:lnTo>
+                  <a:lnTo>
+                    <a:pt x="6753071" y="710"/>
+                  </a:lnTo>
+                  <a:lnTo>
+                    <a:pt x="6823415" y="473"/>
+                  </a:lnTo>
+                  <a:lnTo>
+                    <a:pt x="6893760" y="236"/>
+                  </a:lnTo>
+                  <a:lnTo>
+                    <a:pt x="6964104" y="0"/>
                   </a:lnTo>
                 </a:path>
               </a:pathLst>
@@ -4568,27 +4603,27 @@
         </p:sp>
         <p:sp>
           <p:nvSpPr>
-            <p:cNvPr id="24" name="pl24"/>
+            <p:cNvPr id="25" name="pl25"/>
             <p:cNvSpPr/>
             <p:nvPr/>
           </p:nvSpPr>
           <p:spPr>
             <a:xfrm>
-              <a:off x="817517" y="4727786"/>
-              <a:ext cx="7799693" cy="0"/>
+              <a:off x="887106" y="3100960"/>
+              <a:ext cx="7660515" cy="0"/>
             </a:xfrm>
             <a:custGeom>
               <a:avLst/>
               <a:pathLst>
-                <a:path w="7799693" h="0">
+                <a:path w="7660515" h="0">
                   <a:moveTo>
                     <a:pt x="0" y="0"/>
                   </a:moveTo>
                   <a:lnTo>
-                    <a:pt x="7799693" y="0"/>
-                  </a:lnTo>
-                  <a:lnTo>
-                    <a:pt x="7799693" y="0"/>
+                    <a:pt x="7660515" y="0"/>
+                  </a:lnTo>
+                  <a:lnTo>
+                    <a:pt x="7660515" y="0"/>
                   </a:lnTo>
                 </a:path>
               </a:pathLst>
@@ -4611,21 +4646,21 @@
         </p:sp>
         <p:sp>
           <p:nvSpPr>
-            <p:cNvPr id="25" name="pl25"/>
+            <p:cNvPr id="26" name="pl26"/>
             <p:cNvSpPr/>
             <p:nvPr/>
           </p:nvSpPr>
           <p:spPr>
             <a:xfrm>
-              <a:off x="4526955" y="2073503"/>
-              <a:ext cx="0" cy="3649639"/>
+              <a:off x="4530353" y="2143092"/>
+              <a:ext cx="0" cy="1317069"/>
             </a:xfrm>
             <a:custGeom>
               <a:avLst/>
               <a:pathLst>
-                <a:path w="0" h="3649639">
+                <a:path w="0" h="1317069">
                   <a:moveTo>
-                    <a:pt x="0" y="3649639"/>
+                    <a:pt x="0" y="1317069"/>
                   </a:moveTo>
                   <a:lnTo>
                     <a:pt x="0" y="0"/>
@@ -4654,13 +4689,13 @@
         </p:sp>
         <p:sp>
           <p:nvSpPr>
-            <p:cNvPr id="26" name="tx26"/>
+            <p:cNvPr id="27" name="tx27"/>
             <p:cNvSpPr/>
             <p:nvPr/>
           </p:nvSpPr>
           <p:spPr>
             <a:xfrm>
-              <a:off x="692708" y="5517199"/>
+              <a:off x="762297" y="3360243"/>
               <a:ext cx="62179" cy="80101"/>
             </a:xfrm>
             <a:prstGeom prst="rect">
@@ -4700,13 +4735,13 @@
         </p:sp>
         <p:sp>
           <p:nvSpPr>
-            <p:cNvPr id="27" name="tx27"/>
+            <p:cNvPr id="28" name="tx28"/>
             <p:cNvSpPr/>
             <p:nvPr/>
           </p:nvSpPr>
           <p:spPr>
             <a:xfrm>
-              <a:off x="692708" y="4687735"/>
+              <a:off x="762297" y="3060909"/>
               <a:ext cx="62179" cy="80101"/>
             </a:xfrm>
             <a:prstGeom prst="rect">
@@ -4746,13 +4781,13 @@
         </p:sp>
         <p:sp>
           <p:nvSpPr>
-            <p:cNvPr id="28" name="tx28"/>
+            <p:cNvPr id="29" name="tx29"/>
             <p:cNvSpPr/>
             <p:nvPr/>
           </p:nvSpPr>
           <p:spPr>
             <a:xfrm>
-              <a:off x="692708" y="3858272"/>
+              <a:off x="762297" y="2761575"/>
               <a:ext cx="62179" cy="80101"/>
             </a:xfrm>
             <a:prstGeom prst="rect">
@@ -4792,13 +4827,13 @@
         </p:sp>
         <p:sp>
           <p:nvSpPr>
-            <p:cNvPr id="29" name="tx29"/>
+            <p:cNvPr id="30" name="tx30"/>
             <p:cNvSpPr/>
             <p:nvPr/>
           </p:nvSpPr>
           <p:spPr>
             <a:xfrm>
-              <a:off x="692708" y="3028808"/>
+              <a:off x="762297" y="2462242"/>
               <a:ext cx="62179" cy="80101"/>
             </a:xfrm>
             <a:prstGeom prst="rect">
@@ -4838,13 +4873,13 @@
         </p:sp>
         <p:sp>
           <p:nvSpPr>
-            <p:cNvPr id="30" name="tx30"/>
+            <p:cNvPr id="31" name="tx31"/>
             <p:cNvSpPr/>
             <p:nvPr/>
           </p:nvSpPr>
           <p:spPr>
             <a:xfrm>
-              <a:off x="692708" y="2199345"/>
+              <a:off x="762297" y="2162908"/>
               <a:ext cx="62179" cy="80101"/>
             </a:xfrm>
             <a:prstGeom prst="rect">
@@ -4884,13 +4919,13 @@
         </p:sp>
         <p:sp>
           <p:nvSpPr>
-            <p:cNvPr id="31" name="tx31"/>
+            <p:cNvPr id="32" name="tx32"/>
             <p:cNvSpPr/>
             <p:nvPr/>
           </p:nvSpPr>
           <p:spPr>
             <a:xfrm>
-              <a:off x="2421884" y="5785772"/>
+              <a:off x="2461403" y="3522791"/>
               <a:ext cx="161574" cy="80101"/>
             </a:xfrm>
             <a:prstGeom prst="rect">
@@ -4930,13 +4965,13 @@
         </p:sp>
         <p:sp>
           <p:nvSpPr>
-            <p:cNvPr id="32" name="tx32"/>
+            <p:cNvPr id="33" name="tx33"/>
             <p:cNvSpPr/>
             <p:nvPr/>
           </p:nvSpPr>
           <p:spPr>
             <a:xfrm>
-              <a:off x="4542539" y="5785772"/>
+              <a:off x="4545104" y="3522791"/>
               <a:ext cx="62179" cy="80101"/>
             </a:xfrm>
             <a:prstGeom prst="rect">
@@ -4976,13 +5011,13 @@
         </p:sp>
         <p:sp>
           <p:nvSpPr>
-            <p:cNvPr id="33" name="tx33"/>
+            <p:cNvPr id="34" name="tx34"/>
             <p:cNvSpPr/>
             <p:nvPr/>
           </p:nvSpPr>
           <p:spPr>
             <a:xfrm>
-              <a:off x="6582407" y="5785772"/>
+              <a:off x="6548017" y="3522791"/>
               <a:ext cx="124358" cy="80101"/>
             </a:xfrm>
             <a:prstGeom prst="rect">
@@ -5022,13 +5057,13 @@
         </p:sp>
         <p:sp>
           <p:nvSpPr>
-            <p:cNvPr id="34" name="tx34"/>
+            <p:cNvPr id="35" name="tx35"/>
             <p:cNvSpPr/>
             <p:nvPr/>
           </p:nvSpPr>
           <p:spPr>
             <a:xfrm>
-              <a:off x="2928340" y="5925448"/>
+              <a:off x="2928340" y="3662467"/>
               <a:ext cx="3578047" cy="100218"/>
             </a:xfrm>
             <a:prstGeom prst="rect">
@@ -5068,13 +5103,13 @@
         </p:sp>
         <p:sp>
           <p:nvSpPr>
-            <p:cNvPr id="35" name="tx35"/>
+            <p:cNvPr id="36" name="tx36"/>
             <p:cNvSpPr/>
             <p:nvPr/>
           </p:nvSpPr>
           <p:spPr>
             <a:xfrm rot="-5400000">
-              <a:off x="68446" y="3848213"/>
+              <a:off x="138035" y="2751517"/>
               <a:ext cx="1016904" cy="100218"/>
             </a:xfrm>
             <a:prstGeom prst="rect">
@@ -5114,13 +5149,13 @@
         </p:sp>
         <p:sp>
           <p:nvSpPr>
-            <p:cNvPr id="36" name="tx36"/>
+            <p:cNvPr id="37" name="tx37"/>
             <p:cNvSpPr/>
             <p:nvPr/>
           </p:nvSpPr>
           <p:spPr>
             <a:xfrm>
-              <a:off x="817517" y="1896563"/>
+              <a:off x="887106" y="1966152"/>
               <a:ext cx="6321612" cy="82021"/>
             </a:xfrm>
             <a:prstGeom prst="rect">
@@ -5160,13 +5195,3746 @@
         </p:sp>
         <p:sp>
           <p:nvSpPr>
-            <p:cNvPr id="37" name="tx37"/>
+            <p:cNvPr id="38" name="tx38"/>
             <p:cNvSpPr/>
             <p:nvPr/>
           </p:nvSpPr>
           <p:spPr>
             <a:xfrm>
-              <a:off x="817517" y="1669789"/>
+              <a:off x="887106" y="1739378"/>
+              <a:ext cx="2616647" cy="120152"/>
+            </a:xfrm>
+            <a:prstGeom prst="rect">
+              <a:avLst/>
+            </a:prstGeom>
+            <a:noFill/>
+          </p:spPr>
+          <p:txBody>
+            <a:bodyPr lIns="0" rIns="0" tIns="0" bIns="0" anchorCtr="1" anchor="ctr" wrap="none"/>
+            <a:lstStyle/>
+            <a:p>
+              <a:pPr algn="l" marL="0" marR="0" indent="0">
+                <a:lnSpc>
+                  <a:spcPts val="1320"/>
+                </a:lnSpc>
+                <a:spcBef>
+                  <a:spcPts val="0"/>
+                </a:spcBef>
+                <a:spcAft>
+                  <a:spcPts val="0"/>
+                </a:spcAft>
+              </a:pPr>
+              <a:r>
+                <a:rPr sz="1320">
+                  <a:solidFill>
+                    <a:srgbClr val="000000">
+                      <a:alpha val="100000"/>
+                    </a:srgbClr>
+                  </a:solidFill>
+                  <a:latin typeface="Helvetica"/>
+                  <a:cs typeface="Helvetica"/>
+                </a:rPr>
+                <a:t>Planned Surgery/Port (Carboplatin)</a:t>
+              </a:r>
+            </a:p>
+          </p:txBody>
+        </p:sp>
+        <p:sp>
+          <p:nvSpPr>
+            <p:cNvPr id="39" name="pl39"/>
+            <p:cNvSpPr/>
+            <p:nvPr/>
+          </p:nvSpPr>
+          <p:spPr>
+            <a:xfrm>
+              <a:off x="887106" y="5444019"/>
+              <a:ext cx="7660515" cy="0"/>
+            </a:xfrm>
+            <a:custGeom>
+              <a:avLst/>
+              <a:pathLst>
+                <a:path w="7660515" h="0">
+                  <a:moveTo>
+                    <a:pt x="0" y="0"/>
+                  </a:moveTo>
+                  <a:lnTo>
+                    <a:pt x="7660515" y="0"/>
+                  </a:lnTo>
+                  <a:lnTo>
+                    <a:pt x="7660515" y="0"/>
+                  </a:lnTo>
+                </a:path>
+              </a:pathLst>
+            </a:custGeom>
+            <a:ln w="6775" cap="flat">
+              <a:solidFill>
+                <a:srgbClr val="EBEBEB">
+                  <a:alpha val="100000"/>
+                </a:srgbClr>
+              </a:solidFill>
+              <a:prstDash val="solid"/>
+              <a:round/>
+            </a:ln>
+          </p:spPr>
+          <p:txBody>
+            <a:bodyPr/>
+            <a:lstStyle/>
+            <a:p/>
+          </p:txBody>
+        </p:sp>
+        <p:sp>
+          <p:nvSpPr>
+            <p:cNvPr id="40" name="pl40"/>
+            <p:cNvSpPr/>
+            <p:nvPr/>
+          </p:nvSpPr>
+          <p:spPr>
+            <a:xfrm>
+              <a:off x="887106" y="5144686"/>
+              <a:ext cx="7660515" cy="0"/>
+            </a:xfrm>
+            <a:custGeom>
+              <a:avLst/>
+              <a:pathLst>
+                <a:path w="7660515" h="0">
+                  <a:moveTo>
+                    <a:pt x="0" y="0"/>
+                  </a:moveTo>
+                  <a:lnTo>
+                    <a:pt x="7660515" y="0"/>
+                  </a:lnTo>
+                  <a:lnTo>
+                    <a:pt x="7660515" y="0"/>
+                  </a:lnTo>
+                </a:path>
+              </a:pathLst>
+            </a:custGeom>
+            <a:ln w="6775" cap="flat">
+              <a:solidFill>
+                <a:srgbClr val="EBEBEB">
+                  <a:alpha val="100000"/>
+                </a:srgbClr>
+              </a:solidFill>
+              <a:prstDash val="solid"/>
+              <a:round/>
+            </a:ln>
+          </p:spPr>
+          <p:txBody>
+            <a:bodyPr/>
+            <a:lstStyle/>
+            <a:p/>
+          </p:txBody>
+        </p:sp>
+        <p:sp>
+          <p:nvSpPr>
+            <p:cNvPr id="41" name="pl41"/>
+            <p:cNvSpPr/>
+            <p:nvPr/>
+          </p:nvSpPr>
+          <p:spPr>
+            <a:xfrm>
+              <a:off x="887106" y="4845352"/>
+              <a:ext cx="7660515" cy="0"/>
+            </a:xfrm>
+            <a:custGeom>
+              <a:avLst/>
+              <a:pathLst>
+                <a:path w="7660515" h="0">
+                  <a:moveTo>
+                    <a:pt x="0" y="0"/>
+                  </a:moveTo>
+                  <a:lnTo>
+                    <a:pt x="7660515" y="0"/>
+                  </a:lnTo>
+                  <a:lnTo>
+                    <a:pt x="7660515" y="0"/>
+                  </a:lnTo>
+                </a:path>
+              </a:pathLst>
+            </a:custGeom>
+            <a:ln w="6775" cap="flat">
+              <a:solidFill>
+                <a:srgbClr val="EBEBEB">
+                  <a:alpha val="100000"/>
+                </a:srgbClr>
+              </a:solidFill>
+              <a:prstDash val="solid"/>
+              <a:round/>
+            </a:ln>
+          </p:spPr>
+          <p:txBody>
+            <a:bodyPr/>
+            <a:lstStyle/>
+            <a:p/>
+          </p:txBody>
+        </p:sp>
+        <p:sp>
+          <p:nvSpPr>
+            <p:cNvPr id="42" name="pl42"/>
+            <p:cNvSpPr/>
+            <p:nvPr/>
+          </p:nvSpPr>
+          <p:spPr>
+            <a:xfrm>
+              <a:off x="887106" y="4546018"/>
+              <a:ext cx="7660515" cy="0"/>
+            </a:xfrm>
+            <a:custGeom>
+              <a:avLst/>
+              <a:pathLst>
+                <a:path w="7660515" h="0">
+                  <a:moveTo>
+                    <a:pt x="0" y="0"/>
+                  </a:moveTo>
+                  <a:lnTo>
+                    <a:pt x="7660515" y="0"/>
+                  </a:lnTo>
+                  <a:lnTo>
+                    <a:pt x="7660515" y="0"/>
+                  </a:lnTo>
+                </a:path>
+              </a:pathLst>
+            </a:custGeom>
+            <a:ln w="6775" cap="flat">
+              <a:solidFill>
+                <a:srgbClr val="EBEBEB">
+                  <a:alpha val="100000"/>
+                </a:srgbClr>
+              </a:solidFill>
+              <a:prstDash val="solid"/>
+              <a:round/>
+            </a:ln>
+          </p:spPr>
+          <p:txBody>
+            <a:bodyPr/>
+            <a:lstStyle/>
+            <a:p/>
+          </p:txBody>
+        </p:sp>
+        <p:sp>
+          <p:nvSpPr>
+            <p:cNvPr id="43" name="pl43"/>
+            <p:cNvSpPr/>
+            <p:nvPr/>
+          </p:nvSpPr>
+          <p:spPr>
+            <a:xfrm>
+              <a:off x="914987" y="4336484"/>
+              <a:ext cx="0" cy="1317069"/>
+            </a:xfrm>
+            <a:custGeom>
+              <a:avLst/>
+              <a:pathLst>
+                <a:path w="0" h="1317069">
+                  <a:moveTo>
+                    <a:pt x="0" y="1317069"/>
+                  </a:moveTo>
+                  <a:lnTo>
+                    <a:pt x="0" y="0"/>
+                  </a:lnTo>
+                  <a:lnTo>
+                    <a:pt x="0" y="0"/>
+                  </a:lnTo>
+                </a:path>
+              </a:pathLst>
+            </a:custGeom>
+            <a:ln w="6775" cap="flat">
+              <a:solidFill>
+                <a:srgbClr val="EBEBEB">
+                  <a:alpha val="100000"/>
+                </a:srgbClr>
+              </a:solidFill>
+              <a:prstDash val="solid"/>
+              <a:round/>
+            </a:ln>
+          </p:spPr>
+          <p:txBody>
+            <a:bodyPr/>
+            <a:lstStyle/>
+            <a:p/>
+          </p:txBody>
+        </p:sp>
+        <p:sp>
+          <p:nvSpPr>
+            <p:cNvPr id="44" name="pl44"/>
+            <p:cNvSpPr/>
+            <p:nvPr/>
+          </p:nvSpPr>
+          <p:spPr>
+            <a:xfrm>
+              <a:off x="1728588" y="4336484"/>
+              <a:ext cx="0" cy="1317069"/>
+            </a:xfrm>
+            <a:custGeom>
+              <a:avLst/>
+              <a:pathLst>
+                <a:path w="0" h="1317069">
+                  <a:moveTo>
+                    <a:pt x="0" y="1317069"/>
+                  </a:moveTo>
+                  <a:lnTo>
+                    <a:pt x="0" y="0"/>
+                  </a:lnTo>
+                  <a:lnTo>
+                    <a:pt x="0" y="0"/>
+                  </a:lnTo>
+                </a:path>
+              </a:pathLst>
+            </a:custGeom>
+            <a:ln w="6775" cap="flat">
+              <a:solidFill>
+                <a:srgbClr val="EBEBEB">
+                  <a:alpha val="100000"/>
+                </a:srgbClr>
+              </a:solidFill>
+              <a:prstDash val="solid"/>
+              <a:round/>
+            </a:ln>
+          </p:spPr>
+          <p:txBody>
+            <a:bodyPr/>
+            <a:lstStyle/>
+            <a:p/>
+          </p:txBody>
+        </p:sp>
+        <p:sp>
+          <p:nvSpPr>
+            <p:cNvPr id="45" name="pl45"/>
+            <p:cNvSpPr/>
+            <p:nvPr/>
+          </p:nvSpPr>
+          <p:spPr>
+            <a:xfrm>
+              <a:off x="2542190" y="4336484"/>
+              <a:ext cx="0" cy="1317069"/>
+            </a:xfrm>
+            <a:custGeom>
+              <a:avLst/>
+              <a:pathLst>
+                <a:path w="0" h="1317069">
+                  <a:moveTo>
+                    <a:pt x="0" y="1317069"/>
+                  </a:moveTo>
+                  <a:lnTo>
+                    <a:pt x="0" y="0"/>
+                  </a:lnTo>
+                  <a:lnTo>
+                    <a:pt x="0" y="0"/>
+                  </a:lnTo>
+                </a:path>
+              </a:pathLst>
+            </a:custGeom>
+            <a:ln w="6775" cap="flat">
+              <a:solidFill>
+                <a:srgbClr val="EBEBEB">
+                  <a:alpha val="100000"/>
+                </a:srgbClr>
+              </a:solidFill>
+              <a:prstDash val="solid"/>
+              <a:round/>
+            </a:ln>
+          </p:spPr>
+          <p:txBody>
+            <a:bodyPr/>
+            <a:lstStyle/>
+            <a:p/>
+          </p:txBody>
+        </p:sp>
+        <p:sp>
+          <p:nvSpPr>
+            <p:cNvPr id="46" name="pl46"/>
+            <p:cNvSpPr/>
+            <p:nvPr/>
+          </p:nvSpPr>
+          <p:spPr>
+            <a:xfrm>
+              <a:off x="3355791" y="4336484"/>
+              <a:ext cx="0" cy="1317069"/>
+            </a:xfrm>
+            <a:custGeom>
+              <a:avLst/>
+              <a:pathLst>
+                <a:path w="0" h="1317069">
+                  <a:moveTo>
+                    <a:pt x="0" y="1317069"/>
+                  </a:moveTo>
+                  <a:lnTo>
+                    <a:pt x="0" y="0"/>
+                  </a:lnTo>
+                  <a:lnTo>
+                    <a:pt x="0" y="0"/>
+                  </a:lnTo>
+                </a:path>
+              </a:pathLst>
+            </a:custGeom>
+            <a:ln w="6775" cap="flat">
+              <a:solidFill>
+                <a:srgbClr val="EBEBEB">
+                  <a:alpha val="100000"/>
+                </a:srgbClr>
+              </a:solidFill>
+              <a:prstDash val="solid"/>
+              <a:round/>
+            </a:ln>
+          </p:spPr>
+          <p:txBody>
+            <a:bodyPr/>
+            <a:lstStyle/>
+            <a:p/>
+          </p:txBody>
+        </p:sp>
+        <p:sp>
+          <p:nvSpPr>
+            <p:cNvPr id="47" name="pl47"/>
+            <p:cNvSpPr/>
+            <p:nvPr/>
+          </p:nvSpPr>
+          <p:spPr>
+            <a:xfrm>
+              <a:off x="4169393" y="4336484"/>
+              <a:ext cx="0" cy="1317069"/>
+            </a:xfrm>
+            <a:custGeom>
+              <a:avLst/>
+              <a:pathLst>
+                <a:path w="0" h="1317069">
+                  <a:moveTo>
+                    <a:pt x="0" y="1317069"/>
+                  </a:moveTo>
+                  <a:lnTo>
+                    <a:pt x="0" y="0"/>
+                  </a:lnTo>
+                  <a:lnTo>
+                    <a:pt x="0" y="0"/>
+                  </a:lnTo>
+                </a:path>
+              </a:pathLst>
+            </a:custGeom>
+            <a:ln w="6775" cap="flat">
+              <a:solidFill>
+                <a:srgbClr val="EBEBEB">
+                  <a:alpha val="100000"/>
+                </a:srgbClr>
+              </a:solidFill>
+              <a:prstDash val="solid"/>
+              <a:round/>
+            </a:ln>
+          </p:spPr>
+          <p:txBody>
+            <a:bodyPr/>
+            <a:lstStyle/>
+            <a:p/>
+          </p:txBody>
+        </p:sp>
+        <p:sp>
+          <p:nvSpPr>
+            <p:cNvPr id="48" name="pl48"/>
+            <p:cNvSpPr/>
+            <p:nvPr/>
+          </p:nvSpPr>
+          <p:spPr>
+            <a:xfrm>
+              <a:off x="4982994" y="4336484"/>
+              <a:ext cx="0" cy="1317069"/>
+            </a:xfrm>
+            <a:custGeom>
+              <a:avLst/>
+              <a:pathLst>
+                <a:path w="0" h="1317069">
+                  <a:moveTo>
+                    <a:pt x="0" y="1317069"/>
+                  </a:moveTo>
+                  <a:lnTo>
+                    <a:pt x="0" y="0"/>
+                  </a:lnTo>
+                  <a:lnTo>
+                    <a:pt x="0" y="0"/>
+                  </a:lnTo>
+                </a:path>
+              </a:pathLst>
+            </a:custGeom>
+            <a:ln w="6775" cap="flat">
+              <a:solidFill>
+                <a:srgbClr val="EBEBEB">
+                  <a:alpha val="100000"/>
+                </a:srgbClr>
+              </a:solidFill>
+              <a:prstDash val="solid"/>
+              <a:round/>
+            </a:ln>
+          </p:spPr>
+          <p:txBody>
+            <a:bodyPr/>
+            <a:lstStyle/>
+            <a:p/>
+          </p:txBody>
+        </p:sp>
+        <p:sp>
+          <p:nvSpPr>
+            <p:cNvPr id="49" name="pl49"/>
+            <p:cNvSpPr/>
+            <p:nvPr/>
+          </p:nvSpPr>
+          <p:spPr>
+            <a:xfrm>
+              <a:off x="5796595" y="4336484"/>
+              <a:ext cx="0" cy="1317069"/>
+            </a:xfrm>
+            <a:custGeom>
+              <a:avLst/>
+              <a:pathLst>
+                <a:path w="0" h="1317069">
+                  <a:moveTo>
+                    <a:pt x="0" y="1317069"/>
+                  </a:moveTo>
+                  <a:lnTo>
+                    <a:pt x="0" y="0"/>
+                  </a:lnTo>
+                  <a:lnTo>
+                    <a:pt x="0" y="0"/>
+                  </a:lnTo>
+                </a:path>
+              </a:pathLst>
+            </a:custGeom>
+            <a:ln w="6775" cap="flat">
+              <a:solidFill>
+                <a:srgbClr val="EBEBEB">
+                  <a:alpha val="100000"/>
+                </a:srgbClr>
+              </a:solidFill>
+              <a:prstDash val="solid"/>
+              <a:round/>
+            </a:ln>
+          </p:spPr>
+          <p:txBody>
+            <a:bodyPr/>
+            <a:lstStyle/>
+            <a:p/>
+          </p:txBody>
+        </p:sp>
+        <p:sp>
+          <p:nvSpPr>
+            <p:cNvPr id="50" name="pl50"/>
+            <p:cNvSpPr/>
+            <p:nvPr/>
+          </p:nvSpPr>
+          <p:spPr>
+            <a:xfrm>
+              <a:off x="6610197" y="4336484"/>
+              <a:ext cx="0" cy="1317069"/>
+            </a:xfrm>
+            <a:custGeom>
+              <a:avLst/>
+              <a:pathLst>
+                <a:path w="0" h="1317069">
+                  <a:moveTo>
+                    <a:pt x="0" y="1317069"/>
+                  </a:moveTo>
+                  <a:lnTo>
+                    <a:pt x="0" y="0"/>
+                  </a:lnTo>
+                  <a:lnTo>
+                    <a:pt x="0" y="0"/>
+                  </a:lnTo>
+                </a:path>
+              </a:pathLst>
+            </a:custGeom>
+            <a:ln w="6775" cap="flat">
+              <a:solidFill>
+                <a:srgbClr val="EBEBEB">
+                  <a:alpha val="100000"/>
+                </a:srgbClr>
+              </a:solidFill>
+              <a:prstDash val="solid"/>
+              <a:round/>
+            </a:ln>
+          </p:spPr>
+          <p:txBody>
+            <a:bodyPr/>
+            <a:lstStyle/>
+            <a:p/>
+          </p:txBody>
+        </p:sp>
+        <p:sp>
+          <p:nvSpPr>
+            <p:cNvPr id="51" name="pl51"/>
+            <p:cNvSpPr/>
+            <p:nvPr/>
+          </p:nvSpPr>
+          <p:spPr>
+            <a:xfrm>
+              <a:off x="7423798" y="4336484"/>
+              <a:ext cx="0" cy="1317069"/>
+            </a:xfrm>
+            <a:custGeom>
+              <a:avLst/>
+              <a:pathLst>
+                <a:path w="0" h="1317069">
+                  <a:moveTo>
+                    <a:pt x="0" y="1317069"/>
+                  </a:moveTo>
+                  <a:lnTo>
+                    <a:pt x="0" y="0"/>
+                  </a:lnTo>
+                  <a:lnTo>
+                    <a:pt x="0" y="0"/>
+                  </a:lnTo>
+                </a:path>
+              </a:pathLst>
+            </a:custGeom>
+            <a:ln w="6775" cap="flat">
+              <a:solidFill>
+                <a:srgbClr val="EBEBEB">
+                  <a:alpha val="100000"/>
+                </a:srgbClr>
+              </a:solidFill>
+              <a:prstDash val="solid"/>
+              <a:round/>
+            </a:ln>
+          </p:spPr>
+          <p:txBody>
+            <a:bodyPr/>
+            <a:lstStyle/>
+            <a:p/>
+          </p:txBody>
+        </p:sp>
+        <p:sp>
+          <p:nvSpPr>
+            <p:cNvPr id="52" name="pl52"/>
+            <p:cNvSpPr/>
+            <p:nvPr/>
+          </p:nvSpPr>
+          <p:spPr>
+            <a:xfrm>
+              <a:off x="8237399" y="4336484"/>
+              <a:ext cx="0" cy="1317069"/>
+            </a:xfrm>
+            <a:custGeom>
+              <a:avLst/>
+              <a:pathLst>
+                <a:path w="0" h="1317069">
+                  <a:moveTo>
+                    <a:pt x="0" y="1317069"/>
+                  </a:moveTo>
+                  <a:lnTo>
+                    <a:pt x="0" y="0"/>
+                  </a:lnTo>
+                  <a:lnTo>
+                    <a:pt x="0" y="0"/>
+                  </a:lnTo>
+                </a:path>
+              </a:pathLst>
+            </a:custGeom>
+            <a:ln w="6775" cap="flat">
+              <a:solidFill>
+                <a:srgbClr val="EBEBEB">
+                  <a:alpha val="100000"/>
+                </a:srgbClr>
+              </a:solidFill>
+              <a:prstDash val="solid"/>
+              <a:round/>
+            </a:ln>
+          </p:spPr>
+          <p:txBody>
+            <a:bodyPr/>
+            <a:lstStyle/>
+            <a:p/>
+          </p:txBody>
+        </p:sp>
+        <p:sp>
+          <p:nvSpPr>
+            <p:cNvPr id="53" name="pl53"/>
+            <p:cNvSpPr/>
+            <p:nvPr/>
+          </p:nvSpPr>
+          <p:spPr>
+            <a:xfrm>
+              <a:off x="887106" y="5593686"/>
+              <a:ext cx="7660515" cy="0"/>
+            </a:xfrm>
+            <a:custGeom>
+              <a:avLst/>
+              <a:pathLst>
+                <a:path w="7660515" h="0">
+                  <a:moveTo>
+                    <a:pt x="0" y="0"/>
+                  </a:moveTo>
+                  <a:lnTo>
+                    <a:pt x="7660515" y="0"/>
+                  </a:lnTo>
+                  <a:lnTo>
+                    <a:pt x="7660515" y="0"/>
+                  </a:lnTo>
+                </a:path>
+              </a:pathLst>
+            </a:custGeom>
+            <a:ln w="13550" cap="flat">
+              <a:solidFill>
+                <a:srgbClr val="EBEBEB">
+                  <a:alpha val="100000"/>
+                </a:srgbClr>
+              </a:solidFill>
+              <a:prstDash val="solid"/>
+              <a:round/>
+            </a:ln>
+          </p:spPr>
+          <p:txBody>
+            <a:bodyPr/>
+            <a:lstStyle/>
+            <a:p/>
+          </p:txBody>
+        </p:sp>
+        <p:sp>
+          <p:nvSpPr>
+            <p:cNvPr id="54" name="pl54"/>
+            <p:cNvSpPr/>
+            <p:nvPr/>
+          </p:nvSpPr>
+          <p:spPr>
+            <a:xfrm>
+              <a:off x="887106" y="5294352"/>
+              <a:ext cx="7660515" cy="0"/>
+            </a:xfrm>
+            <a:custGeom>
+              <a:avLst/>
+              <a:pathLst>
+                <a:path w="7660515" h="0">
+                  <a:moveTo>
+                    <a:pt x="0" y="0"/>
+                  </a:moveTo>
+                  <a:lnTo>
+                    <a:pt x="7660515" y="0"/>
+                  </a:lnTo>
+                  <a:lnTo>
+                    <a:pt x="7660515" y="0"/>
+                  </a:lnTo>
+                </a:path>
+              </a:pathLst>
+            </a:custGeom>
+            <a:ln w="13550" cap="flat">
+              <a:solidFill>
+                <a:srgbClr val="EBEBEB">
+                  <a:alpha val="100000"/>
+                </a:srgbClr>
+              </a:solidFill>
+              <a:prstDash val="solid"/>
+              <a:round/>
+            </a:ln>
+          </p:spPr>
+          <p:txBody>
+            <a:bodyPr/>
+            <a:lstStyle/>
+            <a:p/>
+          </p:txBody>
+        </p:sp>
+        <p:sp>
+          <p:nvSpPr>
+            <p:cNvPr id="55" name="pl55"/>
+            <p:cNvSpPr/>
+            <p:nvPr/>
+          </p:nvSpPr>
+          <p:spPr>
+            <a:xfrm>
+              <a:off x="887106" y="4995019"/>
+              <a:ext cx="7660515" cy="0"/>
+            </a:xfrm>
+            <a:custGeom>
+              <a:avLst/>
+              <a:pathLst>
+                <a:path w="7660515" h="0">
+                  <a:moveTo>
+                    <a:pt x="0" y="0"/>
+                  </a:moveTo>
+                  <a:lnTo>
+                    <a:pt x="7660515" y="0"/>
+                  </a:lnTo>
+                  <a:lnTo>
+                    <a:pt x="7660515" y="0"/>
+                  </a:lnTo>
+                </a:path>
+              </a:pathLst>
+            </a:custGeom>
+            <a:ln w="13550" cap="flat">
+              <a:solidFill>
+                <a:srgbClr val="EBEBEB">
+                  <a:alpha val="100000"/>
+                </a:srgbClr>
+              </a:solidFill>
+              <a:prstDash val="solid"/>
+              <a:round/>
+            </a:ln>
+          </p:spPr>
+          <p:txBody>
+            <a:bodyPr/>
+            <a:lstStyle/>
+            <a:p/>
+          </p:txBody>
+        </p:sp>
+        <p:sp>
+          <p:nvSpPr>
+            <p:cNvPr id="56" name="pl56"/>
+            <p:cNvSpPr/>
+            <p:nvPr/>
+          </p:nvSpPr>
+          <p:spPr>
+            <a:xfrm>
+              <a:off x="887106" y="4695685"/>
+              <a:ext cx="7660515" cy="0"/>
+            </a:xfrm>
+            <a:custGeom>
+              <a:avLst/>
+              <a:pathLst>
+                <a:path w="7660515" h="0">
+                  <a:moveTo>
+                    <a:pt x="0" y="0"/>
+                  </a:moveTo>
+                  <a:lnTo>
+                    <a:pt x="7660515" y="0"/>
+                  </a:lnTo>
+                  <a:lnTo>
+                    <a:pt x="7660515" y="0"/>
+                  </a:lnTo>
+                </a:path>
+              </a:pathLst>
+            </a:custGeom>
+            <a:ln w="13550" cap="flat">
+              <a:solidFill>
+                <a:srgbClr val="EBEBEB">
+                  <a:alpha val="100000"/>
+                </a:srgbClr>
+              </a:solidFill>
+              <a:prstDash val="solid"/>
+              <a:round/>
+            </a:ln>
+          </p:spPr>
+          <p:txBody>
+            <a:bodyPr/>
+            <a:lstStyle/>
+            <a:p/>
+          </p:txBody>
+        </p:sp>
+        <p:sp>
+          <p:nvSpPr>
+            <p:cNvPr id="57" name="pl57"/>
+            <p:cNvSpPr/>
+            <p:nvPr/>
+          </p:nvSpPr>
+          <p:spPr>
+            <a:xfrm>
+              <a:off x="887106" y="4396351"/>
+              <a:ext cx="7660515" cy="0"/>
+            </a:xfrm>
+            <a:custGeom>
+              <a:avLst/>
+              <a:pathLst>
+                <a:path w="7660515" h="0">
+                  <a:moveTo>
+                    <a:pt x="0" y="0"/>
+                  </a:moveTo>
+                  <a:lnTo>
+                    <a:pt x="7660515" y="0"/>
+                  </a:lnTo>
+                  <a:lnTo>
+                    <a:pt x="7660515" y="0"/>
+                  </a:lnTo>
+                </a:path>
+              </a:pathLst>
+            </a:custGeom>
+            <a:ln w="13550" cap="flat">
+              <a:solidFill>
+                <a:srgbClr val="EBEBEB">
+                  <a:alpha val="100000"/>
+                </a:srgbClr>
+              </a:solidFill>
+              <a:prstDash val="solid"/>
+              <a:round/>
+            </a:ln>
+          </p:spPr>
+          <p:txBody>
+            <a:bodyPr/>
+            <a:lstStyle/>
+            <a:p/>
+          </p:txBody>
+        </p:sp>
+        <p:sp>
+          <p:nvSpPr>
+            <p:cNvPr id="58" name="pl58"/>
+            <p:cNvSpPr/>
+            <p:nvPr/>
+          </p:nvSpPr>
+          <p:spPr>
+            <a:xfrm>
+              <a:off x="1321788" y="4336484"/>
+              <a:ext cx="0" cy="1317069"/>
+            </a:xfrm>
+            <a:custGeom>
+              <a:avLst/>
+              <a:pathLst>
+                <a:path w="0" h="1317069">
+                  <a:moveTo>
+                    <a:pt x="0" y="1317069"/>
+                  </a:moveTo>
+                  <a:lnTo>
+                    <a:pt x="0" y="0"/>
+                  </a:lnTo>
+                  <a:lnTo>
+                    <a:pt x="0" y="0"/>
+                  </a:lnTo>
+                </a:path>
+              </a:pathLst>
+            </a:custGeom>
+            <a:ln w="13550" cap="flat">
+              <a:solidFill>
+                <a:srgbClr val="EBEBEB">
+                  <a:alpha val="100000"/>
+                </a:srgbClr>
+              </a:solidFill>
+              <a:prstDash val="solid"/>
+              <a:round/>
+            </a:ln>
+          </p:spPr>
+          <p:txBody>
+            <a:bodyPr/>
+            <a:lstStyle/>
+            <a:p/>
+          </p:txBody>
+        </p:sp>
+        <p:sp>
+          <p:nvSpPr>
+            <p:cNvPr id="59" name="pl59"/>
+            <p:cNvSpPr/>
+            <p:nvPr/>
+          </p:nvSpPr>
+          <p:spPr>
+            <a:xfrm>
+              <a:off x="2135389" y="4336484"/>
+              <a:ext cx="0" cy="1317069"/>
+            </a:xfrm>
+            <a:custGeom>
+              <a:avLst/>
+              <a:pathLst>
+                <a:path w="0" h="1317069">
+                  <a:moveTo>
+                    <a:pt x="0" y="1317069"/>
+                  </a:moveTo>
+                  <a:lnTo>
+                    <a:pt x="0" y="0"/>
+                  </a:lnTo>
+                  <a:lnTo>
+                    <a:pt x="0" y="0"/>
+                  </a:lnTo>
+                </a:path>
+              </a:pathLst>
+            </a:custGeom>
+            <a:ln w="13550" cap="flat">
+              <a:solidFill>
+                <a:srgbClr val="EBEBEB">
+                  <a:alpha val="100000"/>
+                </a:srgbClr>
+              </a:solidFill>
+              <a:prstDash val="solid"/>
+              <a:round/>
+            </a:ln>
+          </p:spPr>
+          <p:txBody>
+            <a:bodyPr/>
+            <a:lstStyle/>
+            <a:p/>
+          </p:txBody>
+        </p:sp>
+        <p:sp>
+          <p:nvSpPr>
+            <p:cNvPr id="60" name="pl60"/>
+            <p:cNvSpPr/>
+            <p:nvPr/>
+          </p:nvSpPr>
+          <p:spPr>
+            <a:xfrm>
+              <a:off x="2948991" y="4336484"/>
+              <a:ext cx="0" cy="1317069"/>
+            </a:xfrm>
+            <a:custGeom>
+              <a:avLst/>
+              <a:pathLst>
+                <a:path w="0" h="1317069">
+                  <a:moveTo>
+                    <a:pt x="0" y="1317069"/>
+                  </a:moveTo>
+                  <a:lnTo>
+                    <a:pt x="0" y="0"/>
+                  </a:lnTo>
+                  <a:lnTo>
+                    <a:pt x="0" y="0"/>
+                  </a:lnTo>
+                </a:path>
+              </a:pathLst>
+            </a:custGeom>
+            <a:ln w="13550" cap="flat">
+              <a:solidFill>
+                <a:srgbClr val="EBEBEB">
+                  <a:alpha val="100000"/>
+                </a:srgbClr>
+              </a:solidFill>
+              <a:prstDash val="solid"/>
+              <a:round/>
+            </a:ln>
+          </p:spPr>
+          <p:txBody>
+            <a:bodyPr/>
+            <a:lstStyle/>
+            <a:p/>
+          </p:txBody>
+        </p:sp>
+        <p:sp>
+          <p:nvSpPr>
+            <p:cNvPr id="61" name="pl61"/>
+            <p:cNvSpPr/>
+            <p:nvPr/>
+          </p:nvSpPr>
+          <p:spPr>
+            <a:xfrm>
+              <a:off x="3762592" y="4336484"/>
+              <a:ext cx="0" cy="1317069"/>
+            </a:xfrm>
+            <a:custGeom>
+              <a:avLst/>
+              <a:pathLst>
+                <a:path w="0" h="1317069">
+                  <a:moveTo>
+                    <a:pt x="0" y="1317069"/>
+                  </a:moveTo>
+                  <a:lnTo>
+                    <a:pt x="0" y="0"/>
+                  </a:lnTo>
+                  <a:lnTo>
+                    <a:pt x="0" y="0"/>
+                  </a:lnTo>
+                </a:path>
+              </a:pathLst>
+            </a:custGeom>
+            <a:ln w="13550" cap="flat">
+              <a:solidFill>
+                <a:srgbClr val="EBEBEB">
+                  <a:alpha val="100000"/>
+                </a:srgbClr>
+              </a:solidFill>
+              <a:prstDash val="solid"/>
+              <a:round/>
+            </a:ln>
+          </p:spPr>
+          <p:txBody>
+            <a:bodyPr/>
+            <a:lstStyle/>
+            <a:p/>
+          </p:txBody>
+        </p:sp>
+        <p:sp>
+          <p:nvSpPr>
+            <p:cNvPr id="62" name="pl62"/>
+            <p:cNvSpPr/>
+            <p:nvPr/>
+          </p:nvSpPr>
+          <p:spPr>
+            <a:xfrm>
+              <a:off x="4576193" y="4336484"/>
+              <a:ext cx="0" cy="1317069"/>
+            </a:xfrm>
+            <a:custGeom>
+              <a:avLst/>
+              <a:pathLst>
+                <a:path w="0" h="1317069">
+                  <a:moveTo>
+                    <a:pt x="0" y="1317069"/>
+                  </a:moveTo>
+                  <a:lnTo>
+                    <a:pt x="0" y="0"/>
+                  </a:lnTo>
+                  <a:lnTo>
+                    <a:pt x="0" y="0"/>
+                  </a:lnTo>
+                </a:path>
+              </a:pathLst>
+            </a:custGeom>
+            <a:ln w="13550" cap="flat">
+              <a:solidFill>
+                <a:srgbClr val="EBEBEB">
+                  <a:alpha val="100000"/>
+                </a:srgbClr>
+              </a:solidFill>
+              <a:prstDash val="solid"/>
+              <a:round/>
+            </a:ln>
+          </p:spPr>
+          <p:txBody>
+            <a:bodyPr/>
+            <a:lstStyle/>
+            <a:p/>
+          </p:txBody>
+        </p:sp>
+        <p:sp>
+          <p:nvSpPr>
+            <p:cNvPr id="63" name="pl63"/>
+            <p:cNvSpPr/>
+            <p:nvPr/>
+          </p:nvSpPr>
+          <p:spPr>
+            <a:xfrm>
+              <a:off x="5389795" y="4336484"/>
+              <a:ext cx="0" cy="1317069"/>
+            </a:xfrm>
+            <a:custGeom>
+              <a:avLst/>
+              <a:pathLst>
+                <a:path w="0" h="1317069">
+                  <a:moveTo>
+                    <a:pt x="0" y="1317069"/>
+                  </a:moveTo>
+                  <a:lnTo>
+                    <a:pt x="0" y="0"/>
+                  </a:lnTo>
+                  <a:lnTo>
+                    <a:pt x="0" y="0"/>
+                  </a:lnTo>
+                </a:path>
+              </a:pathLst>
+            </a:custGeom>
+            <a:ln w="13550" cap="flat">
+              <a:solidFill>
+                <a:srgbClr val="EBEBEB">
+                  <a:alpha val="100000"/>
+                </a:srgbClr>
+              </a:solidFill>
+              <a:prstDash val="solid"/>
+              <a:round/>
+            </a:ln>
+          </p:spPr>
+          <p:txBody>
+            <a:bodyPr/>
+            <a:lstStyle/>
+            <a:p/>
+          </p:txBody>
+        </p:sp>
+        <p:sp>
+          <p:nvSpPr>
+            <p:cNvPr id="64" name="pl64"/>
+            <p:cNvSpPr/>
+            <p:nvPr/>
+          </p:nvSpPr>
+          <p:spPr>
+            <a:xfrm>
+              <a:off x="6203396" y="4336484"/>
+              <a:ext cx="0" cy="1317069"/>
+            </a:xfrm>
+            <a:custGeom>
+              <a:avLst/>
+              <a:pathLst>
+                <a:path w="0" h="1317069">
+                  <a:moveTo>
+                    <a:pt x="0" y="1317069"/>
+                  </a:moveTo>
+                  <a:lnTo>
+                    <a:pt x="0" y="0"/>
+                  </a:lnTo>
+                  <a:lnTo>
+                    <a:pt x="0" y="0"/>
+                  </a:lnTo>
+                </a:path>
+              </a:pathLst>
+            </a:custGeom>
+            <a:ln w="13550" cap="flat">
+              <a:solidFill>
+                <a:srgbClr val="EBEBEB">
+                  <a:alpha val="100000"/>
+                </a:srgbClr>
+              </a:solidFill>
+              <a:prstDash val="solid"/>
+              <a:round/>
+            </a:ln>
+          </p:spPr>
+          <p:txBody>
+            <a:bodyPr/>
+            <a:lstStyle/>
+            <a:p/>
+          </p:txBody>
+        </p:sp>
+        <p:sp>
+          <p:nvSpPr>
+            <p:cNvPr id="65" name="pl65"/>
+            <p:cNvSpPr/>
+            <p:nvPr/>
+          </p:nvSpPr>
+          <p:spPr>
+            <a:xfrm>
+              <a:off x="7016997" y="4336484"/>
+              <a:ext cx="0" cy="1317069"/>
+            </a:xfrm>
+            <a:custGeom>
+              <a:avLst/>
+              <a:pathLst>
+                <a:path w="0" h="1317069">
+                  <a:moveTo>
+                    <a:pt x="0" y="1317069"/>
+                  </a:moveTo>
+                  <a:lnTo>
+                    <a:pt x="0" y="0"/>
+                  </a:lnTo>
+                  <a:lnTo>
+                    <a:pt x="0" y="0"/>
+                  </a:lnTo>
+                </a:path>
+              </a:pathLst>
+            </a:custGeom>
+            <a:ln w="13550" cap="flat">
+              <a:solidFill>
+                <a:srgbClr val="EBEBEB">
+                  <a:alpha val="100000"/>
+                </a:srgbClr>
+              </a:solidFill>
+              <a:prstDash val="solid"/>
+              <a:round/>
+            </a:ln>
+          </p:spPr>
+          <p:txBody>
+            <a:bodyPr/>
+            <a:lstStyle/>
+            <a:p/>
+          </p:txBody>
+        </p:sp>
+        <p:sp>
+          <p:nvSpPr>
+            <p:cNvPr id="66" name="pl66"/>
+            <p:cNvSpPr/>
+            <p:nvPr/>
+          </p:nvSpPr>
+          <p:spPr>
+            <a:xfrm>
+              <a:off x="7830599" y="4336484"/>
+              <a:ext cx="0" cy="1317069"/>
+            </a:xfrm>
+            <a:custGeom>
+              <a:avLst/>
+              <a:pathLst>
+                <a:path w="0" h="1317069">
+                  <a:moveTo>
+                    <a:pt x="0" y="1317069"/>
+                  </a:moveTo>
+                  <a:lnTo>
+                    <a:pt x="0" y="0"/>
+                  </a:lnTo>
+                  <a:lnTo>
+                    <a:pt x="0" y="0"/>
+                  </a:lnTo>
+                </a:path>
+              </a:pathLst>
+            </a:custGeom>
+            <a:ln w="13550" cap="flat">
+              <a:solidFill>
+                <a:srgbClr val="EBEBEB">
+                  <a:alpha val="100000"/>
+                </a:srgbClr>
+              </a:solidFill>
+              <a:prstDash val="solid"/>
+              <a:round/>
+            </a:ln>
+          </p:spPr>
+          <p:txBody>
+            <a:bodyPr/>
+            <a:lstStyle/>
+            <a:p/>
+          </p:txBody>
+        </p:sp>
+        <p:sp>
+          <p:nvSpPr>
+            <p:cNvPr id="67" name="pg67"/>
+            <p:cNvSpPr/>
+            <p:nvPr/>
+          </p:nvSpPr>
+          <p:spPr>
+            <a:xfrm>
+              <a:off x="1235312" y="4886537"/>
+              <a:ext cx="6964104" cy="569971"/>
+            </a:xfrm>
+            <a:custGeom>
+              <a:avLst/>
+              <a:pathLst>
+                <a:path w="6964104" h="569971">
+                  <a:moveTo>
+                    <a:pt x="0" y="103917"/>
+                  </a:moveTo>
+                  <a:lnTo>
+                    <a:pt x="70344" y="112874"/>
+                  </a:lnTo>
+                  <a:lnTo>
+                    <a:pt x="140688" y="121698"/>
+                  </a:lnTo>
+                  <a:lnTo>
+                    <a:pt x="211033" y="130391"/>
+                  </a:lnTo>
+                  <a:lnTo>
+                    <a:pt x="281377" y="138955"/>
+                  </a:lnTo>
+                  <a:lnTo>
+                    <a:pt x="351722" y="147392"/>
+                  </a:lnTo>
+                  <a:lnTo>
+                    <a:pt x="422066" y="155703"/>
+                  </a:lnTo>
+                  <a:lnTo>
+                    <a:pt x="492411" y="163891"/>
+                  </a:lnTo>
+                  <a:lnTo>
+                    <a:pt x="562755" y="171958"/>
+                  </a:lnTo>
+                  <a:lnTo>
+                    <a:pt x="633100" y="179905"/>
+                  </a:lnTo>
+                  <a:lnTo>
+                    <a:pt x="703444" y="187733"/>
+                  </a:lnTo>
+                  <a:lnTo>
+                    <a:pt x="773789" y="195446"/>
+                  </a:lnTo>
+                  <a:lnTo>
+                    <a:pt x="844133" y="203044"/>
+                  </a:lnTo>
+                  <a:lnTo>
+                    <a:pt x="914478" y="210529"/>
+                  </a:lnTo>
+                  <a:lnTo>
+                    <a:pt x="984822" y="217903"/>
+                  </a:lnTo>
+                  <a:lnTo>
+                    <a:pt x="1055167" y="225168"/>
+                  </a:lnTo>
+                  <a:lnTo>
+                    <a:pt x="1125511" y="232325"/>
+                  </a:lnTo>
+                  <a:lnTo>
+                    <a:pt x="1195856" y="239375"/>
+                  </a:lnTo>
+                  <a:lnTo>
+                    <a:pt x="1266200" y="246321"/>
+                  </a:lnTo>
+                  <a:lnTo>
+                    <a:pt x="1336545" y="253163"/>
+                  </a:lnTo>
+                  <a:lnTo>
+                    <a:pt x="1406889" y="259904"/>
+                  </a:lnTo>
+                  <a:lnTo>
+                    <a:pt x="1477234" y="266545"/>
+                  </a:lnTo>
+                  <a:lnTo>
+                    <a:pt x="1547578" y="273088"/>
+                  </a:lnTo>
+                  <a:lnTo>
+                    <a:pt x="1617923" y="279533"/>
+                  </a:lnTo>
+                  <a:lnTo>
+                    <a:pt x="1688267" y="285882"/>
+                  </a:lnTo>
+                  <a:lnTo>
+                    <a:pt x="1758612" y="292137"/>
+                  </a:lnTo>
+                  <a:lnTo>
+                    <a:pt x="1828956" y="298300"/>
+                  </a:lnTo>
+                  <a:lnTo>
+                    <a:pt x="1899301" y="304370"/>
+                  </a:lnTo>
+                  <a:lnTo>
+                    <a:pt x="1969645" y="310351"/>
+                  </a:lnTo>
+                  <a:lnTo>
+                    <a:pt x="2039990" y="316243"/>
+                  </a:lnTo>
+                  <a:lnTo>
+                    <a:pt x="2110334" y="322047"/>
+                  </a:lnTo>
+                  <a:lnTo>
+                    <a:pt x="2180679" y="327765"/>
+                  </a:lnTo>
+                  <a:lnTo>
+                    <a:pt x="2251023" y="333399"/>
+                  </a:lnTo>
+                  <a:lnTo>
+                    <a:pt x="2321368" y="338948"/>
+                  </a:lnTo>
+                  <a:lnTo>
+                    <a:pt x="2391712" y="344416"/>
+                  </a:lnTo>
+                  <a:lnTo>
+                    <a:pt x="2462057" y="349802"/>
+                  </a:lnTo>
+                  <a:lnTo>
+                    <a:pt x="2532401" y="355108"/>
+                  </a:lnTo>
+                  <a:lnTo>
+                    <a:pt x="2602746" y="360335"/>
+                  </a:lnTo>
+                  <a:lnTo>
+                    <a:pt x="2673090" y="365485"/>
+                  </a:lnTo>
+                  <a:lnTo>
+                    <a:pt x="2743435" y="370558"/>
+                  </a:lnTo>
+                  <a:lnTo>
+                    <a:pt x="2813779" y="375556"/>
+                  </a:lnTo>
+                  <a:lnTo>
+                    <a:pt x="2884124" y="380479"/>
+                  </a:lnTo>
+                  <a:lnTo>
+                    <a:pt x="2954468" y="385330"/>
+                  </a:lnTo>
+                  <a:lnTo>
+                    <a:pt x="3024813" y="390108"/>
+                  </a:lnTo>
+                  <a:lnTo>
+                    <a:pt x="3095157" y="394816"/>
+                  </a:lnTo>
+                  <a:lnTo>
+                    <a:pt x="3165502" y="399454"/>
+                  </a:lnTo>
+                  <a:lnTo>
+                    <a:pt x="3235846" y="404022"/>
+                  </a:lnTo>
+                  <a:lnTo>
+                    <a:pt x="3306191" y="407031"/>
+                  </a:lnTo>
+                  <a:lnTo>
+                    <a:pt x="3376535" y="402044"/>
+                  </a:lnTo>
+                  <a:lnTo>
+                    <a:pt x="3446880" y="396973"/>
+                  </a:lnTo>
+                  <a:lnTo>
+                    <a:pt x="3517224" y="391819"/>
+                  </a:lnTo>
+                  <a:lnTo>
+                    <a:pt x="3587569" y="386578"/>
+                  </a:lnTo>
+                  <a:lnTo>
+                    <a:pt x="3657913" y="381251"/>
+                  </a:lnTo>
+                  <a:lnTo>
+                    <a:pt x="3728257" y="375835"/>
+                  </a:lnTo>
+                  <a:lnTo>
+                    <a:pt x="3798602" y="370329"/>
+                  </a:lnTo>
+                  <a:lnTo>
+                    <a:pt x="3868946" y="364732"/>
+                  </a:lnTo>
+                  <a:lnTo>
+                    <a:pt x="3939291" y="359041"/>
+                  </a:lnTo>
+                  <a:lnTo>
+                    <a:pt x="4009635" y="353256"/>
+                  </a:lnTo>
+                  <a:lnTo>
+                    <a:pt x="4079980" y="347375"/>
+                  </a:lnTo>
+                  <a:lnTo>
+                    <a:pt x="4150324" y="341396"/>
+                  </a:lnTo>
+                  <a:lnTo>
+                    <a:pt x="4220669" y="335317"/>
+                  </a:lnTo>
+                  <a:lnTo>
+                    <a:pt x="4291013" y="329138"/>
+                  </a:lnTo>
+                  <a:lnTo>
+                    <a:pt x="4361358" y="322856"/>
+                  </a:lnTo>
+                  <a:lnTo>
+                    <a:pt x="4431702" y="316470"/>
+                  </a:lnTo>
+                  <a:lnTo>
+                    <a:pt x="4502047" y="309977"/>
+                  </a:lnTo>
+                  <a:lnTo>
+                    <a:pt x="4572391" y="303377"/>
+                  </a:lnTo>
+                  <a:lnTo>
+                    <a:pt x="4642736" y="296666"/>
+                  </a:lnTo>
+                  <a:lnTo>
+                    <a:pt x="4713080" y="289845"/>
+                  </a:lnTo>
+                  <a:lnTo>
+                    <a:pt x="4783425" y="282910"/>
+                  </a:lnTo>
+                  <a:lnTo>
+                    <a:pt x="4853769" y="275859"/>
+                  </a:lnTo>
+                  <a:lnTo>
+                    <a:pt x="4924114" y="268692"/>
+                  </a:lnTo>
+                  <a:lnTo>
+                    <a:pt x="4994458" y="261405"/>
+                  </a:lnTo>
+                  <a:lnTo>
+                    <a:pt x="5064803" y="253998"/>
+                  </a:lnTo>
+                  <a:lnTo>
+                    <a:pt x="5135147" y="246467"/>
+                  </a:lnTo>
+                  <a:lnTo>
+                    <a:pt x="5205492" y="238811"/>
+                  </a:lnTo>
+                  <a:lnTo>
+                    <a:pt x="5275836" y="231028"/>
+                  </a:lnTo>
+                  <a:lnTo>
+                    <a:pt x="5346181" y="223115"/>
+                  </a:lnTo>
+                  <a:lnTo>
+                    <a:pt x="5416525" y="215071"/>
+                  </a:lnTo>
+                  <a:lnTo>
+                    <a:pt x="5486870" y="206894"/>
+                  </a:lnTo>
+                  <a:lnTo>
+                    <a:pt x="5557214" y="198580"/>
+                  </a:lnTo>
+                  <a:lnTo>
+                    <a:pt x="5627559" y="190128"/>
+                  </a:lnTo>
+                  <a:lnTo>
+                    <a:pt x="5697903" y="181536"/>
+                  </a:lnTo>
+                  <a:lnTo>
+                    <a:pt x="5768248" y="172801"/>
+                  </a:lnTo>
+                  <a:lnTo>
+                    <a:pt x="5838592" y="163921"/>
+                  </a:lnTo>
+                  <a:lnTo>
+                    <a:pt x="5908937" y="154893"/>
+                  </a:lnTo>
+                  <a:lnTo>
+                    <a:pt x="5979281" y="145716"/>
+                  </a:lnTo>
+                  <a:lnTo>
+                    <a:pt x="6049626" y="136385"/>
+                  </a:lnTo>
+                  <a:lnTo>
+                    <a:pt x="6119970" y="126900"/>
+                  </a:lnTo>
+                  <a:lnTo>
+                    <a:pt x="6190315" y="117257"/>
+                  </a:lnTo>
+                  <a:lnTo>
+                    <a:pt x="6260659" y="107454"/>
+                  </a:lnTo>
+                  <a:lnTo>
+                    <a:pt x="6331004" y="97488"/>
+                  </a:lnTo>
+                  <a:lnTo>
+                    <a:pt x="6401348" y="87356"/>
+                  </a:lnTo>
+                  <a:lnTo>
+                    <a:pt x="6471693" y="77056"/>
+                  </a:lnTo>
+                  <a:lnTo>
+                    <a:pt x="6542037" y="66585"/>
+                  </a:lnTo>
+                  <a:lnTo>
+                    <a:pt x="6612382" y="55939"/>
+                  </a:lnTo>
+                  <a:lnTo>
+                    <a:pt x="6682726" y="45117"/>
+                  </a:lnTo>
+                  <a:lnTo>
+                    <a:pt x="6753071" y="34115"/>
+                  </a:lnTo>
+                  <a:lnTo>
+                    <a:pt x="6823415" y="22930"/>
+                  </a:lnTo>
+                  <a:lnTo>
+                    <a:pt x="6893760" y="11559"/>
+                  </a:lnTo>
+                  <a:lnTo>
+                    <a:pt x="6964104" y="0"/>
+                  </a:lnTo>
+                  <a:lnTo>
+                    <a:pt x="6964104" y="569971"/>
+                  </a:lnTo>
+                  <a:lnTo>
+                    <a:pt x="6893760" y="567903"/>
+                  </a:lnTo>
+                  <a:lnTo>
+                    <a:pt x="6823415" y="565805"/>
+                  </a:lnTo>
+                  <a:lnTo>
+                    <a:pt x="6753071" y="563674"/>
+                  </a:lnTo>
+                  <a:lnTo>
+                    <a:pt x="6682726" y="561512"/>
+                  </a:lnTo>
+                  <a:lnTo>
+                    <a:pt x="6612382" y="559317"/>
+                  </a:lnTo>
+                  <a:lnTo>
+                    <a:pt x="6542037" y="557088"/>
+                  </a:lnTo>
+                  <a:lnTo>
+                    <a:pt x="6471693" y="554827"/>
+                  </a:lnTo>
+                  <a:lnTo>
+                    <a:pt x="6401348" y="552531"/>
+                  </a:lnTo>
+                  <a:lnTo>
+                    <a:pt x="6331004" y="550200"/>
+                  </a:lnTo>
+                  <a:lnTo>
+                    <a:pt x="6260659" y="547835"/>
+                  </a:lnTo>
+                  <a:lnTo>
+                    <a:pt x="6190315" y="545434"/>
+                  </a:lnTo>
+                  <a:lnTo>
+                    <a:pt x="6119970" y="542996"/>
+                  </a:lnTo>
+                  <a:lnTo>
+                    <a:pt x="6049626" y="540522"/>
+                  </a:lnTo>
+                  <a:lnTo>
+                    <a:pt x="5979281" y="538011"/>
+                  </a:lnTo>
+                  <a:lnTo>
+                    <a:pt x="5908937" y="535461"/>
+                  </a:lnTo>
+                  <a:lnTo>
+                    <a:pt x="5838592" y="532874"/>
+                  </a:lnTo>
+                  <a:lnTo>
+                    <a:pt x="5768248" y="530247"/>
+                  </a:lnTo>
+                  <a:lnTo>
+                    <a:pt x="5697903" y="527581"/>
+                  </a:lnTo>
+                  <a:lnTo>
+                    <a:pt x="5627559" y="524874"/>
+                  </a:lnTo>
+                  <a:lnTo>
+                    <a:pt x="5557214" y="522127"/>
+                  </a:lnTo>
+                  <a:lnTo>
+                    <a:pt x="5486870" y="519338"/>
+                  </a:lnTo>
+                  <a:lnTo>
+                    <a:pt x="5416525" y="516507"/>
+                  </a:lnTo>
+                  <a:lnTo>
+                    <a:pt x="5346181" y="513634"/>
+                  </a:lnTo>
+                  <a:lnTo>
+                    <a:pt x="5275836" y="510717"/>
+                  </a:lnTo>
+                  <a:lnTo>
+                    <a:pt x="5205492" y="507756"/>
+                  </a:lnTo>
+                  <a:lnTo>
+                    <a:pt x="5135147" y="504751"/>
+                  </a:lnTo>
+                  <a:lnTo>
+                    <a:pt x="5064803" y="501701"/>
+                  </a:lnTo>
+                  <a:lnTo>
+                    <a:pt x="4994458" y="498604"/>
+                  </a:lnTo>
+                  <a:lnTo>
+                    <a:pt x="4924114" y="495461"/>
+                  </a:lnTo>
+                  <a:lnTo>
+                    <a:pt x="4853769" y="492270"/>
+                  </a:lnTo>
+                  <a:lnTo>
+                    <a:pt x="4783425" y="489031"/>
+                  </a:lnTo>
+                  <a:lnTo>
+                    <a:pt x="4713080" y="485744"/>
+                  </a:lnTo>
+                  <a:lnTo>
+                    <a:pt x="4642736" y="482407"/>
+                  </a:lnTo>
+                  <a:lnTo>
+                    <a:pt x="4572391" y="479019"/>
+                  </a:lnTo>
+                  <a:lnTo>
+                    <a:pt x="4502047" y="475581"/>
+                  </a:lnTo>
+                  <a:lnTo>
+                    <a:pt x="4431702" y="472091"/>
+                  </a:lnTo>
+                  <a:lnTo>
+                    <a:pt x="4361358" y="468548"/>
+                  </a:lnTo>
+                  <a:lnTo>
+                    <a:pt x="4291013" y="464952"/>
+                  </a:lnTo>
+                  <a:lnTo>
+                    <a:pt x="4220669" y="461301"/>
+                  </a:lnTo>
+                  <a:lnTo>
+                    <a:pt x="4150324" y="457596"/>
+                  </a:lnTo>
+                  <a:lnTo>
+                    <a:pt x="4079980" y="453834"/>
+                  </a:lnTo>
+                  <a:lnTo>
+                    <a:pt x="4009635" y="450016"/>
+                  </a:lnTo>
+                  <a:lnTo>
+                    <a:pt x="3939291" y="446141"/>
+                  </a:lnTo>
+                  <a:lnTo>
+                    <a:pt x="3868946" y="442207"/>
+                  </a:lnTo>
+                  <a:lnTo>
+                    <a:pt x="3798602" y="438213"/>
+                  </a:lnTo>
+                  <a:lnTo>
+                    <a:pt x="3728257" y="434160"/>
+                  </a:lnTo>
+                  <a:lnTo>
+                    <a:pt x="3657913" y="430045"/>
+                  </a:lnTo>
+                  <a:lnTo>
+                    <a:pt x="3587569" y="425869"/>
+                  </a:lnTo>
+                  <a:lnTo>
+                    <a:pt x="3517224" y="421629"/>
+                  </a:lnTo>
+                  <a:lnTo>
+                    <a:pt x="3446880" y="417326"/>
+                  </a:lnTo>
+                  <a:lnTo>
+                    <a:pt x="3376535" y="412958"/>
+                  </a:lnTo>
+                  <a:lnTo>
+                    <a:pt x="3306191" y="408523"/>
+                  </a:lnTo>
+                  <a:lnTo>
+                    <a:pt x="3235846" y="411937"/>
+                  </a:lnTo>
+                  <a:lnTo>
+                    <a:pt x="3165502" y="416763"/>
+                  </a:lnTo>
+                  <a:lnTo>
+                    <a:pt x="3095157" y="421510"/>
+                  </a:lnTo>
+                  <a:lnTo>
+                    <a:pt x="3024813" y="426180"/>
+                  </a:lnTo>
+                  <a:lnTo>
+                    <a:pt x="2954468" y="430773"/>
+                  </a:lnTo>
+                  <a:lnTo>
+                    <a:pt x="2884124" y="435290"/>
+                  </a:lnTo>
+                  <a:lnTo>
+                    <a:pt x="2813779" y="439735"/>
+                  </a:lnTo>
+                  <a:lnTo>
+                    <a:pt x="2743435" y="444106"/>
+                  </a:lnTo>
+                  <a:lnTo>
+                    <a:pt x="2673090" y="448406"/>
+                  </a:lnTo>
+                  <a:lnTo>
+                    <a:pt x="2602746" y="452636"/>
+                  </a:lnTo>
+                  <a:lnTo>
+                    <a:pt x="2532401" y="456796"/>
+                  </a:lnTo>
+                  <a:lnTo>
+                    <a:pt x="2462057" y="460889"/>
+                  </a:lnTo>
+                  <a:lnTo>
+                    <a:pt x="2391712" y="464914"/>
+                  </a:lnTo>
+                  <a:lnTo>
+                    <a:pt x="2321368" y="468874"/>
+                  </a:lnTo>
+                  <a:lnTo>
+                    <a:pt x="2251023" y="472769"/>
+                  </a:lnTo>
+                  <a:lnTo>
+                    <a:pt x="2180679" y="476601"/>
+                  </a:lnTo>
+                  <a:lnTo>
+                    <a:pt x="2110334" y="480369"/>
+                  </a:lnTo>
+                  <a:lnTo>
+                    <a:pt x="2039990" y="484076"/>
+                  </a:lnTo>
+                  <a:lnTo>
+                    <a:pt x="1969645" y="487723"/>
+                  </a:lnTo>
+                  <a:lnTo>
+                    <a:pt x="1899301" y="491310"/>
+                  </a:lnTo>
+                  <a:lnTo>
+                    <a:pt x="1828956" y="494838"/>
+                  </a:lnTo>
+                  <a:lnTo>
+                    <a:pt x="1758612" y="498309"/>
+                  </a:lnTo>
+                  <a:lnTo>
+                    <a:pt x="1688267" y="501723"/>
+                  </a:lnTo>
+                  <a:lnTo>
+                    <a:pt x="1617923" y="505081"/>
+                  </a:lnTo>
+                  <a:lnTo>
+                    <a:pt x="1547578" y="508384"/>
+                  </a:lnTo>
+                  <a:lnTo>
+                    <a:pt x="1477234" y="511633"/>
+                  </a:lnTo>
+                  <a:lnTo>
+                    <a:pt x="1406889" y="514829"/>
+                  </a:lnTo>
+                  <a:lnTo>
+                    <a:pt x="1336545" y="517973"/>
+                  </a:lnTo>
+                  <a:lnTo>
+                    <a:pt x="1266200" y="521066"/>
+                  </a:lnTo>
+                  <a:lnTo>
+                    <a:pt x="1195856" y="524108"/>
+                  </a:lnTo>
+                  <a:lnTo>
+                    <a:pt x="1125511" y="527100"/>
+                  </a:lnTo>
+                  <a:lnTo>
+                    <a:pt x="1055167" y="530043"/>
+                  </a:lnTo>
+                  <a:lnTo>
+                    <a:pt x="984822" y="532938"/>
+                  </a:lnTo>
+                  <a:lnTo>
+                    <a:pt x="914478" y="535786"/>
+                  </a:lnTo>
+                  <a:lnTo>
+                    <a:pt x="844133" y="538587"/>
+                  </a:lnTo>
+                  <a:lnTo>
+                    <a:pt x="773789" y="541343"/>
+                  </a:lnTo>
+                  <a:lnTo>
+                    <a:pt x="703444" y="544053"/>
+                  </a:lnTo>
+                  <a:lnTo>
+                    <a:pt x="633100" y="546719"/>
+                  </a:lnTo>
+                  <a:lnTo>
+                    <a:pt x="562755" y="549342"/>
+                  </a:lnTo>
+                  <a:lnTo>
+                    <a:pt x="492411" y="551921"/>
+                  </a:lnTo>
+                  <a:lnTo>
+                    <a:pt x="422066" y="554459"/>
+                  </a:lnTo>
+                  <a:lnTo>
+                    <a:pt x="351722" y="556955"/>
+                  </a:lnTo>
+                  <a:lnTo>
+                    <a:pt x="281377" y="559410"/>
+                  </a:lnTo>
+                  <a:lnTo>
+                    <a:pt x="211033" y="561825"/>
+                  </a:lnTo>
+                  <a:lnTo>
+                    <a:pt x="140688" y="564201"/>
+                  </a:lnTo>
+                  <a:lnTo>
+                    <a:pt x="70344" y="566538"/>
+                  </a:lnTo>
+                  <a:lnTo>
+                    <a:pt x="0" y="568836"/>
+                  </a:lnTo>
+                  <a:close/>
+                </a:path>
+              </a:pathLst>
+            </a:custGeom>
+            <a:solidFill>
+              <a:srgbClr val="FF8C00">
+                <a:alpha val="20000"/>
+              </a:srgbClr>
+            </a:solidFill>
+          </p:spPr>
+          <p:txBody>
+            <a:bodyPr/>
+            <a:lstStyle/>
+            <a:p/>
+          </p:txBody>
+        </p:sp>
+        <p:sp>
+          <p:nvSpPr>
+            <p:cNvPr id="68" name="pl68"/>
+            <p:cNvSpPr/>
+            <p:nvPr/>
+          </p:nvSpPr>
+          <p:spPr>
+            <a:xfrm>
+              <a:off x="1235312" y="4886537"/>
+              <a:ext cx="6964104" cy="407031"/>
+            </a:xfrm>
+            <a:custGeom>
+              <a:avLst/>
+              <a:pathLst>
+                <a:path w="6964104" h="407031">
+                  <a:moveTo>
+                    <a:pt x="0" y="103917"/>
+                  </a:moveTo>
+                  <a:lnTo>
+                    <a:pt x="70344" y="112874"/>
+                  </a:lnTo>
+                  <a:lnTo>
+                    <a:pt x="140688" y="121698"/>
+                  </a:lnTo>
+                  <a:lnTo>
+                    <a:pt x="211033" y="130391"/>
+                  </a:lnTo>
+                  <a:lnTo>
+                    <a:pt x="281377" y="138955"/>
+                  </a:lnTo>
+                  <a:lnTo>
+                    <a:pt x="351722" y="147392"/>
+                  </a:lnTo>
+                  <a:lnTo>
+                    <a:pt x="422066" y="155703"/>
+                  </a:lnTo>
+                  <a:lnTo>
+                    <a:pt x="492411" y="163891"/>
+                  </a:lnTo>
+                  <a:lnTo>
+                    <a:pt x="562755" y="171958"/>
+                  </a:lnTo>
+                  <a:lnTo>
+                    <a:pt x="633100" y="179905"/>
+                  </a:lnTo>
+                  <a:lnTo>
+                    <a:pt x="703444" y="187733"/>
+                  </a:lnTo>
+                  <a:lnTo>
+                    <a:pt x="773789" y="195446"/>
+                  </a:lnTo>
+                  <a:lnTo>
+                    <a:pt x="844133" y="203044"/>
+                  </a:lnTo>
+                  <a:lnTo>
+                    <a:pt x="914478" y="210529"/>
+                  </a:lnTo>
+                  <a:lnTo>
+                    <a:pt x="984822" y="217903"/>
+                  </a:lnTo>
+                  <a:lnTo>
+                    <a:pt x="1055167" y="225168"/>
+                  </a:lnTo>
+                  <a:lnTo>
+                    <a:pt x="1125511" y="232325"/>
+                  </a:lnTo>
+                  <a:lnTo>
+                    <a:pt x="1195856" y="239375"/>
+                  </a:lnTo>
+                  <a:lnTo>
+                    <a:pt x="1266200" y="246321"/>
+                  </a:lnTo>
+                  <a:lnTo>
+                    <a:pt x="1336545" y="253163"/>
+                  </a:lnTo>
+                  <a:lnTo>
+                    <a:pt x="1406889" y="259904"/>
+                  </a:lnTo>
+                  <a:lnTo>
+                    <a:pt x="1477234" y="266545"/>
+                  </a:lnTo>
+                  <a:lnTo>
+                    <a:pt x="1547578" y="273088"/>
+                  </a:lnTo>
+                  <a:lnTo>
+                    <a:pt x="1617923" y="279533"/>
+                  </a:lnTo>
+                  <a:lnTo>
+                    <a:pt x="1688267" y="285882"/>
+                  </a:lnTo>
+                  <a:lnTo>
+                    <a:pt x="1758612" y="292137"/>
+                  </a:lnTo>
+                  <a:lnTo>
+                    <a:pt x="1828956" y="298300"/>
+                  </a:lnTo>
+                  <a:lnTo>
+                    <a:pt x="1899301" y="304370"/>
+                  </a:lnTo>
+                  <a:lnTo>
+                    <a:pt x="1969645" y="310351"/>
+                  </a:lnTo>
+                  <a:lnTo>
+                    <a:pt x="2039990" y="316243"/>
+                  </a:lnTo>
+                  <a:lnTo>
+                    <a:pt x="2110334" y="322047"/>
+                  </a:lnTo>
+                  <a:lnTo>
+                    <a:pt x="2180679" y="327765"/>
+                  </a:lnTo>
+                  <a:lnTo>
+                    <a:pt x="2251023" y="333399"/>
+                  </a:lnTo>
+                  <a:lnTo>
+                    <a:pt x="2321368" y="338948"/>
+                  </a:lnTo>
+                  <a:lnTo>
+                    <a:pt x="2391712" y="344416"/>
+                  </a:lnTo>
+                  <a:lnTo>
+                    <a:pt x="2462057" y="349802"/>
+                  </a:lnTo>
+                  <a:lnTo>
+                    <a:pt x="2532401" y="355108"/>
+                  </a:lnTo>
+                  <a:lnTo>
+                    <a:pt x="2602746" y="360335"/>
+                  </a:lnTo>
+                  <a:lnTo>
+                    <a:pt x="2673090" y="365485"/>
+                  </a:lnTo>
+                  <a:lnTo>
+                    <a:pt x="2743435" y="370558"/>
+                  </a:lnTo>
+                  <a:lnTo>
+                    <a:pt x="2813779" y="375556"/>
+                  </a:lnTo>
+                  <a:lnTo>
+                    <a:pt x="2884124" y="380479"/>
+                  </a:lnTo>
+                  <a:lnTo>
+                    <a:pt x="2954468" y="385330"/>
+                  </a:lnTo>
+                  <a:lnTo>
+                    <a:pt x="3024813" y="390108"/>
+                  </a:lnTo>
+                  <a:lnTo>
+                    <a:pt x="3095157" y="394816"/>
+                  </a:lnTo>
+                  <a:lnTo>
+                    <a:pt x="3165502" y="399454"/>
+                  </a:lnTo>
+                  <a:lnTo>
+                    <a:pt x="3235846" y="404022"/>
+                  </a:lnTo>
+                  <a:lnTo>
+                    <a:pt x="3306191" y="407031"/>
+                  </a:lnTo>
+                  <a:lnTo>
+                    <a:pt x="3376535" y="402044"/>
+                  </a:lnTo>
+                  <a:lnTo>
+                    <a:pt x="3446880" y="396973"/>
+                  </a:lnTo>
+                  <a:lnTo>
+                    <a:pt x="3517224" y="391819"/>
+                  </a:lnTo>
+                  <a:lnTo>
+                    <a:pt x="3587569" y="386578"/>
+                  </a:lnTo>
+                  <a:lnTo>
+                    <a:pt x="3657913" y="381251"/>
+                  </a:lnTo>
+                  <a:lnTo>
+                    <a:pt x="3728257" y="375835"/>
+                  </a:lnTo>
+                  <a:lnTo>
+                    <a:pt x="3798602" y="370329"/>
+                  </a:lnTo>
+                  <a:lnTo>
+                    <a:pt x="3868946" y="364732"/>
+                  </a:lnTo>
+                  <a:lnTo>
+                    <a:pt x="3939291" y="359041"/>
+                  </a:lnTo>
+                  <a:lnTo>
+                    <a:pt x="4009635" y="353256"/>
+                  </a:lnTo>
+                  <a:lnTo>
+                    <a:pt x="4079980" y="347375"/>
+                  </a:lnTo>
+                  <a:lnTo>
+                    <a:pt x="4150324" y="341396"/>
+                  </a:lnTo>
+                  <a:lnTo>
+                    <a:pt x="4220669" y="335317"/>
+                  </a:lnTo>
+                  <a:lnTo>
+                    <a:pt x="4291013" y="329138"/>
+                  </a:lnTo>
+                  <a:lnTo>
+                    <a:pt x="4361358" y="322856"/>
+                  </a:lnTo>
+                  <a:lnTo>
+                    <a:pt x="4431702" y="316470"/>
+                  </a:lnTo>
+                  <a:lnTo>
+                    <a:pt x="4502047" y="309977"/>
+                  </a:lnTo>
+                  <a:lnTo>
+                    <a:pt x="4572391" y="303377"/>
+                  </a:lnTo>
+                  <a:lnTo>
+                    <a:pt x="4642736" y="296666"/>
+                  </a:lnTo>
+                  <a:lnTo>
+                    <a:pt x="4713080" y="289845"/>
+                  </a:lnTo>
+                  <a:lnTo>
+                    <a:pt x="4783425" y="282910"/>
+                  </a:lnTo>
+                  <a:lnTo>
+                    <a:pt x="4853769" y="275859"/>
+                  </a:lnTo>
+                  <a:lnTo>
+                    <a:pt x="4924114" y="268692"/>
+                  </a:lnTo>
+                  <a:lnTo>
+                    <a:pt x="4994458" y="261405"/>
+                  </a:lnTo>
+                  <a:lnTo>
+                    <a:pt x="5064803" y="253998"/>
+                  </a:lnTo>
+                  <a:lnTo>
+                    <a:pt x="5135147" y="246467"/>
+                  </a:lnTo>
+                  <a:lnTo>
+                    <a:pt x="5205492" y="238811"/>
+                  </a:lnTo>
+                  <a:lnTo>
+                    <a:pt x="5275836" y="231028"/>
+                  </a:lnTo>
+                  <a:lnTo>
+                    <a:pt x="5346181" y="223115"/>
+                  </a:lnTo>
+                  <a:lnTo>
+                    <a:pt x="5416525" y="215071"/>
+                  </a:lnTo>
+                  <a:lnTo>
+                    <a:pt x="5486870" y="206894"/>
+                  </a:lnTo>
+                  <a:lnTo>
+                    <a:pt x="5557214" y="198580"/>
+                  </a:lnTo>
+                  <a:lnTo>
+                    <a:pt x="5627559" y="190128"/>
+                  </a:lnTo>
+                  <a:lnTo>
+                    <a:pt x="5697903" y="181536"/>
+                  </a:lnTo>
+                  <a:lnTo>
+                    <a:pt x="5768248" y="172801"/>
+                  </a:lnTo>
+                  <a:lnTo>
+                    <a:pt x="5838592" y="163921"/>
+                  </a:lnTo>
+                  <a:lnTo>
+                    <a:pt x="5908937" y="154893"/>
+                  </a:lnTo>
+                  <a:lnTo>
+                    <a:pt x="5979281" y="145716"/>
+                  </a:lnTo>
+                  <a:lnTo>
+                    <a:pt x="6049626" y="136385"/>
+                  </a:lnTo>
+                  <a:lnTo>
+                    <a:pt x="6119970" y="126900"/>
+                  </a:lnTo>
+                  <a:lnTo>
+                    <a:pt x="6190315" y="117257"/>
+                  </a:lnTo>
+                  <a:lnTo>
+                    <a:pt x="6260659" y="107454"/>
+                  </a:lnTo>
+                  <a:lnTo>
+                    <a:pt x="6331004" y="97488"/>
+                  </a:lnTo>
+                  <a:lnTo>
+                    <a:pt x="6401348" y="87356"/>
+                  </a:lnTo>
+                  <a:lnTo>
+                    <a:pt x="6471693" y="77056"/>
+                  </a:lnTo>
+                  <a:lnTo>
+                    <a:pt x="6542037" y="66585"/>
+                  </a:lnTo>
+                  <a:lnTo>
+                    <a:pt x="6612382" y="55939"/>
+                  </a:lnTo>
+                  <a:lnTo>
+                    <a:pt x="6682726" y="45117"/>
+                  </a:lnTo>
+                  <a:lnTo>
+                    <a:pt x="6753071" y="34115"/>
+                  </a:lnTo>
+                  <a:lnTo>
+                    <a:pt x="6823415" y="22930"/>
+                  </a:lnTo>
+                  <a:lnTo>
+                    <a:pt x="6893760" y="11559"/>
+                  </a:lnTo>
+                  <a:lnTo>
+                    <a:pt x="6964104" y="0"/>
+                  </a:lnTo>
+                </a:path>
+              </a:pathLst>
+            </a:custGeom>
+          </p:spPr>
+          <p:txBody>
+            <a:bodyPr/>
+            <a:lstStyle/>
+            <a:p/>
+          </p:txBody>
+        </p:sp>
+        <p:sp>
+          <p:nvSpPr>
+            <p:cNvPr id="69" name="pl69"/>
+            <p:cNvSpPr/>
+            <p:nvPr/>
+          </p:nvSpPr>
+          <p:spPr>
+            <a:xfrm>
+              <a:off x="1235312" y="5295061"/>
+              <a:ext cx="6964104" cy="161447"/>
+            </a:xfrm>
+            <a:custGeom>
+              <a:avLst/>
+              <a:pathLst>
+                <a:path w="6964104" h="161447">
+                  <a:moveTo>
+                    <a:pt x="6964104" y="161447"/>
+                  </a:moveTo>
+                  <a:lnTo>
+                    <a:pt x="6893760" y="159379"/>
+                  </a:lnTo>
+                  <a:lnTo>
+                    <a:pt x="6823415" y="157281"/>
+                  </a:lnTo>
+                  <a:lnTo>
+                    <a:pt x="6753071" y="155150"/>
+                  </a:lnTo>
+                  <a:lnTo>
+                    <a:pt x="6682726" y="152988"/>
+                  </a:lnTo>
+                  <a:lnTo>
+                    <a:pt x="6612382" y="150793"/>
+                  </a:lnTo>
+                  <a:lnTo>
+                    <a:pt x="6542037" y="148564"/>
+                  </a:lnTo>
+                  <a:lnTo>
+                    <a:pt x="6471693" y="146303"/>
+                  </a:lnTo>
+                  <a:lnTo>
+                    <a:pt x="6401348" y="144007"/>
+                  </a:lnTo>
+                  <a:lnTo>
+                    <a:pt x="6331004" y="141676"/>
+                  </a:lnTo>
+                  <a:lnTo>
+                    <a:pt x="6260659" y="139311"/>
+                  </a:lnTo>
+                  <a:lnTo>
+                    <a:pt x="6190315" y="136910"/>
+                  </a:lnTo>
+                  <a:lnTo>
+                    <a:pt x="6119970" y="134472"/>
+                  </a:lnTo>
+                  <a:lnTo>
+                    <a:pt x="6049626" y="131998"/>
+                  </a:lnTo>
+                  <a:lnTo>
+                    <a:pt x="5979281" y="129487"/>
+                  </a:lnTo>
+                  <a:lnTo>
+                    <a:pt x="5908937" y="126937"/>
+                  </a:lnTo>
+                  <a:lnTo>
+                    <a:pt x="5838592" y="124350"/>
+                  </a:lnTo>
+                  <a:lnTo>
+                    <a:pt x="5768248" y="121723"/>
+                  </a:lnTo>
+                  <a:lnTo>
+                    <a:pt x="5697903" y="119057"/>
+                  </a:lnTo>
+                  <a:lnTo>
+                    <a:pt x="5627559" y="116350"/>
+                  </a:lnTo>
+                  <a:lnTo>
+                    <a:pt x="5557214" y="113603"/>
+                  </a:lnTo>
+                  <a:lnTo>
+                    <a:pt x="5486870" y="110814"/>
+                  </a:lnTo>
+                  <a:lnTo>
+                    <a:pt x="5416525" y="107983"/>
+                  </a:lnTo>
+                  <a:lnTo>
+                    <a:pt x="5346181" y="105110"/>
+                  </a:lnTo>
+                  <a:lnTo>
+                    <a:pt x="5275836" y="102193"/>
+                  </a:lnTo>
+                  <a:lnTo>
+                    <a:pt x="5205492" y="99233"/>
+                  </a:lnTo>
+                  <a:lnTo>
+                    <a:pt x="5135147" y="96227"/>
+                  </a:lnTo>
+                  <a:lnTo>
+                    <a:pt x="5064803" y="93177"/>
+                  </a:lnTo>
+                  <a:lnTo>
+                    <a:pt x="4994458" y="90080"/>
+                  </a:lnTo>
+                  <a:lnTo>
+                    <a:pt x="4924114" y="86937"/>
+                  </a:lnTo>
+                  <a:lnTo>
+                    <a:pt x="4853769" y="83746"/>
+                  </a:lnTo>
+                  <a:lnTo>
+                    <a:pt x="4783425" y="80507"/>
+                  </a:lnTo>
+                  <a:lnTo>
+                    <a:pt x="4713080" y="77220"/>
+                  </a:lnTo>
+                  <a:lnTo>
+                    <a:pt x="4642736" y="73883"/>
+                  </a:lnTo>
+                  <a:lnTo>
+                    <a:pt x="4572391" y="70495"/>
+                  </a:lnTo>
+                  <a:lnTo>
+                    <a:pt x="4502047" y="67057"/>
+                  </a:lnTo>
+                  <a:lnTo>
+                    <a:pt x="4431702" y="63567"/>
+                  </a:lnTo>
+                  <a:lnTo>
+                    <a:pt x="4361358" y="60024"/>
+                  </a:lnTo>
+                  <a:lnTo>
+                    <a:pt x="4291013" y="56428"/>
+                  </a:lnTo>
+                  <a:lnTo>
+                    <a:pt x="4220669" y="52777"/>
+                  </a:lnTo>
+                  <a:lnTo>
+                    <a:pt x="4150324" y="49072"/>
+                  </a:lnTo>
+                  <a:lnTo>
+                    <a:pt x="4079980" y="45310"/>
+                  </a:lnTo>
+                  <a:lnTo>
+                    <a:pt x="4009635" y="41492"/>
+                  </a:lnTo>
+                  <a:lnTo>
+                    <a:pt x="3939291" y="37617"/>
+                  </a:lnTo>
+                  <a:lnTo>
+                    <a:pt x="3868946" y="33683"/>
+                  </a:lnTo>
+                  <a:lnTo>
+                    <a:pt x="3798602" y="29690"/>
+                  </a:lnTo>
+                  <a:lnTo>
+                    <a:pt x="3728257" y="25636"/>
+                  </a:lnTo>
+                  <a:lnTo>
+                    <a:pt x="3657913" y="21521"/>
+                  </a:lnTo>
+                  <a:lnTo>
+                    <a:pt x="3587569" y="17345"/>
+                  </a:lnTo>
+                  <a:lnTo>
+                    <a:pt x="3517224" y="13105"/>
+                  </a:lnTo>
+                  <a:lnTo>
+                    <a:pt x="3446880" y="8802"/>
+                  </a:lnTo>
+                  <a:lnTo>
+                    <a:pt x="3376535" y="4434"/>
+                  </a:lnTo>
+                  <a:lnTo>
+                    <a:pt x="3306191" y="0"/>
+                  </a:lnTo>
+                  <a:lnTo>
+                    <a:pt x="3235846" y="3414"/>
+                  </a:lnTo>
+                  <a:lnTo>
+                    <a:pt x="3165502" y="8239"/>
+                  </a:lnTo>
+                  <a:lnTo>
+                    <a:pt x="3095157" y="12986"/>
+                  </a:lnTo>
+                  <a:lnTo>
+                    <a:pt x="3024813" y="17656"/>
+                  </a:lnTo>
+                  <a:lnTo>
+                    <a:pt x="2954468" y="22249"/>
+                  </a:lnTo>
+                  <a:lnTo>
+                    <a:pt x="2884124" y="26767"/>
+                  </a:lnTo>
+                  <a:lnTo>
+                    <a:pt x="2813779" y="31211"/>
+                  </a:lnTo>
+                  <a:lnTo>
+                    <a:pt x="2743435" y="35582"/>
+                  </a:lnTo>
+                  <a:lnTo>
+                    <a:pt x="2673090" y="39882"/>
+                  </a:lnTo>
+                  <a:lnTo>
+                    <a:pt x="2602746" y="44112"/>
+                  </a:lnTo>
+                  <a:lnTo>
+                    <a:pt x="2532401" y="48272"/>
+                  </a:lnTo>
+                  <a:lnTo>
+                    <a:pt x="2462057" y="52365"/>
+                  </a:lnTo>
+                  <a:lnTo>
+                    <a:pt x="2391712" y="56390"/>
+                  </a:lnTo>
+                  <a:lnTo>
+                    <a:pt x="2321368" y="60350"/>
+                  </a:lnTo>
+                  <a:lnTo>
+                    <a:pt x="2251023" y="64245"/>
+                  </a:lnTo>
+                  <a:lnTo>
+                    <a:pt x="2180679" y="68077"/>
+                  </a:lnTo>
+                  <a:lnTo>
+                    <a:pt x="2110334" y="71845"/>
+                  </a:lnTo>
+                  <a:lnTo>
+                    <a:pt x="2039990" y="75552"/>
+                  </a:lnTo>
+                  <a:lnTo>
+                    <a:pt x="1969645" y="79199"/>
+                  </a:lnTo>
+                  <a:lnTo>
+                    <a:pt x="1899301" y="82786"/>
+                  </a:lnTo>
+                  <a:lnTo>
+                    <a:pt x="1828956" y="86314"/>
+                  </a:lnTo>
+                  <a:lnTo>
+                    <a:pt x="1758612" y="89785"/>
+                  </a:lnTo>
+                  <a:lnTo>
+                    <a:pt x="1688267" y="93199"/>
+                  </a:lnTo>
+                  <a:lnTo>
+                    <a:pt x="1617923" y="96557"/>
+                  </a:lnTo>
+                  <a:lnTo>
+                    <a:pt x="1547578" y="99860"/>
+                  </a:lnTo>
+                  <a:lnTo>
+                    <a:pt x="1477234" y="103109"/>
+                  </a:lnTo>
+                  <a:lnTo>
+                    <a:pt x="1406889" y="106305"/>
+                  </a:lnTo>
+                  <a:lnTo>
+                    <a:pt x="1336545" y="109449"/>
+                  </a:lnTo>
+                  <a:lnTo>
+                    <a:pt x="1266200" y="112542"/>
+                  </a:lnTo>
+                  <a:lnTo>
+                    <a:pt x="1195856" y="115584"/>
+                  </a:lnTo>
+                  <a:lnTo>
+                    <a:pt x="1125511" y="118576"/>
+                  </a:lnTo>
+                  <a:lnTo>
+                    <a:pt x="1055167" y="121519"/>
+                  </a:lnTo>
+                  <a:lnTo>
+                    <a:pt x="984822" y="124414"/>
+                  </a:lnTo>
+                  <a:lnTo>
+                    <a:pt x="914478" y="127262"/>
+                  </a:lnTo>
+                  <a:lnTo>
+                    <a:pt x="844133" y="130063"/>
+                  </a:lnTo>
+                  <a:lnTo>
+                    <a:pt x="773789" y="132819"/>
+                  </a:lnTo>
+                  <a:lnTo>
+                    <a:pt x="703444" y="135529"/>
+                  </a:lnTo>
+                  <a:lnTo>
+                    <a:pt x="633100" y="138195"/>
+                  </a:lnTo>
+                  <a:lnTo>
+                    <a:pt x="562755" y="140818"/>
+                  </a:lnTo>
+                  <a:lnTo>
+                    <a:pt x="492411" y="143397"/>
+                  </a:lnTo>
+                  <a:lnTo>
+                    <a:pt x="422066" y="145935"/>
+                  </a:lnTo>
+                  <a:lnTo>
+                    <a:pt x="351722" y="148431"/>
+                  </a:lnTo>
+                  <a:lnTo>
+                    <a:pt x="281377" y="150886"/>
+                  </a:lnTo>
+                  <a:lnTo>
+                    <a:pt x="211033" y="153301"/>
+                  </a:lnTo>
+                  <a:lnTo>
+                    <a:pt x="140688" y="155677"/>
+                  </a:lnTo>
+                  <a:lnTo>
+                    <a:pt x="70344" y="158014"/>
+                  </a:lnTo>
+                  <a:lnTo>
+                    <a:pt x="0" y="160312"/>
+                  </a:lnTo>
+                </a:path>
+              </a:pathLst>
+            </a:custGeom>
+          </p:spPr>
+          <p:txBody>
+            <a:bodyPr/>
+            <a:lstStyle/>
+            <a:p/>
+          </p:txBody>
+        </p:sp>
+        <p:sp>
+          <p:nvSpPr>
+            <p:cNvPr id="70" name="pl70"/>
+            <p:cNvSpPr/>
+            <p:nvPr/>
+          </p:nvSpPr>
+          <p:spPr>
+            <a:xfrm>
+              <a:off x="1235312" y="5282230"/>
+              <a:ext cx="6964104" cy="22606"/>
+            </a:xfrm>
+            <a:custGeom>
+              <a:avLst/>
+              <a:pathLst>
+                <a:path w="6964104" h="22606">
+                  <a:moveTo>
+                    <a:pt x="0" y="22606"/>
+                  </a:moveTo>
+                  <a:lnTo>
+                    <a:pt x="70344" y="22386"/>
+                  </a:lnTo>
+                  <a:lnTo>
+                    <a:pt x="140688" y="22166"/>
+                  </a:lnTo>
+                  <a:lnTo>
+                    <a:pt x="211033" y="21945"/>
+                  </a:lnTo>
+                  <a:lnTo>
+                    <a:pt x="281377" y="21725"/>
+                  </a:lnTo>
+                  <a:lnTo>
+                    <a:pt x="351722" y="21504"/>
+                  </a:lnTo>
+                  <a:lnTo>
+                    <a:pt x="422066" y="21284"/>
+                  </a:lnTo>
+                  <a:lnTo>
+                    <a:pt x="492411" y="21063"/>
+                  </a:lnTo>
+                  <a:lnTo>
+                    <a:pt x="562755" y="20841"/>
+                  </a:lnTo>
+                  <a:lnTo>
+                    <a:pt x="633100" y="20620"/>
+                  </a:lnTo>
+                  <a:lnTo>
+                    <a:pt x="703444" y="20399"/>
+                  </a:lnTo>
+                  <a:lnTo>
+                    <a:pt x="773789" y="20177"/>
+                  </a:lnTo>
+                  <a:lnTo>
+                    <a:pt x="844133" y="19955"/>
+                  </a:lnTo>
+                  <a:lnTo>
+                    <a:pt x="914478" y="19733"/>
+                  </a:lnTo>
+                  <a:lnTo>
+                    <a:pt x="984822" y="19511"/>
+                  </a:lnTo>
+                  <a:lnTo>
+                    <a:pt x="1055167" y="19289"/>
+                  </a:lnTo>
+                  <a:lnTo>
+                    <a:pt x="1125511" y="19067"/>
+                  </a:lnTo>
+                  <a:lnTo>
+                    <a:pt x="1195856" y="18844"/>
+                  </a:lnTo>
+                  <a:lnTo>
+                    <a:pt x="1266200" y="18621"/>
+                  </a:lnTo>
+                  <a:lnTo>
+                    <a:pt x="1336545" y="18398"/>
+                  </a:lnTo>
+                  <a:lnTo>
+                    <a:pt x="1406889" y="18175"/>
+                  </a:lnTo>
+                  <a:lnTo>
+                    <a:pt x="1477234" y="17952"/>
+                  </a:lnTo>
+                  <a:lnTo>
+                    <a:pt x="1547578" y="17728"/>
+                  </a:lnTo>
+                  <a:lnTo>
+                    <a:pt x="1617923" y="17505"/>
+                  </a:lnTo>
+                  <a:lnTo>
+                    <a:pt x="1688267" y="17281"/>
+                  </a:lnTo>
+                  <a:lnTo>
+                    <a:pt x="1758612" y="17057"/>
+                  </a:lnTo>
+                  <a:lnTo>
+                    <a:pt x="1828956" y="16833"/>
+                  </a:lnTo>
+                  <a:lnTo>
+                    <a:pt x="1899301" y="16608"/>
+                  </a:lnTo>
+                  <a:lnTo>
+                    <a:pt x="1969645" y="16384"/>
+                  </a:lnTo>
+                  <a:lnTo>
+                    <a:pt x="2039990" y="16159"/>
+                  </a:lnTo>
+                  <a:lnTo>
+                    <a:pt x="2110334" y="15934"/>
+                  </a:lnTo>
+                  <a:lnTo>
+                    <a:pt x="2180679" y="15709"/>
+                  </a:lnTo>
+                  <a:lnTo>
+                    <a:pt x="2251023" y="15484"/>
+                  </a:lnTo>
+                  <a:lnTo>
+                    <a:pt x="2321368" y="15259"/>
+                  </a:lnTo>
+                  <a:lnTo>
+                    <a:pt x="2391712" y="15033"/>
+                  </a:lnTo>
+                  <a:lnTo>
+                    <a:pt x="2462057" y="14807"/>
+                  </a:lnTo>
+                  <a:lnTo>
+                    <a:pt x="2532401" y="14582"/>
+                  </a:lnTo>
+                  <a:lnTo>
+                    <a:pt x="2602746" y="14356"/>
+                  </a:lnTo>
+                  <a:lnTo>
+                    <a:pt x="2673090" y="14129"/>
+                  </a:lnTo>
+                  <a:lnTo>
+                    <a:pt x="2743435" y="13903"/>
+                  </a:lnTo>
+                  <a:lnTo>
+                    <a:pt x="2813779" y="13676"/>
+                  </a:lnTo>
+                  <a:lnTo>
+                    <a:pt x="2884124" y="13450"/>
+                  </a:lnTo>
+                  <a:lnTo>
+                    <a:pt x="2954468" y="13223"/>
+                  </a:lnTo>
+                  <a:lnTo>
+                    <a:pt x="3024813" y="12996"/>
+                  </a:lnTo>
+                  <a:lnTo>
+                    <a:pt x="3095157" y="12768"/>
+                  </a:lnTo>
+                  <a:lnTo>
+                    <a:pt x="3165502" y="12541"/>
+                  </a:lnTo>
+                  <a:lnTo>
+                    <a:pt x="3235846" y="12313"/>
+                  </a:lnTo>
+                  <a:lnTo>
+                    <a:pt x="3306191" y="12086"/>
+                  </a:lnTo>
+                  <a:lnTo>
+                    <a:pt x="3376535" y="11858"/>
+                  </a:lnTo>
+                  <a:lnTo>
+                    <a:pt x="3446880" y="11630"/>
+                  </a:lnTo>
+                  <a:lnTo>
+                    <a:pt x="3517224" y="11401"/>
+                  </a:lnTo>
+                  <a:lnTo>
+                    <a:pt x="3587569" y="11173"/>
+                  </a:lnTo>
+                  <a:lnTo>
+                    <a:pt x="3657913" y="10944"/>
+                  </a:lnTo>
+                  <a:lnTo>
+                    <a:pt x="3728257" y="10715"/>
+                  </a:lnTo>
+                  <a:lnTo>
+                    <a:pt x="3798602" y="10486"/>
+                  </a:lnTo>
+                  <a:lnTo>
+                    <a:pt x="3868946" y="10257"/>
+                  </a:lnTo>
+                  <a:lnTo>
+                    <a:pt x="3939291" y="10028"/>
+                  </a:lnTo>
+                  <a:lnTo>
+                    <a:pt x="4009635" y="9798"/>
+                  </a:lnTo>
+                  <a:lnTo>
+                    <a:pt x="4079980" y="9569"/>
+                  </a:lnTo>
+                  <a:lnTo>
+                    <a:pt x="4150324" y="9339"/>
+                  </a:lnTo>
+                  <a:lnTo>
+                    <a:pt x="4220669" y="9109"/>
+                  </a:lnTo>
+                  <a:lnTo>
+                    <a:pt x="4291013" y="8879"/>
+                  </a:lnTo>
+                  <a:lnTo>
+                    <a:pt x="4361358" y="8648"/>
+                  </a:lnTo>
+                  <a:lnTo>
+                    <a:pt x="4431702" y="8418"/>
+                  </a:lnTo>
+                  <a:lnTo>
+                    <a:pt x="4502047" y="8187"/>
+                  </a:lnTo>
+                  <a:lnTo>
+                    <a:pt x="4572391" y="7956"/>
+                  </a:lnTo>
+                  <a:lnTo>
+                    <a:pt x="4642736" y="7725"/>
+                  </a:lnTo>
+                  <a:lnTo>
+                    <a:pt x="4713080" y="7494"/>
+                  </a:lnTo>
+                  <a:lnTo>
+                    <a:pt x="4783425" y="7262"/>
+                  </a:lnTo>
+                  <a:lnTo>
+                    <a:pt x="4853769" y="7031"/>
+                  </a:lnTo>
+                  <a:lnTo>
+                    <a:pt x="4924114" y="6799"/>
+                  </a:lnTo>
+                  <a:lnTo>
+                    <a:pt x="4994458" y="6567"/>
+                  </a:lnTo>
+                  <a:lnTo>
+                    <a:pt x="5064803" y="6335"/>
+                  </a:lnTo>
+                  <a:lnTo>
+                    <a:pt x="5135147" y="6102"/>
+                  </a:lnTo>
+                  <a:lnTo>
+                    <a:pt x="5205492" y="5870"/>
+                  </a:lnTo>
+                  <a:lnTo>
+                    <a:pt x="5275836" y="5637"/>
+                  </a:lnTo>
+                  <a:lnTo>
+                    <a:pt x="5346181" y="5404"/>
+                  </a:lnTo>
+                  <a:lnTo>
+                    <a:pt x="5416525" y="5171"/>
+                  </a:lnTo>
+                  <a:lnTo>
+                    <a:pt x="5486870" y="4938"/>
+                  </a:lnTo>
+                  <a:lnTo>
+                    <a:pt x="5557214" y="4705"/>
+                  </a:lnTo>
+                  <a:lnTo>
+                    <a:pt x="5627559" y="4471"/>
+                  </a:lnTo>
+                  <a:lnTo>
+                    <a:pt x="5697903" y="4237"/>
+                  </a:lnTo>
+                  <a:lnTo>
+                    <a:pt x="5768248" y="4003"/>
+                  </a:lnTo>
+                  <a:lnTo>
+                    <a:pt x="5838592" y="3769"/>
+                  </a:lnTo>
+                  <a:lnTo>
+                    <a:pt x="5908937" y="3535"/>
+                  </a:lnTo>
+                  <a:lnTo>
+                    <a:pt x="5979281" y="3301"/>
+                  </a:lnTo>
+                  <a:lnTo>
+                    <a:pt x="6049626" y="3066"/>
+                  </a:lnTo>
+                  <a:lnTo>
+                    <a:pt x="6119970" y="2831"/>
+                  </a:lnTo>
+                  <a:lnTo>
+                    <a:pt x="6190315" y="2596"/>
+                  </a:lnTo>
+                  <a:lnTo>
+                    <a:pt x="6260659" y="2361"/>
+                  </a:lnTo>
+                  <a:lnTo>
+                    <a:pt x="6331004" y="2126"/>
+                  </a:lnTo>
+                  <a:lnTo>
+                    <a:pt x="6401348" y="1890"/>
+                  </a:lnTo>
+                  <a:lnTo>
+                    <a:pt x="6471693" y="1654"/>
+                  </a:lnTo>
+                  <a:lnTo>
+                    <a:pt x="6542037" y="1419"/>
+                  </a:lnTo>
+                  <a:lnTo>
+                    <a:pt x="6612382" y="1183"/>
+                  </a:lnTo>
+                  <a:lnTo>
+                    <a:pt x="6682726" y="946"/>
+                  </a:lnTo>
+                  <a:lnTo>
+                    <a:pt x="6753071" y="710"/>
+                  </a:lnTo>
+                  <a:lnTo>
+                    <a:pt x="6823415" y="473"/>
+                  </a:lnTo>
+                  <a:lnTo>
+                    <a:pt x="6893760" y="236"/>
+                  </a:lnTo>
+                  <a:lnTo>
+                    <a:pt x="6964104" y="0"/>
+                  </a:lnTo>
+                </a:path>
+              </a:pathLst>
+            </a:custGeom>
+            <a:ln w="27101" cap="flat">
+              <a:solidFill>
+                <a:srgbClr val="FF8C00">
+                  <a:alpha val="100000"/>
+                </a:srgbClr>
+              </a:solidFill>
+              <a:prstDash val="solid"/>
+              <a:round/>
+            </a:ln>
+          </p:spPr>
+          <p:txBody>
+            <a:bodyPr/>
+            <a:lstStyle/>
+            <a:p/>
+          </p:txBody>
+        </p:sp>
+        <p:sp>
+          <p:nvSpPr>
+            <p:cNvPr id="71" name="pl71"/>
+            <p:cNvSpPr/>
+            <p:nvPr/>
+          </p:nvSpPr>
+          <p:spPr>
+            <a:xfrm>
+              <a:off x="887106" y="5294352"/>
+              <a:ext cx="7660515" cy="0"/>
+            </a:xfrm>
+            <a:custGeom>
+              <a:avLst/>
+              <a:pathLst>
+                <a:path w="7660515" h="0">
+                  <a:moveTo>
+                    <a:pt x="0" y="0"/>
+                  </a:moveTo>
+                  <a:lnTo>
+                    <a:pt x="7660515" y="0"/>
+                  </a:lnTo>
+                  <a:lnTo>
+                    <a:pt x="7660515" y="0"/>
+                  </a:lnTo>
+                </a:path>
+              </a:pathLst>
+            </a:custGeom>
+            <a:ln w="13550" cap="flat">
+              <a:solidFill>
+                <a:srgbClr val="7F7F7F">
+                  <a:alpha val="100000"/>
+                </a:srgbClr>
+              </a:solidFill>
+              <a:prstDash val="dash"/>
+              <a:round/>
+            </a:ln>
+          </p:spPr>
+          <p:txBody>
+            <a:bodyPr/>
+            <a:lstStyle/>
+            <a:p/>
+          </p:txBody>
+        </p:sp>
+        <p:sp>
+          <p:nvSpPr>
+            <p:cNvPr id="72" name="pl72"/>
+            <p:cNvSpPr/>
+            <p:nvPr/>
+          </p:nvSpPr>
+          <p:spPr>
+            <a:xfrm>
+              <a:off x="4530353" y="4336484"/>
+              <a:ext cx="0" cy="1317069"/>
+            </a:xfrm>
+            <a:custGeom>
+              <a:avLst/>
+              <a:pathLst>
+                <a:path w="0" h="1317069">
+                  <a:moveTo>
+                    <a:pt x="0" y="1317069"/>
+                  </a:moveTo>
+                  <a:lnTo>
+                    <a:pt x="0" y="0"/>
+                  </a:lnTo>
+                  <a:lnTo>
+                    <a:pt x="0" y="0"/>
+                  </a:lnTo>
+                </a:path>
+              </a:pathLst>
+            </a:custGeom>
+            <a:ln w="13550" cap="flat">
+              <a:solidFill>
+                <a:srgbClr val="666666">
+                  <a:alpha val="100000"/>
+                </a:srgbClr>
+              </a:solidFill>
+              <a:prstDash val="dot"/>
+              <a:round/>
+            </a:ln>
+          </p:spPr>
+          <p:txBody>
+            <a:bodyPr/>
+            <a:lstStyle/>
+            <a:p/>
+          </p:txBody>
+        </p:sp>
+        <p:sp>
+          <p:nvSpPr>
+            <p:cNvPr id="73" name="tx73"/>
+            <p:cNvSpPr/>
+            <p:nvPr/>
+          </p:nvSpPr>
+          <p:spPr>
+            <a:xfrm>
+              <a:off x="762297" y="5553636"/>
+              <a:ext cx="62179" cy="80101"/>
+            </a:xfrm>
+            <a:prstGeom prst="rect">
+              <a:avLst/>
+            </a:prstGeom>
+            <a:noFill/>
+          </p:spPr>
+          <p:txBody>
+            <a:bodyPr lIns="0" rIns="0" tIns="0" bIns="0" anchorCtr="1" anchor="ctr" wrap="none"/>
+            <a:lstStyle/>
+            <a:p>
+              <a:pPr algn="l" marL="0" marR="0" indent="0">
+                <a:lnSpc>
+                  <a:spcPts val="880"/>
+                </a:lnSpc>
+                <a:spcBef>
+                  <a:spcPts val="0"/>
+                </a:spcBef>
+                <a:spcAft>
+                  <a:spcPts val="0"/>
+                </a:spcAft>
+              </a:pPr>
+              <a:r>
+                <a:rPr sz="880">
+                  <a:solidFill>
+                    <a:srgbClr val="4D4D4D">
+                      <a:alpha val="100000"/>
+                    </a:srgbClr>
+                  </a:solidFill>
+                  <a:latin typeface="Helvetica"/>
+                  <a:cs typeface="Helvetica"/>
+                </a:rPr>
+                <a:t>0</a:t>
+              </a:r>
+            </a:p>
+          </p:txBody>
+        </p:sp>
+        <p:sp>
+          <p:nvSpPr>
+            <p:cNvPr id="74" name="tx74"/>
+            <p:cNvSpPr/>
+            <p:nvPr/>
+          </p:nvSpPr>
+          <p:spPr>
+            <a:xfrm>
+              <a:off x="762297" y="5254302"/>
+              <a:ext cx="62179" cy="80101"/>
+            </a:xfrm>
+            <a:prstGeom prst="rect">
+              <a:avLst/>
+            </a:prstGeom>
+            <a:noFill/>
+          </p:spPr>
+          <p:txBody>
+            <a:bodyPr lIns="0" rIns="0" tIns="0" bIns="0" anchorCtr="1" anchor="ctr" wrap="none"/>
+            <a:lstStyle/>
+            <a:p>
+              <a:pPr algn="l" marL="0" marR="0" indent="0">
+                <a:lnSpc>
+                  <a:spcPts val="880"/>
+                </a:lnSpc>
+                <a:spcBef>
+                  <a:spcPts val="0"/>
+                </a:spcBef>
+                <a:spcAft>
+                  <a:spcPts val="0"/>
+                </a:spcAft>
+              </a:pPr>
+              <a:r>
+                <a:rPr sz="880">
+                  <a:solidFill>
+                    <a:srgbClr val="4D4D4D">
+                      <a:alpha val="100000"/>
+                    </a:srgbClr>
+                  </a:solidFill>
+                  <a:latin typeface="Helvetica"/>
+                  <a:cs typeface="Helvetica"/>
+                </a:rPr>
+                <a:t>1</a:t>
+              </a:r>
+            </a:p>
+          </p:txBody>
+        </p:sp>
+        <p:sp>
+          <p:nvSpPr>
+            <p:cNvPr id="75" name="tx75"/>
+            <p:cNvSpPr/>
+            <p:nvPr/>
+          </p:nvSpPr>
+          <p:spPr>
+            <a:xfrm>
+              <a:off x="762297" y="4954968"/>
+              <a:ext cx="62179" cy="80101"/>
+            </a:xfrm>
+            <a:prstGeom prst="rect">
+              <a:avLst/>
+            </a:prstGeom>
+            <a:noFill/>
+          </p:spPr>
+          <p:txBody>
+            <a:bodyPr lIns="0" rIns="0" tIns="0" bIns="0" anchorCtr="1" anchor="ctr" wrap="none"/>
+            <a:lstStyle/>
+            <a:p>
+              <a:pPr algn="l" marL="0" marR="0" indent="0">
+                <a:lnSpc>
+                  <a:spcPts val="880"/>
+                </a:lnSpc>
+                <a:spcBef>
+                  <a:spcPts val="0"/>
+                </a:spcBef>
+                <a:spcAft>
+                  <a:spcPts val="0"/>
+                </a:spcAft>
+              </a:pPr>
+              <a:r>
+                <a:rPr sz="880">
+                  <a:solidFill>
+                    <a:srgbClr val="4D4D4D">
+                      <a:alpha val="100000"/>
+                    </a:srgbClr>
+                  </a:solidFill>
+                  <a:latin typeface="Helvetica"/>
+                  <a:cs typeface="Helvetica"/>
+                </a:rPr>
+                <a:t>2</a:t>
+              </a:r>
+            </a:p>
+          </p:txBody>
+        </p:sp>
+        <p:sp>
+          <p:nvSpPr>
+            <p:cNvPr id="76" name="tx76"/>
+            <p:cNvSpPr/>
+            <p:nvPr/>
+          </p:nvSpPr>
+          <p:spPr>
+            <a:xfrm>
+              <a:off x="762297" y="4655634"/>
+              <a:ext cx="62179" cy="80101"/>
+            </a:xfrm>
+            <a:prstGeom prst="rect">
+              <a:avLst/>
+            </a:prstGeom>
+            <a:noFill/>
+          </p:spPr>
+          <p:txBody>
+            <a:bodyPr lIns="0" rIns="0" tIns="0" bIns="0" anchorCtr="1" anchor="ctr" wrap="none"/>
+            <a:lstStyle/>
+            <a:p>
+              <a:pPr algn="l" marL="0" marR="0" indent="0">
+                <a:lnSpc>
+                  <a:spcPts val="880"/>
+                </a:lnSpc>
+                <a:spcBef>
+                  <a:spcPts val="0"/>
+                </a:spcBef>
+                <a:spcAft>
+                  <a:spcPts val="0"/>
+                </a:spcAft>
+              </a:pPr>
+              <a:r>
+                <a:rPr sz="880">
+                  <a:solidFill>
+                    <a:srgbClr val="4D4D4D">
+                      <a:alpha val="100000"/>
+                    </a:srgbClr>
+                  </a:solidFill>
+                  <a:latin typeface="Helvetica"/>
+                  <a:cs typeface="Helvetica"/>
+                </a:rPr>
+                <a:t>3</a:t>
+              </a:r>
+            </a:p>
+          </p:txBody>
+        </p:sp>
+        <p:sp>
+          <p:nvSpPr>
+            <p:cNvPr id="77" name="tx77"/>
+            <p:cNvSpPr/>
+            <p:nvPr/>
+          </p:nvSpPr>
+          <p:spPr>
+            <a:xfrm>
+              <a:off x="762297" y="4356300"/>
+              <a:ext cx="62179" cy="80101"/>
+            </a:xfrm>
+            <a:prstGeom prst="rect">
+              <a:avLst/>
+            </a:prstGeom>
+            <a:noFill/>
+          </p:spPr>
+          <p:txBody>
+            <a:bodyPr lIns="0" rIns="0" tIns="0" bIns="0" anchorCtr="1" anchor="ctr" wrap="none"/>
+            <a:lstStyle/>
+            <a:p>
+              <a:pPr algn="l" marL="0" marR="0" indent="0">
+                <a:lnSpc>
+                  <a:spcPts val="880"/>
+                </a:lnSpc>
+                <a:spcBef>
+                  <a:spcPts val="0"/>
+                </a:spcBef>
+                <a:spcAft>
+                  <a:spcPts val="0"/>
+                </a:spcAft>
+              </a:pPr>
+              <a:r>
+                <a:rPr sz="880">
+                  <a:solidFill>
+                    <a:srgbClr val="4D4D4D">
+                      <a:alpha val="100000"/>
+                    </a:srgbClr>
+                  </a:solidFill>
+                  <a:latin typeface="Helvetica"/>
+                  <a:cs typeface="Helvetica"/>
+                </a:rPr>
+                <a:t>4</a:t>
+              </a:r>
+            </a:p>
+          </p:txBody>
+        </p:sp>
+        <p:sp>
+          <p:nvSpPr>
+            <p:cNvPr id="78" name="tx78"/>
+            <p:cNvSpPr/>
+            <p:nvPr/>
+          </p:nvSpPr>
+          <p:spPr>
+            <a:xfrm>
+              <a:off x="1241001" y="5716183"/>
+              <a:ext cx="161574" cy="80101"/>
+            </a:xfrm>
+            <a:prstGeom prst="rect">
+              <a:avLst/>
+            </a:prstGeom>
+            <a:noFill/>
+          </p:spPr>
+          <p:txBody>
+            <a:bodyPr lIns="0" rIns="0" tIns="0" bIns="0" anchorCtr="1" anchor="ctr" wrap="none"/>
+            <a:lstStyle/>
+            <a:p>
+              <a:pPr algn="l" marL="0" marR="0" indent="0">
+                <a:lnSpc>
+                  <a:spcPts val="880"/>
+                </a:lnSpc>
+                <a:spcBef>
+                  <a:spcPts val="0"/>
+                </a:spcBef>
+                <a:spcAft>
+                  <a:spcPts val="0"/>
+                </a:spcAft>
+              </a:pPr>
+              <a:r>
+                <a:rPr sz="880">
+                  <a:solidFill>
+                    <a:srgbClr val="4D4D4D">
+                      <a:alpha val="100000"/>
+                    </a:srgbClr>
+                  </a:solidFill>
+                  <a:latin typeface="Helvetica"/>
+                  <a:cs typeface="Helvetica"/>
+                </a:rPr>
+                <a:t>-40</a:t>
+              </a:r>
+            </a:p>
+          </p:txBody>
+        </p:sp>
+        <p:sp>
+          <p:nvSpPr>
+            <p:cNvPr id="79" name="tx79"/>
+            <p:cNvSpPr/>
+            <p:nvPr/>
+          </p:nvSpPr>
+          <p:spPr>
+            <a:xfrm>
+              <a:off x="2054602" y="5716183"/>
+              <a:ext cx="161574" cy="80101"/>
+            </a:xfrm>
+            <a:prstGeom prst="rect">
+              <a:avLst/>
+            </a:prstGeom>
+            <a:noFill/>
+          </p:spPr>
+          <p:txBody>
+            <a:bodyPr lIns="0" rIns="0" tIns="0" bIns="0" anchorCtr="1" anchor="ctr" wrap="none"/>
+            <a:lstStyle/>
+            <a:p>
+              <a:pPr algn="l" marL="0" marR="0" indent="0">
+                <a:lnSpc>
+                  <a:spcPts val="880"/>
+                </a:lnSpc>
+                <a:spcBef>
+                  <a:spcPts val="0"/>
+                </a:spcBef>
+                <a:spcAft>
+                  <a:spcPts val="0"/>
+                </a:spcAft>
+              </a:pPr>
+              <a:r>
+                <a:rPr sz="880">
+                  <a:solidFill>
+                    <a:srgbClr val="4D4D4D">
+                      <a:alpha val="100000"/>
+                    </a:srgbClr>
+                  </a:solidFill>
+                  <a:latin typeface="Helvetica"/>
+                  <a:cs typeface="Helvetica"/>
+                </a:rPr>
+                <a:t>-30</a:t>
+              </a:r>
+            </a:p>
+          </p:txBody>
+        </p:sp>
+        <p:sp>
+          <p:nvSpPr>
+            <p:cNvPr id="80" name="tx80"/>
+            <p:cNvSpPr/>
+            <p:nvPr/>
+          </p:nvSpPr>
+          <p:spPr>
+            <a:xfrm>
+              <a:off x="2868203" y="5716183"/>
+              <a:ext cx="161574" cy="80101"/>
+            </a:xfrm>
+            <a:prstGeom prst="rect">
+              <a:avLst/>
+            </a:prstGeom>
+            <a:noFill/>
+          </p:spPr>
+          <p:txBody>
+            <a:bodyPr lIns="0" rIns="0" tIns="0" bIns="0" anchorCtr="1" anchor="ctr" wrap="none"/>
+            <a:lstStyle/>
+            <a:p>
+              <a:pPr algn="l" marL="0" marR="0" indent="0">
+                <a:lnSpc>
+                  <a:spcPts val="880"/>
+                </a:lnSpc>
+                <a:spcBef>
+                  <a:spcPts val="0"/>
+                </a:spcBef>
+                <a:spcAft>
+                  <a:spcPts val="0"/>
+                </a:spcAft>
+              </a:pPr>
+              <a:r>
+                <a:rPr sz="880">
+                  <a:solidFill>
+                    <a:srgbClr val="4D4D4D">
+                      <a:alpha val="100000"/>
+                    </a:srgbClr>
+                  </a:solidFill>
+                  <a:latin typeface="Helvetica"/>
+                  <a:cs typeface="Helvetica"/>
+                </a:rPr>
+                <a:t>-20</a:t>
+              </a:r>
+            </a:p>
+          </p:txBody>
+        </p:sp>
+        <p:sp>
+          <p:nvSpPr>
+            <p:cNvPr id="81" name="tx81"/>
+            <p:cNvSpPr/>
+            <p:nvPr/>
+          </p:nvSpPr>
+          <p:spPr>
+            <a:xfrm>
+              <a:off x="3681805" y="5716183"/>
+              <a:ext cx="161574" cy="80101"/>
+            </a:xfrm>
+            <a:prstGeom prst="rect">
+              <a:avLst/>
+            </a:prstGeom>
+            <a:noFill/>
+          </p:spPr>
+          <p:txBody>
+            <a:bodyPr lIns="0" rIns="0" tIns="0" bIns="0" anchorCtr="1" anchor="ctr" wrap="none"/>
+            <a:lstStyle/>
+            <a:p>
+              <a:pPr algn="l" marL="0" marR="0" indent="0">
+                <a:lnSpc>
+                  <a:spcPts val="880"/>
+                </a:lnSpc>
+                <a:spcBef>
+                  <a:spcPts val="0"/>
+                </a:spcBef>
+                <a:spcAft>
+                  <a:spcPts val="0"/>
+                </a:spcAft>
+              </a:pPr>
+              <a:r>
+                <a:rPr sz="880">
+                  <a:solidFill>
+                    <a:srgbClr val="4D4D4D">
+                      <a:alpha val="100000"/>
+                    </a:srgbClr>
+                  </a:solidFill>
+                  <a:latin typeface="Helvetica"/>
+                  <a:cs typeface="Helvetica"/>
+                </a:rPr>
+                <a:t>-10</a:t>
+              </a:r>
+            </a:p>
+          </p:txBody>
+        </p:sp>
+        <p:sp>
+          <p:nvSpPr>
+            <p:cNvPr id="82" name="tx82"/>
+            <p:cNvSpPr/>
+            <p:nvPr/>
+          </p:nvSpPr>
+          <p:spPr>
+            <a:xfrm>
+              <a:off x="4545104" y="5716183"/>
+              <a:ext cx="62179" cy="80101"/>
+            </a:xfrm>
+            <a:prstGeom prst="rect">
+              <a:avLst/>
+            </a:prstGeom>
+            <a:noFill/>
+          </p:spPr>
+          <p:txBody>
+            <a:bodyPr lIns="0" rIns="0" tIns="0" bIns="0" anchorCtr="1" anchor="ctr" wrap="none"/>
+            <a:lstStyle/>
+            <a:p>
+              <a:pPr algn="l" marL="0" marR="0" indent="0">
+                <a:lnSpc>
+                  <a:spcPts val="880"/>
+                </a:lnSpc>
+                <a:spcBef>
+                  <a:spcPts val="0"/>
+                </a:spcBef>
+                <a:spcAft>
+                  <a:spcPts val="0"/>
+                </a:spcAft>
+              </a:pPr>
+              <a:r>
+                <a:rPr sz="880">
+                  <a:solidFill>
+                    <a:srgbClr val="4D4D4D">
+                      <a:alpha val="100000"/>
+                    </a:srgbClr>
+                  </a:solidFill>
+                  <a:latin typeface="Helvetica"/>
+                  <a:cs typeface="Helvetica"/>
+                </a:rPr>
+                <a:t>0</a:t>
+              </a:r>
+            </a:p>
+          </p:txBody>
+        </p:sp>
+        <p:sp>
+          <p:nvSpPr>
+            <p:cNvPr id="83" name="tx83"/>
+            <p:cNvSpPr/>
+            <p:nvPr/>
+          </p:nvSpPr>
+          <p:spPr>
+            <a:xfrm>
+              <a:off x="5327615" y="5716183"/>
+              <a:ext cx="124358" cy="80101"/>
+            </a:xfrm>
+            <a:prstGeom prst="rect">
+              <a:avLst/>
+            </a:prstGeom>
+            <a:noFill/>
+          </p:spPr>
+          <p:txBody>
+            <a:bodyPr lIns="0" rIns="0" tIns="0" bIns="0" anchorCtr="1" anchor="ctr" wrap="none"/>
+            <a:lstStyle/>
+            <a:p>
+              <a:pPr algn="l" marL="0" marR="0" indent="0">
+                <a:lnSpc>
+                  <a:spcPts val="880"/>
+                </a:lnSpc>
+                <a:spcBef>
+                  <a:spcPts val="0"/>
+                </a:spcBef>
+                <a:spcAft>
+                  <a:spcPts val="0"/>
+                </a:spcAft>
+              </a:pPr>
+              <a:r>
+                <a:rPr sz="880">
+                  <a:solidFill>
+                    <a:srgbClr val="4D4D4D">
+                      <a:alpha val="100000"/>
+                    </a:srgbClr>
+                  </a:solidFill>
+                  <a:latin typeface="Helvetica"/>
+                  <a:cs typeface="Helvetica"/>
+                </a:rPr>
+                <a:t>10</a:t>
+              </a:r>
+            </a:p>
+          </p:txBody>
+        </p:sp>
+        <p:sp>
+          <p:nvSpPr>
+            <p:cNvPr id="84" name="tx84"/>
+            <p:cNvSpPr/>
+            <p:nvPr/>
+          </p:nvSpPr>
+          <p:spPr>
+            <a:xfrm>
+              <a:off x="6141217" y="5716183"/>
+              <a:ext cx="124358" cy="80101"/>
+            </a:xfrm>
+            <a:prstGeom prst="rect">
+              <a:avLst/>
+            </a:prstGeom>
+            <a:noFill/>
+          </p:spPr>
+          <p:txBody>
+            <a:bodyPr lIns="0" rIns="0" tIns="0" bIns="0" anchorCtr="1" anchor="ctr" wrap="none"/>
+            <a:lstStyle/>
+            <a:p>
+              <a:pPr algn="l" marL="0" marR="0" indent="0">
+                <a:lnSpc>
+                  <a:spcPts val="880"/>
+                </a:lnSpc>
+                <a:spcBef>
+                  <a:spcPts val="0"/>
+                </a:spcBef>
+                <a:spcAft>
+                  <a:spcPts val="0"/>
+                </a:spcAft>
+              </a:pPr>
+              <a:r>
+                <a:rPr sz="880">
+                  <a:solidFill>
+                    <a:srgbClr val="4D4D4D">
+                      <a:alpha val="100000"/>
+                    </a:srgbClr>
+                  </a:solidFill>
+                  <a:latin typeface="Helvetica"/>
+                  <a:cs typeface="Helvetica"/>
+                </a:rPr>
+                <a:t>20</a:t>
+              </a:r>
+            </a:p>
+          </p:txBody>
+        </p:sp>
+        <p:sp>
+          <p:nvSpPr>
+            <p:cNvPr id="85" name="tx85"/>
+            <p:cNvSpPr/>
+            <p:nvPr/>
+          </p:nvSpPr>
+          <p:spPr>
+            <a:xfrm>
+              <a:off x="6954818" y="5716183"/>
+              <a:ext cx="124358" cy="80101"/>
+            </a:xfrm>
+            <a:prstGeom prst="rect">
+              <a:avLst/>
+            </a:prstGeom>
+            <a:noFill/>
+          </p:spPr>
+          <p:txBody>
+            <a:bodyPr lIns="0" rIns="0" tIns="0" bIns="0" anchorCtr="1" anchor="ctr" wrap="none"/>
+            <a:lstStyle/>
+            <a:p>
+              <a:pPr algn="l" marL="0" marR="0" indent="0">
+                <a:lnSpc>
+                  <a:spcPts val="880"/>
+                </a:lnSpc>
+                <a:spcBef>
+                  <a:spcPts val="0"/>
+                </a:spcBef>
+                <a:spcAft>
+                  <a:spcPts val="0"/>
+                </a:spcAft>
+              </a:pPr>
+              <a:r>
+                <a:rPr sz="880">
+                  <a:solidFill>
+                    <a:srgbClr val="4D4D4D">
+                      <a:alpha val="100000"/>
+                    </a:srgbClr>
+                  </a:solidFill>
+                  <a:latin typeface="Helvetica"/>
+                  <a:cs typeface="Helvetica"/>
+                </a:rPr>
+                <a:t>30</a:t>
+              </a:r>
+            </a:p>
+          </p:txBody>
+        </p:sp>
+        <p:sp>
+          <p:nvSpPr>
+            <p:cNvPr id="86" name="tx86"/>
+            <p:cNvSpPr/>
+            <p:nvPr/>
+          </p:nvSpPr>
+          <p:spPr>
+            <a:xfrm>
+              <a:off x="7768419" y="5716183"/>
+              <a:ext cx="124358" cy="80101"/>
+            </a:xfrm>
+            <a:prstGeom prst="rect">
+              <a:avLst/>
+            </a:prstGeom>
+            <a:noFill/>
+          </p:spPr>
+          <p:txBody>
+            <a:bodyPr lIns="0" rIns="0" tIns="0" bIns="0" anchorCtr="1" anchor="ctr" wrap="none"/>
+            <a:lstStyle/>
+            <a:p>
+              <a:pPr algn="l" marL="0" marR="0" indent="0">
+                <a:lnSpc>
+                  <a:spcPts val="880"/>
+                </a:lnSpc>
+                <a:spcBef>
+                  <a:spcPts val="0"/>
+                </a:spcBef>
+                <a:spcAft>
+                  <a:spcPts val="0"/>
+                </a:spcAft>
+              </a:pPr>
+              <a:r>
+                <a:rPr sz="880">
+                  <a:solidFill>
+                    <a:srgbClr val="4D4D4D">
+                      <a:alpha val="100000"/>
+                    </a:srgbClr>
+                  </a:solidFill>
+                  <a:latin typeface="Helvetica"/>
+                  <a:cs typeface="Helvetica"/>
+                </a:rPr>
+                <a:t>40</a:t>
+              </a:r>
+            </a:p>
+          </p:txBody>
+        </p:sp>
+        <p:sp>
+          <p:nvSpPr>
+            <p:cNvPr id="87" name="tx87"/>
+            <p:cNvSpPr/>
+            <p:nvPr/>
+          </p:nvSpPr>
+          <p:spPr>
+            <a:xfrm>
+              <a:off x="2928340" y="5855859"/>
+              <a:ext cx="3578047" cy="100218"/>
+            </a:xfrm>
+            <a:prstGeom prst="rect">
+              <a:avLst/>
+            </a:prstGeom>
+            <a:noFill/>
+          </p:spPr>
+          <p:txBody>
+            <a:bodyPr lIns="0" rIns="0" tIns="0" bIns="0" anchorCtr="1" anchor="ctr" wrap="none"/>
+            <a:lstStyle/>
+            <a:p>
+              <a:pPr algn="l" marL="0" marR="0" indent="0">
+                <a:lnSpc>
+                  <a:spcPts val="1100"/>
+                </a:lnSpc>
+                <a:spcBef>
+                  <a:spcPts val="0"/>
+                </a:spcBef>
+                <a:spcAft>
+                  <a:spcPts val="0"/>
+                </a:spcAft>
+              </a:pPr>
+              <a:r>
+                <a:rPr sz="1100">
+                  <a:solidFill>
+                    <a:srgbClr val="000000">
+                      <a:alpha val="100000"/>
+                    </a:srgbClr>
+                  </a:solidFill>
+                  <a:latin typeface="Helvetica"/>
+                  <a:cs typeface="Helvetica"/>
+                </a:rPr>
+                <a:t>eGFR difference (%): 100 × (CKD-EPI Cr-Cys − CG) / CG</a:t>
+              </a:r>
+            </a:p>
+          </p:txBody>
+        </p:sp>
+        <p:sp>
+          <p:nvSpPr>
+            <p:cNvPr id="88" name="tx88"/>
+            <p:cNvSpPr/>
+            <p:nvPr/>
+          </p:nvSpPr>
+          <p:spPr>
+            <a:xfrm rot="-5400000">
+              <a:off x="138035" y="4944909"/>
+              <a:ext cx="1016904" cy="100218"/>
+            </a:xfrm>
+            <a:prstGeom prst="rect">
+              <a:avLst/>
+            </a:prstGeom>
+            <a:noFill/>
+          </p:spPr>
+          <p:txBody>
+            <a:bodyPr lIns="0" rIns="0" tIns="0" bIns="0" anchorCtr="1" anchor="ctr" wrap="none"/>
+            <a:lstStyle/>
+            <a:p>
+              <a:pPr algn="l" marL="0" marR="0" indent="0">
+                <a:lnSpc>
+                  <a:spcPts val="1100"/>
+                </a:lnSpc>
+                <a:spcBef>
+                  <a:spcPts val="0"/>
+                </a:spcBef>
+                <a:spcAft>
+                  <a:spcPts val="0"/>
+                </a:spcAft>
+              </a:pPr>
+              <a:r>
+                <a:rPr sz="1100">
+                  <a:solidFill>
+                    <a:srgbClr val="000000">
+                      <a:alpha val="100000"/>
+                    </a:srgbClr>
+                  </a:solidFill>
+                  <a:latin typeface="Helvetica"/>
+                  <a:cs typeface="Helvetica"/>
+                </a:rPr>
+                <a:t>subHR (95% CI)</a:t>
+              </a:r>
+            </a:p>
+          </p:txBody>
+        </p:sp>
+        <p:sp>
+          <p:nvSpPr>
+            <p:cNvPr id="89" name="tx89"/>
+            <p:cNvSpPr/>
+            <p:nvPr/>
+          </p:nvSpPr>
+          <p:spPr>
+            <a:xfrm>
+              <a:off x="887106" y="4159544"/>
+              <a:ext cx="6321612" cy="82021"/>
+            </a:xfrm>
+            <a:prstGeom prst="rect">
+              <a:avLst/>
+            </a:prstGeom>
+            <a:noFill/>
+          </p:spPr>
+          <p:txBody>
+            <a:bodyPr lIns="0" rIns="0" tIns="0" bIns="0" anchorCtr="1" anchor="ctr" wrap="none"/>
+            <a:lstStyle/>
+            <a:p>
+              <a:pPr algn="l" marL="0" marR="0" indent="0">
+                <a:lnSpc>
+                  <a:spcPts val="900"/>
+                </a:lnSpc>
+                <a:spcBef>
+                  <a:spcPts val="0"/>
+                </a:spcBef>
+                <a:spcAft>
+                  <a:spcPts val="0"/>
+                </a:spcAft>
+              </a:pPr>
+              <a:r>
+                <a:rPr sz="900">
+                  <a:solidFill>
+                    <a:srgbClr val="404040">
+                      <a:alpha val="100000"/>
+                    </a:srgbClr>
+                  </a:solidFill>
+                  <a:latin typeface="Helvetica"/>
+                  <a:cs typeface="Helvetica"/>
+                </a:rPr>
+                <a:t>subHR per 10 % decline: 0.99 (0.83-1.19), p = 0.924  |  per IQR decline (Δ = 29.9 %): 0.97 (0.57-1.68)  |  IQR: [-15.0, 14.9] %</a:t>
+              </a:r>
+            </a:p>
+          </p:txBody>
+        </p:sp>
+        <p:sp>
+          <p:nvSpPr>
+            <p:cNvPr id="90" name="tx90"/>
+            <p:cNvSpPr/>
+            <p:nvPr/>
+          </p:nvSpPr>
+          <p:spPr>
+            <a:xfrm>
+              <a:off x="887106" y="3932770"/>
               <a:ext cx="2616647" cy="120152"/>
             </a:xfrm>
             <a:prstGeom prst="rect">
